--- a/docs/thesis/presentation-maria.pptx
+++ b/docs/thesis/presentation-maria.pptx
@@ -17,6 +17,7 @@
     <p:sldId id="265" r:id="rId16"/>
     <p:sldId id="266" r:id="rId17"/>
     <p:sldId id="267" r:id="rId18"/>
+    <p:sldId id="268" r:id="rId19"/>
   </p:sldIdLst>
   <p:sldSz cx="12191695" cy="6858000" type="screen4x3"/>
   <p:notesSz cx="6858000" cy="9144000"/>
@@ -3583,7 +3584,7 @@
                 </a:solidFill>
                 <a:latin typeface="Calibri"/>
               </a:rPr>
-              <a:t>Интерфейс приложения</a:t>
+              <a:t>Тестирование</a:t>
             </a:r>
           </a:p>
         </p:txBody>
@@ -3631,40 +3632,16 @@
           </a:p>
         </p:txBody>
       </p:sp>
-      <p:pic>
-        <p:nvPicPr>
-          <p:cNvPr id="4" name="Picture 3" descr="screen-03.png"/>
-          <p:cNvPicPr>
-            <a:picLocks noChangeAspect="1"/>
-          </p:cNvPicPr>
-          <p:nvPr/>
-        </p:nvPicPr>
-        <p:blipFill>
-          <a:blip r:embed="rId2"/>
-          <a:stretch>
-            <a:fillRect/>
-          </a:stretch>
-        </p:blipFill>
-        <p:spPr>
-          <a:xfrm>
-            <a:off x="838047" y="1097280"/>
-            <a:ext cx="3322320" cy="4389120"/>
-          </a:xfrm>
-          <a:prstGeom prst="rect">
-            <a:avLst/>
-          </a:prstGeom>
-        </p:spPr>
-      </p:pic>
-      <p:sp>
-        <p:nvSpPr>
-          <p:cNvPr id="5" name="TextBox 4"/>
+      <p:sp>
+        <p:nvSpPr>
+          <p:cNvPr id="4" name="TextBox 3"/>
           <p:cNvSpPr txBox="1"/>
           <p:nvPr/>
         </p:nvSpPr>
         <p:spPr>
           <a:xfrm>
-            <a:off x="838047" y="5623560"/>
-            <a:ext cx="3322320" cy="548640"/>
+            <a:off x="548640" y="1005840"/>
+            <a:ext cx="10972800" cy="731520"/>
           </a:xfrm>
           <a:prstGeom prst="rect">
             <a:avLst/>
@@ -3677,53 +3654,29 @@
           </a:bodyPr>
           <a:lstStyle/>
           <a:p>
-            <a:pPr algn="ctr"/>
-            <a:r>
-              <a:rPr sz="1200" b="0">
-                <a:solidFill>
-                  <a:srgbClr val="555555"/>
-                </a:solidFill>
-                <a:latin typeface="Calibri"/>
-              </a:rPr>
-              <a:t>Главный экран: прогресс веса и активность</a:t>
-            </a:r>
-          </a:p>
-        </p:txBody>
-      </p:sp>
-      <p:pic>
-        <p:nvPicPr>
-          <p:cNvPr id="6" name="Picture 5" descr="screen-05.png"/>
-          <p:cNvPicPr>
-            <a:picLocks noChangeAspect="1"/>
-          </p:cNvPicPr>
-          <p:nvPr/>
-        </p:nvPicPr>
-        <p:blipFill>
-          <a:blip r:embed="rId3"/>
-          <a:stretch>
-            <a:fillRect/>
-          </a:stretch>
-        </p:blipFill>
-        <p:spPr>
-          <a:xfrm>
-            <a:off x="4434687" y="1097280"/>
-            <a:ext cx="3322320" cy="4389120"/>
-          </a:xfrm>
-          <a:prstGeom prst="rect">
-            <a:avLst/>
-          </a:prstGeom>
-        </p:spPr>
-      </p:pic>
-      <p:sp>
-        <p:nvSpPr>
-          <p:cNvPr id="7" name="TextBox 6"/>
+            <a:pPr algn="l"/>
+            <a:r>
+              <a:rPr sz="1800" b="0">
+                <a:solidFill>
+                  <a:srgbClr val="1F1F1F"/>
+                </a:solidFill>
+                <a:latin typeface="Calibri"/>
+              </a:rPr>
+              <a:t>Многоуровневая стратегия: чистые юниты на domain/-слое + интеграционные тесты с реальным PostgreSQL.</a:t>
+            </a:r>
+          </a:p>
+        </p:txBody>
+      </p:sp>
+      <p:sp>
+        <p:nvSpPr>
+          <p:cNvPr id="5" name="TextBox 4"/>
           <p:cNvSpPr txBox="1"/>
           <p:nvPr/>
         </p:nvSpPr>
         <p:spPr>
           <a:xfrm>
-            <a:off x="4434687" y="5623560"/>
-            <a:ext cx="3322320" cy="548640"/>
+            <a:off x="548640" y="2011680"/>
+            <a:ext cx="10972800" cy="4389120"/>
           </a:xfrm>
           <a:prstGeom prst="rect">
             <a:avLst/>
@@ -3736,53 +3689,97 @@
           </a:bodyPr>
           <a:lstStyle/>
           <a:p>
-            <a:pPr algn="ctr"/>
-            <a:r>
-              <a:rPr sz="1200" b="0">
-                <a:solidFill>
-                  <a:srgbClr val="555555"/>
-                </a:solidFill>
-                <a:latin typeface="Calibri"/>
-              </a:rPr>
-              <a:t>Лог тренировки: подходы, веса, прогрессия</a:t>
-            </a:r>
-          </a:p>
-        </p:txBody>
-      </p:sp>
-      <p:pic>
-        <p:nvPicPr>
-          <p:cNvPr id="8" name="Picture 7" descr="screen-01.png"/>
-          <p:cNvPicPr>
-            <a:picLocks noChangeAspect="1"/>
-          </p:cNvPicPr>
-          <p:nvPr/>
-        </p:nvPicPr>
-        <p:blipFill>
-          <a:blip r:embed="rId4"/>
-          <a:stretch>
-            <a:fillRect/>
-          </a:stretch>
-        </p:blipFill>
-        <p:spPr>
-          <a:xfrm>
-            <a:off x="8031327" y="1097280"/>
-            <a:ext cx="3322320" cy="4389120"/>
-          </a:xfrm>
-          <a:prstGeom prst="rect">
-            <a:avLst/>
-          </a:prstGeom>
-        </p:spPr>
-      </p:pic>
-      <p:sp>
-        <p:nvSpPr>
-          <p:cNvPr id="9" name="TextBox 8"/>
+            <a:pPr algn="l">
+              <a:spcAft>
+                <a:spcPts val="800"/>
+              </a:spcAft>
+            </a:pPr>
+            <a:r>
+              <a:rPr sz="1700">
+                <a:solidFill>
+                  <a:srgbClr val="1F1F1F"/>
+                </a:solidFill>
+                <a:latin typeface="Calibri"/>
+              </a:rPr>
+              <a:t>•  Юнит-тесты domain/: 49 тестов forecast/ML-слоя (composer, baseline, features, interpretation, evaluation)</a:t>
+            </a:r>
+          </a:p>
+          <a:p>
+            <a:pPr algn="l">
+              <a:spcAft>
+                <a:spcPts val="800"/>
+              </a:spcAft>
+            </a:pPr>
+            <a:r>
+              <a:rPr sz="1700">
+                <a:solidFill>
+                  <a:srgbClr val="1F1F1F"/>
+                </a:solidFill>
+                <a:latin typeface="Calibri"/>
+              </a:rPr>
+              <a:t>•  Интеграционные тесты: testcontainers Postgres + savepoint per test; FastAPI берёт ту же сессию через dependency_overrides</a:t>
+            </a:r>
+          </a:p>
+          <a:p>
+            <a:pPr algn="l">
+              <a:spcAft>
+                <a:spcPts val="800"/>
+              </a:spcAft>
+            </a:pPr>
+            <a:r>
+              <a:rPr sz="1700">
+                <a:solidFill>
+                  <a:srgbClr val="1F1F1F"/>
+                </a:solidFill>
+                <a:latin typeface="Calibri"/>
+              </a:rPr>
+              <a:t>•  ML-pipeline: smoke-тесты обучения для persistence / Ridge / LightGBM на mini-датасете (изоляция через tmp_path)</a:t>
+            </a:r>
+          </a:p>
+          <a:p>
+            <a:pPr algn="l">
+              <a:spcAft>
+                <a:spcPts val="800"/>
+              </a:spcAft>
+            </a:pPr>
+            <a:r>
+              <a:rPr sz="1700">
+                <a:solidFill>
+                  <a:srgbClr val="1F1F1F"/>
+                </a:solidFill>
+                <a:latin typeface="Calibri"/>
+              </a:rPr>
+              <a:t>•  Калибровка CI на тестовом сплите: 0.78–0.80 для LGBM, 0.79–0.83 для MLP (теоретический уровень — 0.80)</a:t>
+            </a:r>
+          </a:p>
+          <a:p>
+            <a:pPr algn="l">
+              <a:spcAft>
+                <a:spcPts val="800"/>
+              </a:spcAft>
+            </a:pPr>
+            <a:r>
+              <a:rPr sz="1700">
+                <a:solidFill>
+                  <a:srgbClr val="1F1F1F"/>
+                </a:solidFill>
+                <a:latin typeface="Calibri"/>
+              </a:rPr>
+              <a:t>•  Маркеры pytest unit / integration проставляются автоматически по пути; make check = lint + typecheck (strict mypy) + test</a:t>
+            </a:r>
+          </a:p>
+        </p:txBody>
+      </p:sp>
+      <p:sp>
+        <p:nvSpPr>
+          <p:cNvPr id="6" name="TextBox 5"/>
           <p:cNvSpPr txBox="1"/>
           <p:nvPr/>
         </p:nvSpPr>
         <p:spPr>
           <a:xfrm>
-            <a:off x="8031327" y="5623560"/>
-            <a:ext cx="3322320" cy="548640"/>
+            <a:off x="548640" y="6446520"/>
+            <a:ext cx="5486400" cy="274320"/>
           </a:xfrm>
           <a:prstGeom prst="rect">
             <a:avLst/>
@@ -3795,29 +3792,29 @@
           </a:bodyPr>
           <a:lstStyle/>
           <a:p>
-            <a:pPr algn="ctr"/>
-            <a:r>
-              <a:rPr sz="1200" b="0">
+            <a:pPr algn="l"/>
+            <a:r>
+              <a:rPr sz="1000" b="0">
                 <a:solidFill>
                   <a:srgbClr val="555555"/>
                 </a:solidFill>
                 <a:latin typeface="Calibri"/>
               </a:rPr>
-              <a:t>Регистрация и онбординг пользователя</a:t>
-            </a:r>
-          </a:p>
-        </p:txBody>
-      </p:sp>
-      <p:sp>
-        <p:nvSpPr>
-          <p:cNvPr id="10" name="TextBox 9"/>
+              <a:t>Лапова М. И.  ·  ВКР 2026  ·  Fitness Tracker</a:t>
+            </a:r>
+          </a:p>
+        </p:txBody>
+      </p:sp>
+      <p:sp>
+        <p:nvSpPr>
+          <p:cNvPr id="7" name="TextBox 6"/>
           <p:cNvSpPr txBox="1"/>
           <p:nvPr/>
         </p:nvSpPr>
         <p:spPr>
           <a:xfrm>
-            <a:off x="548640" y="6446520"/>
-            <a:ext cx="5486400" cy="274320"/>
+            <a:off x="10515600" y="6446520"/>
+            <a:ext cx="1188720" cy="274320"/>
           </a:xfrm>
           <a:prstGeom prst="rect">
             <a:avLst/>
@@ -3830,7 +3827,7 @@
           </a:bodyPr>
           <a:lstStyle/>
           <a:p>
-            <a:pPr algn="l"/>
+            <a:pPr algn="r"/>
             <a:r>
               <a:rPr sz="1000" b="0">
                 <a:solidFill>
@@ -3838,42 +3835,7 @@
                 </a:solidFill>
                 <a:latin typeface="Calibri"/>
               </a:rPr>
-              <a:t>Лапова М. И.  ·  ВКР 2026  ·  Fitness Tracker</a:t>
-            </a:r>
-          </a:p>
-        </p:txBody>
-      </p:sp>
-      <p:sp>
-        <p:nvSpPr>
-          <p:cNvPr id="11" name="TextBox 10"/>
-          <p:cNvSpPr txBox="1"/>
-          <p:nvPr/>
-        </p:nvSpPr>
-        <p:spPr>
-          <a:xfrm>
-            <a:off x="10515600" y="6446520"/>
-            <a:ext cx="1188720" cy="274320"/>
-          </a:xfrm>
-          <a:prstGeom prst="rect">
-            <a:avLst/>
-          </a:prstGeom>
-          <a:noFill/>
-        </p:spPr>
-        <p:txBody>
-          <a:bodyPr wrap="square">
-            <a:spAutoFit/>
-          </a:bodyPr>
-          <a:lstStyle/>
-          <a:p>
-            <a:pPr algn="r"/>
-            <a:r>
-              <a:rPr sz="1000" b="0">
-                <a:solidFill>
-                  <a:srgbClr val="555555"/>
-                </a:solidFill>
-                <a:latin typeface="Calibri"/>
-              </a:rPr>
-              <a:t>10 / 12</a:t>
+              <a:t>10 / 13</a:t>
             </a:r>
           </a:p>
         </p:txBody>
@@ -3926,7 +3888,7 @@
                 </a:solidFill>
                 <a:latin typeface="Calibri"/>
               </a:rPr>
-              <a:t>Выводы</a:t>
+              <a:t>Интерфейс приложения</a:t>
             </a:r>
           </a:p>
         </p:txBody>
@@ -3974,16 +3936,40 @@
           </a:p>
         </p:txBody>
       </p:sp>
-      <p:sp>
-        <p:nvSpPr>
-          <p:cNvPr id="4" name="TextBox 3"/>
+      <p:pic>
+        <p:nvPicPr>
+          <p:cNvPr id="4" name="Picture 3" descr="screen-03.png"/>
+          <p:cNvPicPr>
+            <a:picLocks noChangeAspect="1"/>
+          </p:cNvPicPr>
+          <p:nvPr/>
+        </p:nvPicPr>
+        <p:blipFill>
+          <a:blip r:embed="rId2"/>
+          <a:stretch>
+            <a:fillRect/>
+          </a:stretch>
+        </p:blipFill>
+        <p:spPr>
+          <a:xfrm>
+            <a:off x="838047" y="1097280"/>
+            <a:ext cx="3322320" cy="4389120"/>
+          </a:xfrm>
+          <a:prstGeom prst="rect">
+            <a:avLst/>
+          </a:prstGeom>
+        </p:spPr>
+      </p:pic>
+      <p:sp>
+        <p:nvSpPr>
+          <p:cNvPr id="5" name="TextBox 4"/>
           <p:cNvSpPr txBox="1"/>
           <p:nvPr/>
         </p:nvSpPr>
         <p:spPr>
           <a:xfrm>
-            <a:off x="548640" y="1097280"/>
-            <a:ext cx="10972800" cy="5029200"/>
+            <a:off x="838047" y="5623560"/>
+            <a:ext cx="3322320" cy="548640"/>
           </a:xfrm>
           <a:prstGeom prst="rect">
             <a:avLst/>
@@ -3996,97 +3982,53 @@
           </a:bodyPr>
           <a:lstStyle/>
           <a:p>
-            <a:pPr algn="l">
-              <a:spcAft>
-                <a:spcPts val="800"/>
-              </a:spcAft>
-            </a:pPr>
-            <a:r>
-              <a:rPr sz="1800">
-                <a:solidFill>
-                  <a:srgbClr val="1F1F1F"/>
-                </a:solidFill>
-                <a:latin typeface="Calibri"/>
-              </a:rPr>
-              <a:t>•  Реализовано кроссплатформенное PWA-приложение с end-to-end интеграцией ML-моделей в продакшен (FastAPI + Flutter)</a:t>
-            </a:r>
-          </a:p>
-          <a:p>
-            <a:pPr algn="l">
-              <a:spcAft>
-                <a:spcPts val="800"/>
-              </a:spcAft>
-            </a:pPr>
-            <a:r>
-              <a:rPr sz="1800">
-                <a:solidFill>
-                  <a:srgbClr val="1F1F1F"/>
-                </a:solidFill>
-                <a:latin typeface="Calibri"/>
-              </a:rPr>
-              <a:t>•  Обучены и сравнены 4 модели прогноза InBody; LightGBM quantile обеспечивает R²=0.73 на Δ weight и калиброванный 80%-CI (0.79)</a:t>
-            </a:r>
-          </a:p>
-          <a:p>
-            <a:pPr algn="l">
-              <a:spcAft>
-                <a:spcPts val="800"/>
-              </a:spcAft>
-            </a:pPr>
-            <a:r>
-              <a:rPr sz="1800">
-                <a:solidFill>
-                  <a:srgbClr val="1F1F1F"/>
-                </a:solidFill>
-                <a:latin typeface="Calibri"/>
-              </a:rPr>
-              <a:t>•  Реализован watcher-сервис автоматической адаптации плана по 6 условиям срабатывания, покрыт 19 тестами</a:t>
-            </a:r>
-          </a:p>
-          <a:p>
-            <a:pPr algn="l">
-              <a:spcAft>
-                <a:spcPts val="800"/>
-              </a:spcAft>
-            </a:pPr>
-            <a:r>
-              <a:rPr sz="1800">
-                <a:solidFill>
-                  <a:srgbClr val="1F1F1F"/>
-                </a:solidFill>
-                <a:latin typeface="Calibri"/>
-              </a:rPr>
-              <a:t>•  Подтверждена гипотеза: квантильная регрессия даёт точный прогноз с адекватной калибровкой; снижение MAE на Δ weight 52% vs persistence</a:t>
-            </a:r>
-          </a:p>
-          <a:p>
-            <a:pPr algn="l">
-              <a:spcAft>
-                <a:spcPts val="800"/>
-              </a:spcAft>
-            </a:pPr>
-            <a:r>
-              <a:rPr sz="1800">
-                <a:solidFill>
-                  <a:srgbClr val="1F1F1F"/>
-                </a:solidFill>
-                <a:latin typeface="Calibri"/>
-              </a:rPr>
-              <a:t>•  Архитектура спроектирована с расчётом на отказоустойчивость: fallback на OLS-baseline при отсутствии ML-артефакта</a:t>
-            </a:r>
-          </a:p>
-        </p:txBody>
-      </p:sp>
-      <p:sp>
-        <p:nvSpPr>
-          <p:cNvPr id="5" name="TextBox 4"/>
+            <a:pPr algn="ctr"/>
+            <a:r>
+              <a:rPr sz="1200" b="0">
+                <a:solidFill>
+                  <a:srgbClr val="555555"/>
+                </a:solidFill>
+                <a:latin typeface="Calibri"/>
+              </a:rPr>
+              <a:t>Главный экран: прогресс веса и активность</a:t>
+            </a:r>
+          </a:p>
+        </p:txBody>
+      </p:sp>
+      <p:pic>
+        <p:nvPicPr>
+          <p:cNvPr id="6" name="Picture 5" descr="screen-05.png"/>
+          <p:cNvPicPr>
+            <a:picLocks noChangeAspect="1"/>
+          </p:cNvPicPr>
+          <p:nvPr/>
+        </p:nvPicPr>
+        <p:blipFill>
+          <a:blip r:embed="rId3"/>
+          <a:stretch>
+            <a:fillRect/>
+          </a:stretch>
+        </p:blipFill>
+        <p:spPr>
+          <a:xfrm>
+            <a:off x="4434687" y="1097280"/>
+            <a:ext cx="3322320" cy="4389120"/>
+          </a:xfrm>
+          <a:prstGeom prst="rect">
+            <a:avLst/>
+          </a:prstGeom>
+        </p:spPr>
+      </p:pic>
+      <p:sp>
+        <p:nvSpPr>
+          <p:cNvPr id="7" name="TextBox 6"/>
           <p:cNvSpPr txBox="1"/>
           <p:nvPr/>
         </p:nvSpPr>
         <p:spPr>
           <a:xfrm>
-            <a:off x="548640" y="6446520"/>
-            <a:ext cx="5486400" cy="274320"/>
+            <a:off x="4434687" y="5623560"/>
+            <a:ext cx="3322320" cy="548640"/>
           </a:xfrm>
           <a:prstGeom prst="rect">
             <a:avLst/>
@@ -4099,29 +4041,53 @@
           </a:bodyPr>
           <a:lstStyle/>
           <a:p>
-            <a:pPr algn="l"/>
-            <a:r>
-              <a:rPr sz="1000" b="0">
+            <a:pPr algn="ctr"/>
+            <a:r>
+              <a:rPr sz="1200" b="0">
                 <a:solidFill>
                   <a:srgbClr val="555555"/>
                 </a:solidFill>
                 <a:latin typeface="Calibri"/>
               </a:rPr>
-              <a:t>Лапова М. И.  ·  ВКР 2026  ·  Fitness Tracker</a:t>
-            </a:r>
-          </a:p>
-        </p:txBody>
-      </p:sp>
-      <p:sp>
-        <p:nvSpPr>
-          <p:cNvPr id="6" name="TextBox 5"/>
+              <a:t>Лог тренировки: подходы, веса, прогрессия</a:t>
+            </a:r>
+          </a:p>
+        </p:txBody>
+      </p:sp>
+      <p:pic>
+        <p:nvPicPr>
+          <p:cNvPr id="8" name="Picture 7" descr="screen-01.png"/>
+          <p:cNvPicPr>
+            <a:picLocks noChangeAspect="1"/>
+          </p:cNvPicPr>
+          <p:nvPr/>
+        </p:nvPicPr>
+        <p:blipFill>
+          <a:blip r:embed="rId4"/>
+          <a:stretch>
+            <a:fillRect/>
+          </a:stretch>
+        </p:blipFill>
+        <p:spPr>
+          <a:xfrm>
+            <a:off x="8031327" y="1097280"/>
+            <a:ext cx="3322320" cy="4389120"/>
+          </a:xfrm>
+          <a:prstGeom prst="rect">
+            <a:avLst/>
+          </a:prstGeom>
+        </p:spPr>
+      </p:pic>
+      <p:sp>
+        <p:nvSpPr>
+          <p:cNvPr id="9" name="TextBox 8"/>
           <p:cNvSpPr txBox="1"/>
           <p:nvPr/>
         </p:nvSpPr>
         <p:spPr>
           <a:xfrm>
-            <a:off x="10515600" y="6446520"/>
-            <a:ext cx="1188720" cy="274320"/>
+            <a:off x="8031327" y="5623560"/>
+            <a:ext cx="3322320" cy="548640"/>
           </a:xfrm>
           <a:prstGeom prst="rect">
             <a:avLst/>
@@ -4134,6 +4100,76 @@
           </a:bodyPr>
           <a:lstStyle/>
           <a:p>
+            <a:pPr algn="ctr"/>
+            <a:r>
+              <a:rPr sz="1200" b="0">
+                <a:solidFill>
+                  <a:srgbClr val="555555"/>
+                </a:solidFill>
+                <a:latin typeface="Calibri"/>
+              </a:rPr>
+              <a:t>Регистрация и онбординг пользователя</a:t>
+            </a:r>
+          </a:p>
+        </p:txBody>
+      </p:sp>
+      <p:sp>
+        <p:nvSpPr>
+          <p:cNvPr id="10" name="TextBox 9"/>
+          <p:cNvSpPr txBox="1"/>
+          <p:nvPr/>
+        </p:nvSpPr>
+        <p:spPr>
+          <a:xfrm>
+            <a:off x="548640" y="6446520"/>
+            <a:ext cx="5486400" cy="274320"/>
+          </a:xfrm>
+          <a:prstGeom prst="rect">
+            <a:avLst/>
+          </a:prstGeom>
+          <a:noFill/>
+        </p:spPr>
+        <p:txBody>
+          <a:bodyPr wrap="square">
+            <a:spAutoFit/>
+          </a:bodyPr>
+          <a:lstStyle/>
+          <a:p>
+            <a:pPr algn="l"/>
+            <a:r>
+              <a:rPr sz="1000" b="0">
+                <a:solidFill>
+                  <a:srgbClr val="555555"/>
+                </a:solidFill>
+                <a:latin typeface="Calibri"/>
+              </a:rPr>
+              <a:t>Лапова М. И.  ·  ВКР 2026  ·  Fitness Tracker</a:t>
+            </a:r>
+          </a:p>
+        </p:txBody>
+      </p:sp>
+      <p:sp>
+        <p:nvSpPr>
+          <p:cNvPr id="11" name="TextBox 10"/>
+          <p:cNvSpPr txBox="1"/>
+          <p:nvPr/>
+        </p:nvSpPr>
+        <p:spPr>
+          <a:xfrm>
+            <a:off x="10515600" y="6446520"/>
+            <a:ext cx="1188720" cy="274320"/>
+          </a:xfrm>
+          <a:prstGeom prst="rect">
+            <a:avLst/>
+          </a:prstGeom>
+          <a:noFill/>
+        </p:spPr>
+        <p:txBody>
+          <a:bodyPr wrap="square">
+            <a:spAutoFit/>
+          </a:bodyPr>
+          <a:lstStyle/>
+          <a:p>
             <a:pPr algn="r"/>
             <a:r>
               <a:rPr sz="1000" b="0">
@@ -4142,7 +4178,7 @@
                 </a:solidFill>
                 <a:latin typeface="Calibri"/>
               </a:rPr>
-              <a:t>11 / 12</a:t>
+              <a:t>11 / 13</a:t>
             </a:r>
           </a:p>
         </p:txBody>
@@ -4167,6 +4203,275 @@
       <p:grpSpPr/>
       <p:sp>
         <p:nvSpPr>
+          <p:cNvPr id="2" name="TextBox 1"/>
+          <p:cNvSpPr txBox="1"/>
+          <p:nvPr/>
+        </p:nvSpPr>
+        <p:spPr>
+          <a:xfrm>
+            <a:off x="548640" y="274320"/>
+            <a:ext cx="10972800" cy="548640"/>
+          </a:xfrm>
+          <a:prstGeom prst="rect">
+            <a:avLst/>
+          </a:prstGeom>
+          <a:noFill/>
+        </p:spPr>
+        <p:txBody>
+          <a:bodyPr wrap="square">
+            <a:spAutoFit/>
+          </a:bodyPr>
+          <a:lstStyle/>
+          <a:p>
+            <a:pPr algn="l"/>
+            <a:r>
+              <a:rPr sz="2800" b="1">
+                <a:solidFill>
+                  <a:srgbClr val="1F1F1F"/>
+                </a:solidFill>
+                <a:latin typeface="Calibri"/>
+              </a:rPr>
+              <a:t>Выводы</a:t>
+            </a:r>
+          </a:p>
+        </p:txBody>
+      </p:sp>
+      <p:sp>
+        <p:nvSpPr>
+          <p:cNvPr id="3" name="Rectangle 2"/>
+          <p:cNvSpPr/>
+          <p:nvPr/>
+        </p:nvSpPr>
+        <p:spPr>
+          <a:xfrm>
+            <a:off x="548640" y="594360"/>
+            <a:ext cx="1097280" cy="54864"/>
+          </a:xfrm>
+          <a:prstGeom prst="rect">
+            <a:avLst/>
+          </a:prstGeom>
+          <a:solidFill>
+            <a:srgbClr val="7F0DF2"/>
+          </a:solidFill>
+          <a:ln>
+            <a:noFill/>
+          </a:ln>
+        </p:spPr>
+        <p:style>
+          <a:lnRef idx="1">
+            <a:schemeClr val="accent1"/>
+          </a:lnRef>
+          <a:fillRef idx="3">
+            <a:schemeClr val="accent1"/>
+          </a:fillRef>
+          <a:effectRef idx="2">
+            <a:schemeClr val="accent1"/>
+          </a:effectRef>
+          <a:fontRef idx="minor">
+            <a:schemeClr val="lt1"/>
+          </a:fontRef>
+        </p:style>
+        <p:txBody>
+          <a:bodyPr rtlCol="0" anchor="ctr"/>
+          <a:lstStyle/>
+          <a:p>
+            <a:pPr algn="ctr"/>
+          </a:p>
+        </p:txBody>
+      </p:sp>
+      <p:sp>
+        <p:nvSpPr>
+          <p:cNvPr id="4" name="TextBox 3"/>
+          <p:cNvSpPr txBox="1"/>
+          <p:nvPr/>
+        </p:nvSpPr>
+        <p:spPr>
+          <a:xfrm>
+            <a:off x="548640" y="1097280"/>
+            <a:ext cx="10972800" cy="5029200"/>
+          </a:xfrm>
+          <a:prstGeom prst="rect">
+            <a:avLst/>
+          </a:prstGeom>
+          <a:noFill/>
+        </p:spPr>
+        <p:txBody>
+          <a:bodyPr wrap="square">
+            <a:spAutoFit/>
+          </a:bodyPr>
+          <a:lstStyle/>
+          <a:p>
+            <a:pPr algn="l">
+              <a:spcAft>
+                <a:spcPts val="800"/>
+              </a:spcAft>
+            </a:pPr>
+            <a:r>
+              <a:rPr sz="1800">
+                <a:solidFill>
+                  <a:srgbClr val="1F1F1F"/>
+                </a:solidFill>
+                <a:latin typeface="Calibri"/>
+              </a:rPr>
+              <a:t>•  Реализовано кроссплатформенное PWA-приложение с end-to-end интеграцией ML-моделей в продакшен (FastAPI + Flutter)</a:t>
+            </a:r>
+          </a:p>
+          <a:p>
+            <a:pPr algn="l">
+              <a:spcAft>
+                <a:spcPts val="800"/>
+              </a:spcAft>
+            </a:pPr>
+            <a:r>
+              <a:rPr sz="1800">
+                <a:solidFill>
+                  <a:srgbClr val="1F1F1F"/>
+                </a:solidFill>
+                <a:latin typeface="Calibri"/>
+              </a:rPr>
+              <a:t>•  Обучены и сравнены 4 модели прогноза InBody; LightGBM quantile обеспечивает R²=0.73 на Δ weight и калиброванный 80%-CI (0.79)</a:t>
+            </a:r>
+          </a:p>
+          <a:p>
+            <a:pPr algn="l">
+              <a:spcAft>
+                <a:spcPts val="800"/>
+              </a:spcAft>
+            </a:pPr>
+            <a:r>
+              <a:rPr sz="1800">
+                <a:solidFill>
+                  <a:srgbClr val="1F1F1F"/>
+                </a:solidFill>
+                <a:latin typeface="Calibri"/>
+              </a:rPr>
+              <a:t>•  Реализован watcher-сервис автоматической адаптации плана по 6 условиям срабатывания, покрыт 19 тестами</a:t>
+            </a:r>
+          </a:p>
+          <a:p>
+            <a:pPr algn="l">
+              <a:spcAft>
+                <a:spcPts val="800"/>
+              </a:spcAft>
+            </a:pPr>
+            <a:r>
+              <a:rPr sz="1800">
+                <a:solidFill>
+                  <a:srgbClr val="1F1F1F"/>
+                </a:solidFill>
+                <a:latin typeface="Calibri"/>
+              </a:rPr>
+              <a:t>•  Подтверждена гипотеза: квантильная регрессия даёт точный прогноз с адекватной калибровкой; снижение MAE на Δ weight 52% vs persistence</a:t>
+            </a:r>
+          </a:p>
+          <a:p>
+            <a:pPr algn="l">
+              <a:spcAft>
+                <a:spcPts val="800"/>
+              </a:spcAft>
+            </a:pPr>
+            <a:r>
+              <a:rPr sz="1800">
+                <a:solidFill>
+                  <a:srgbClr val="1F1F1F"/>
+                </a:solidFill>
+                <a:latin typeface="Calibri"/>
+              </a:rPr>
+              <a:t>•  Архитектура спроектирована с расчётом на отказоустойчивость: fallback на OLS-baseline при отсутствии ML-артефакта</a:t>
+            </a:r>
+          </a:p>
+        </p:txBody>
+      </p:sp>
+      <p:sp>
+        <p:nvSpPr>
+          <p:cNvPr id="5" name="TextBox 4"/>
+          <p:cNvSpPr txBox="1"/>
+          <p:nvPr/>
+        </p:nvSpPr>
+        <p:spPr>
+          <a:xfrm>
+            <a:off x="548640" y="6446520"/>
+            <a:ext cx="5486400" cy="274320"/>
+          </a:xfrm>
+          <a:prstGeom prst="rect">
+            <a:avLst/>
+          </a:prstGeom>
+          <a:noFill/>
+        </p:spPr>
+        <p:txBody>
+          <a:bodyPr wrap="square">
+            <a:spAutoFit/>
+          </a:bodyPr>
+          <a:lstStyle/>
+          <a:p>
+            <a:pPr algn="l"/>
+            <a:r>
+              <a:rPr sz="1000" b="0">
+                <a:solidFill>
+                  <a:srgbClr val="555555"/>
+                </a:solidFill>
+                <a:latin typeface="Calibri"/>
+              </a:rPr>
+              <a:t>Лапова М. И.  ·  ВКР 2026  ·  Fitness Tracker</a:t>
+            </a:r>
+          </a:p>
+        </p:txBody>
+      </p:sp>
+      <p:sp>
+        <p:nvSpPr>
+          <p:cNvPr id="6" name="TextBox 5"/>
+          <p:cNvSpPr txBox="1"/>
+          <p:nvPr/>
+        </p:nvSpPr>
+        <p:spPr>
+          <a:xfrm>
+            <a:off x="10515600" y="6446520"/>
+            <a:ext cx="1188720" cy="274320"/>
+          </a:xfrm>
+          <a:prstGeom prst="rect">
+            <a:avLst/>
+          </a:prstGeom>
+          <a:noFill/>
+        </p:spPr>
+        <p:txBody>
+          <a:bodyPr wrap="square">
+            <a:spAutoFit/>
+          </a:bodyPr>
+          <a:lstStyle/>
+          <a:p>
+            <a:pPr algn="r"/>
+            <a:r>
+              <a:rPr sz="1000" b="0">
+                <a:solidFill>
+                  <a:srgbClr val="555555"/>
+                </a:solidFill>
+                <a:latin typeface="Calibri"/>
+              </a:rPr>
+              <a:t>12 / 13</a:t>
+            </a:r>
+          </a:p>
+        </p:txBody>
+      </p:sp>
+    </p:spTree>
+  </p:cSld>
+  <p:clrMapOvr>
+    <a:masterClrMapping/>
+  </p:clrMapOvr>
+</p:sld>
+</file>
+
+<file path=ppt/slides/slide13.xml><?xml version="1.0" encoding="utf-8"?>
+<p:sld xmlns:a="http://schemas.openxmlformats.org/drawingml/2006/main" xmlns:p="http://schemas.openxmlformats.org/presentationml/2006/main" xmlns:r="http://schemas.openxmlformats.org/officeDocument/2006/relationships">
+  <p:cSld>
+    <p:spTree>
+      <p:nvGrpSpPr>
+        <p:cNvPr id="1" name=""/>
+        <p:cNvGrpSpPr/>
+        <p:nvPr/>
+      </p:nvGrpSpPr>
+      <p:grpSpPr/>
+      <p:sp>
+        <p:nvSpPr>
           <p:cNvPr id="2" name="Rectangle 1"/>
           <p:cNvSpPr/>
           <p:nvPr/>
@@ -4674,7 +4979,7 @@
                 </a:solidFill>
                 <a:latin typeface="Calibri"/>
               </a:rPr>
-              <a:t>2 / 12</a:t>
+              <a:t>2 / 13</a:t>
             </a:r>
           </a:p>
         </p:txBody>
@@ -5064,7 +5369,7 @@
                 </a:solidFill>
                 <a:latin typeface="Calibri"/>
               </a:rPr>
-              <a:t>3 / 12</a:t>
+              <a:t>3 / 13</a:t>
             </a:r>
           </a:p>
         </p:txBody>
@@ -5522,7 +5827,7 @@
                 </a:solidFill>
                 <a:latin typeface="Calibri"/>
               </a:rPr>
-              <a:t>4 / 12</a:t>
+              <a:t>4 / 13</a:t>
             </a:r>
           </a:p>
         </p:txBody>
@@ -5740,7 +6045,7 @@
                 </a:solidFill>
                 <a:latin typeface="Calibri"/>
               </a:rPr>
-              <a:t>•  Baseline для сравнения: persistence (Δ=0) и Ridge — обязательны для проверки, что ML-модель несёт полезный сигнал</a:t>
+              <a:t>•  Прод-артефакт — 9 LightGBM-бустеров (3 целевых × 3 квантиля); каждый бустер — ансамбль из ~86 деревьев решений глубиной до 4, обучен с целевой функцией quantile loss</a:t>
             </a:r>
           </a:p>
           <a:p>
@@ -5756,7 +6061,7 @@
                 </a:solidFill>
                 <a:latin typeface="Calibri"/>
               </a:rPr>
-              <a:t>•  Альтернативная архитектура: MLP с shared trunk 64→32 + per-target heads + δ-параметризация (гарантирует q10 ≤ q50 ≤ q90)</a:t>
+              <a:t>•  Baseline для сравнения: persistence (Δ=0) и Ridge; альтернатива — MLP с shared trunk 64→32 + δ-параметризация квантилей (q10 ≤ q50 ≤ q90)</a:t>
             </a:r>
           </a:p>
         </p:txBody>
@@ -5826,7 +6131,7 @@
                 </a:solidFill>
                 <a:latin typeface="Calibri"/>
               </a:rPr>
-              <a:t>5 / 12</a:t>
+              <a:t>5 / 13</a:t>
             </a:r>
           </a:p>
         </p:txBody>
@@ -6146,7 +6451,7 @@
                 </a:solidFill>
                 <a:latin typeface="Calibri"/>
               </a:rPr>
-              <a:t>6 / 12</a:t>
+              <a:t>6 / 13</a:t>
             </a:r>
           </a:p>
         </p:txBody>
@@ -6371,7 +6676,7 @@
                 </a:solidFill>
                 <a:latin typeface="Calibri"/>
               </a:rPr>
-              <a:t>7 / 12</a:t>
+              <a:t>7 / 13</a:t>
             </a:r>
           </a:p>
         </p:txBody>
@@ -6424,7 +6729,7 @@
                 </a:solidFill>
                 <a:latin typeface="Calibri"/>
               </a:rPr>
-              <a:t>Watcher-сервис адаптации плана</a:t>
+              <a:t>Что внутри модели: feature importance</a:t>
             </a:r>
           </a:p>
         </p:txBody>
@@ -6472,16 +6777,40 @@
           </a:p>
         </p:txBody>
       </p:sp>
-      <p:sp>
-        <p:nvSpPr>
-          <p:cNvPr id="4" name="TextBox 3"/>
+      <p:pic>
+        <p:nvPicPr>
+          <p:cNvPr id="4" name="Picture 3" descr="image.png"/>
+          <p:cNvPicPr>
+            <a:picLocks noChangeAspect="1"/>
+          </p:cNvPicPr>
+          <p:nvPr/>
+        </p:nvPicPr>
+        <p:blipFill>
+          <a:blip r:embed="rId2"/>
+          <a:stretch>
+            <a:fillRect/>
+          </a:stretch>
+        </p:blipFill>
+        <p:spPr>
+          <a:xfrm>
+            <a:off x="1097280" y="1005840"/>
+            <a:ext cx="10058400" cy="5184873"/>
+          </a:xfrm>
+          <a:prstGeom prst="rect">
+            <a:avLst/>
+          </a:prstGeom>
+        </p:spPr>
+      </p:pic>
+      <p:sp>
+        <p:nvSpPr>
+          <p:cNvPr id="5" name="TextBox 4"/>
           <p:cNvSpPr txBox="1"/>
           <p:nvPr/>
         </p:nvSpPr>
         <p:spPr>
           <a:xfrm>
-            <a:off x="548640" y="1005840"/>
-            <a:ext cx="10972800" cy="731520"/>
+            <a:off x="548640" y="5852160"/>
+            <a:ext cx="10972800" cy="457200"/>
           </a:xfrm>
           <a:prstGeom prst="rect">
             <a:avLst/>
@@ -6494,29 +6823,29 @@
           </a:bodyPr>
           <a:lstStyle/>
           <a:p>
-            <a:pPr algn="l"/>
-            <a:r>
-              <a:rPr sz="1800" b="0">
-                <a:solidFill>
-                  <a:srgbClr val="1F1F1F"/>
-                </a:solidFill>
-                <a:latin typeface="Calibri"/>
-              </a:rPr>
-              <a:t>Детерминированный сервис, реагирующий на изменения профиля и истории тренировок без участия пользователя.</a:t>
-            </a:r>
-          </a:p>
-        </p:txBody>
-      </p:sp>
-      <p:sp>
-        <p:nvSpPr>
-          <p:cNvPr id="5" name="TextBox 4"/>
+            <a:pPr algn="ctr"/>
+            <a:r>
+              <a:rPr sz="1400" b="0">
+                <a:solidFill>
+                  <a:srgbClr val="555555"/>
+                </a:solidFill>
+                <a:latin typeface="Calibri"/>
+              </a:rPr>
+              <a:t>Главный сигнал — цель пользователя (goal_weight_loss); следом — BMI. Это согласуется с физиологией: при сознательном дефиците калорий человек теряет вес независимо от исходных параметров.</a:t>
+            </a:r>
+          </a:p>
+        </p:txBody>
+      </p:sp>
+      <p:sp>
+        <p:nvSpPr>
+          <p:cNvPr id="6" name="TextBox 5"/>
           <p:cNvSpPr txBox="1"/>
           <p:nvPr/>
         </p:nvSpPr>
         <p:spPr>
           <a:xfrm>
-            <a:off x="548640" y="2011680"/>
-            <a:ext cx="10972800" cy="4389120"/>
+            <a:off x="548640" y="6446520"/>
+            <a:ext cx="5486400" cy="274320"/>
           </a:xfrm>
           <a:prstGeom prst="rect">
             <a:avLst/>
@@ -6529,97 +6858,29 @@
           </a:bodyPr>
           <a:lstStyle/>
           <a:p>
-            <a:pPr algn="l">
-              <a:spcAft>
-                <a:spcPts val="800"/>
-              </a:spcAft>
-            </a:pPr>
-            <a:r>
-              <a:rPr sz="1700">
-                <a:solidFill>
-                  <a:srgbClr val="1F1F1F"/>
-                </a:solidFill>
-                <a:latin typeface="Calibri"/>
-              </a:rPr>
-              <a:t>•  6 условий срабатывания: изменение веса, цели, частоты, оборудования, окончание цикла, ручной запуск</a:t>
-            </a:r>
-          </a:p>
-          <a:p>
-            <a:pPr algn="l">
-              <a:spcAft>
-                <a:spcPts val="800"/>
-              </a:spcAft>
-            </a:pPr>
-            <a:r>
-              <a:rPr sz="1700">
-                <a:solidFill>
-                  <a:srgbClr val="1F1F1F"/>
-                </a:solidFill>
-                <a:latin typeface="Calibri"/>
-              </a:rPr>
-              <a:t>•  Architecture: pg-cron + watcher-функции в domain/-слое; идемпотентность по pending-событиям</a:t>
-            </a:r>
-          </a:p>
-          <a:p>
-            <a:pPr algn="l">
-              <a:spcAft>
-                <a:spcPts val="800"/>
-              </a:spcAft>
-            </a:pPr>
-            <a:r>
-              <a:rPr sz="1700">
-                <a:solidFill>
-                  <a:srgbClr val="1F1F1F"/>
-                </a:solidFill>
-                <a:latin typeface="Calibri"/>
-              </a:rPr>
-              <a:t>•  При срабатывании создаётся PlanRebuildEvent в БД; пересборка плана происходит асинхронно через BackgroundTasks</a:t>
-            </a:r>
-          </a:p>
-          <a:p>
-            <a:pPr algn="l">
-              <a:spcAft>
-                <a:spcPts val="800"/>
-              </a:spcAft>
-            </a:pPr>
-            <a:r>
-              <a:rPr sz="1700">
-                <a:solidFill>
-                  <a:srgbClr val="1F1F1F"/>
-                </a:solidFill>
-                <a:latin typeface="Calibri"/>
-              </a:rPr>
-              <a:t>•  Покрытие тестами: 8 модульных + 11 интеграционных, включая race-conditions между триггерами</a:t>
-            </a:r>
-          </a:p>
-          <a:p>
-            <a:pPr algn="l">
-              <a:spcAft>
-                <a:spcPts val="800"/>
-              </a:spcAft>
-            </a:pPr>
-            <a:r>
-              <a:rPr sz="1700">
-                <a:solidFill>
-                  <a:srgbClr val="1F1F1F"/>
-                </a:solidFill>
-                <a:latin typeface="Calibri"/>
-              </a:rPr>
-              <a:t>•  Гарантия консистентности: одно активное событие на пользователя (partial unique index)</a:t>
-            </a:r>
-          </a:p>
-        </p:txBody>
-      </p:sp>
-      <p:sp>
-        <p:nvSpPr>
-          <p:cNvPr id="6" name="TextBox 5"/>
+            <a:pPr algn="l"/>
+            <a:r>
+              <a:rPr sz="1000" b="0">
+                <a:solidFill>
+                  <a:srgbClr val="555555"/>
+                </a:solidFill>
+                <a:latin typeface="Calibri"/>
+              </a:rPr>
+              <a:t>Лапова М. И.  ·  ВКР 2026  ·  Fitness Tracker</a:t>
+            </a:r>
+          </a:p>
+        </p:txBody>
+      </p:sp>
+      <p:sp>
+        <p:nvSpPr>
+          <p:cNvPr id="7" name="TextBox 6"/>
           <p:cNvSpPr txBox="1"/>
           <p:nvPr/>
         </p:nvSpPr>
         <p:spPr>
           <a:xfrm>
-            <a:off x="548640" y="6446520"/>
-            <a:ext cx="5486400" cy="274320"/>
+            <a:off x="10515600" y="6446520"/>
+            <a:ext cx="1188720" cy="274320"/>
           </a:xfrm>
           <a:prstGeom prst="rect">
             <a:avLst/>
@@ -6632,7 +6893,7 @@
           </a:bodyPr>
           <a:lstStyle/>
           <a:p>
-            <a:pPr algn="l"/>
+            <a:pPr algn="r"/>
             <a:r>
               <a:rPr sz="1000" b="0">
                 <a:solidFill>
@@ -6640,42 +6901,7 @@
                 </a:solidFill>
                 <a:latin typeface="Calibri"/>
               </a:rPr>
-              <a:t>Лапова М. И.  ·  ВКР 2026  ·  Fitness Tracker</a:t>
-            </a:r>
-          </a:p>
-        </p:txBody>
-      </p:sp>
-      <p:sp>
-        <p:nvSpPr>
-          <p:cNvPr id="7" name="TextBox 6"/>
-          <p:cNvSpPr txBox="1"/>
-          <p:nvPr/>
-        </p:nvSpPr>
-        <p:spPr>
-          <a:xfrm>
-            <a:off x="10515600" y="6446520"/>
-            <a:ext cx="1188720" cy="274320"/>
-          </a:xfrm>
-          <a:prstGeom prst="rect">
-            <a:avLst/>
-          </a:prstGeom>
-          <a:noFill/>
-        </p:spPr>
-        <p:txBody>
-          <a:bodyPr wrap="square">
-            <a:spAutoFit/>
-          </a:bodyPr>
-          <a:lstStyle/>
-          <a:p>
-            <a:pPr algn="r"/>
-            <a:r>
-              <a:rPr sz="1000" b="0">
-                <a:solidFill>
-                  <a:srgbClr val="555555"/>
-                </a:solidFill>
-                <a:latin typeface="Calibri"/>
-              </a:rPr>
-              <a:t>8 / 12</a:t>
+              <a:t>8 / 13</a:t>
             </a:r>
           </a:p>
         </p:txBody>
@@ -6728,7 +6954,7 @@
                 </a:solidFill>
                 <a:latin typeface="Calibri"/>
               </a:rPr>
-              <a:t>Тестирование</a:t>
+              <a:t>Watcher-сервис адаптации плана</a:t>
             </a:r>
           </a:p>
         </p:txBody>
@@ -6806,7 +7032,7 @@
                 </a:solidFill>
                 <a:latin typeface="Calibri"/>
               </a:rPr>
-              <a:t>Многоуровневая стратегия: чистые юниты на domain/-слое + интеграционные тесты с реальным PostgreSQL.</a:t>
+              <a:t>Детерминированный сервис, реагирующий на изменения профиля и истории тренировок без участия пользователя.</a:t>
             </a:r>
           </a:p>
         </p:txBody>
@@ -6845,7 +7071,7 @@
                 </a:solidFill>
                 <a:latin typeface="Calibri"/>
               </a:rPr>
-              <a:t>•  Юнит-тесты domain/: 49 тестов forecast/ML-слоя (composer, baseline, features, interpretation, evaluation)</a:t>
+              <a:t>•  6 условий срабатывания: изменение веса, цели, частоты, оборудования, окончание цикла, ручной запуск</a:t>
             </a:r>
           </a:p>
           <a:p>
@@ -6861,7 +7087,7 @@
                 </a:solidFill>
                 <a:latin typeface="Calibri"/>
               </a:rPr>
-              <a:t>•  Интеграционные тесты: testcontainers Postgres + savepoint per test; FastAPI берёт ту же сессию через dependency_overrides</a:t>
+              <a:t>•  Architecture: pg-cron + watcher-функции в domain/-слое; идемпотентность по pending-событиям</a:t>
             </a:r>
           </a:p>
           <a:p>
@@ -6877,7 +7103,7 @@
                 </a:solidFill>
                 <a:latin typeface="Calibri"/>
               </a:rPr>
-              <a:t>•  ML-pipeline: smoke-тесты обучения для persistence / Ridge / LightGBM на mini-датасете (изоляция через tmp_path)</a:t>
+              <a:t>•  При срабатывании создаётся PlanRebuildEvent в БД; пересборка плана происходит асинхронно через BackgroundTasks</a:t>
             </a:r>
           </a:p>
           <a:p>
@@ -6893,7 +7119,7 @@
                 </a:solidFill>
                 <a:latin typeface="Calibri"/>
               </a:rPr>
-              <a:t>•  Калибровка CI на тестовом сплите: 0.78–0.80 для LGBM, 0.79–0.83 для MLP (теоретический уровень — 0.80)</a:t>
+              <a:t>•  Покрытие тестами: 8 модульных + 11 интеграционных, включая race-conditions между триггерами</a:t>
             </a:r>
           </a:p>
           <a:p>
@@ -6909,7 +7135,7 @@
                 </a:solidFill>
                 <a:latin typeface="Calibri"/>
               </a:rPr>
-              <a:t>•  Маркеры pytest unit / integration проставляются автоматически по пути; make check = lint + typecheck (strict mypy) + test</a:t>
+              <a:t>•  Гарантия консистентности: одно активное событие на пользователя (partial unique index)</a:t>
             </a:r>
           </a:p>
         </p:txBody>
@@ -6979,7 +7205,7 @@
                 </a:solidFill>
                 <a:latin typeface="Calibri"/>
               </a:rPr>
-              <a:t>9 / 12</a:t>
+              <a:t>9 / 13</a:t>
             </a:r>
           </a:p>
         </p:txBody>

--- a/docs/thesis/presentation-maria.pptx
+++ b/docs/thesis/presentation-maria.pptx
@@ -18,6 +18,7 @@
     <p:sldId id="266" r:id="rId17"/>
     <p:sldId id="267" r:id="rId18"/>
     <p:sldId id="268" r:id="rId19"/>
+    <p:sldId id="269" r:id="rId20"/>
   </p:sldIdLst>
   <p:sldSz cx="12191695" cy="6858000" type="screen4x3"/>
   <p:notesSz cx="6858000" cy="9144000"/>
@@ -3584,7 +3585,7 @@
                 </a:solidFill>
                 <a:latin typeface="Calibri"/>
               </a:rPr>
-              <a:t>Тестирование</a:t>
+              <a:t>Watcher-сервис адаптации плана</a:t>
             </a:r>
           </a:p>
         </p:txBody>
@@ -3662,7 +3663,7 @@
                 </a:solidFill>
                 <a:latin typeface="Calibri"/>
               </a:rPr>
-              <a:t>Многоуровневая стратегия: чистые юниты на domain/-слое + интеграционные тесты с реальным PostgreSQL.</a:t>
+              <a:t>Детерминированный сервис, реагирующий на изменения профиля и истории тренировок без участия пользователя.</a:t>
             </a:r>
           </a:p>
         </p:txBody>
@@ -3701,7 +3702,7 @@
                 </a:solidFill>
                 <a:latin typeface="Calibri"/>
               </a:rPr>
-              <a:t>•  Юнит-тесты domain/: 49 тестов forecast/ML-слоя (composer, baseline, features, interpretation, evaluation)</a:t>
+              <a:t>•  6 условий срабатывания: изменение веса, цели, частоты, оборудования, окончание цикла, ручной запуск</a:t>
             </a:r>
           </a:p>
           <a:p>
@@ -3717,7 +3718,7 @@
                 </a:solidFill>
                 <a:latin typeface="Calibri"/>
               </a:rPr>
-              <a:t>•  Интеграционные тесты: testcontainers Postgres + savepoint per test; FastAPI берёт ту же сессию через dependency_overrides</a:t>
+              <a:t>•  Architecture: pg-cron + watcher-функции в domain/-слое; идемпотентность по pending-событиям</a:t>
             </a:r>
           </a:p>
           <a:p>
@@ -3733,7 +3734,7 @@
                 </a:solidFill>
                 <a:latin typeface="Calibri"/>
               </a:rPr>
-              <a:t>•  ML-pipeline: smoke-тесты обучения для persistence / Ridge / LightGBM на mini-датасете (изоляция через tmp_path)</a:t>
+              <a:t>•  При срабатывании создаётся PlanRebuildEvent в БД; пересборка плана происходит асинхронно через BackgroundTasks</a:t>
             </a:r>
           </a:p>
           <a:p>
@@ -3749,7 +3750,7 @@
                 </a:solidFill>
                 <a:latin typeface="Calibri"/>
               </a:rPr>
-              <a:t>•  Калибровка CI на тестовом сплите: 0.78–0.80 для LGBM, 0.79–0.83 для MLP (теоретический уровень — 0.80)</a:t>
+              <a:t>•  Покрытие тестами: 8 модульных + 11 интеграционных, включая race-conditions между триггерами</a:t>
             </a:r>
           </a:p>
           <a:p>
@@ -3765,7 +3766,7 @@
                 </a:solidFill>
                 <a:latin typeface="Calibri"/>
               </a:rPr>
-              <a:t>•  Маркеры pytest unit / integration проставляются автоматически по пути; make check = lint + typecheck (strict mypy) + test</a:t>
+              <a:t>•  Гарантия консистентности: одно активное событие на пользователя (partial unique index)</a:t>
             </a:r>
           </a:p>
         </p:txBody>
@@ -3835,7 +3836,7 @@
                 </a:solidFill>
                 <a:latin typeface="Calibri"/>
               </a:rPr>
-              <a:t>10 / 13</a:t>
+              <a:t>10 / 14</a:t>
             </a:r>
           </a:p>
         </p:txBody>
@@ -3888,7 +3889,7 @@
                 </a:solidFill>
                 <a:latin typeface="Calibri"/>
               </a:rPr>
-              <a:t>Интерфейс приложения</a:t>
+              <a:t>Тестирование</a:t>
             </a:r>
           </a:p>
         </p:txBody>
@@ -3936,40 +3937,16 @@
           </a:p>
         </p:txBody>
       </p:sp>
-      <p:pic>
-        <p:nvPicPr>
-          <p:cNvPr id="4" name="Picture 3" descr="screen-03.png"/>
-          <p:cNvPicPr>
-            <a:picLocks noChangeAspect="1"/>
-          </p:cNvPicPr>
-          <p:nvPr/>
-        </p:nvPicPr>
-        <p:blipFill>
-          <a:blip r:embed="rId2"/>
-          <a:stretch>
-            <a:fillRect/>
-          </a:stretch>
-        </p:blipFill>
-        <p:spPr>
-          <a:xfrm>
-            <a:off x="838047" y="1097280"/>
-            <a:ext cx="3322320" cy="4389120"/>
-          </a:xfrm>
-          <a:prstGeom prst="rect">
-            <a:avLst/>
-          </a:prstGeom>
-        </p:spPr>
-      </p:pic>
-      <p:sp>
-        <p:nvSpPr>
-          <p:cNvPr id="5" name="TextBox 4"/>
+      <p:sp>
+        <p:nvSpPr>
+          <p:cNvPr id="4" name="TextBox 3"/>
           <p:cNvSpPr txBox="1"/>
           <p:nvPr/>
         </p:nvSpPr>
         <p:spPr>
           <a:xfrm>
-            <a:off x="838047" y="5623560"/>
-            <a:ext cx="3322320" cy="548640"/>
+            <a:off x="548640" y="1005840"/>
+            <a:ext cx="10972800" cy="731520"/>
           </a:xfrm>
           <a:prstGeom prst="rect">
             <a:avLst/>
@@ -3982,53 +3959,29 @@
           </a:bodyPr>
           <a:lstStyle/>
           <a:p>
-            <a:pPr algn="ctr"/>
-            <a:r>
-              <a:rPr sz="1200" b="0">
-                <a:solidFill>
-                  <a:srgbClr val="555555"/>
-                </a:solidFill>
-                <a:latin typeface="Calibri"/>
-              </a:rPr>
-              <a:t>Главный экран: прогресс веса и активность</a:t>
-            </a:r>
-          </a:p>
-        </p:txBody>
-      </p:sp>
-      <p:pic>
-        <p:nvPicPr>
-          <p:cNvPr id="6" name="Picture 5" descr="screen-05.png"/>
-          <p:cNvPicPr>
-            <a:picLocks noChangeAspect="1"/>
-          </p:cNvPicPr>
-          <p:nvPr/>
-        </p:nvPicPr>
-        <p:blipFill>
-          <a:blip r:embed="rId3"/>
-          <a:stretch>
-            <a:fillRect/>
-          </a:stretch>
-        </p:blipFill>
-        <p:spPr>
-          <a:xfrm>
-            <a:off x="4434687" y="1097280"/>
-            <a:ext cx="3322320" cy="4389120"/>
-          </a:xfrm>
-          <a:prstGeom prst="rect">
-            <a:avLst/>
-          </a:prstGeom>
-        </p:spPr>
-      </p:pic>
-      <p:sp>
-        <p:nvSpPr>
-          <p:cNvPr id="7" name="TextBox 6"/>
+            <a:pPr algn="l"/>
+            <a:r>
+              <a:rPr sz="1800" b="0">
+                <a:solidFill>
+                  <a:srgbClr val="1F1F1F"/>
+                </a:solidFill>
+                <a:latin typeface="Calibri"/>
+              </a:rPr>
+              <a:t>Многоуровневая стратегия: чистые юниты на domain/-слое + интеграционные тесты с реальным PostgreSQL.</a:t>
+            </a:r>
+          </a:p>
+        </p:txBody>
+      </p:sp>
+      <p:sp>
+        <p:nvSpPr>
+          <p:cNvPr id="5" name="TextBox 4"/>
           <p:cNvSpPr txBox="1"/>
           <p:nvPr/>
         </p:nvSpPr>
         <p:spPr>
           <a:xfrm>
-            <a:off x="4434687" y="5623560"/>
-            <a:ext cx="3322320" cy="548640"/>
+            <a:off x="548640" y="2011680"/>
+            <a:ext cx="10972800" cy="4389120"/>
           </a:xfrm>
           <a:prstGeom prst="rect">
             <a:avLst/>
@@ -4041,53 +3994,97 @@
           </a:bodyPr>
           <a:lstStyle/>
           <a:p>
-            <a:pPr algn="ctr"/>
-            <a:r>
-              <a:rPr sz="1200" b="0">
-                <a:solidFill>
-                  <a:srgbClr val="555555"/>
-                </a:solidFill>
-                <a:latin typeface="Calibri"/>
-              </a:rPr>
-              <a:t>Лог тренировки: подходы, веса, прогрессия</a:t>
-            </a:r>
-          </a:p>
-        </p:txBody>
-      </p:sp>
-      <p:pic>
-        <p:nvPicPr>
-          <p:cNvPr id="8" name="Picture 7" descr="screen-01.png"/>
-          <p:cNvPicPr>
-            <a:picLocks noChangeAspect="1"/>
-          </p:cNvPicPr>
-          <p:nvPr/>
-        </p:nvPicPr>
-        <p:blipFill>
-          <a:blip r:embed="rId4"/>
-          <a:stretch>
-            <a:fillRect/>
-          </a:stretch>
-        </p:blipFill>
-        <p:spPr>
-          <a:xfrm>
-            <a:off x="8031327" y="1097280"/>
-            <a:ext cx="3322320" cy="4389120"/>
-          </a:xfrm>
-          <a:prstGeom prst="rect">
-            <a:avLst/>
-          </a:prstGeom>
-        </p:spPr>
-      </p:pic>
-      <p:sp>
-        <p:nvSpPr>
-          <p:cNvPr id="9" name="TextBox 8"/>
+            <a:pPr algn="l">
+              <a:spcAft>
+                <a:spcPts val="800"/>
+              </a:spcAft>
+            </a:pPr>
+            <a:r>
+              <a:rPr sz="1700">
+                <a:solidFill>
+                  <a:srgbClr val="1F1F1F"/>
+                </a:solidFill>
+                <a:latin typeface="Calibri"/>
+              </a:rPr>
+              <a:t>•  Юнит-тесты domain/: 49 тестов forecast/ML-слоя (composer, baseline, features, interpretation, evaluation)</a:t>
+            </a:r>
+          </a:p>
+          <a:p>
+            <a:pPr algn="l">
+              <a:spcAft>
+                <a:spcPts val="800"/>
+              </a:spcAft>
+            </a:pPr>
+            <a:r>
+              <a:rPr sz="1700">
+                <a:solidFill>
+                  <a:srgbClr val="1F1F1F"/>
+                </a:solidFill>
+                <a:latin typeface="Calibri"/>
+              </a:rPr>
+              <a:t>•  Интеграционные тесты: testcontainers Postgres + savepoint per test; FastAPI берёт ту же сессию через dependency_overrides</a:t>
+            </a:r>
+          </a:p>
+          <a:p>
+            <a:pPr algn="l">
+              <a:spcAft>
+                <a:spcPts val="800"/>
+              </a:spcAft>
+            </a:pPr>
+            <a:r>
+              <a:rPr sz="1700">
+                <a:solidFill>
+                  <a:srgbClr val="1F1F1F"/>
+                </a:solidFill>
+                <a:latin typeface="Calibri"/>
+              </a:rPr>
+              <a:t>•  ML-pipeline: smoke-тесты обучения для persistence / Ridge / LightGBM на mini-датасете (изоляция через tmp_path)</a:t>
+            </a:r>
+          </a:p>
+          <a:p>
+            <a:pPr algn="l">
+              <a:spcAft>
+                <a:spcPts val="800"/>
+              </a:spcAft>
+            </a:pPr>
+            <a:r>
+              <a:rPr sz="1700">
+                <a:solidFill>
+                  <a:srgbClr val="1F1F1F"/>
+                </a:solidFill>
+                <a:latin typeface="Calibri"/>
+              </a:rPr>
+              <a:t>•  Калибровка CI на тестовом сплите: 0.78–0.80 для LGBM, 0.79–0.83 для MLP (теоретический уровень — 0.80)</a:t>
+            </a:r>
+          </a:p>
+          <a:p>
+            <a:pPr algn="l">
+              <a:spcAft>
+                <a:spcPts val="800"/>
+              </a:spcAft>
+            </a:pPr>
+            <a:r>
+              <a:rPr sz="1700">
+                <a:solidFill>
+                  <a:srgbClr val="1F1F1F"/>
+                </a:solidFill>
+                <a:latin typeface="Calibri"/>
+              </a:rPr>
+              <a:t>•  Маркеры pytest unit / integration проставляются автоматически по пути; make check = lint + typecheck (strict mypy) + test</a:t>
+            </a:r>
+          </a:p>
+        </p:txBody>
+      </p:sp>
+      <p:sp>
+        <p:nvSpPr>
+          <p:cNvPr id="6" name="TextBox 5"/>
           <p:cNvSpPr txBox="1"/>
           <p:nvPr/>
         </p:nvSpPr>
         <p:spPr>
           <a:xfrm>
-            <a:off x="8031327" y="5623560"/>
-            <a:ext cx="3322320" cy="548640"/>
+            <a:off x="548640" y="6446520"/>
+            <a:ext cx="5486400" cy="274320"/>
           </a:xfrm>
           <a:prstGeom prst="rect">
             <a:avLst/>
@@ -4100,29 +4097,29 @@
           </a:bodyPr>
           <a:lstStyle/>
           <a:p>
-            <a:pPr algn="ctr"/>
-            <a:r>
-              <a:rPr sz="1200" b="0">
+            <a:pPr algn="l"/>
+            <a:r>
+              <a:rPr sz="1000" b="0">
                 <a:solidFill>
                   <a:srgbClr val="555555"/>
                 </a:solidFill>
                 <a:latin typeface="Calibri"/>
               </a:rPr>
-              <a:t>Регистрация и онбординг пользователя</a:t>
-            </a:r>
-          </a:p>
-        </p:txBody>
-      </p:sp>
-      <p:sp>
-        <p:nvSpPr>
-          <p:cNvPr id="10" name="TextBox 9"/>
+              <a:t>Лапова М. И.  ·  ВКР 2026  ·  Fitness Tracker</a:t>
+            </a:r>
+          </a:p>
+        </p:txBody>
+      </p:sp>
+      <p:sp>
+        <p:nvSpPr>
+          <p:cNvPr id="7" name="TextBox 6"/>
           <p:cNvSpPr txBox="1"/>
           <p:nvPr/>
         </p:nvSpPr>
         <p:spPr>
           <a:xfrm>
-            <a:off x="548640" y="6446520"/>
-            <a:ext cx="5486400" cy="274320"/>
+            <a:off x="10515600" y="6446520"/>
+            <a:ext cx="1188720" cy="274320"/>
           </a:xfrm>
           <a:prstGeom prst="rect">
             <a:avLst/>
@@ -4135,7 +4132,7 @@
           </a:bodyPr>
           <a:lstStyle/>
           <a:p>
-            <a:pPr algn="l"/>
+            <a:pPr algn="r"/>
             <a:r>
               <a:rPr sz="1000" b="0">
                 <a:solidFill>
@@ -4143,42 +4140,7 @@
                 </a:solidFill>
                 <a:latin typeface="Calibri"/>
               </a:rPr>
-              <a:t>Лапова М. И.  ·  ВКР 2026  ·  Fitness Tracker</a:t>
-            </a:r>
-          </a:p>
-        </p:txBody>
-      </p:sp>
-      <p:sp>
-        <p:nvSpPr>
-          <p:cNvPr id="11" name="TextBox 10"/>
-          <p:cNvSpPr txBox="1"/>
-          <p:nvPr/>
-        </p:nvSpPr>
-        <p:spPr>
-          <a:xfrm>
-            <a:off x="10515600" y="6446520"/>
-            <a:ext cx="1188720" cy="274320"/>
-          </a:xfrm>
-          <a:prstGeom prst="rect">
-            <a:avLst/>
-          </a:prstGeom>
-          <a:noFill/>
-        </p:spPr>
-        <p:txBody>
-          <a:bodyPr wrap="square">
-            <a:spAutoFit/>
-          </a:bodyPr>
-          <a:lstStyle/>
-          <a:p>
-            <a:pPr algn="r"/>
-            <a:r>
-              <a:rPr sz="1000" b="0">
-                <a:solidFill>
-                  <a:srgbClr val="555555"/>
-                </a:solidFill>
-                <a:latin typeface="Calibri"/>
-              </a:rPr>
-              <a:t>11 / 13</a:t>
+              <a:t>11 / 14</a:t>
             </a:r>
           </a:p>
         </p:txBody>
@@ -4231,7 +4193,7 @@
                 </a:solidFill>
                 <a:latin typeface="Calibri"/>
               </a:rPr>
-              <a:t>Выводы</a:t>
+              <a:t>Интерфейс приложения</a:t>
             </a:r>
           </a:p>
         </p:txBody>
@@ -4279,16 +4241,40 @@
           </a:p>
         </p:txBody>
       </p:sp>
-      <p:sp>
-        <p:nvSpPr>
-          <p:cNvPr id="4" name="TextBox 3"/>
+      <p:pic>
+        <p:nvPicPr>
+          <p:cNvPr id="4" name="Picture 3" descr="screen-03.png"/>
+          <p:cNvPicPr>
+            <a:picLocks noChangeAspect="1"/>
+          </p:cNvPicPr>
+          <p:nvPr/>
+        </p:nvPicPr>
+        <p:blipFill>
+          <a:blip r:embed="rId2"/>
+          <a:stretch>
+            <a:fillRect/>
+          </a:stretch>
+        </p:blipFill>
+        <p:spPr>
+          <a:xfrm>
+            <a:off x="838047" y="1097280"/>
+            <a:ext cx="3322320" cy="4389120"/>
+          </a:xfrm>
+          <a:prstGeom prst="rect">
+            <a:avLst/>
+          </a:prstGeom>
+        </p:spPr>
+      </p:pic>
+      <p:sp>
+        <p:nvSpPr>
+          <p:cNvPr id="5" name="TextBox 4"/>
           <p:cNvSpPr txBox="1"/>
           <p:nvPr/>
         </p:nvSpPr>
         <p:spPr>
           <a:xfrm>
-            <a:off x="548640" y="1097280"/>
-            <a:ext cx="10972800" cy="5029200"/>
+            <a:off x="838047" y="5623560"/>
+            <a:ext cx="3322320" cy="548640"/>
           </a:xfrm>
           <a:prstGeom prst="rect">
             <a:avLst/>
@@ -4301,97 +4287,53 @@
           </a:bodyPr>
           <a:lstStyle/>
           <a:p>
-            <a:pPr algn="l">
-              <a:spcAft>
-                <a:spcPts val="800"/>
-              </a:spcAft>
-            </a:pPr>
-            <a:r>
-              <a:rPr sz="1800">
-                <a:solidFill>
-                  <a:srgbClr val="1F1F1F"/>
-                </a:solidFill>
-                <a:latin typeface="Calibri"/>
-              </a:rPr>
-              <a:t>•  Реализовано кроссплатформенное PWA-приложение с end-to-end интеграцией ML-моделей в продакшен (FastAPI + Flutter)</a:t>
-            </a:r>
-          </a:p>
-          <a:p>
-            <a:pPr algn="l">
-              <a:spcAft>
-                <a:spcPts val="800"/>
-              </a:spcAft>
-            </a:pPr>
-            <a:r>
-              <a:rPr sz="1800">
-                <a:solidFill>
-                  <a:srgbClr val="1F1F1F"/>
-                </a:solidFill>
-                <a:latin typeface="Calibri"/>
-              </a:rPr>
-              <a:t>•  Обучены и сравнены 4 модели прогноза InBody; LightGBM quantile обеспечивает R²=0.73 на Δ weight и калиброванный 80%-CI (0.79)</a:t>
-            </a:r>
-          </a:p>
-          <a:p>
-            <a:pPr algn="l">
-              <a:spcAft>
-                <a:spcPts val="800"/>
-              </a:spcAft>
-            </a:pPr>
-            <a:r>
-              <a:rPr sz="1800">
-                <a:solidFill>
-                  <a:srgbClr val="1F1F1F"/>
-                </a:solidFill>
-                <a:latin typeface="Calibri"/>
-              </a:rPr>
-              <a:t>•  Реализован watcher-сервис автоматической адаптации плана по 6 условиям срабатывания, покрыт 19 тестами</a:t>
-            </a:r>
-          </a:p>
-          <a:p>
-            <a:pPr algn="l">
-              <a:spcAft>
-                <a:spcPts val="800"/>
-              </a:spcAft>
-            </a:pPr>
-            <a:r>
-              <a:rPr sz="1800">
-                <a:solidFill>
-                  <a:srgbClr val="1F1F1F"/>
-                </a:solidFill>
-                <a:latin typeface="Calibri"/>
-              </a:rPr>
-              <a:t>•  Подтверждена гипотеза: квантильная регрессия даёт точный прогноз с адекватной калибровкой; снижение MAE на Δ weight 52% vs persistence</a:t>
-            </a:r>
-          </a:p>
-          <a:p>
-            <a:pPr algn="l">
-              <a:spcAft>
-                <a:spcPts val="800"/>
-              </a:spcAft>
-            </a:pPr>
-            <a:r>
-              <a:rPr sz="1800">
-                <a:solidFill>
-                  <a:srgbClr val="1F1F1F"/>
-                </a:solidFill>
-                <a:latin typeface="Calibri"/>
-              </a:rPr>
-              <a:t>•  Архитектура спроектирована с расчётом на отказоустойчивость: fallback на OLS-baseline при отсутствии ML-артефакта</a:t>
-            </a:r>
-          </a:p>
-        </p:txBody>
-      </p:sp>
-      <p:sp>
-        <p:nvSpPr>
-          <p:cNvPr id="5" name="TextBox 4"/>
+            <a:pPr algn="ctr"/>
+            <a:r>
+              <a:rPr sz="1200" b="0">
+                <a:solidFill>
+                  <a:srgbClr val="555555"/>
+                </a:solidFill>
+                <a:latin typeface="Calibri"/>
+              </a:rPr>
+              <a:t>Главный экран: прогресс веса и активность</a:t>
+            </a:r>
+          </a:p>
+        </p:txBody>
+      </p:sp>
+      <p:pic>
+        <p:nvPicPr>
+          <p:cNvPr id="6" name="Picture 5" descr="screen-05.png"/>
+          <p:cNvPicPr>
+            <a:picLocks noChangeAspect="1"/>
+          </p:cNvPicPr>
+          <p:nvPr/>
+        </p:nvPicPr>
+        <p:blipFill>
+          <a:blip r:embed="rId3"/>
+          <a:stretch>
+            <a:fillRect/>
+          </a:stretch>
+        </p:blipFill>
+        <p:spPr>
+          <a:xfrm>
+            <a:off x="4434687" y="1097280"/>
+            <a:ext cx="3322320" cy="4389120"/>
+          </a:xfrm>
+          <a:prstGeom prst="rect">
+            <a:avLst/>
+          </a:prstGeom>
+        </p:spPr>
+      </p:pic>
+      <p:sp>
+        <p:nvSpPr>
+          <p:cNvPr id="7" name="TextBox 6"/>
           <p:cNvSpPr txBox="1"/>
           <p:nvPr/>
         </p:nvSpPr>
         <p:spPr>
           <a:xfrm>
-            <a:off x="548640" y="6446520"/>
-            <a:ext cx="5486400" cy="274320"/>
+            <a:off x="4434687" y="5623560"/>
+            <a:ext cx="3322320" cy="548640"/>
           </a:xfrm>
           <a:prstGeom prst="rect">
             <a:avLst/>
@@ -4404,29 +4346,53 @@
           </a:bodyPr>
           <a:lstStyle/>
           <a:p>
-            <a:pPr algn="l"/>
-            <a:r>
-              <a:rPr sz="1000" b="0">
+            <a:pPr algn="ctr"/>
+            <a:r>
+              <a:rPr sz="1200" b="0">
                 <a:solidFill>
                   <a:srgbClr val="555555"/>
                 </a:solidFill>
                 <a:latin typeface="Calibri"/>
               </a:rPr>
-              <a:t>Лапова М. И.  ·  ВКР 2026  ·  Fitness Tracker</a:t>
-            </a:r>
-          </a:p>
-        </p:txBody>
-      </p:sp>
-      <p:sp>
-        <p:nvSpPr>
-          <p:cNvPr id="6" name="TextBox 5"/>
+              <a:t>Лог тренировки: подходы, веса, прогрессия</a:t>
+            </a:r>
+          </a:p>
+        </p:txBody>
+      </p:sp>
+      <p:pic>
+        <p:nvPicPr>
+          <p:cNvPr id="8" name="Picture 7" descr="screen-01.png"/>
+          <p:cNvPicPr>
+            <a:picLocks noChangeAspect="1"/>
+          </p:cNvPicPr>
+          <p:nvPr/>
+        </p:nvPicPr>
+        <p:blipFill>
+          <a:blip r:embed="rId4"/>
+          <a:stretch>
+            <a:fillRect/>
+          </a:stretch>
+        </p:blipFill>
+        <p:spPr>
+          <a:xfrm>
+            <a:off x="8031327" y="1097280"/>
+            <a:ext cx="3322320" cy="4389120"/>
+          </a:xfrm>
+          <a:prstGeom prst="rect">
+            <a:avLst/>
+          </a:prstGeom>
+        </p:spPr>
+      </p:pic>
+      <p:sp>
+        <p:nvSpPr>
+          <p:cNvPr id="9" name="TextBox 8"/>
           <p:cNvSpPr txBox="1"/>
           <p:nvPr/>
         </p:nvSpPr>
         <p:spPr>
           <a:xfrm>
-            <a:off x="10515600" y="6446520"/>
-            <a:ext cx="1188720" cy="274320"/>
+            <a:off x="8031327" y="5623560"/>
+            <a:ext cx="3322320" cy="548640"/>
           </a:xfrm>
           <a:prstGeom prst="rect">
             <a:avLst/>
@@ -4439,6 +4405,76 @@
           </a:bodyPr>
           <a:lstStyle/>
           <a:p>
+            <a:pPr algn="ctr"/>
+            <a:r>
+              <a:rPr sz="1200" b="0">
+                <a:solidFill>
+                  <a:srgbClr val="555555"/>
+                </a:solidFill>
+                <a:latin typeface="Calibri"/>
+              </a:rPr>
+              <a:t>Регистрация и онбординг пользователя</a:t>
+            </a:r>
+          </a:p>
+        </p:txBody>
+      </p:sp>
+      <p:sp>
+        <p:nvSpPr>
+          <p:cNvPr id="10" name="TextBox 9"/>
+          <p:cNvSpPr txBox="1"/>
+          <p:nvPr/>
+        </p:nvSpPr>
+        <p:spPr>
+          <a:xfrm>
+            <a:off x="548640" y="6446520"/>
+            <a:ext cx="5486400" cy="274320"/>
+          </a:xfrm>
+          <a:prstGeom prst="rect">
+            <a:avLst/>
+          </a:prstGeom>
+          <a:noFill/>
+        </p:spPr>
+        <p:txBody>
+          <a:bodyPr wrap="square">
+            <a:spAutoFit/>
+          </a:bodyPr>
+          <a:lstStyle/>
+          <a:p>
+            <a:pPr algn="l"/>
+            <a:r>
+              <a:rPr sz="1000" b="0">
+                <a:solidFill>
+                  <a:srgbClr val="555555"/>
+                </a:solidFill>
+                <a:latin typeface="Calibri"/>
+              </a:rPr>
+              <a:t>Лапова М. И.  ·  ВКР 2026  ·  Fitness Tracker</a:t>
+            </a:r>
+          </a:p>
+        </p:txBody>
+      </p:sp>
+      <p:sp>
+        <p:nvSpPr>
+          <p:cNvPr id="11" name="TextBox 10"/>
+          <p:cNvSpPr txBox="1"/>
+          <p:nvPr/>
+        </p:nvSpPr>
+        <p:spPr>
+          <a:xfrm>
+            <a:off x="10515600" y="6446520"/>
+            <a:ext cx="1188720" cy="274320"/>
+          </a:xfrm>
+          <a:prstGeom prst="rect">
+            <a:avLst/>
+          </a:prstGeom>
+          <a:noFill/>
+        </p:spPr>
+        <p:txBody>
+          <a:bodyPr wrap="square">
+            <a:spAutoFit/>
+          </a:bodyPr>
+          <a:lstStyle/>
+          <a:p>
             <a:pPr algn="r"/>
             <a:r>
               <a:rPr sz="1000" b="0">
@@ -4447,7 +4483,7 @@
                 </a:solidFill>
                 <a:latin typeface="Calibri"/>
               </a:rPr>
-              <a:t>12 / 13</a:t>
+              <a:t>12 / 14</a:t>
             </a:r>
           </a:p>
         </p:txBody>
@@ -4472,6 +4508,275 @@
       <p:grpSpPr/>
       <p:sp>
         <p:nvSpPr>
+          <p:cNvPr id="2" name="TextBox 1"/>
+          <p:cNvSpPr txBox="1"/>
+          <p:nvPr/>
+        </p:nvSpPr>
+        <p:spPr>
+          <a:xfrm>
+            <a:off x="548640" y="274320"/>
+            <a:ext cx="10972800" cy="548640"/>
+          </a:xfrm>
+          <a:prstGeom prst="rect">
+            <a:avLst/>
+          </a:prstGeom>
+          <a:noFill/>
+        </p:spPr>
+        <p:txBody>
+          <a:bodyPr wrap="square">
+            <a:spAutoFit/>
+          </a:bodyPr>
+          <a:lstStyle/>
+          <a:p>
+            <a:pPr algn="l"/>
+            <a:r>
+              <a:rPr sz="2800" b="1">
+                <a:solidFill>
+                  <a:srgbClr val="1F1F1F"/>
+                </a:solidFill>
+                <a:latin typeface="Calibri"/>
+              </a:rPr>
+              <a:t>Выводы</a:t>
+            </a:r>
+          </a:p>
+        </p:txBody>
+      </p:sp>
+      <p:sp>
+        <p:nvSpPr>
+          <p:cNvPr id="3" name="Rectangle 2"/>
+          <p:cNvSpPr/>
+          <p:nvPr/>
+        </p:nvSpPr>
+        <p:spPr>
+          <a:xfrm>
+            <a:off x="548640" y="594360"/>
+            <a:ext cx="1097280" cy="54864"/>
+          </a:xfrm>
+          <a:prstGeom prst="rect">
+            <a:avLst/>
+          </a:prstGeom>
+          <a:solidFill>
+            <a:srgbClr val="7F0DF2"/>
+          </a:solidFill>
+          <a:ln>
+            <a:noFill/>
+          </a:ln>
+        </p:spPr>
+        <p:style>
+          <a:lnRef idx="1">
+            <a:schemeClr val="accent1"/>
+          </a:lnRef>
+          <a:fillRef idx="3">
+            <a:schemeClr val="accent1"/>
+          </a:fillRef>
+          <a:effectRef idx="2">
+            <a:schemeClr val="accent1"/>
+          </a:effectRef>
+          <a:fontRef idx="minor">
+            <a:schemeClr val="lt1"/>
+          </a:fontRef>
+        </p:style>
+        <p:txBody>
+          <a:bodyPr rtlCol="0" anchor="ctr"/>
+          <a:lstStyle/>
+          <a:p>
+            <a:pPr algn="ctr"/>
+          </a:p>
+        </p:txBody>
+      </p:sp>
+      <p:sp>
+        <p:nvSpPr>
+          <p:cNvPr id="4" name="TextBox 3"/>
+          <p:cNvSpPr txBox="1"/>
+          <p:nvPr/>
+        </p:nvSpPr>
+        <p:spPr>
+          <a:xfrm>
+            <a:off x="548640" y="1097280"/>
+            <a:ext cx="10972800" cy="5029200"/>
+          </a:xfrm>
+          <a:prstGeom prst="rect">
+            <a:avLst/>
+          </a:prstGeom>
+          <a:noFill/>
+        </p:spPr>
+        <p:txBody>
+          <a:bodyPr wrap="square">
+            <a:spAutoFit/>
+          </a:bodyPr>
+          <a:lstStyle/>
+          <a:p>
+            <a:pPr algn="l">
+              <a:spcAft>
+                <a:spcPts val="800"/>
+              </a:spcAft>
+            </a:pPr>
+            <a:r>
+              <a:rPr sz="1800">
+                <a:solidFill>
+                  <a:srgbClr val="1F1F1F"/>
+                </a:solidFill>
+                <a:latin typeface="Calibri"/>
+              </a:rPr>
+              <a:t>•  Реализовано кроссплатформенное PWA-приложение с end-to-end интеграцией ML-моделей в продакшен (FastAPI + Flutter)</a:t>
+            </a:r>
+          </a:p>
+          <a:p>
+            <a:pPr algn="l">
+              <a:spcAft>
+                <a:spcPts val="800"/>
+              </a:spcAft>
+            </a:pPr>
+            <a:r>
+              <a:rPr sz="1800">
+                <a:solidFill>
+                  <a:srgbClr val="1F1F1F"/>
+                </a:solidFill>
+                <a:latin typeface="Calibri"/>
+              </a:rPr>
+              <a:t>•  Обучены и сравнены 4 модели прогноза InBody; LightGBM quantile обеспечивает R²=0.73 на Δ weight и калиброванный 80%-CI (0.79)</a:t>
+            </a:r>
+          </a:p>
+          <a:p>
+            <a:pPr algn="l">
+              <a:spcAft>
+                <a:spcPts val="800"/>
+              </a:spcAft>
+            </a:pPr>
+            <a:r>
+              <a:rPr sz="1800">
+                <a:solidFill>
+                  <a:srgbClr val="1F1F1F"/>
+                </a:solidFill>
+                <a:latin typeface="Calibri"/>
+              </a:rPr>
+              <a:t>•  Реализован watcher-сервис автоматической адаптации плана по 6 условиям срабатывания, покрыт 19 тестами</a:t>
+            </a:r>
+          </a:p>
+          <a:p>
+            <a:pPr algn="l">
+              <a:spcAft>
+                <a:spcPts val="800"/>
+              </a:spcAft>
+            </a:pPr>
+            <a:r>
+              <a:rPr sz="1800">
+                <a:solidFill>
+                  <a:srgbClr val="1F1F1F"/>
+                </a:solidFill>
+                <a:latin typeface="Calibri"/>
+              </a:rPr>
+              <a:t>•  Подтверждена гипотеза: квантильная регрессия даёт точный прогноз с адекватной калибровкой; снижение MAE на Δ weight 52% vs persistence</a:t>
+            </a:r>
+          </a:p>
+          <a:p>
+            <a:pPr algn="l">
+              <a:spcAft>
+                <a:spcPts val="800"/>
+              </a:spcAft>
+            </a:pPr>
+            <a:r>
+              <a:rPr sz="1800">
+                <a:solidFill>
+                  <a:srgbClr val="1F1F1F"/>
+                </a:solidFill>
+                <a:latin typeface="Calibri"/>
+              </a:rPr>
+              <a:t>•  Архитектура спроектирована с расчётом на отказоустойчивость: fallback на OLS-baseline при отсутствии ML-артефакта</a:t>
+            </a:r>
+          </a:p>
+        </p:txBody>
+      </p:sp>
+      <p:sp>
+        <p:nvSpPr>
+          <p:cNvPr id="5" name="TextBox 4"/>
+          <p:cNvSpPr txBox="1"/>
+          <p:nvPr/>
+        </p:nvSpPr>
+        <p:spPr>
+          <a:xfrm>
+            <a:off x="548640" y="6446520"/>
+            <a:ext cx="5486400" cy="274320"/>
+          </a:xfrm>
+          <a:prstGeom prst="rect">
+            <a:avLst/>
+          </a:prstGeom>
+          <a:noFill/>
+        </p:spPr>
+        <p:txBody>
+          <a:bodyPr wrap="square">
+            <a:spAutoFit/>
+          </a:bodyPr>
+          <a:lstStyle/>
+          <a:p>
+            <a:pPr algn="l"/>
+            <a:r>
+              <a:rPr sz="1000" b="0">
+                <a:solidFill>
+                  <a:srgbClr val="555555"/>
+                </a:solidFill>
+                <a:latin typeface="Calibri"/>
+              </a:rPr>
+              <a:t>Лапова М. И.  ·  ВКР 2026  ·  Fitness Tracker</a:t>
+            </a:r>
+          </a:p>
+        </p:txBody>
+      </p:sp>
+      <p:sp>
+        <p:nvSpPr>
+          <p:cNvPr id="6" name="TextBox 5"/>
+          <p:cNvSpPr txBox="1"/>
+          <p:nvPr/>
+        </p:nvSpPr>
+        <p:spPr>
+          <a:xfrm>
+            <a:off x="10515600" y="6446520"/>
+            <a:ext cx="1188720" cy="274320"/>
+          </a:xfrm>
+          <a:prstGeom prst="rect">
+            <a:avLst/>
+          </a:prstGeom>
+          <a:noFill/>
+        </p:spPr>
+        <p:txBody>
+          <a:bodyPr wrap="square">
+            <a:spAutoFit/>
+          </a:bodyPr>
+          <a:lstStyle/>
+          <a:p>
+            <a:pPr algn="r"/>
+            <a:r>
+              <a:rPr sz="1000" b="0">
+                <a:solidFill>
+                  <a:srgbClr val="555555"/>
+                </a:solidFill>
+                <a:latin typeface="Calibri"/>
+              </a:rPr>
+              <a:t>13 / 14</a:t>
+            </a:r>
+          </a:p>
+        </p:txBody>
+      </p:sp>
+    </p:spTree>
+  </p:cSld>
+  <p:clrMapOvr>
+    <a:masterClrMapping/>
+  </p:clrMapOvr>
+</p:sld>
+</file>
+
+<file path=ppt/slides/slide14.xml><?xml version="1.0" encoding="utf-8"?>
+<p:sld xmlns:a="http://schemas.openxmlformats.org/drawingml/2006/main" xmlns:p="http://schemas.openxmlformats.org/presentationml/2006/main" xmlns:r="http://schemas.openxmlformats.org/officeDocument/2006/relationships">
+  <p:cSld>
+    <p:spTree>
+      <p:nvGrpSpPr>
+        <p:cNvPr id="1" name=""/>
+        <p:cNvGrpSpPr/>
+        <p:nvPr/>
+      </p:nvGrpSpPr>
+      <p:grpSpPr/>
+      <p:sp>
+        <p:nvSpPr>
           <p:cNvPr id="2" name="Rectangle 1"/>
           <p:cNvSpPr/>
           <p:nvPr/>
@@ -4979,7 +5284,7 @@
                 </a:solidFill>
                 <a:latin typeface="Calibri"/>
               </a:rPr>
-              <a:t>2 / 13</a:t>
+              <a:t>2 / 14</a:t>
             </a:r>
           </a:p>
         </p:txBody>
@@ -5369,7 +5674,7 @@
                 </a:solidFill>
                 <a:latin typeface="Calibri"/>
               </a:rPr>
-              <a:t>3 / 13</a:t>
+              <a:t>3 / 14</a:t>
             </a:r>
           </a:p>
         </p:txBody>
@@ -5827,7 +6132,7 @@
                 </a:solidFill>
                 <a:latin typeface="Calibri"/>
               </a:rPr>
-              <a:t>4 / 13</a:t>
+              <a:t>4 / 14</a:t>
             </a:r>
           </a:p>
         </p:txBody>
@@ -6131,7 +6436,7 @@
                 </a:solidFill>
                 <a:latin typeface="Calibri"/>
               </a:rPr>
-              <a:t>5 / 13</a:t>
+              <a:t>5 / 14</a:t>
             </a:r>
           </a:p>
         </p:txBody>
@@ -6451,7 +6756,7 @@
                 </a:solidFill>
                 <a:latin typeface="Calibri"/>
               </a:rPr>
-              <a:t>6 / 13</a:t>
+              <a:t>6 / 14</a:t>
             </a:r>
           </a:p>
         </p:txBody>
@@ -6676,7 +6981,7 @@
                 </a:solidFill>
                 <a:latin typeface="Calibri"/>
               </a:rPr>
-              <a:t>7 / 13</a:t>
+              <a:t>7 / 14</a:t>
             </a:r>
           </a:p>
         </p:txBody>
@@ -6729,7 +7034,7 @@
                 </a:solidFill>
                 <a:latin typeface="Calibri"/>
               </a:rPr>
-              <a:t>Что внутри модели: feature importance</a:t>
+              <a:t>Метрики моделей: точечная оценка Δweight</a:t>
             </a:r>
           </a:p>
         </p:txBody>
@@ -6777,30 +7082,560 @@
           </a:p>
         </p:txBody>
       </p:sp>
-      <p:pic>
-        <p:nvPicPr>
-          <p:cNvPr id="4" name="Picture 3" descr="image.png"/>
-          <p:cNvPicPr>
-            <a:picLocks noChangeAspect="1"/>
-          </p:cNvPicPr>
-          <p:nvPr/>
-        </p:nvPicPr>
-        <p:blipFill>
-          <a:blip r:embed="rId2"/>
-          <a:stretch>
-            <a:fillRect/>
-          </a:stretch>
-        </p:blipFill>
-        <p:spPr>
-          <a:xfrm>
-            <a:off x="1097280" y="1005840"/>
-            <a:ext cx="10058400" cy="5184873"/>
-          </a:xfrm>
-          <a:prstGeom prst="rect">
-            <a:avLst/>
-          </a:prstGeom>
-        </p:spPr>
-      </p:pic>
+      <p:graphicFrame>
+        <p:nvGraphicFramePr>
+          <p:cNvPr id="4" name="Table 3"/>
+          <p:cNvGraphicFramePr>
+            <a:graphicFrameLocks noGrp="1"/>
+          </p:cNvGraphicFramePr>
+          <p:nvPr/>
+        </p:nvGraphicFramePr>
+        <p:xfrm>
+          <a:off x="838047" y="1280160"/>
+          <a:ext cx="10515600" cy="2468880"/>
+        </p:xfrm>
+        <a:graphic>
+          <a:graphicData uri="http://schemas.openxmlformats.org/drawingml/2006/table">
+            <a:tbl>
+              <a:tblPr firstRow="1" bandRow="1">
+                <a:tableStyleId>{5C22544A-7EE6-4342-B048-85BDC9FD1C3A}</a:tableStyleId>
+              </a:tblPr>
+              <a:tblGrid>
+                <a:gridCol w="2103120"/>
+                <a:gridCol w="2103120"/>
+                <a:gridCol w="2103120"/>
+                <a:gridCol w="2103120"/>
+                <a:gridCol w="2103120"/>
+              </a:tblGrid>
+              <a:tr h="493776">
+                <a:tc>
+                  <a:txBody>
+                    <a:bodyPr/>
+                    <a:lstStyle/>
+                    <a:p>
+                      <a:pPr algn="ctr"/>
+                      <a:r>
+                        <a:rPr sz="1400" b="1">
+                          <a:solidFill>
+                            <a:srgbClr val="FFFFFF"/>
+                          </a:solidFill>
+                          <a:latin typeface="Calibri"/>
+                        </a:rPr>
+                        <a:t>Модель</a:t>
+                      </a:r>
+                    </a:p>
+                  </a:txBody>
+                  <a:tcPr>
+                    <a:solidFill>
+                      <a:srgbClr val="7F0DF2"/>
+                    </a:solidFill>
+                  </a:tcPr>
+                </a:tc>
+                <a:tc>
+                  <a:txBody>
+                    <a:bodyPr/>
+                    <a:lstStyle/>
+                    <a:p>
+                      <a:pPr algn="ctr"/>
+                      <a:r>
+                        <a:rPr sz="1400" b="1">
+                          <a:solidFill>
+                            <a:srgbClr val="FFFFFF"/>
+                          </a:solidFill>
+                          <a:latin typeface="Calibri"/>
+                        </a:rPr>
+                        <a:t>MAE, кг</a:t>
+                      </a:r>
+                    </a:p>
+                  </a:txBody>
+                  <a:tcPr>
+                    <a:solidFill>
+                      <a:srgbClr val="7F0DF2"/>
+                    </a:solidFill>
+                  </a:tcPr>
+                </a:tc>
+                <a:tc>
+                  <a:txBody>
+                    <a:bodyPr/>
+                    <a:lstStyle/>
+                    <a:p>
+                      <a:pPr algn="ctr"/>
+                      <a:r>
+                        <a:rPr sz="1400" b="1">
+                          <a:solidFill>
+                            <a:srgbClr val="FFFFFF"/>
+                          </a:solidFill>
+                          <a:latin typeface="Calibri"/>
+                        </a:rPr>
+                        <a:t>RMSE, кг</a:t>
+                      </a:r>
+                    </a:p>
+                  </a:txBody>
+                  <a:tcPr>
+                    <a:solidFill>
+                      <a:srgbClr val="7F0DF2"/>
+                    </a:solidFill>
+                  </a:tcPr>
+                </a:tc>
+                <a:tc>
+                  <a:txBody>
+                    <a:bodyPr/>
+                    <a:lstStyle/>
+                    <a:p>
+                      <a:pPr algn="ctr"/>
+                      <a:r>
+                        <a:rPr sz="1400" b="1">
+                          <a:solidFill>
+                            <a:srgbClr val="FFFFFF"/>
+                          </a:solidFill>
+                          <a:latin typeface="Calibri"/>
+                        </a:rPr>
+                        <a:t>R²</a:t>
+                      </a:r>
+                    </a:p>
+                  </a:txBody>
+                  <a:tcPr>
+                    <a:solidFill>
+                      <a:srgbClr val="7F0DF2"/>
+                    </a:solidFill>
+                  </a:tcPr>
+                </a:tc>
+                <a:tc>
+                  <a:txBody>
+                    <a:bodyPr/>
+                    <a:lstStyle/>
+                    <a:p>
+                      <a:pPr algn="ctr"/>
+                      <a:r>
+                        <a:rPr sz="1400" b="1">
+                          <a:solidFill>
+                            <a:srgbClr val="FFFFFF"/>
+                          </a:solidFill>
+                          <a:latin typeface="Calibri"/>
+                        </a:rPr>
+                        <a:t>Δ vs baseline</a:t>
+                      </a:r>
+                    </a:p>
+                  </a:txBody>
+                  <a:tcPr>
+                    <a:solidFill>
+                      <a:srgbClr val="7F0DF2"/>
+                    </a:solidFill>
+                  </a:tcPr>
+                </a:tc>
+              </a:tr>
+              <a:tr h="493776">
+                <a:tc>
+                  <a:txBody>
+                    <a:bodyPr/>
+                    <a:lstStyle/>
+                    <a:p>
+                      <a:pPr algn="l"/>
+                      <a:r>
+                        <a:rPr sz="1300" b="0">
+                          <a:solidFill>
+                            <a:srgbClr val="1F1F1F"/>
+                          </a:solidFill>
+                          <a:latin typeface="Calibri"/>
+                        </a:rPr>
+                        <a:t>Persistence baseline</a:t>
+                      </a:r>
+                    </a:p>
+                  </a:txBody>
+                  <a:tcPr/>
+                </a:tc>
+                <a:tc>
+                  <a:txBody>
+                    <a:bodyPr/>
+                    <a:lstStyle/>
+                    <a:p>
+                      <a:pPr algn="ctr"/>
+                      <a:r>
+                        <a:rPr sz="1300" b="0">
+                          <a:solidFill>
+                            <a:srgbClr val="1F1F1F"/>
+                          </a:solidFill>
+                          <a:latin typeface="Calibri"/>
+                        </a:rPr>
+                        <a:t>0,325</a:t>
+                      </a:r>
+                    </a:p>
+                  </a:txBody>
+                  <a:tcPr/>
+                </a:tc>
+                <a:tc>
+                  <a:txBody>
+                    <a:bodyPr/>
+                    <a:lstStyle/>
+                    <a:p>
+                      <a:pPr algn="ctr"/>
+                      <a:r>
+                        <a:rPr sz="1300" b="0">
+                          <a:solidFill>
+                            <a:srgbClr val="1F1F1F"/>
+                          </a:solidFill>
+                          <a:latin typeface="Calibri"/>
+                        </a:rPr>
+                        <a:t>0,399</a:t>
+                      </a:r>
+                    </a:p>
+                  </a:txBody>
+                  <a:tcPr/>
+                </a:tc>
+                <a:tc>
+                  <a:txBody>
+                    <a:bodyPr/>
+                    <a:lstStyle/>
+                    <a:p>
+                      <a:pPr algn="ctr"/>
+                      <a:r>
+                        <a:rPr sz="1300" b="0">
+                          <a:solidFill>
+                            <a:srgbClr val="1F1F1F"/>
+                          </a:solidFill>
+                          <a:latin typeface="Calibri"/>
+                        </a:rPr>
+                        <a:t>−0,13</a:t>
+                      </a:r>
+                    </a:p>
+                  </a:txBody>
+                  <a:tcPr/>
+                </a:tc>
+                <a:tc>
+                  <a:txBody>
+                    <a:bodyPr/>
+                    <a:lstStyle/>
+                    <a:p>
+                      <a:pPr algn="ctr"/>
+                      <a:r>
+                        <a:rPr sz="1300" b="0">
+                          <a:solidFill>
+                            <a:srgbClr val="1F1F1F"/>
+                          </a:solidFill>
+                          <a:latin typeface="Calibri"/>
+                        </a:rPr>
+                        <a:t>—</a:t>
+                      </a:r>
+                    </a:p>
+                  </a:txBody>
+                  <a:tcPr/>
+                </a:tc>
+              </a:tr>
+              <a:tr h="493776">
+                <a:tc>
+                  <a:txBody>
+                    <a:bodyPr/>
+                    <a:lstStyle/>
+                    <a:p>
+                      <a:pPr algn="l"/>
+                      <a:r>
+                        <a:rPr sz="1300" b="0">
+                          <a:solidFill>
+                            <a:srgbClr val="1F1F1F"/>
+                          </a:solidFill>
+                          <a:latin typeface="Calibri"/>
+                        </a:rPr>
+                        <a:t>Ridge регрессия</a:t>
+                      </a:r>
+                    </a:p>
+                  </a:txBody>
+                  <a:tcPr/>
+                </a:tc>
+                <a:tc>
+                  <a:txBody>
+                    <a:bodyPr/>
+                    <a:lstStyle/>
+                    <a:p>
+                      <a:pPr algn="ctr"/>
+                      <a:r>
+                        <a:rPr sz="1300" b="0">
+                          <a:solidFill>
+                            <a:srgbClr val="1F1F1F"/>
+                          </a:solidFill>
+                          <a:latin typeface="Calibri"/>
+                        </a:rPr>
+                        <a:t>0,168</a:t>
+                      </a:r>
+                    </a:p>
+                  </a:txBody>
+                  <a:tcPr/>
+                </a:tc>
+                <a:tc>
+                  <a:txBody>
+                    <a:bodyPr/>
+                    <a:lstStyle/>
+                    <a:p>
+                      <a:pPr algn="ctr"/>
+                      <a:r>
+                        <a:rPr sz="1300" b="0">
+                          <a:solidFill>
+                            <a:srgbClr val="1F1F1F"/>
+                          </a:solidFill>
+                          <a:latin typeface="Calibri"/>
+                        </a:rPr>
+                        <a:t>0,210</a:t>
+                      </a:r>
+                    </a:p>
+                  </a:txBody>
+                  <a:tcPr/>
+                </a:tc>
+                <a:tc>
+                  <a:txBody>
+                    <a:bodyPr/>
+                    <a:lstStyle/>
+                    <a:p>
+                      <a:pPr algn="ctr"/>
+                      <a:r>
+                        <a:rPr sz="1300" b="0">
+                          <a:solidFill>
+                            <a:srgbClr val="1F1F1F"/>
+                          </a:solidFill>
+                          <a:latin typeface="Calibri"/>
+                        </a:rPr>
+                        <a:t>0,69</a:t>
+                      </a:r>
+                    </a:p>
+                  </a:txBody>
+                  <a:tcPr/>
+                </a:tc>
+                <a:tc>
+                  <a:txBody>
+                    <a:bodyPr/>
+                    <a:lstStyle/>
+                    <a:p>
+                      <a:pPr algn="ctr"/>
+                      <a:r>
+                        <a:rPr sz="1300" b="0">
+                          <a:solidFill>
+                            <a:srgbClr val="1F1F1F"/>
+                          </a:solidFill>
+                          <a:latin typeface="Calibri"/>
+                        </a:rPr>
+                        <a:t>−48%</a:t>
+                      </a:r>
+                    </a:p>
+                  </a:txBody>
+                  <a:tcPr/>
+                </a:tc>
+              </a:tr>
+              <a:tr h="493776">
+                <a:tc>
+                  <a:txBody>
+                    <a:bodyPr/>
+                    <a:lstStyle/>
+                    <a:p>
+                      <a:pPr algn="l"/>
+                      <a:r>
+                        <a:rPr sz="1300" b="1">
+                          <a:solidFill>
+                            <a:srgbClr val="1F1F1F"/>
+                          </a:solidFill>
+                          <a:latin typeface="Calibri"/>
+                        </a:rPr>
+                        <a:t>LightGBM (квантильная)</a:t>
+                      </a:r>
+                    </a:p>
+                  </a:txBody>
+                  <a:tcPr>
+                    <a:solidFill>
+                      <a:srgbClr val="F3E8FF"/>
+                    </a:solidFill>
+                  </a:tcPr>
+                </a:tc>
+                <a:tc>
+                  <a:txBody>
+                    <a:bodyPr/>
+                    <a:lstStyle/>
+                    <a:p>
+                      <a:pPr algn="ctr"/>
+                      <a:r>
+                        <a:rPr sz="1300" b="1">
+                          <a:solidFill>
+                            <a:srgbClr val="1F1F1F"/>
+                          </a:solidFill>
+                          <a:latin typeface="Calibri"/>
+                        </a:rPr>
+                        <a:t>0,156</a:t>
+                      </a:r>
+                    </a:p>
+                  </a:txBody>
+                  <a:tcPr>
+                    <a:solidFill>
+                      <a:srgbClr val="F3E8FF"/>
+                    </a:solidFill>
+                  </a:tcPr>
+                </a:tc>
+                <a:tc>
+                  <a:txBody>
+                    <a:bodyPr/>
+                    <a:lstStyle/>
+                    <a:p>
+                      <a:pPr algn="ctr"/>
+                      <a:r>
+                        <a:rPr sz="1300" b="1">
+                          <a:solidFill>
+                            <a:srgbClr val="1F1F1F"/>
+                          </a:solidFill>
+                          <a:latin typeface="Calibri"/>
+                        </a:rPr>
+                        <a:t>0,196</a:t>
+                      </a:r>
+                    </a:p>
+                  </a:txBody>
+                  <a:tcPr>
+                    <a:solidFill>
+                      <a:srgbClr val="F3E8FF"/>
+                    </a:solidFill>
+                  </a:tcPr>
+                </a:tc>
+                <a:tc>
+                  <a:txBody>
+                    <a:bodyPr/>
+                    <a:lstStyle/>
+                    <a:p>
+                      <a:pPr algn="ctr"/>
+                      <a:r>
+                        <a:rPr sz="1300" b="1">
+                          <a:solidFill>
+                            <a:srgbClr val="1F1F1F"/>
+                          </a:solidFill>
+                          <a:latin typeface="Calibri"/>
+                        </a:rPr>
+                        <a:t>0,73</a:t>
+                      </a:r>
+                    </a:p>
+                  </a:txBody>
+                  <a:tcPr>
+                    <a:solidFill>
+                      <a:srgbClr val="F3E8FF"/>
+                    </a:solidFill>
+                  </a:tcPr>
+                </a:tc>
+                <a:tc>
+                  <a:txBody>
+                    <a:bodyPr/>
+                    <a:lstStyle/>
+                    <a:p>
+                      <a:pPr algn="ctr"/>
+                      <a:r>
+                        <a:rPr sz="1300" b="1">
+                          <a:solidFill>
+                            <a:srgbClr val="1F1F1F"/>
+                          </a:solidFill>
+                          <a:latin typeface="Calibri"/>
+                        </a:rPr>
+                        <a:t>−52%</a:t>
+                      </a:r>
+                    </a:p>
+                  </a:txBody>
+                  <a:tcPr>
+                    <a:solidFill>
+                      <a:srgbClr val="F3E8FF"/>
+                    </a:solidFill>
+                  </a:tcPr>
+                </a:tc>
+              </a:tr>
+              <a:tr h="493776">
+                <a:tc>
+                  <a:txBody>
+                    <a:bodyPr/>
+                    <a:lstStyle/>
+                    <a:p>
+                      <a:pPr algn="l"/>
+                      <a:r>
+                        <a:rPr sz="1300" b="0">
+                          <a:solidFill>
+                            <a:srgbClr val="1F1F1F"/>
+                          </a:solidFill>
+                          <a:latin typeface="Calibri"/>
+                        </a:rPr>
+                        <a:t>MLP (PyTorch, наша)</a:t>
+                      </a:r>
+                    </a:p>
+                  </a:txBody>
+                  <a:tcPr/>
+                </a:tc>
+                <a:tc>
+                  <a:txBody>
+                    <a:bodyPr/>
+                    <a:lstStyle/>
+                    <a:p>
+                      <a:pPr algn="ctr"/>
+                      <a:r>
+                        <a:rPr sz="1300" b="0">
+                          <a:solidFill>
+                            <a:srgbClr val="1F1F1F"/>
+                          </a:solidFill>
+                          <a:latin typeface="Calibri"/>
+                        </a:rPr>
+                        <a:t>0,156</a:t>
+                      </a:r>
+                    </a:p>
+                  </a:txBody>
+                  <a:tcPr/>
+                </a:tc>
+                <a:tc>
+                  <a:txBody>
+                    <a:bodyPr/>
+                    <a:lstStyle/>
+                    <a:p>
+                      <a:pPr algn="ctr"/>
+                      <a:r>
+                        <a:rPr sz="1300" b="0">
+                          <a:solidFill>
+                            <a:srgbClr val="1F1F1F"/>
+                          </a:solidFill>
+                          <a:latin typeface="Calibri"/>
+                        </a:rPr>
+                        <a:t>0,196</a:t>
+                      </a:r>
+                    </a:p>
+                  </a:txBody>
+                  <a:tcPr/>
+                </a:tc>
+                <a:tc>
+                  <a:txBody>
+                    <a:bodyPr/>
+                    <a:lstStyle/>
+                    <a:p>
+                      <a:pPr algn="ctr"/>
+                      <a:r>
+                        <a:rPr sz="1300" b="0">
+                          <a:solidFill>
+                            <a:srgbClr val="1F1F1F"/>
+                          </a:solidFill>
+                          <a:latin typeface="Calibri"/>
+                        </a:rPr>
+                        <a:t>0,73</a:t>
+                      </a:r>
+                    </a:p>
+                  </a:txBody>
+                  <a:tcPr/>
+                </a:tc>
+                <a:tc>
+                  <a:txBody>
+                    <a:bodyPr/>
+                    <a:lstStyle/>
+                    <a:p>
+                      <a:pPr algn="ctr"/>
+                      <a:r>
+                        <a:rPr sz="1300" b="0">
+                          <a:solidFill>
+                            <a:srgbClr val="1F1F1F"/>
+                          </a:solidFill>
+                          <a:latin typeface="Calibri"/>
+                        </a:rPr>
+                        <a:t>−52%</a:t>
+                      </a:r>
+                    </a:p>
+                  </a:txBody>
+                  <a:tcPr/>
+                </a:tc>
+              </a:tr>
+            </a:tbl>
+          </a:graphicData>
+        </a:graphic>
+      </p:graphicFrame>
       <p:sp>
         <p:nvSpPr>
           <p:cNvPr id="5" name="TextBox 4"/>
@@ -6809,8 +7644,8 @@
         </p:nvSpPr>
         <p:spPr>
           <a:xfrm>
-            <a:off x="548640" y="5852160"/>
-            <a:ext cx="10972800" cy="457200"/>
+            <a:off x="548640" y="4023359"/>
+            <a:ext cx="10972800" cy="640080"/>
           </a:xfrm>
           <a:prstGeom prst="rect">
             <a:avLst/>
@@ -6825,13 +7660,13 @@
           <a:p>
             <a:pPr algn="ctr"/>
             <a:r>
-              <a:rPr sz="1400" b="0">
+              <a:rPr sz="1300" b="0">
                 <a:solidFill>
                   <a:srgbClr val="555555"/>
                 </a:solidFill>
                 <a:latin typeface="Calibri"/>
               </a:rPr>
-              <a:t>Главный сигнал — цель пользователя (goal_weight_loss); следом — BMI. Это согласуется с физиологией: при сознательном дефиците калорий человек теряет вес независимо от исходных параметров.</a:t>
+              <a:t>LightGBM и MLP сходятся к близкой точности; LightGBM выбран в прод за скорость и интерпретируемость. Калибровка CI80: 0,78–0,80.</a:t>
             </a:r>
           </a:p>
         </p:txBody>
@@ -6901,7 +7736,7 @@
                 </a:solidFill>
                 <a:latin typeface="Calibri"/>
               </a:rPr>
-              <a:t>8 / 13</a:t>
+              <a:t>8 / 14</a:t>
             </a:r>
           </a:p>
         </p:txBody>
@@ -6954,7 +7789,7 @@
                 </a:solidFill>
                 <a:latin typeface="Calibri"/>
               </a:rPr>
-              <a:t>Watcher-сервис адаптации плана</a:t>
+              <a:t>Что внутри модели: feature importance</a:t>
             </a:r>
           </a:p>
         </p:txBody>
@@ -7002,16 +7837,40 @@
           </a:p>
         </p:txBody>
       </p:sp>
-      <p:sp>
-        <p:nvSpPr>
-          <p:cNvPr id="4" name="TextBox 3"/>
+      <p:pic>
+        <p:nvPicPr>
+          <p:cNvPr id="4" name="Picture 3" descr="image.png"/>
+          <p:cNvPicPr>
+            <a:picLocks noChangeAspect="1"/>
+          </p:cNvPicPr>
+          <p:nvPr/>
+        </p:nvPicPr>
+        <p:blipFill>
+          <a:blip r:embed="rId2"/>
+          <a:stretch>
+            <a:fillRect/>
+          </a:stretch>
+        </p:blipFill>
+        <p:spPr>
+          <a:xfrm>
+            <a:off x="1097280" y="1005840"/>
+            <a:ext cx="10058400" cy="5184873"/>
+          </a:xfrm>
+          <a:prstGeom prst="rect">
+            <a:avLst/>
+          </a:prstGeom>
+        </p:spPr>
+      </p:pic>
+      <p:sp>
+        <p:nvSpPr>
+          <p:cNvPr id="5" name="TextBox 4"/>
           <p:cNvSpPr txBox="1"/>
           <p:nvPr/>
         </p:nvSpPr>
         <p:spPr>
           <a:xfrm>
-            <a:off x="548640" y="1005840"/>
-            <a:ext cx="10972800" cy="731520"/>
+            <a:off x="548640" y="5852160"/>
+            <a:ext cx="10972800" cy="457200"/>
           </a:xfrm>
           <a:prstGeom prst="rect">
             <a:avLst/>
@@ -7024,29 +7883,29 @@
           </a:bodyPr>
           <a:lstStyle/>
           <a:p>
-            <a:pPr algn="l"/>
-            <a:r>
-              <a:rPr sz="1800" b="0">
-                <a:solidFill>
-                  <a:srgbClr val="1F1F1F"/>
-                </a:solidFill>
-                <a:latin typeface="Calibri"/>
-              </a:rPr>
-              <a:t>Детерминированный сервис, реагирующий на изменения профиля и истории тренировок без участия пользователя.</a:t>
-            </a:r>
-          </a:p>
-        </p:txBody>
-      </p:sp>
-      <p:sp>
-        <p:nvSpPr>
-          <p:cNvPr id="5" name="TextBox 4"/>
+            <a:pPr algn="ctr"/>
+            <a:r>
+              <a:rPr sz="1400" b="0">
+                <a:solidFill>
+                  <a:srgbClr val="555555"/>
+                </a:solidFill>
+                <a:latin typeface="Calibri"/>
+              </a:rPr>
+              <a:t>Главный сигнал — цель пользователя (goal_weight_loss); следом — BMI. Это согласуется с физиологией: при сознательном дефиците калорий человек теряет вес независимо от исходных параметров.</a:t>
+            </a:r>
+          </a:p>
+        </p:txBody>
+      </p:sp>
+      <p:sp>
+        <p:nvSpPr>
+          <p:cNvPr id="6" name="TextBox 5"/>
           <p:cNvSpPr txBox="1"/>
           <p:nvPr/>
         </p:nvSpPr>
         <p:spPr>
           <a:xfrm>
-            <a:off x="548640" y="2011680"/>
-            <a:ext cx="10972800" cy="4389120"/>
+            <a:off x="548640" y="6446520"/>
+            <a:ext cx="5486400" cy="274320"/>
           </a:xfrm>
           <a:prstGeom prst="rect">
             <a:avLst/>
@@ -7059,97 +7918,29 @@
           </a:bodyPr>
           <a:lstStyle/>
           <a:p>
-            <a:pPr algn="l">
-              <a:spcAft>
-                <a:spcPts val="800"/>
-              </a:spcAft>
-            </a:pPr>
-            <a:r>
-              <a:rPr sz="1700">
-                <a:solidFill>
-                  <a:srgbClr val="1F1F1F"/>
-                </a:solidFill>
-                <a:latin typeface="Calibri"/>
-              </a:rPr>
-              <a:t>•  6 условий срабатывания: изменение веса, цели, частоты, оборудования, окончание цикла, ручной запуск</a:t>
-            </a:r>
-          </a:p>
-          <a:p>
-            <a:pPr algn="l">
-              <a:spcAft>
-                <a:spcPts val="800"/>
-              </a:spcAft>
-            </a:pPr>
-            <a:r>
-              <a:rPr sz="1700">
-                <a:solidFill>
-                  <a:srgbClr val="1F1F1F"/>
-                </a:solidFill>
-                <a:latin typeface="Calibri"/>
-              </a:rPr>
-              <a:t>•  Architecture: pg-cron + watcher-функции в domain/-слое; идемпотентность по pending-событиям</a:t>
-            </a:r>
-          </a:p>
-          <a:p>
-            <a:pPr algn="l">
-              <a:spcAft>
-                <a:spcPts val="800"/>
-              </a:spcAft>
-            </a:pPr>
-            <a:r>
-              <a:rPr sz="1700">
-                <a:solidFill>
-                  <a:srgbClr val="1F1F1F"/>
-                </a:solidFill>
-                <a:latin typeface="Calibri"/>
-              </a:rPr>
-              <a:t>•  При срабатывании создаётся PlanRebuildEvent в БД; пересборка плана происходит асинхронно через BackgroundTasks</a:t>
-            </a:r>
-          </a:p>
-          <a:p>
-            <a:pPr algn="l">
-              <a:spcAft>
-                <a:spcPts val="800"/>
-              </a:spcAft>
-            </a:pPr>
-            <a:r>
-              <a:rPr sz="1700">
-                <a:solidFill>
-                  <a:srgbClr val="1F1F1F"/>
-                </a:solidFill>
-                <a:latin typeface="Calibri"/>
-              </a:rPr>
-              <a:t>•  Покрытие тестами: 8 модульных + 11 интеграционных, включая race-conditions между триггерами</a:t>
-            </a:r>
-          </a:p>
-          <a:p>
-            <a:pPr algn="l">
-              <a:spcAft>
-                <a:spcPts val="800"/>
-              </a:spcAft>
-            </a:pPr>
-            <a:r>
-              <a:rPr sz="1700">
-                <a:solidFill>
-                  <a:srgbClr val="1F1F1F"/>
-                </a:solidFill>
-                <a:latin typeface="Calibri"/>
-              </a:rPr>
-              <a:t>•  Гарантия консистентности: одно активное событие на пользователя (partial unique index)</a:t>
-            </a:r>
-          </a:p>
-        </p:txBody>
-      </p:sp>
-      <p:sp>
-        <p:nvSpPr>
-          <p:cNvPr id="6" name="TextBox 5"/>
+            <a:pPr algn="l"/>
+            <a:r>
+              <a:rPr sz="1000" b="0">
+                <a:solidFill>
+                  <a:srgbClr val="555555"/>
+                </a:solidFill>
+                <a:latin typeface="Calibri"/>
+              </a:rPr>
+              <a:t>Лапова М. И.  ·  ВКР 2026  ·  Fitness Tracker</a:t>
+            </a:r>
+          </a:p>
+        </p:txBody>
+      </p:sp>
+      <p:sp>
+        <p:nvSpPr>
+          <p:cNvPr id="7" name="TextBox 6"/>
           <p:cNvSpPr txBox="1"/>
           <p:nvPr/>
         </p:nvSpPr>
         <p:spPr>
           <a:xfrm>
-            <a:off x="548640" y="6446520"/>
-            <a:ext cx="5486400" cy="274320"/>
+            <a:off x="10515600" y="6446520"/>
+            <a:ext cx="1188720" cy="274320"/>
           </a:xfrm>
           <a:prstGeom prst="rect">
             <a:avLst/>
@@ -7162,7 +7953,7 @@
           </a:bodyPr>
           <a:lstStyle/>
           <a:p>
-            <a:pPr algn="l"/>
+            <a:pPr algn="r"/>
             <a:r>
               <a:rPr sz="1000" b="0">
                 <a:solidFill>
@@ -7170,42 +7961,7 @@
                 </a:solidFill>
                 <a:latin typeface="Calibri"/>
               </a:rPr>
-              <a:t>Лапова М. И.  ·  ВКР 2026  ·  Fitness Tracker</a:t>
-            </a:r>
-          </a:p>
-        </p:txBody>
-      </p:sp>
-      <p:sp>
-        <p:nvSpPr>
-          <p:cNvPr id="7" name="TextBox 6"/>
-          <p:cNvSpPr txBox="1"/>
-          <p:nvPr/>
-        </p:nvSpPr>
-        <p:spPr>
-          <a:xfrm>
-            <a:off x="10515600" y="6446520"/>
-            <a:ext cx="1188720" cy="274320"/>
-          </a:xfrm>
-          <a:prstGeom prst="rect">
-            <a:avLst/>
-          </a:prstGeom>
-          <a:noFill/>
-        </p:spPr>
-        <p:txBody>
-          <a:bodyPr wrap="square">
-            <a:spAutoFit/>
-          </a:bodyPr>
-          <a:lstStyle/>
-          <a:p>
-            <a:pPr algn="r"/>
-            <a:r>
-              <a:rPr sz="1000" b="0">
-                <a:solidFill>
-                  <a:srgbClr val="555555"/>
-                </a:solidFill>
-                <a:latin typeface="Calibri"/>
-              </a:rPr>
-              <a:t>9 / 13</a:t>
+              <a:t>9 / 14</a:t>
             </a:r>
           </a:p>
         </p:txBody>

--- a/docs/thesis/presentation-maria.pptx
+++ b/docs/thesis/presentation-maria.pptx
@@ -3301,7 +3301,7 @@
         <p:spPr>
           <a:xfrm>
             <a:off x="548640" y="2103120"/>
-            <a:ext cx="10972800" cy="365760"/>
+            <a:ext cx="10972800" cy="457200"/>
           </a:xfrm>
           <a:prstGeom prst="rect">
             <a:avLst/>
@@ -3322,7 +3322,7 @@
                 </a:solidFill>
                 <a:latin typeface="Calibri"/>
               </a:rPr>
-              <a:t>«Прикладная математика и информатика» · магистратура</a:t>
+              <a:t>«Прикладная математика и информатика» · магистерская программа «Глубокое обучение и генеративный искусственный интеллект»</a:t>
             </a:r>
           </a:p>
         </p:txBody>
@@ -3427,7 +3427,7 @@
                 </a:solidFill>
                 <a:latin typeface="Calibri"/>
               </a:rPr>
-              <a:t>Лапова Мария Игоревна, гр. МММ-401-О-03</a:t>
+              <a:t>Лапова Мария Сергеевна, гр. МММ-401-О-03</a:t>
             </a:r>
           </a:p>
         </p:txBody>
@@ -3497,7 +3497,8 @@
                 </a:solidFill>
                 <a:latin typeface="Calibri"/>
               </a:rPr>
-              <a:t>Симанчев Р. Ю., канд. физ.-мат. наук, доцент</a:t>
+              <a:t>Агафонов А. Л.,
+доцент, каф. компьютерной математики и программного обеспечения</a:t>
             </a:r>
           </a:p>
         </p:txBody>
@@ -3801,7 +3802,7 @@
                 </a:solidFill>
                 <a:latin typeface="Calibri"/>
               </a:rPr>
-              <a:t>Лапова М. И.  ·  ВКР 2026  ·  Fitness Tracker</a:t>
+              <a:t>Лапова М. С.  ·  ВКР 2026  ·  Fitness Tracker</a:t>
             </a:r>
           </a:p>
         </p:txBody>
@@ -4105,7 +4106,7 @@
                 </a:solidFill>
                 <a:latin typeface="Calibri"/>
               </a:rPr>
-              <a:t>Лапова М. И.  ·  ВКР 2026  ·  Fitness Tracker</a:t>
+              <a:t>Лапова М. С.  ·  ВКР 2026  ·  Fitness Tracker</a:t>
             </a:r>
           </a:p>
         </p:txBody>
@@ -4448,7 +4449,7 @@
                 </a:solidFill>
                 <a:latin typeface="Calibri"/>
               </a:rPr>
-              <a:t>Лапова М. И.  ·  ВКР 2026  ·  Fitness Tracker</a:t>
+              <a:t>Лапова М. С.  ·  ВКР 2026  ·  Fitness Tracker</a:t>
             </a:r>
           </a:p>
         </p:txBody>
@@ -4717,7 +4718,7 @@
                 </a:solidFill>
                 <a:latin typeface="Calibri"/>
               </a:rPr>
-              <a:t>Лапова М. И.  ·  ВКР 2026  ·  Fitness Tracker</a:t>
+              <a:t>Лапова М. С.  ·  ВКР 2026  ·  Fitness Tracker</a:t>
             </a:r>
           </a:p>
         </p:txBody>
@@ -4961,7 +4962,7 @@
                 </a:solidFill>
                 <a:latin typeface="Calibri"/>
               </a:rPr>
-              <a:t>Лапова Мария Игоревна · группа МММ-401-О-03</a:t>
+              <a:t>Лапова Мария Сергеевна · группа МММ-401-О-03</a:t>
             </a:r>
           </a:p>
         </p:txBody>
@@ -5249,7 +5250,7 @@
                 </a:solidFill>
                 <a:latin typeface="Calibri"/>
               </a:rPr>
-              <a:t>Лапова М. И.  ·  ВКР 2026  ·  Fitness Tracker</a:t>
+              <a:t>Лапова М. С.  ·  ВКР 2026  ·  Fitness Tracker</a:t>
             </a:r>
           </a:p>
         </p:txBody>
@@ -5639,7 +5640,7 @@
                 </a:solidFill>
                 <a:latin typeface="Calibri"/>
               </a:rPr>
-              <a:t>Лапова М. И.  ·  ВКР 2026  ·  Fitness Tracker</a:t>
+              <a:t>Лапова М. С.  ·  ВКР 2026  ·  Fitness Tracker</a:t>
             </a:r>
           </a:p>
         </p:txBody>
@@ -6097,7 +6098,7 @@
                 </a:solidFill>
                 <a:latin typeface="Calibri"/>
               </a:rPr>
-              <a:t>Лапова М. И.  ·  ВКР 2026  ·  Fitness Tracker</a:t>
+              <a:t>Лапова М. С.  ·  ВКР 2026  ·  Fitness Tracker</a:t>
             </a:r>
           </a:p>
         </p:txBody>
@@ -6401,7 +6402,7 @@
                 </a:solidFill>
                 <a:latin typeface="Calibri"/>
               </a:rPr>
-              <a:t>Лапова М. И.  ·  ВКР 2026  ·  Fitness Tracker</a:t>
+              <a:t>Лапова М. С.  ·  ВКР 2026  ·  Fitness Tracker</a:t>
             </a:r>
           </a:p>
         </p:txBody>
@@ -6721,7 +6722,7 @@
                 </a:solidFill>
                 <a:latin typeface="Calibri"/>
               </a:rPr>
-              <a:t>Лапова М. И.  ·  ВКР 2026  ·  Fitness Tracker</a:t>
+              <a:t>Лапова М. С.  ·  ВКР 2026  ·  Fitness Tracker</a:t>
             </a:r>
           </a:p>
         </p:txBody>
@@ -6946,7 +6947,7 @@
                 </a:solidFill>
                 <a:latin typeface="Calibri"/>
               </a:rPr>
-              <a:t>Лапова М. И.  ·  ВКР 2026  ·  Fitness Tracker</a:t>
+              <a:t>Лапова М. С.  ·  ВКР 2026  ·  Fitness Tracker</a:t>
             </a:r>
           </a:p>
         </p:txBody>
@@ -7701,7 +7702,7 @@
                 </a:solidFill>
                 <a:latin typeface="Calibri"/>
               </a:rPr>
-              <a:t>Лапова М. И.  ·  ВКР 2026  ·  Fitness Tracker</a:t>
+              <a:t>Лапова М. С.  ·  ВКР 2026  ·  Fitness Tracker</a:t>
             </a:r>
           </a:p>
         </p:txBody>
@@ -7926,7 +7927,7 @@
                 </a:solidFill>
                 <a:latin typeface="Calibri"/>
               </a:rPr>
-              <a:t>Лапова М. И.  ·  ВКР 2026  ·  Fitness Tracker</a:t>
+              <a:t>Лапова М. С.  ·  ВКР 2026  ·  Fitness Tracker</a:t>
             </a:r>
           </a:p>
         </p:txBody>

--- a/docs/thesis/presentation-maria.pptx
+++ b/docs/thesis/presentation-maria.pptx
@@ -19,6 +19,9 @@
     <p:sldId id="267" r:id="rId18"/>
     <p:sldId id="268" r:id="rId19"/>
     <p:sldId id="269" r:id="rId20"/>
+    <p:sldId id="270" r:id="rId21"/>
+    <p:sldId id="271" r:id="rId22"/>
+    <p:sldId id="272" r:id="rId23"/>
   </p:sldIdLst>
   <p:sldSz cx="12191695" cy="6858000" type="screen4x3"/>
   <p:notesSz cx="6858000" cy="9144000"/>
@@ -3103,100 +3106,14 @@
       <p:grpSpPr/>
       <p:sp>
         <p:nvSpPr>
-          <p:cNvPr id="2" name="Rectangle 1"/>
-          <p:cNvSpPr/>
-          <p:nvPr/>
-        </p:nvSpPr>
-        <p:spPr>
-          <a:xfrm>
-            <a:off x="0" y="0"/>
-            <a:ext cx="12191695" cy="6858000"/>
-          </a:xfrm>
-          <a:prstGeom prst="rect">
-            <a:avLst/>
-          </a:prstGeom>
-          <a:solidFill>
-            <a:srgbClr val="141B2D"/>
-          </a:solidFill>
-          <a:ln>
-            <a:noFill/>
-          </a:ln>
-        </p:spPr>
-        <p:style>
-          <a:lnRef idx="1">
-            <a:schemeClr val="accent1"/>
-          </a:lnRef>
-          <a:fillRef idx="3">
-            <a:schemeClr val="accent1"/>
-          </a:fillRef>
-          <a:effectRef idx="2">
-            <a:schemeClr val="accent1"/>
-          </a:effectRef>
-          <a:fontRef idx="minor">
-            <a:schemeClr val="lt1"/>
-          </a:fontRef>
-        </p:style>
-        <p:txBody>
-          <a:bodyPr rtlCol="0" anchor="ctr"/>
-          <a:lstStyle/>
-          <a:p>
-            <a:pPr algn="ctr"/>
-          </a:p>
-        </p:txBody>
-      </p:sp>
-      <p:sp>
-        <p:nvSpPr>
-          <p:cNvPr id="3" name="Rectangle 2"/>
-          <p:cNvSpPr/>
-          <p:nvPr/>
-        </p:nvSpPr>
-        <p:spPr>
-          <a:xfrm>
-            <a:off x="548640" y="3017520"/>
-            <a:ext cx="1371600" cy="73152"/>
-          </a:xfrm>
-          <a:prstGeom prst="rect">
-            <a:avLst/>
-          </a:prstGeom>
-          <a:solidFill>
-            <a:srgbClr val="7F0DF2"/>
-          </a:solidFill>
-          <a:ln>
-            <a:noFill/>
-          </a:ln>
-        </p:spPr>
-        <p:style>
-          <a:lnRef idx="1">
-            <a:schemeClr val="accent1"/>
-          </a:lnRef>
-          <a:fillRef idx="3">
-            <a:schemeClr val="accent1"/>
-          </a:fillRef>
-          <a:effectRef idx="2">
-            <a:schemeClr val="accent1"/>
-          </a:effectRef>
-          <a:fontRef idx="minor">
-            <a:schemeClr val="lt1"/>
-          </a:fontRef>
-        </p:style>
-        <p:txBody>
-          <a:bodyPr rtlCol="0" anchor="ctr"/>
-          <a:lstStyle/>
-          <a:p>
-            <a:pPr algn="ctr"/>
-          </a:p>
-        </p:txBody>
-      </p:sp>
-      <p:sp>
-        <p:nvSpPr>
-          <p:cNvPr id="4" name="TextBox 3"/>
+          <p:cNvPr id="2" name="TextBox 1"/>
           <p:cNvSpPr txBox="1"/>
           <p:nvPr/>
         </p:nvSpPr>
         <p:spPr>
           <a:xfrm>
-            <a:off x="548640" y="640080"/>
-            <a:ext cx="10972800" cy="457200"/>
+            <a:off x="548640" y="320040"/>
+            <a:ext cx="11091672" cy="320040"/>
           </a:xfrm>
           <a:prstGeom prst="rect">
             <a:avLst/>
@@ -3209,29 +3126,29 @@
           </a:bodyPr>
           <a:lstStyle/>
           <a:p>
-            <a:pPr algn="l"/>
-            <a:r>
-              <a:rPr sz="1400" b="0">
-                <a:solidFill>
-                  <a:srgbClr val="FFFFFF"/>
-                </a:solidFill>
-                <a:latin typeface="Calibri"/>
-              </a:rPr>
-              <a:t>Омский государственный университет им. Ф. М. Достоевского</a:t>
-            </a:r>
-          </a:p>
-        </p:txBody>
-      </p:sp>
-      <p:sp>
-        <p:nvSpPr>
-          <p:cNvPr id="5" name="TextBox 4"/>
+            <a:pPr algn="ctr"/>
+            <a:r>
+              <a:rPr sz="1400" b="1">
+                <a:solidFill>
+                  <a:srgbClr val="1F1F1F"/>
+                </a:solidFill>
+                <a:latin typeface="Times New Roman"/>
+              </a:rPr>
+              <a:t>МИНОБРНАУКИ РОССИИ</a:t>
+            </a:r>
+          </a:p>
+        </p:txBody>
+      </p:sp>
+      <p:sp>
+        <p:nvSpPr>
+          <p:cNvPr id="3" name="TextBox 2"/>
           <p:cNvSpPr txBox="1"/>
           <p:nvPr/>
         </p:nvSpPr>
         <p:spPr>
           <a:xfrm>
-            <a:off x="548640" y="960120"/>
-            <a:ext cx="10972800" cy="457200"/>
+            <a:off x="822960" y="640080"/>
+            <a:ext cx="10543032" cy="777240"/>
           </a:xfrm>
           <a:prstGeom prst="rect">
             <a:avLst/>
@@ -3244,29 +3161,29 @@
           </a:bodyPr>
           <a:lstStyle/>
           <a:p>
-            <a:pPr algn="l"/>
+            <a:pPr algn="ctr"/>
             <a:r>
               <a:rPr sz="1200" b="0">
                 <a:solidFill>
-                  <a:srgbClr val="BBBBBB"/>
-                </a:solidFill>
-                <a:latin typeface="Calibri"/>
-              </a:rPr>
-              <a:t>Факультет цифровых технологий, кибербезопасности, математики и технологий</a:t>
-            </a:r>
-          </a:p>
-        </p:txBody>
-      </p:sp>
-      <p:sp>
-        <p:nvSpPr>
-          <p:cNvPr id="6" name="TextBox 5"/>
+                  <a:srgbClr val="1F1F1F"/>
+                </a:solidFill>
+                <a:latin typeface="Times New Roman"/>
+              </a:rPr>
+              <a:t>федеральное государственное автономное образовательное учреждение высшего образования «Омский государственный университет им. Ф.М. Достоевского»</a:t>
+            </a:r>
+          </a:p>
+        </p:txBody>
+      </p:sp>
+      <p:sp>
+        <p:nvSpPr>
+          <p:cNvPr id="4" name="TextBox 3"/>
           <p:cNvSpPr txBox="1"/>
           <p:nvPr/>
         </p:nvSpPr>
         <p:spPr>
           <a:xfrm>
-            <a:off x="548640" y="1737360"/>
-            <a:ext cx="10972800" cy="365760"/>
+            <a:off x="548640" y="1371600"/>
+            <a:ext cx="11091672" cy="320040"/>
           </a:xfrm>
           <a:prstGeom prst="rect">
             <a:avLst/>
@@ -3279,29 +3196,29 @@
           </a:bodyPr>
           <a:lstStyle/>
           <a:p>
-            <a:pPr algn="l"/>
-            <a:r>
-              <a:rPr sz="1400" b="1">
-                <a:solidFill>
-                  <a:srgbClr val="7F0DF2"/>
-                </a:solidFill>
-                <a:latin typeface="Calibri"/>
-              </a:rPr>
-              <a:t>ВЫПУСКНАЯ КВАЛИФИКАЦИОННАЯ РАБОТА</a:t>
-            </a:r>
-          </a:p>
-        </p:txBody>
-      </p:sp>
-      <p:sp>
-        <p:nvSpPr>
-          <p:cNvPr id="7" name="TextBox 6"/>
+            <a:pPr algn="ctr"/>
+            <a:r>
+              <a:rPr sz="1200" b="0">
+                <a:solidFill>
+                  <a:srgbClr val="555555"/>
+                </a:solidFill>
+                <a:latin typeface="Times New Roman"/>
+              </a:rPr>
+              <a:t>Кафедра компьютерной математики и программного обеспечения</a:t>
+            </a:r>
+          </a:p>
+        </p:txBody>
+      </p:sp>
+      <p:sp>
+        <p:nvSpPr>
+          <p:cNvPr id="5" name="TextBox 4"/>
           <p:cNvSpPr txBox="1"/>
           <p:nvPr/>
         </p:nvSpPr>
         <p:spPr>
           <a:xfrm>
-            <a:off x="548640" y="2103120"/>
-            <a:ext cx="10972800" cy="457200"/>
+            <a:off x="731520" y="2377440"/>
+            <a:ext cx="10725912" cy="1371600"/>
           </a:xfrm>
           <a:prstGeom prst="rect">
             <a:avLst/>
@@ -3314,29 +3231,29 @@
           </a:bodyPr>
           <a:lstStyle/>
           <a:p>
-            <a:pPr algn="l"/>
-            <a:r>
-              <a:rPr sz="1200" b="0">
-                <a:solidFill>
-                  <a:srgbClr val="BBBBBB"/>
-                </a:solidFill>
-                <a:latin typeface="Calibri"/>
-              </a:rPr>
-              <a:t>«Прикладная математика и информатика» · магистерская программа «Глубокое обучение и генеративный искусственный интеллект»</a:t>
-            </a:r>
-          </a:p>
-        </p:txBody>
-      </p:sp>
-      <p:sp>
-        <p:nvSpPr>
-          <p:cNvPr id="8" name="TextBox 7"/>
+            <a:pPr algn="ctr"/>
+            <a:r>
+              <a:rPr sz="2600" b="1">
+                <a:solidFill>
+                  <a:srgbClr val="1F1F1F"/>
+                </a:solidFill>
+                <a:latin typeface="Times New Roman"/>
+              </a:rPr>
+              <a:t>РАЗРАБОТКА КРОССПЛАТФОРМЕННОГО ПРИЛОЖЕНИЯ ДЛЯ ПРОГНОЗА ПОКАЗАТЕЛЕЙ INBODY С АДАПТАЦИЕЙ ТРЕНИРОВОК</a:t>
+            </a:r>
+          </a:p>
+        </p:txBody>
+      </p:sp>
+      <p:sp>
+        <p:nvSpPr>
+          <p:cNvPr id="6" name="TextBox 5"/>
           <p:cNvSpPr txBox="1"/>
           <p:nvPr/>
         </p:nvSpPr>
         <p:spPr>
           <a:xfrm>
-            <a:off x="548640" y="3200400"/>
-            <a:ext cx="10972800" cy="1828800"/>
+            <a:off x="548640" y="3840480"/>
+            <a:ext cx="11091672" cy="320040"/>
           </a:xfrm>
           <a:prstGeom prst="rect">
             <a:avLst/>
@@ -3349,29 +3266,29 @@
           </a:bodyPr>
           <a:lstStyle/>
           <a:p>
-            <a:pPr algn="l"/>
-            <a:r>
-              <a:rPr sz="2600" b="1">
-                <a:solidFill>
-                  <a:srgbClr val="FFFFFF"/>
-                </a:solidFill>
-                <a:latin typeface="Calibri"/>
-              </a:rPr>
-              <a:t>Разработка кроссплатформенного приложения для прогноза состава тела и адаптации плана тренировок с использованием машинного обучения</a:t>
-            </a:r>
-          </a:p>
-        </p:txBody>
-      </p:sp>
-      <p:sp>
-        <p:nvSpPr>
-          <p:cNvPr id="9" name="TextBox 8"/>
+            <a:pPr algn="ctr"/>
+            <a:r>
+              <a:rPr sz="1400" b="1">
+                <a:solidFill>
+                  <a:srgbClr val="1F1F1F"/>
+                </a:solidFill>
+                <a:latin typeface="Times New Roman"/>
+              </a:rPr>
+              <a:t>Выпускная квалификационная работа</a:t>
+            </a:r>
+          </a:p>
+        </p:txBody>
+      </p:sp>
+      <p:sp>
+        <p:nvSpPr>
+          <p:cNvPr id="7" name="TextBox 6"/>
           <p:cNvSpPr txBox="1"/>
           <p:nvPr/>
         </p:nvSpPr>
         <p:spPr>
           <a:xfrm>
-            <a:off x="548640" y="5212080"/>
-            <a:ext cx="5486400" cy="365760"/>
+            <a:off x="548640" y="4160520"/>
+            <a:ext cx="11091672" cy="320040"/>
           </a:xfrm>
           <a:prstGeom prst="rect">
             <a:avLst/>
@@ -3384,29 +3301,29 @@
           </a:bodyPr>
           <a:lstStyle/>
           <a:p>
-            <a:pPr algn="l"/>
+            <a:pPr algn="ctr"/>
             <a:r>
               <a:rPr sz="1200" b="0">
                 <a:solidFill>
-                  <a:srgbClr val="BBBBBB"/>
-                </a:solidFill>
-                <a:latin typeface="Calibri"/>
-              </a:rPr>
-              <a:t>Автор:</a:t>
-            </a:r>
-          </a:p>
-        </p:txBody>
-      </p:sp>
-      <p:sp>
-        <p:nvSpPr>
-          <p:cNvPr id="10" name="TextBox 9"/>
+                  <a:srgbClr val="555555"/>
+                </a:solidFill>
+                <a:latin typeface="Times New Roman"/>
+              </a:rPr>
+              <a:t>по направлению 01.04.02 — «Прикладная математика и информатика»</a:t>
+            </a:r>
+          </a:p>
+        </p:txBody>
+      </p:sp>
+      <p:sp>
+        <p:nvSpPr>
+          <p:cNvPr id="8" name="TextBox 7"/>
           <p:cNvSpPr txBox="1"/>
           <p:nvPr/>
         </p:nvSpPr>
         <p:spPr>
           <a:xfrm>
-            <a:off x="548640" y="5486400"/>
-            <a:ext cx="5486400" cy="365760"/>
+            <a:off x="5486400" y="5120640"/>
+            <a:ext cx="6126480" cy="292608"/>
           </a:xfrm>
           <a:prstGeom prst="rect">
             <a:avLst/>
@@ -3419,29 +3336,29 @@
           </a:bodyPr>
           <a:lstStyle/>
           <a:p>
-            <a:pPr algn="l"/>
-            <a:r>
-              <a:rPr sz="1600" b="1">
-                <a:solidFill>
-                  <a:srgbClr val="FFFFFF"/>
-                </a:solidFill>
-                <a:latin typeface="Calibri"/>
-              </a:rPr>
-              <a:t>Лапова Мария Сергеевна, гр. МММ-401-О-03</a:t>
-            </a:r>
-          </a:p>
-        </p:txBody>
-      </p:sp>
-      <p:sp>
-        <p:nvSpPr>
-          <p:cNvPr id="11" name="TextBox 10"/>
+            <a:pPr algn="r"/>
+            <a:r>
+              <a:rPr sz="1200" b="0">
+                <a:solidFill>
+                  <a:srgbClr val="555555"/>
+                </a:solidFill>
+                <a:latin typeface="Times New Roman"/>
+              </a:rPr>
+              <a:t>Научный руководитель:</a:t>
+            </a:r>
+          </a:p>
+        </p:txBody>
+      </p:sp>
+      <p:sp>
+        <p:nvSpPr>
+          <p:cNvPr id="9" name="TextBox 8"/>
           <p:cNvSpPr txBox="1"/>
           <p:nvPr/>
         </p:nvSpPr>
         <p:spPr>
           <a:xfrm>
-            <a:off x="6400800" y="5212080"/>
-            <a:ext cx="5486400" cy="365760"/>
+            <a:off x="5029200" y="5394960"/>
+            <a:ext cx="6583680" cy="502920"/>
           </a:xfrm>
           <a:prstGeom prst="rect">
             <a:avLst/>
@@ -3454,29 +3371,29 @@
           </a:bodyPr>
           <a:lstStyle/>
           <a:p>
-            <a:pPr algn="l"/>
-            <a:r>
-              <a:rPr sz="1200" b="0">
-                <a:solidFill>
-                  <a:srgbClr val="BBBBBB"/>
-                </a:solidFill>
-                <a:latin typeface="Calibri"/>
-              </a:rPr>
-              <a:t>Научный руководитель:</a:t>
-            </a:r>
-          </a:p>
-        </p:txBody>
-      </p:sp>
-      <p:sp>
-        <p:nvSpPr>
-          <p:cNvPr id="12" name="TextBox 11"/>
+            <a:pPr algn="r"/>
+            <a:r>
+              <a:rPr sz="1300" b="0">
+                <a:solidFill>
+                  <a:srgbClr val="1F1F1F"/>
+                </a:solidFill>
+                <a:latin typeface="Times New Roman"/>
+              </a:rPr>
+              <a:t>Агафонов А. Л., доцент, каф. компьютерной математики и программного обеспечения</a:t>
+            </a:r>
+          </a:p>
+        </p:txBody>
+      </p:sp>
+      <p:sp>
+        <p:nvSpPr>
+          <p:cNvPr id="10" name="TextBox 9"/>
           <p:cNvSpPr txBox="1"/>
           <p:nvPr/>
         </p:nvSpPr>
         <p:spPr>
           <a:xfrm>
-            <a:off x="6400800" y="5486400"/>
-            <a:ext cx="5486400" cy="548640"/>
+            <a:off x="5486400" y="5897880"/>
+            <a:ext cx="6126480" cy="292608"/>
           </a:xfrm>
           <a:prstGeom prst="rect">
             <a:avLst/>
@@ -3489,30 +3406,29 @@
           </a:bodyPr>
           <a:lstStyle/>
           <a:p>
-            <a:pPr algn="l"/>
-            <a:r>
-              <a:rPr sz="1400" b="0">
-                <a:solidFill>
-                  <a:srgbClr val="FFFFFF"/>
-                </a:solidFill>
-                <a:latin typeface="Calibri"/>
-              </a:rPr>
-              <a:t>Агафонов А. Л.,
-доцент, каф. компьютерной математики и программного обеспечения</a:t>
-            </a:r>
-          </a:p>
-        </p:txBody>
-      </p:sp>
-      <p:sp>
-        <p:nvSpPr>
-          <p:cNvPr id="13" name="TextBox 12"/>
+            <a:pPr algn="r"/>
+            <a:r>
+              <a:rPr sz="1200" b="0">
+                <a:solidFill>
+                  <a:srgbClr val="555555"/>
+                </a:solidFill>
+                <a:latin typeface="Times New Roman"/>
+              </a:rPr>
+              <a:t>Студентка гр. МММ-401-О-03:</a:t>
+            </a:r>
+          </a:p>
+        </p:txBody>
+      </p:sp>
+      <p:sp>
+        <p:nvSpPr>
+          <p:cNvPr id="11" name="TextBox 10"/>
           <p:cNvSpPr txBox="1"/>
           <p:nvPr/>
         </p:nvSpPr>
         <p:spPr>
           <a:xfrm>
-            <a:off x="548640" y="6309360"/>
-            <a:ext cx="10972800" cy="365760"/>
+            <a:off x="5486400" y="6153912"/>
+            <a:ext cx="6126480" cy="292608"/>
           </a:xfrm>
           <a:prstGeom prst="rect">
             <a:avLst/>
@@ -3525,15 +3441,50 @@
           </a:bodyPr>
           <a:lstStyle/>
           <a:p>
-            <a:pPr algn="l"/>
+            <a:pPr algn="r"/>
+            <a:r>
+              <a:rPr sz="1300" b="1">
+                <a:solidFill>
+                  <a:srgbClr val="1F1F1F"/>
+                </a:solidFill>
+                <a:latin typeface="Times New Roman"/>
+              </a:rPr>
+              <a:t>Лапова Мария Сергеевна</a:t>
+            </a:r>
+          </a:p>
+        </p:txBody>
+      </p:sp>
+      <p:sp>
+        <p:nvSpPr>
+          <p:cNvPr id="12" name="TextBox 11"/>
+          <p:cNvSpPr txBox="1"/>
+          <p:nvPr/>
+        </p:nvSpPr>
+        <p:spPr>
+          <a:xfrm>
+            <a:off x="548640" y="6446520"/>
+            <a:ext cx="11091672" cy="320040"/>
+          </a:xfrm>
+          <a:prstGeom prst="rect">
+            <a:avLst/>
+          </a:prstGeom>
+          <a:noFill/>
+        </p:spPr>
+        <p:txBody>
+          <a:bodyPr wrap="square">
+            <a:spAutoFit/>
+          </a:bodyPr>
+          <a:lstStyle/>
+          <a:p>
+            <a:pPr algn="ctr"/>
             <a:r>
               <a:rPr sz="1200" b="0">
                 <a:solidFill>
-                  <a:srgbClr val="BBBBBB"/>
-                </a:solidFill>
-                <a:latin typeface="Calibri"/>
-              </a:rPr>
-              <a:t>Омск · 2026</a:t>
+                  <a:srgbClr val="555555"/>
+                </a:solidFill>
+                <a:latin typeface="Times New Roman"/>
+              </a:rPr>
+              <a:t>Омск, 2026</a:t>
             </a:r>
           </a:p>
         </p:txBody>
@@ -3584,56 +3535,37 @@
                 <a:solidFill>
                   <a:srgbClr val="1F1F1F"/>
                 </a:solidFill>
-                <a:latin typeface="Calibri"/>
-              </a:rPr>
-              <a:t>Watcher-сервис адаптации плана</a:t>
-            </a:r>
-          </a:p>
-        </p:txBody>
-      </p:sp>
-      <p:sp>
-        <p:nvSpPr>
-          <p:cNvPr id="3" name="Rectangle 2"/>
-          <p:cNvSpPr/>
+                <a:latin typeface="Times New Roman"/>
+              </a:rPr>
+              <a:t>Как работает прогноз</a:t>
+            </a:r>
+          </a:p>
+        </p:txBody>
+      </p:sp>
+      <p:pic>
+        <p:nvPicPr>
+          <p:cNvPr id="3" name="Picture 2" descr="image.png"/>
+          <p:cNvPicPr>
+            <a:picLocks noChangeAspect="1"/>
+          </p:cNvPicPr>
           <p:nvPr/>
-        </p:nvSpPr>
-        <p:spPr>
-          <a:xfrm>
-            <a:off x="548640" y="594360"/>
-            <a:ext cx="1097280" cy="54864"/>
+        </p:nvPicPr>
+        <p:blipFill>
+          <a:blip r:embed="rId2"/>
+          <a:stretch>
+            <a:fillRect/>
+          </a:stretch>
+        </p:blipFill>
+        <p:spPr>
+          <a:xfrm>
+            <a:off x="1066647" y="2238743"/>
+            <a:ext cx="10058400" cy="2197634"/>
           </a:xfrm>
           <a:prstGeom prst="rect">
             <a:avLst/>
           </a:prstGeom>
-          <a:solidFill>
-            <a:srgbClr val="7F0DF2"/>
-          </a:solidFill>
-          <a:ln>
-            <a:noFill/>
-          </a:ln>
-        </p:spPr>
-        <p:style>
-          <a:lnRef idx="1">
-            <a:schemeClr val="accent1"/>
-          </a:lnRef>
-          <a:fillRef idx="3">
-            <a:schemeClr val="accent1"/>
-          </a:fillRef>
-          <a:effectRef idx="2">
-            <a:schemeClr val="accent1"/>
-          </a:effectRef>
-          <a:fontRef idx="minor">
-            <a:schemeClr val="lt1"/>
-          </a:fontRef>
-        </p:style>
-        <p:txBody>
-          <a:bodyPr rtlCol="0" anchor="ctr"/>
-          <a:lstStyle/>
-          <a:p>
-            <a:pPr algn="ctr"/>
-          </a:p>
-        </p:txBody>
-      </p:sp>
+        </p:spPr>
+      </p:pic>
       <p:sp>
         <p:nvSpPr>
           <p:cNvPr id="4" name="TextBox 3"/>
@@ -3642,8 +3574,8 @@
         </p:nvSpPr>
         <p:spPr>
           <a:xfrm>
-            <a:off x="548640" y="1005840"/>
-            <a:ext cx="10972800" cy="731520"/>
+            <a:off x="548640" y="5852160"/>
+            <a:ext cx="10972800" cy="457200"/>
           </a:xfrm>
           <a:prstGeom prst="rect">
             <a:avLst/>
@@ -3656,15 +3588,15 @@
           </a:bodyPr>
           <a:lstStyle/>
           <a:p>
-            <a:pPr algn="l"/>
-            <a:r>
-              <a:rPr sz="1800" b="0">
-                <a:solidFill>
-                  <a:srgbClr val="1F1F1F"/>
-                </a:solidFill>
-                <a:latin typeface="Calibri"/>
-              </a:rPr>
-              <a:t>Детерминированный сервис, реагирующий на изменения профиля и истории тренировок без участия пользователя.</a:t>
+            <a:pPr algn="ctr"/>
+            <a:r>
+              <a:rPr sz="1400" b="0">
+                <a:solidFill>
+                  <a:srgbClr val="555555"/>
+                </a:solidFill>
+                <a:latin typeface="Times New Roman"/>
+              </a:rPr>
+              <a:t>Рис. 3. Пайплайн прогноза InBody</a:t>
             </a:r>
           </a:p>
         </p:txBody>
@@ -3677,8 +3609,8 @@
         </p:nvSpPr>
         <p:spPr>
           <a:xfrm>
-            <a:off x="548640" y="2011680"/>
-            <a:ext cx="10972800" cy="4389120"/>
+            <a:off x="10332720" y="6263640"/>
+            <a:ext cx="1371600" cy="457200"/>
           </a:xfrm>
           <a:prstGeom prst="rect">
             <a:avLst/>
@@ -3691,153 +3623,15 @@
           </a:bodyPr>
           <a:lstStyle/>
           <a:p>
-            <a:pPr algn="l">
-              <a:spcAft>
-                <a:spcPts val="800"/>
-              </a:spcAft>
-            </a:pPr>
-            <a:r>
-              <a:rPr sz="1700">
-                <a:solidFill>
-                  <a:srgbClr val="1F1F1F"/>
-                </a:solidFill>
-                <a:latin typeface="Calibri"/>
-              </a:rPr>
-              <a:t>•  6 условий срабатывания: изменение веса, цели, частоты, оборудования, окончание цикла, ручной запуск</a:t>
-            </a:r>
-          </a:p>
-          <a:p>
-            <a:pPr algn="l">
-              <a:spcAft>
-                <a:spcPts val="800"/>
-              </a:spcAft>
-            </a:pPr>
-            <a:r>
-              <a:rPr sz="1700">
-                <a:solidFill>
-                  <a:srgbClr val="1F1F1F"/>
-                </a:solidFill>
-                <a:latin typeface="Calibri"/>
-              </a:rPr>
-              <a:t>•  Architecture: pg-cron + watcher-функции в domain/-слое; идемпотентность по pending-событиям</a:t>
-            </a:r>
-          </a:p>
-          <a:p>
-            <a:pPr algn="l">
-              <a:spcAft>
-                <a:spcPts val="800"/>
-              </a:spcAft>
-            </a:pPr>
-            <a:r>
-              <a:rPr sz="1700">
-                <a:solidFill>
-                  <a:srgbClr val="1F1F1F"/>
-                </a:solidFill>
-                <a:latin typeface="Calibri"/>
-              </a:rPr>
-              <a:t>•  При срабатывании создаётся PlanRebuildEvent в БД; пересборка плана происходит асинхронно через BackgroundTasks</a:t>
-            </a:r>
-          </a:p>
-          <a:p>
-            <a:pPr algn="l">
-              <a:spcAft>
-                <a:spcPts val="800"/>
-              </a:spcAft>
-            </a:pPr>
-            <a:r>
-              <a:rPr sz="1700">
-                <a:solidFill>
-                  <a:srgbClr val="1F1F1F"/>
-                </a:solidFill>
-                <a:latin typeface="Calibri"/>
-              </a:rPr>
-              <a:t>•  Покрытие тестами: 8 модульных + 11 интеграционных, включая race-conditions между триггерами</a:t>
-            </a:r>
-          </a:p>
-          <a:p>
-            <a:pPr algn="l">
-              <a:spcAft>
-                <a:spcPts val="800"/>
-              </a:spcAft>
-            </a:pPr>
-            <a:r>
-              <a:rPr sz="1700">
-                <a:solidFill>
-                  <a:srgbClr val="1F1F1F"/>
-                </a:solidFill>
-                <a:latin typeface="Calibri"/>
-              </a:rPr>
-              <a:t>•  Гарантия консистентности: одно активное событие на пользователя (partial unique index)</a:t>
-            </a:r>
-          </a:p>
-        </p:txBody>
-      </p:sp>
-      <p:sp>
-        <p:nvSpPr>
-          <p:cNvPr id="6" name="TextBox 5"/>
-          <p:cNvSpPr txBox="1"/>
-          <p:nvPr/>
-        </p:nvSpPr>
-        <p:spPr>
-          <a:xfrm>
-            <a:off x="548640" y="6446520"/>
-            <a:ext cx="5486400" cy="274320"/>
-          </a:xfrm>
-          <a:prstGeom prst="rect">
-            <a:avLst/>
-          </a:prstGeom>
-          <a:noFill/>
-        </p:spPr>
-        <p:txBody>
-          <a:bodyPr wrap="square">
-            <a:spAutoFit/>
-          </a:bodyPr>
-          <a:lstStyle/>
-          <a:p>
-            <a:pPr algn="l"/>
-            <a:r>
-              <a:rPr sz="1000" b="0">
+            <a:pPr algn="r"/>
+            <a:r>
+              <a:rPr sz="2000" b="0">
                 <a:solidFill>
                   <a:srgbClr val="555555"/>
                 </a:solidFill>
-                <a:latin typeface="Calibri"/>
-              </a:rPr>
-              <a:t>Лапова М. С.  ·  ВКР 2026  ·  Fitness Tracker</a:t>
-            </a:r>
-          </a:p>
-        </p:txBody>
-      </p:sp>
-      <p:sp>
-        <p:nvSpPr>
-          <p:cNvPr id="7" name="TextBox 6"/>
-          <p:cNvSpPr txBox="1"/>
-          <p:nvPr/>
-        </p:nvSpPr>
-        <p:spPr>
-          <a:xfrm>
-            <a:off x="10515600" y="6446520"/>
-            <a:ext cx="1188720" cy="274320"/>
-          </a:xfrm>
-          <a:prstGeom prst="rect">
-            <a:avLst/>
-          </a:prstGeom>
-          <a:noFill/>
-        </p:spPr>
-        <p:txBody>
-          <a:bodyPr wrap="square">
-            <a:spAutoFit/>
-          </a:bodyPr>
-          <a:lstStyle/>
-          <a:p>
-            <a:pPr algn="r"/>
-            <a:r>
-              <a:rPr sz="1000" b="0">
-                <a:solidFill>
-                  <a:srgbClr val="555555"/>
-                </a:solidFill>
-                <a:latin typeface="Calibri"/>
-              </a:rPr>
-              <a:t>10 / 14</a:t>
+                <a:latin typeface="Times New Roman"/>
+              </a:rPr>
+              <a:t>10</a:t>
             </a:r>
           </a:p>
         </p:txBody>
@@ -3888,56 +3682,37 @@
                 <a:solidFill>
                   <a:srgbClr val="1F1F1F"/>
                 </a:solidFill>
-                <a:latin typeface="Calibri"/>
-              </a:rPr>
-              <a:t>Тестирование</a:t>
-            </a:r>
-          </a:p>
-        </p:txBody>
-      </p:sp>
-      <p:sp>
-        <p:nvSpPr>
-          <p:cNvPr id="3" name="Rectangle 2"/>
-          <p:cNvSpPr/>
+                <a:latin typeface="Times New Roman"/>
+              </a:rPr>
+              <a:t>Последовательность обработки запроса</a:t>
+            </a:r>
+          </a:p>
+        </p:txBody>
+      </p:sp>
+      <p:pic>
+        <p:nvPicPr>
+          <p:cNvPr id="3" name="Picture 2" descr="uml-sequence-maria.png"/>
+          <p:cNvPicPr>
+            <a:picLocks noChangeAspect="1"/>
+          </p:cNvPicPr>
           <p:nvPr/>
-        </p:nvSpPr>
-        <p:spPr>
-          <a:xfrm>
-            <a:off x="548640" y="594360"/>
-            <a:ext cx="1097280" cy="54864"/>
+        </p:nvPicPr>
+        <p:blipFill>
+          <a:blip r:embed="rId2"/>
+          <a:stretch>
+            <a:fillRect/>
+          </a:stretch>
+        </p:blipFill>
+        <p:spPr>
+          <a:xfrm>
+            <a:off x="761847" y="1143000"/>
+            <a:ext cx="10668000" cy="4572000"/>
           </a:xfrm>
           <a:prstGeom prst="rect">
             <a:avLst/>
           </a:prstGeom>
-          <a:solidFill>
-            <a:srgbClr val="7F0DF2"/>
-          </a:solidFill>
-          <a:ln>
-            <a:noFill/>
-          </a:ln>
-        </p:spPr>
-        <p:style>
-          <a:lnRef idx="1">
-            <a:schemeClr val="accent1"/>
-          </a:lnRef>
-          <a:fillRef idx="3">
-            <a:schemeClr val="accent1"/>
-          </a:fillRef>
-          <a:effectRef idx="2">
-            <a:schemeClr val="accent1"/>
-          </a:effectRef>
-          <a:fontRef idx="minor">
-            <a:schemeClr val="lt1"/>
-          </a:fontRef>
-        </p:style>
-        <p:txBody>
-          <a:bodyPr rtlCol="0" anchor="ctr"/>
-          <a:lstStyle/>
-          <a:p>
-            <a:pPr algn="ctr"/>
-          </a:p>
-        </p:txBody>
-      </p:sp>
+        </p:spPr>
+      </p:pic>
       <p:sp>
         <p:nvSpPr>
           <p:cNvPr id="4" name="TextBox 3"/>
@@ -3946,8 +3721,8 @@
         </p:nvSpPr>
         <p:spPr>
           <a:xfrm>
-            <a:off x="548640" y="1005840"/>
-            <a:ext cx="10972800" cy="731520"/>
+            <a:off x="548640" y="5852160"/>
+            <a:ext cx="10972800" cy="457200"/>
           </a:xfrm>
           <a:prstGeom prst="rect">
             <a:avLst/>
@@ -3960,15 +3735,15 @@
           </a:bodyPr>
           <a:lstStyle/>
           <a:p>
-            <a:pPr algn="l"/>
-            <a:r>
-              <a:rPr sz="1800" b="0">
-                <a:solidFill>
-                  <a:srgbClr val="1F1F1F"/>
-                </a:solidFill>
-                <a:latin typeface="Calibri"/>
-              </a:rPr>
-              <a:t>Многоуровневая стратегия: чистые юниты на domain/-слое + интеграционные тесты с реальным PostgreSQL.</a:t>
+            <a:pPr algn="ctr"/>
+            <a:r>
+              <a:rPr sz="1300" b="0">
+                <a:solidFill>
+                  <a:srgbClr val="555555"/>
+                </a:solidFill>
+                <a:latin typeface="Times New Roman"/>
+              </a:rPr>
+              <a:t>Рис. 4. Диаграмма последовательности: запрос прогноза InBody</a:t>
             </a:r>
           </a:p>
         </p:txBody>
@@ -3981,8 +3756,8 @@
         </p:nvSpPr>
         <p:spPr>
           <a:xfrm>
-            <a:off x="548640" y="2011680"/>
-            <a:ext cx="10972800" cy="4389120"/>
+            <a:off x="10332720" y="6263640"/>
+            <a:ext cx="1371600" cy="457200"/>
           </a:xfrm>
           <a:prstGeom prst="rect">
             <a:avLst/>
@@ -3995,153 +3770,15 @@
           </a:bodyPr>
           <a:lstStyle/>
           <a:p>
-            <a:pPr algn="l">
-              <a:spcAft>
-                <a:spcPts val="800"/>
-              </a:spcAft>
-            </a:pPr>
-            <a:r>
-              <a:rPr sz="1700">
-                <a:solidFill>
-                  <a:srgbClr val="1F1F1F"/>
-                </a:solidFill>
-                <a:latin typeface="Calibri"/>
-              </a:rPr>
-              <a:t>•  Юнит-тесты domain/: 49 тестов forecast/ML-слоя (composer, baseline, features, interpretation, evaluation)</a:t>
-            </a:r>
-          </a:p>
-          <a:p>
-            <a:pPr algn="l">
-              <a:spcAft>
-                <a:spcPts val="800"/>
-              </a:spcAft>
-            </a:pPr>
-            <a:r>
-              <a:rPr sz="1700">
-                <a:solidFill>
-                  <a:srgbClr val="1F1F1F"/>
-                </a:solidFill>
-                <a:latin typeface="Calibri"/>
-              </a:rPr>
-              <a:t>•  Интеграционные тесты: testcontainers Postgres + savepoint per test; FastAPI берёт ту же сессию через dependency_overrides</a:t>
-            </a:r>
-          </a:p>
-          <a:p>
-            <a:pPr algn="l">
-              <a:spcAft>
-                <a:spcPts val="800"/>
-              </a:spcAft>
-            </a:pPr>
-            <a:r>
-              <a:rPr sz="1700">
-                <a:solidFill>
-                  <a:srgbClr val="1F1F1F"/>
-                </a:solidFill>
-                <a:latin typeface="Calibri"/>
-              </a:rPr>
-              <a:t>•  ML-pipeline: smoke-тесты обучения для persistence / Ridge / LightGBM на mini-датасете (изоляция через tmp_path)</a:t>
-            </a:r>
-          </a:p>
-          <a:p>
-            <a:pPr algn="l">
-              <a:spcAft>
-                <a:spcPts val="800"/>
-              </a:spcAft>
-            </a:pPr>
-            <a:r>
-              <a:rPr sz="1700">
-                <a:solidFill>
-                  <a:srgbClr val="1F1F1F"/>
-                </a:solidFill>
-                <a:latin typeface="Calibri"/>
-              </a:rPr>
-              <a:t>•  Калибровка CI на тестовом сплите: 0.78–0.80 для LGBM, 0.79–0.83 для MLP (теоретический уровень — 0.80)</a:t>
-            </a:r>
-          </a:p>
-          <a:p>
-            <a:pPr algn="l">
-              <a:spcAft>
-                <a:spcPts val="800"/>
-              </a:spcAft>
-            </a:pPr>
-            <a:r>
-              <a:rPr sz="1700">
-                <a:solidFill>
-                  <a:srgbClr val="1F1F1F"/>
-                </a:solidFill>
-                <a:latin typeface="Calibri"/>
-              </a:rPr>
-              <a:t>•  Маркеры pytest unit / integration проставляются автоматически по пути; make check = lint + typecheck (strict mypy) + test</a:t>
-            </a:r>
-          </a:p>
-        </p:txBody>
-      </p:sp>
-      <p:sp>
-        <p:nvSpPr>
-          <p:cNvPr id="6" name="TextBox 5"/>
-          <p:cNvSpPr txBox="1"/>
-          <p:nvPr/>
-        </p:nvSpPr>
-        <p:spPr>
-          <a:xfrm>
-            <a:off x="548640" y="6446520"/>
-            <a:ext cx="5486400" cy="274320"/>
-          </a:xfrm>
-          <a:prstGeom prst="rect">
-            <a:avLst/>
-          </a:prstGeom>
-          <a:noFill/>
-        </p:spPr>
-        <p:txBody>
-          <a:bodyPr wrap="square">
-            <a:spAutoFit/>
-          </a:bodyPr>
-          <a:lstStyle/>
-          <a:p>
-            <a:pPr algn="l"/>
-            <a:r>
-              <a:rPr sz="1000" b="0">
+            <a:pPr algn="r"/>
+            <a:r>
+              <a:rPr sz="2000" b="0">
                 <a:solidFill>
                   <a:srgbClr val="555555"/>
                 </a:solidFill>
-                <a:latin typeface="Calibri"/>
-              </a:rPr>
-              <a:t>Лапова М. С.  ·  ВКР 2026  ·  Fitness Tracker</a:t>
-            </a:r>
-          </a:p>
-        </p:txBody>
-      </p:sp>
-      <p:sp>
-        <p:nvSpPr>
-          <p:cNvPr id="7" name="TextBox 6"/>
-          <p:cNvSpPr txBox="1"/>
-          <p:nvPr/>
-        </p:nvSpPr>
-        <p:spPr>
-          <a:xfrm>
-            <a:off x="10515600" y="6446520"/>
-            <a:ext cx="1188720" cy="274320"/>
-          </a:xfrm>
-          <a:prstGeom prst="rect">
-            <a:avLst/>
-          </a:prstGeom>
-          <a:noFill/>
-        </p:spPr>
-        <p:txBody>
-          <a:bodyPr wrap="square">
-            <a:spAutoFit/>
-          </a:bodyPr>
-          <a:lstStyle/>
-          <a:p>
-            <a:pPr algn="r"/>
-            <a:r>
-              <a:rPr sz="1000" b="0">
-                <a:solidFill>
-                  <a:srgbClr val="555555"/>
-                </a:solidFill>
-                <a:latin typeface="Calibri"/>
-              </a:rPr>
-              <a:t>11 / 14</a:t>
+                <a:latin typeface="Times New Roman"/>
+              </a:rPr>
+              <a:t>11</a:t>
             </a:r>
           </a:p>
         </p:txBody>
@@ -4192,90 +3829,23 @@
                 <a:solidFill>
                   <a:srgbClr val="1F1F1F"/>
                 </a:solidFill>
-                <a:latin typeface="Calibri"/>
-              </a:rPr>
-              <a:t>Интерфейс приложения</a:t>
-            </a:r>
-          </a:p>
-        </p:txBody>
-      </p:sp>
-      <p:sp>
-        <p:nvSpPr>
-          <p:cNvPr id="3" name="Rectangle 2"/>
-          <p:cNvSpPr/>
-          <p:nvPr/>
-        </p:nvSpPr>
-        <p:spPr>
-          <a:xfrm>
-            <a:off x="548640" y="594360"/>
-            <a:ext cx="1097280" cy="54864"/>
-          </a:xfrm>
-          <a:prstGeom prst="rect">
-            <a:avLst/>
-          </a:prstGeom>
-          <a:solidFill>
-            <a:srgbClr val="7F0DF2"/>
-          </a:solidFill>
-          <a:ln>
-            <a:noFill/>
-          </a:ln>
-        </p:spPr>
-        <p:style>
-          <a:lnRef idx="1">
-            <a:schemeClr val="accent1"/>
-          </a:lnRef>
-          <a:fillRef idx="3">
-            <a:schemeClr val="accent1"/>
-          </a:fillRef>
-          <a:effectRef idx="2">
-            <a:schemeClr val="accent1"/>
-          </a:effectRef>
-          <a:fontRef idx="minor">
-            <a:schemeClr val="lt1"/>
-          </a:fontRef>
-        </p:style>
-        <p:txBody>
-          <a:bodyPr rtlCol="0" anchor="ctr"/>
-          <a:lstStyle/>
-          <a:p>
-            <a:pPr algn="ctr"/>
-          </a:p>
-        </p:txBody>
-      </p:sp>
-      <p:pic>
-        <p:nvPicPr>
-          <p:cNvPr id="4" name="Picture 3" descr="screen-03.png"/>
-          <p:cNvPicPr>
-            <a:picLocks noChangeAspect="1"/>
-          </p:cNvPicPr>
-          <p:nvPr/>
-        </p:nvPicPr>
-        <p:blipFill>
-          <a:blip r:embed="rId2"/>
-          <a:stretch>
-            <a:fillRect/>
-          </a:stretch>
-        </p:blipFill>
-        <p:spPr>
-          <a:xfrm>
-            <a:off x="838047" y="1097280"/>
-            <a:ext cx="3322320" cy="4389120"/>
-          </a:xfrm>
-          <a:prstGeom prst="rect">
-            <a:avLst/>
-          </a:prstGeom>
-        </p:spPr>
-      </p:pic>
-      <p:sp>
-        <p:nvSpPr>
-          <p:cNvPr id="5" name="TextBox 4"/>
+                <a:latin typeface="Times New Roman"/>
+              </a:rPr>
+              <a:t>Доверительные интервалы</a:t>
+            </a:r>
+          </a:p>
+        </p:txBody>
+      </p:sp>
+      <p:sp>
+        <p:nvSpPr>
+          <p:cNvPr id="3" name="TextBox 2"/>
           <p:cNvSpPr txBox="1"/>
           <p:nvPr/>
         </p:nvSpPr>
         <p:spPr>
           <a:xfrm>
-            <a:off x="838047" y="5623560"/>
-            <a:ext cx="3322320" cy="548640"/>
+            <a:off x="548640" y="1005840"/>
+            <a:ext cx="10972800" cy="5394960"/>
           </a:xfrm>
           <a:prstGeom prst="rect">
             <a:avLst/>
@@ -4283,58 +3853,98 @@
           <a:noFill/>
         </p:spPr>
         <p:txBody>
-          <a:bodyPr wrap="square">
+          <a:bodyPr wrap="square" anchor="ctr">
             <a:spAutoFit/>
           </a:bodyPr>
           <a:lstStyle/>
           <a:p>
-            <a:pPr algn="ctr"/>
-            <a:r>
-              <a:rPr sz="1200" b="0">
-                <a:solidFill>
-                  <a:srgbClr val="555555"/>
-                </a:solidFill>
-                <a:latin typeface="Calibri"/>
-              </a:rPr>
-              <a:t>Главный экран: прогресс веса и активность</a:t>
-            </a:r>
-          </a:p>
-        </p:txBody>
-      </p:sp>
-      <p:pic>
-        <p:nvPicPr>
-          <p:cNvPr id="6" name="Picture 5" descr="screen-05.png"/>
-          <p:cNvPicPr>
-            <a:picLocks noChangeAspect="1"/>
-          </p:cNvPicPr>
-          <p:nvPr/>
-        </p:nvPicPr>
-        <p:blipFill>
-          <a:blip r:embed="rId3"/>
-          <a:stretch>
-            <a:fillRect/>
-          </a:stretch>
-        </p:blipFill>
-        <p:spPr>
-          <a:xfrm>
-            <a:off x="4434687" y="1097280"/>
-            <a:ext cx="3322320" cy="4389120"/>
-          </a:xfrm>
-          <a:prstGeom prst="rect">
-            <a:avLst/>
-          </a:prstGeom>
-        </p:spPr>
-      </p:pic>
-      <p:sp>
-        <p:nvSpPr>
-          <p:cNvPr id="7" name="TextBox 6"/>
+            <a:pPr algn="l">
+              <a:lnSpc>
+                <a:spcPct val="115000"/>
+              </a:lnSpc>
+              <a:spcAft>
+                <a:spcPts val="1800"/>
+              </a:spcAft>
+            </a:pPr>
+            <a:r>
+              <a:rPr sz="2600">
+                <a:solidFill>
+                  <a:srgbClr val="1F1F1F"/>
+                </a:solidFill>
+                <a:latin typeface="Times New Roman"/>
+              </a:rPr>
+              <a:t>•  Квантильная регрессия: квантили 0,1 / 0,5 / 0,9</a:t>
+            </a:r>
+          </a:p>
+          <a:p>
+            <a:pPr algn="l">
+              <a:lnSpc>
+                <a:spcPct val="115000"/>
+              </a:lnSpc>
+              <a:spcAft>
+                <a:spcPts val="1800"/>
+              </a:spcAft>
+            </a:pPr>
+            <a:r>
+              <a:rPr sz="2600">
+                <a:solidFill>
+                  <a:srgbClr val="1F1F1F"/>
+                </a:solidFill>
+                <a:latin typeface="Times New Roman"/>
+              </a:rPr>
+              <a:t>•  Интервал 80%: факт попадает в 79% случаев</a:t>
+            </a:r>
+          </a:p>
+          <a:p>
+            <a:pPr algn="l">
+              <a:lnSpc>
+                <a:spcPct val="115000"/>
+              </a:lnSpc>
+              <a:spcAft>
+                <a:spcPts val="1800"/>
+              </a:spcAft>
+            </a:pPr>
+            <a:r>
+              <a:rPr sz="2600">
+                <a:solidFill>
+                  <a:srgbClr val="1F1F1F"/>
+                </a:solidFill>
+                <a:latin typeface="Times New Roman"/>
+              </a:rPr>
+              <a:t>•  L(y, ŷ) = max(τ·(y−ŷ), (τ−1)·(y−ŷ))</a:t>
+            </a:r>
+          </a:p>
+          <a:p>
+            <a:pPr algn="l">
+              <a:lnSpc>
+                <a:spcPct val="115000"/>
+              </a:lnSpc>
+              <a:spcAft>
+                <a:spcPts val="1800"/>
+              </a:spcAft>
+            </a:pPr>
+            <a:r>
+              <a:rPr sz="2600">
+                <a:solidFill>
+                  <a:srgbClr val="1F1F1F"/>
+                </a:solidFill>
+                <a:latin typeface="Times New Roman"/>
+              </a:rPr>
+              <a:t>•  9 бустеров: 3 метрики × 3 квантиля</a:t>
+            </a:r>
+          </a:p>
+        </p:txBody>
+      </p:sp>
+      <p:sp>
+        <p:nvSpPr>
+          <p:cNvPr id="4" name="TextBox 3"/>
           <p:cNvSpPr txBox="1"/>
           <p:nvPr/>
         </p:nvSpPr>
         <p:spPr>
           <a:xfrm>
-            <a:off x="4434687" y="5623560"/>
-            <a:ext cx="3322320" cy="548640"/>
+            <a:off x="10332720" y="6263640"/>
+            <a:ext cx="1371600" cy="457200"/>
           </a:xfrm>
           <a:prstGeom prst="rect">
             <a:avLst/>
@@ -4347,144 +3957,15 @@
           </a:bodyPr>
           <a:lstStyle/>
           <a:p>
-            <a:pPr algn="ctr"/>
-            <a:r>
-              <a:rPr sz="1200" b="0">
+            <a:pPr algn="r"/>
+            <a:r>
+              <a:rPr sz="2000" b="0">
                 <a:solidFill>
                   <a:srgbClr val="555555"/>
                 </a:solidFill>
-                <a:latin typeface="Calibri"/>
-              </a:rPr>
-              <a:t>Лог тренировки: подходы, веса, прогрессия</a:t>
-            </a:r>
-          </a:p>
-        </p:txBody>
-      </p:sp>
-      <p:pic>
-        <p:nvPicPr>
-          <p:cNvPr id="8" name="Picture 7" descr="screen-01.png"/>
-          <p:cNvPicPr>
-            <a:picLocks noChangeAspect="1"/>
-          </p:cNvPicPr>
-          <p:nvPr/>
-        </p:nvPicPr>
-        <p:blipFill>
-          <a:blip r:embed="rId4"/>
-          <a:stretch>
-            <a:fillRect/>
-          </a:stretch>
-        </p:blipFill>
-        <p:spPr>
-          <a:xfrm>
-            <a:off x="8031327" y="1097280"/>
-            <a:ext cx="3322320" cy="4389120"/>
-          </a:xfrm>
-          <a:prstGeom prst="rect">
-            <a:avLst/>
-          </a:prstGeom>
-        </p:spPr>
-      </p:pic>
-      <p:sp>
-        <p:nvSpPr>
-          <p:cNvPr id="9" name="TextBox 8"/>
-          <p:cNvSpPr txBox="1"/>
-          <p:nvPr/>
-        </p:nvSpPr>
-        <p:spPr>
-          <a:xfrm>
-            <a:off x="8031327" y="5623560"/>
-            <a:ext cx="3322320" cy="548640"/>
-          </a:xfrm>
-          <a:prstGeom prst="rect">
-            <a:avLst/>
-          </a:prstGeom>
-          <a:noFill/>
-        </p:spPr>
-        <p:txBody>
-          <a:bodyPr wrap="square">
-            <a:spAutoFit/>
-          </a:bodyPr>
-          <a:lstStyle/>
-          <a:p>
-            <a:pPr algn="ctr"/>
-            <a:r>
-              <a:rPr sz="1200" b="0">
-                <a:solidFill>
-                  <a:srgbClr val="555555"/>
-                </a:solidFill>
-                <a:latin typeface="Calibri"/>
-              </a:rPr>
-              <a:t>Регистрация и онбординг пользователя</a:t>
-            </a:r>
-          </a:p>
-        </p:txBody>
-      </p:sp>
-      <p:sp>
-        <p:nvSpPr>
-          <p:cNvPr id="10" name="TextBox 9"/>
-          <p:cNvSpPr txBox="1"/>
-          <p:nvPr/>
-        </p:nvSpPr>
-        <p:spPr>
-          <a:xfrm>
-            <a:off x="548640" y="6446520"/>
-            <a:ext cx="5486400" cy="274320"/>
-          </a:xfrm>
-          <a:prstGeom prst="rect">
-            <a:avLst/>
-          </a:prstGeom>
-          <a:noFill/>
-        </p:spPr>
-        <p:txBody>
-          <a:bodyPr wrap="square">
-            <a:spAutoFit/>
-          </a:bodyPr>
-          <a:lstStyle/>
-          <a:p>
-            <a:pPr algn="l"/>
-            <a:r>
-              <a:rPr sz="1000" b="0">
-                <a:solidFill>
-                  <a:srgbClr val="555555"/>
-                </a:solidFill>
-                <a:latin typeface="Calibri"/>
-              </a:rPr>
-              <a:t>Лапова М. С.  ·  ВКР 2026  ·  Fitness Tracker</a:t>
-            </a:r>
-          </a:p>
-        </p:txBody>
-      </p:sp>
-      <p:sp>
-        <p:nvSpPr>
-          <p:cNvPr id="11" name="TextBox 10"/>
-          <p:cNvSpPr txBox="1"/>
-          <p:nvPr/>
-        </p:nvSpPr>
-        <p:spPr>
-          <a:xfrm>
-            <a:off x="10515600" y="6446520"/>
-            <a:ext cx="1188720" cy="274320"/>
-          </a:xfrm>
-          <a:prstGeom prst="rect">
-            <a:avLst/>
-          </a:prstGeom>
-          <a:noFill/>
-        </p:spPr>
-        <p:txBody>
-          <a:bodyPr wrap="square">
-            <a:spAutoFit/>
-          </a:bodyPr>
-          <a:lstStyle/>
-          <a:p>
-            <a:pPr algn="r"/>
-            <a:r>
-              <a:rPr sz="1000" b="0">
-                <a:solidFill>
-                  <a:srgbClr val="555555"/>
-                </a:solidFill>
-                <a:latin typeface="Calibri"/>
-              </a:rPr>
-              <a:t>12 / 14</a:t>
+                <a:latin typeface="Times New Roman"/>
+              </a:rPr>
+              <a:t>12</a:t>
             </a:r>
           </a:p>
         </p:txBody>
@@ -4535,66 +4016,23 @@
                 <a:solidFill>
                   <a:srgbClr val="1F1F1F"/>
                 </a:solidFill>
-                <a:latin typeface="Calibri"/>
-              </a:rPr>
-              <a:t>Выводы</a:t>
-            </a:r>
-          </a:p>
-        </p:txBody>
-      </p:sp>
-      <p:sp>
-        <p:nvSpPr>
-          <p:cNvPr id="3" name="Rectangle 2"/>
-          <p:cNvSpPr/>
-          <p:nvPr/>
-        </p:nvSpPr>
-        <p:spPr>
-          <a:xfrm>
-            <a:off x="548640" y="594360"/>
-            <a:ext cx="1097280" cy="54864"/>
-          </a:xfrm>
-          <a:prstGeom prst="rect">
-            <a:avLst/>
-          </a:prstGeom>
-          <a:solidFill>
-            <a:srgbClr val="7F0DF2"/>
-          </a:solidFill>
-          <a:ln>
-            <a:noFill/>
-          </a:ln>
-        </p:spPr>
-        <p:style>
-          <a:lnRef idx="1">
-            <a:schemeClr val="accent1"/>
-          </a:lnRef>
-          <a:fillRef idx="3">
-            <a:schemeClr val="accent1"/>
-          </a:fillRef>
-          <a:effectRef idx="2">
-            <a:schemeClr val="accent1"/>
-          </a:effectRef>
-          <a:fontRef idx="minor">
-            <a:schemeClr val="lt1"/>
-          </a:fontRef>
-        </p:style>
-        <p:txBody>
-          <a:bodyPr rtlCol="0" anchor="ctr"/>
-          <a:lstStyle/>
-          <a:p>
-            <a:pPr algn="ctr"/>
-          </a:p>
-        </p:txBody>
-      </p:sp>
-      <p:sp>
-        <p:nvSpPr>
-          <p:cNvPr id="4" name="TextBox 3"/>
+                <a:latin typeface="Times New Roman"/>
+              </a:rPr>
+              <a:t>Алгоритм адаптации плана</a:t>
+            </a:r>
+          </a:p>
+        </p:txBody>
+      </p:sp>
+      <p:sp>
+        <p:nvSpPr>
+          <p:cNvPr id="3" name="TextBox 2"/>
           <p:cNvSpPr txBox="1"/>
           <p:nvPr/>
         </p:nvSpPr>
         <p:spPr>
           <a:xfrm>
-            <a:off x="548640" y="1097280"/>
-            <a:ext cx="10972800" cy="5029200"/>
+            <a:off x="548640" y="1005840"/>
+            <a:ext cx="10972800" cy="731520"/>
           </a:xfrm>
           <a:prstGeom prst="rect">
             <a:avLst/>
@@ -4607,97 +4045,29 @@
           </a:bodyPr>
           <a:lstStyle/>
           <a:p>
-            <a:pPr algn="l">
-              <a:spcAft>
-                <a:spcPts val="800"/>
-              </a:spcAft>
-            </a:pPr>
-            <a:r>
-              <a:rPr sz="1800">
+            <a:pPr algn="l"/>
+            <a:r>
+              <a:rPr sz="2400" b="0">
                 <a:solidFill>
                   <a:srgbClr val="1F1F1F"/>
                 </a:solidFill>
-                <a:latin typeface="Calibri"/>
-              </a:rPr>
-              <a:t>•  Реализовано кроссплатформенное PWA-приложение с end-to-end интеграцией ML-моделей в продакшен (FastAPI + Flutter)</a:t>
-            </a:r>
-          </a:p>
-          <a:p>
-            <a:pPr algn="l">
-              <a:spcAft>
-                <a:spcPts val="800"/>
-              </a:spcAft>
-            </a:pPr>
-            <a:r>
-              <a:rPr sz="1800">
-                <a:solidFill>
-                  <a:srgbClr val="1F1F1F"/>
-                </a:solidFill>
-                <a:latin typeface="Calibri"/>
-              </a:rPr>
-              <a:t>•  Обучены и сравнены 4 модели прогноза InBody; LightGBM quantile обеспечивает R²=0.73 на Δ weight и калиброванный 80%-CI (0.79)</a:t>
-            </a:r>
-          </a:p>
-          <a:p>
-            <a:pPr algn="l">
-              <a:spcAft>
-                <a:spcPts val="800"/>
-              </a:spcAft>
-            </a:pPr>
-            <a:r>
-              <a:rPr sz="1800">
-                <a:solidFill>
-                  <a:srgbClr val="1F1F1F"/>
-                </a:solidFill>
-                <a:latin typeface="Calibri"/>
-              </a:rPr>
-              <a:t>•  Реализован watcher-сервис автоматической адаптации плана по 6 условиям срабатывания, покрыт 19 тестами</a:t>
-            </a:r>
-          </a:p>
-          <a:p>
-            <a:pPr algn="l">
-              <a:spcAft>
-                <a:spcPts val="800"/>
-              </a:spcAft>
-            </a:pPr>
-            <a:r>
-              <a:rPr sz="1800">
-                <a:solidFill>
-                  <a:srgbClr val="1F1F1F"/>
-                </a:solidFill>
-                <a:latin typeface="Calibri"/>
-              </a:rPr>
-              <a:t>•  Подтверждена гипотеза: квантильная регрессия даёт точный прогноз с адекватной калибровкой; снижение MAE на Δ weight 52% vs persistence</a:t>
-            </a:r>
-          </a:p>
-          <a:p>
-            <a:pPr algn="l">
-              <a:spcAft>
-                <a:spcPts val="800"/>
-              </a:spcAft>
-            </a:pPr>
-            <a:r>
-              <a:rPr sz="1800">
-                <a:solidFill>
-                  <a:srgbClr val="1F1F1F"/>
-                </a:solidFill>
-                <a:latin typeface="Calibri"/>
-              </a:rPr>
-              <a:t>•  Архитектура спроектирована с расчётом на отказоустойчивость: fallback на OLS-baseline при отсутствии ML-артефакта</a:t>
-            </a:r>
-          </a:p>
-        </p:txBody>
-      </p:sp>
-      <p:sp>
-        <p:nvSpPr>
-          <p:cNvPr id="5" name="TextBox 4"/>
+                <a:latin typeface="Times New Roman"/>
+              </a:rPr>
+              <a:t>Триггеры обновления плана:</a:t>
+            </a:r>
+          </a:p>
+        </p:txBody>
+      </p:sp>
+      <p:sp>
+        <p:nvSpPr>
+          <p:cNvPr id="4" name="TextBox 3"/>
           <p:cNvSpPr txBox="1"/>
           <p:nvPr/>
         </p:nvSpPr>
         <p:spPr>
           <a:xfrm>
-            <a:off x="548640" y="6446520"/>
-            <a:ext cx="5486400" cy="274320"/>
+            <a:off x="548640" y="2011680"/>
+            <a:ext cx="10972800" cy="4389120"/>
           </a:xfrm>
           <a:prstGeom prst="rect">
             <a:avLst/>
@@ -4705,34 +4075,98 @@
           <a:noFill/>
         </p:spPr>
         <p:txBody>
-          <a:bodyPr wrap="square">
+          <a:bodyPr wrap="square" anchor="ctr">
             <a:spAutoFit/>
           </a:bodyPr>
           <a:lstStyle/>
           <a:p>
-            <a:pPr algn="l"/>
-            <a:r>
-              <a:rPr sz="1000" b="0">
-                <a:solidFill>
-                  <a:srgbClr val="555555"/>
-                </a:solidFill>
-                <a:latin typeface="Calibri"/>
-              </a:rPr>
-              <a:t>Лапова М. С.  ·  ВКР 2026  ·  Fitness Tracker</a:t>
-            </a:r>
-          </a:p>
-        </p:txBody>
-      </p:sp>
-      <p:sp>
-        <p:nvSpPr>
-          <p:cNvPr id="6" name="TextBox 5"/>
+            <a:pPr algn="l">
+              <a:lnSpc>
+                <a:spcPct val="115000"/>
+              </a:lnSpc>
+              <a:spcAft>
+                <a:spcPts val="1800"/>
+              </a:spcAft>
+            </a:pPr>
+            <a:r>
+              <a:rPr sz="2600">
+                <a:solidFill>
+                  <a:srgbClr val="1F1F1F"/>
+                </a:solidFill>
+                <a:latin typeface="Times New Roman"/>
+              </a:rPr>
+              <a:t>•  Изменение веса более чем на 2 кг</a:t>
+            </a:r>
+          </a:p>
+          <a:p>
+            <a:pPr algn="l">
+              <a:lnSpc>
+                <a:spcPct val="115000"/>
+              </a:lnSpc>
+              <a:spcAft>
+                <a:spcPts val="1800"/>
+              </a:spcAft>
+            </a:pPr>
+            <a:r>
+              <a:rPr sz="2600">
+                <a:solidFill>
+                  <a:srgbClr val="1F1F1F"/>
+                </a:solidFill>
+                <a:latin typeface="Times New Roman"/>
+              </a:rPr>
+              <a:t>•  Изменение цели тренировок</a:t>
+            </a:r>
+          </a:p>
+          <a:p>
+            <a:pPr algn="l">
+              <a:lnSpc>
+                <a:spcPct val="115000"/>
+              </a:lnSpc>
+              <a:spcAft>
+                <a:spcPts val="1800"/>
+              </a:spcAft>
+            </a:pPr>
+            <a:r>
+              <a:rPr sz="2600">
+                <a:solidFill>
+                  <a:srgbClr val="1F1F1F"/>
+                </a:solidFill>
+                <a:latin typeface="Times New Roman"/>
+              </a:rPr>
+              <a:t>•  Изменение частоты тренировок</a:t>
+            </a:r>
+          </a:p>
+          <a:p>
+            <a:pPr algn="l">
+              <a:lnSpc>
+                <a:spcPct val="115000"/>
+              </a:lnSpc>
+              <a:spcAft>
+                <a:spcPts val="1800"/>
+              </a:spcAft>
+            </a:pPr>
+            <a:r>
+              <a:rPr sz="2600">
+                <a:solidFill>
+                  <a:srgbClr val="1F1F1F"/>
+                </a:solidFill>
+                <a:latin typeface="Times New Roman"/>
+              </a:rPr>
+              <a:t>•  Завершение 4-недельного цикла</a:t>
+            </a:r>
+          </a:p>
+        </p:txBody>
+      </p:sp>
+      <p:sp>
+        <p:nvSpPr>
+          <p:cNvPr id="5" name="TextBox 4"/>
           <p:cNvSpPr txBox="1"/>
           <p:nvPr/>
         </p:nvSpPr>
         <p:spPr>
           <a:xfrm>
-            <a:off x="10515600" y="6446520"/>
-            <a:ext cx="1188720" cy="274320"/>
+            <a:off x="10332720" y="6263640"/>
+            <a:ext cx="1371600" cy="457200"/>
           </a:xfrm>
           <a:prstGeom prst="rect">
             <a:avLst/>
@@ -4747,13 +4181,13 @@
           <a:p>
             <a:pPr algn="r"/>
             <a:r>
-              <a:rPr sz="1000" b="0">
+              <a:rPr sz="2000" b="0">
                 <a:solidFill>
                   <a:srgbClr val="555555"/>
                 </a:solidFill>
-                <a:latin typeface="Calibri"/>
-              </a:rPr>
-              <a:t>13 / 14</a:t>
+                <a:latin typeface="Times New Roman"/>
+              </a:rPr>
+              <a:t>13</a:t>
             </a:r>
           </a:p>
         </p:txBody>
@@ -4778,57 +4212,14 @@
       <p:grpSpPr/>
       <p:sp>
         <p:nvSpPr>
-          <p:cNvPr id="2" name="Rectangle 1"/>
-          <p:cNvSpPr/>
-          <p:nvPr/>
-        </p:nvSpPr>
-        <p:spPr>
-          <a:xfrm>
-            <a:off x="0" y="0"/>
-            <a:ext cx="12191695" cy="6858000"/>
-          </a:xfrm>
-          <a:prstGeom prst="rect">
-            <a:avLst/>
-          </a:prstGeom>
-          <a:solidFill>
-            <a:srgbClr val="141B2D"/>
-          </a:solidFill>
-          <a:ln>
-            <a:noFill/>
-          </a:ln>
-        </p:spPr>
-        <p:style>
-          <a:lnRef idx="1">
-            <a:schemeClr val="accent1"/>
-          </a:lnRef>
-          <a:fillRef idx="3">
-            <a:schemeClr val="accent1"/>
-          </a:fillRef>
-          <a:effectRef idx="2">
-            <a:schemeClr val="accent1"/>
-          </a:effectRef>
-          <a:fontRef idx="minor">
-            <a:schemeClr val="lt1"/>
-          </a:fontRef>
-        </p:style>
-        <p:txBody>
-          <a:bodyPr rtlCol="0" anchor="ctr"/>
-          <a:lstStyle/>
-          <a:p>
-            <a:pPr algn="ctr"/>
-          </a:p>
-        </p:txBody>
-      </p:sp>
-      <p:sp>
-        <p:nvSpPr>
-          <p:cNvPr id="3" name="TextBox 2"/>
+          <p:cNvPr id="2" name="TextBox 1"/>
           <p:cNvSpPr txBox="1"/>
           <p:nvPr/>
         </p:nvSpPr>
         <p:spPr>
           <a:xfrm>
-            <a:off x="548640" y="2286000"/>
-            <a:ext cx="10972800" cy="1371600"/>
+            <a:off x="548640" y="274320"/>
+            <a:ext cx="10972800" cy="548640"/>
           </a:xfrm>
           <a:prstGeom prst="rect">
             <a:avLst/>
@@ -4841,72 +4232,29 @@
           </a:bodyPr>
           <a:lstStyle/>
           <a:p>
-            <a:pPr algn="ctr"/>
-            <a:r>
-              <a:rPr sz="5400" b="1">
-                <a:solidFill>
-                  <a:srgbClr val="FFFFFF"/>
-                </a:solidFill>
-                <a:latin typeface="Calibri"/>
-              </a:rPr>
-              <a:t>Спасибо за внимание</a:t>
-            </a:r>
-          </a:p>
-        </p:txBody>
-      </p:sp>
-      <p:sp>
-        <p:nvSpPr>
-          <p:cNvPr id="4" name="Rectangle 3"/>
-          <p:cNvSpPr/>
-          <p:nvPr/>
-        </p:nvSpPr>
-        <p:spPr>
-          <a:xfrm>
-            <a:off x="5486400" y="3657600"/>
-            <a:ext cx="1188720" cy="73152"/>
-          </a:xfrm>
-          <a:prstGeom prst="rect">
-            <a:avLst/>
-          </a:prstGeom>
-          <a:solidFill>
-            <a:srgbClr val="7F0DF2"/>
-          </a:solidFill>
-          <a:ln>
-            <a:noFill/>
-          </a:ln>
-        </p:spPr>
-        <p:style>
-          <a:lnRef idx="1">
-            <a:schemeClr val="accent1"/>
-          </a:lnRef>
-          <a:fillRef idx="3">
-            <a:schemeClr val="accent1"/>
-          </a:fillRef>
-          <a:effectRef idx="2">
-            <a:schemeClr val="accent1"/>
-          </a:effectRef>
-          <a:fontRef idx="minor">
-            <a:schemeClr val="lt1"/>
-          </a:fontRef>
-        </p:style>
-        <p:txBody>
-          <a:bodyPr rtlCol="0" anchor="ctr"/>
-          <a:lstStyle/>
-          <a:p>
-            <a:pPr algn="ctr"/>
-          </a:p>
-        </p:txBody>
-      </p:sp>
-      <p:sp>
-        <p:nvSpPr>
-          <p:cNvPr id="5" name="TextBox 4"/>
+            <a:pPr algn="l"/>
+            <a:r>
+              <a:rPr sz="2800" b="1">
+                <a:solidFill>
+                  <a:srgbClr val="1F1F1F"/>
+                </a:solidFill>
+                <a:latin typeface="Times New Roman"/>
+              </a:rPr>
+              <a:t>Сравнение ошибок по моделям</a:t>
+            </a:r>
+          </a:p>
+        </p:txBody>
+      </p:sp>
+      <p:sp>
+        <p:nvSpPr>
+          <p:cNvPr id="3" name="TextBox 2"/>
           <p:cNvSpPr txBox="1"/>
           <p:nvPr/>
         </p:nvSpPr>
         <p:spPr>
           <a:xfrm>
-            <a:off x="548640" y="4023360"/>
-            <a:ext cx="10972800" cy="548640"/>
+            <a:off x="838047" y="1668780"/>
+            <a:ext cx="10515600" cy="365760"/>
           </a:xfrm>
           <a:prstGeom prst="rect">
             <a:avLst/>
@@ -4919,29 +4267,643 @@
           </a:bodyPr>
           <a:lstStyle/>
           <a:p>
-            <a:pPr algn="ctr"/>
-            <a:r>
-              <a:rPr sz="2000" b="0">
-                <a:solidFill>
-                  <a:srgbClr val="BBBBBB"/>
-                </a:solidFill>
-                <a:latin typeface="Calibri"/>
-              </a:rPr>
-              <a:t>Готова ответить на вопросы</a:t>
-            </a:r>
-          </a:p>
-        </p:txBody>
-      </p:sp>
-      <p:sp>
-        <p:nvSpPr>
-          <p:cNvPr id="6" name="TextBox 5"/>
+            <a:pPr algn="r"/>
+            <a:r>
+              <a:rPr sz="1400" b="0">
+                <a:solidFill>
+                  <a:srgbClr val="1F1F1F"/>
+                </a:solidFill>
+                <a:latin typeface="Times New Roman"/>
+              </a:rPr>
+              <a:t>Таблица 3. Сравнение ошибок по моделям</a:t>
+            </a:r>
+          </a:p>
+        </p:txBody>
+      </p:sp>
+      <p:graphicFrame>
+        <p:nvGraphicFramePr>
+          <p:cNvPr id="4" name="Table 3"/>
+          <p:cNvGraphicFramePr>
+            <a:graphicFrameLocks noGrp="1"/>
+          </p:cNvGraphicFramePr>
+          <p:nvPr/>
+        </p:nvGraphicFramePr>
+        <p:xfrm>
+          <a:off x="838047" y="2125980"/>
+          <a:ext cx="10515600" cy="3703320"/>
+        </p:xfrm>
+        <a:graphic>
+          <a:graphicData uri="http://schemas.openxmlformats.org/drawingml/2006/table">
+            <a:tbl>
+              <a:tblPr firstRow="0" bandRow="0">
+                <a:tableStyleId>{5940675A-B579-460E-94D1-54222C63F5DA}</a:tableStyleId>
+              </a:tblPr>
+              <a:tblGrid>
+                <a:gridCol w="2103120"/>
+                <a:gridCol w="2103120"/>
+                <a:gridCol w="2103120"/>
+                <a:gridCol w="2103120"/>
+                <a:gridCol w="2103120"/>
+              </a:tblGrid>
+              <a:tr h="594360">
+                <a:tc>
+                  <a:txBody>
+                    <a:bodyPr/>
+                    <a:lstStyle/>
+                    <a:p>
+                      <a:pPr algn="ctr"/>
+                      <a:r>
+                        <a:rPr sz="1800" b="1">
+                          <a:solidFill>
+                            <a:srgbClr val="FFFFFF"/>
+                          </a:solidFill>
+                          <a:latin typeface="Times New Roman"/>
+                        </a:rPr>
+                        <a:t>Модель</a:t>
+                      </a:r>
+                    </a:p>
+                  </a:txBody>
+                  <a:tcPr anchor="ctr">
+                    <a:solidFill>
+                      <a:srgbClr val="000000"/>
+                    </a:solidFill>
+                  </a:tcPr>
+                </a:tc>
+                <a:tc>
+                  <a:txBody>
+                    <a:bodyPr/>
+                    <a:lstStyle/>
+                    <a:p>
+                      <a:pPr algn="ctr"/>
+                      <a:r>
+                        <a:rPr sz="1800" b="1">
+                          <a:solidFill>
+                            <a:srgbClr val="FFFFFF"/>
+                          </a:solidFill>
+                          <a:latin typeface="Times New Roman"/>
+                        </a:rPr>
+                        <a:t>MAE, кг</a:t>
+                      </a:r>
+                    </a:p>
+                  </a:txBody>
+                  <a:tcPr anchor="ctr">
+                    <a:solidFill>
+                      <a:srgbClr val="000000"/>
+                    </a:solidFill>
+                  </a:tcPr>
+                </a:tc>
+                <a:tc>
+                  <a:txBody>
+                    <a:bodyPr/>
+                    <a:lstStyle/>
+                    <a:p>
+                      <a:pPr algn="ctr"/>
+                      <a:r>
+                        <a:rPr sz="1800" b="1">
+                          <a:solidFill>
+                            <a:srgbClr val="FFFFFF"/>
+                          </a:solidFill>
+                          <a:latin typeface="Times New Roman"/>
+                        </a:rPr>
+                        <a:t>RMSE, кг</a:t>
+                      </a:r>
+                    </a:p>
+                  </a:txBody>
+                  <a:tcPr anchor="ctr">
+                    <a:solidFill>
+                      <a:srgbClr val="000000"/>
+                    </a:solidFill>
+                  </a:tcPr>
+                </a:tc>
+                <a:tc>
+                  <a:txBody>
+                    <a:bodyPr/>
+                    <a:lstStyle/>
+                    <a:p>
+                      <a:pPr algn="ctr"/>
+                      <a:r>
+                        <a:rPr sz="1800" b="1">
+                          <a:solidFill>
+                            <a:srgbClr val="FFFFFF"/>
+                          </a:solidFill>
+                          <a:latin typeface="Times New Roman"/>
+                        </a:rPr>
+                        <a:t>R²</a:t>
+                      </a:r>
+                    </a:p>
+                  </a:txBody>
+                  <a:tcPr anchor="ctr">
+                    <a:solidFill>
+                      <a:srgbClr val="000000"/>
+                    </a:solidFill>
+                  </a:tcPr>
+                </a:tc>
+                <a:tc>
+                  <a:txBody>
+                    <a:bodyPr/>
+                    <a:lstStyle/>
+                    <a:p>
+                      <a:pPr algn="ctr"/>
+                      <a:r>
+                        <a:rPr sz="1800" b="1">
+                          <a:solidFill>
+                            <a:srgbClr val="FFFFFF"/>
+                          </a:solidFill>
+                          <a:latin typeface="Times New Roman"/>
+                        </a:rPr>
+                        <a:t>Лучше baseline на</a:t>
+                      </a:r>
+                    </a:p>
+                  </a:txBody>
+                  <a:tcPr anchor="ctr">
+                    <a:solidFill>
+                      <a:srgbClr val="000000"/>
+                    </a:solidFill>
+                  </a:tcPr>
+                </a:tc>
+              </a:tr>
+              <a:tr h="777240">
+                <a:tc>
+                  <a:txBody>
+                    <a:bodyPr/>
+                    <a:lstStyle/>
+                    <a:p>
+                      <a:pPr algn="l"/>
+                      <a:r>
+                        <a:rPr sz="1600" b="0">
+                          <a:solidFill>
+                            <a:srgbClr val="1F1F1F"/>
+                          </a:solidFill>
+                          <a:latin typeface="Times New Roman"/>
+                        </a:rPr>
+                        <a:t>Persistence (baseline)</a:t>
+                      </a:r>
+                    </a:p>
+                  </a:txBody>
+                  <a:tcPr anchor="ctr">
+                    <a:solidFill>
+                      <a:srgbClr val="FFFFFF"/>
+                    </a:solidFill>
+                  </a:tcPr>
+                </a:tc>
+                <a:tc>
+                  <a:txBody>
+                    <a:bodyPr/>
+                    <a:lstStyle/>
+                    <a:p>
+                      <a:pPr algn="ctr"/>
+                      <a:r>
+                        <a:rPr sz="1600" b="0">
+                          <a:solidFill>
+                            <a:srgbClr val="1F1F1F"/>
+                          </a:solidFill>
+                          <a:latin typeface="Times New Roman"/>
+                        </a:rPr>
+                        <a:t>0,325</a:t>
+                      </a:r>
+                    </a:p>
+                  </a:txBody>
+                  <a:tcPr anchor="ctr">
+                    <a:solidFill>
+                      <a:srgbClr val="FFFFFF"/>
+                    </a:solidFill>
+                  </a:tcPr>
+                </a:tc>
+                <a:tc>
+                  <a:txBody>
+                    <a:bodyPr/>
+                    <a:lstStyle/>
+                    <a:p>
+                      <a:pPr algn="ctr"/>
+                      <a:r>
+                        <a:rPr sz="1600" b="0">
+                          <a:solidFill>
+                            <a:srgbClr val="1F1F1F"/>
+                          </a:solidFill>
+                          <a:latin typeface="Times New Roman"/>
+                        </a:rPr>
+                        <a:t>0,399</a:t>
+                      </a:r>
+                    </a:p>
+                  </a:txBody>
+                  <a:tcPr anchor="ctr">
+                    <a:solidFill>
+                      <a:srgbClr val="FFFFFF"/>
+                    </a:solidFill>
+                  </a:tcPr>
+                </a:tc>
+                <a:tc>
+                  <a:txBody>
+                    <a:bodyPr/>
+                    <a:lstStyle/>
+                    <a:p>
+                      <a:pPr algn="ctr"/>
+                      <a:r>
+                        <a:rPr sz="1600" b="0">
+                          <a:solidFill>
+                            <a:srgbClr val="1F1F1F"/>
+                          </a:solidFill>
+                          <a:latin typeface="Times New Roman"/>
+                        </a:rPr>
+                        <a:t>−0,13</a:t>
+                      </a:r>
+                    </a:p>
+                  </a:txBody>
+                  <a:tcPr anchor="ctr">
+                    <a:solidFill>
+                      <a:srgbClr val="FFFFFF"/>
+                    </a:solidFill>
+                  </a:tcPr>
+                </a:tc>
+                <a:tc>
+                  <a:txBody>
+                    <a:bodyPr/>
+                    <a:lstStyle/>
+                    <a:p>
+                      <a:pPr algn="ctr"/>
+                      <a:r>
+                        <a:rPr sz="1600" b="0">
+                          <a:solidFill>
+                            <a:srgbClr val="1F1F1F"/>
+                          </a:solidFill>
+                          <a:latin typeface="Times New Roman"/>
+                        </a:rPr>
+                        <a:t>—</a:t>
+                      </a:r>
+                    </a:p>
+                  </a:txBody>
+                  <a:tcPr anchor="ctr">
+                    <a:solidFill>
+                      <a:srgbClr val="FFFFFF"/>
+                    </a:solidFill>
+                  </a:tcPr>
+                </a:tc>
+              </a:tr>
+              <a:tr h="777240">
+                <a:tc>
+                  <a:txBody>
+                    <a:bodyPr/>
+                    <a:lstStyle/>
+                    <a:p>
+                      <a:pPr algn="l"/>
+                      <a:r>
+                        <a:rPr sz="1600" b="0">
+                          <a:solidFill>
+                            <a:srgbClr val="1F1F1F"/>
+                          </a:solidFill>
+                          <a:latin typeface="Times New Roman"/>
+                        </a:rPr>
+                        <a:t>Ridge</a:t>
+                      </a:r>
+                    </a:p>
+                  </a:txBody>
+                  <a:tcPr anchor="ctr">
+                    <a:solidFill>
+                      <a:srgbClr val="FFFFFF"/>
+                    </a:solidFill>
+                  </a:tcPr>
+                </a:tc>
+                <a:tc>
+                  <a:txBody>
+                    <a:bodyPr/>
+                    <a:lstStyle/>
+                    <a:p>
+                      <a:pPr algn="ctr"/>
+                      <a:r>
+                        <a:rPr sz="1600" b="0">
+                          <a:solidFill>
+                            <a:srgbClr val="1F1F1F"/>
+                          </a:solidFill>
+                          <a:latin typeface="Times New Roman"/>
+                        </a:rPr>
+                        <a:t>0,168</a:t>
+                      </a:r>
+                    </a:p>
+                  </a:txBody>
+                  <a:tcPr anchor="ctr">
+                    <a:solidFill>
+                      <a:srgbClr val="FFFFFF"/>
+                    </a:solidFill>
+                  </a:tcPr>
+                </a:tc>
+                <a:tc>
+                  <a:txBody>
+                    <a:bodyPr/>
+                    <a:lstStyle/>
+                    <a:p>
+                      <a:pPr algn="ctr"/>
+                      <a:r>
+                        <a:rPr sz="1600" b="0">
+                          <a:solidFill>
+                            <a:srgbClr val="1F1F1F"/>
+                          </a:solidFill>
+                          <a:latin typeface="Times New Roman"/>
+                        </a:rPr>
+                        <a:t>0,210</a:t>
+                      </a:r>
+                    </a:p>
+                  </a:txBody>
+                  <a:tcPr anchor="ctr">
+                    <a:solidFill>
+                      <a:srgbClr val="FFFFFF"/>
+                    </a:solidFill>
+                  </a:tcPr>
+                </a:tc>
+                <a:tc>
+                  <a:txBody>
+                    <a:bodyPr/>
+                    <a:lstStyle/>
+                    <a:p>
+                      <a:pPr algn="ctr"/>
+                      <a:r>
+                        <a:rPr sz="1600" b="0">
+                          <a:solidFill>
+                            <a:srgbClr val="1F1F1F"/>
+                          </a:solidFill>
+                          <a:latin typeface="Times New Roman"/>
+                        </a:rPr>
+                        <a:t>0,69</a:t>
+                      </a:r>
+                    </a:p>
+                  </a:txBody>
+                  <a:tcPr anchor="ctr">
+                    <a:solidFill>
+                      <a:srgbClr val="FFFFFF"/>
+                    </a:solidFill>
+                  </a:tcPr>
+                </a:tc>
+                <a:tc>
+                  <a:txBody>
+                    <a:bodyPr/>
+                    <a:lstStyle/>
+                    <a:p>
+                      <a:pPr algn="ctr"/>
+                      <a:r>
+                        <a:rPr sz="1600" b="0">
+                          <a:solidFill>
+                            <a:srgbClr val="1F1F1F"/>
+                          </a:solidFill>
+                          <a:latin typeface="Times New Roman"/>
+                        </a:rPr>
+                        <a:t>48 %</a:t>
+                      </a:r>
+                    </a:p>
+                  </a:txBody>
+                  <a:tcPr anchor="ctr">
+                    <a:solidFill>
+                      <a:srgbClr val="FFFFFF"/>
+                    </a:solidFill>
+                  </a:tcPr>
+                </a:tc>
+              </a:tr>
+              <a:tr h="777240">
+                <a:tc>
+                  <a:txBody>
+                    <a:bodyPr/>
+                    <a:lstStyle/>
+                    <a:p>
+                      <a:pPr algn="l"/>
+                      <a:r>
+                        <a:rPr sz="1600" b="1">
+                          <a:solidFill>
+                            <a:srgbClr val="FFFFFF"/>
+                          </a:solidFill>
+                          <a:latin typeface="Times New Roman"/>
+                        </a:rPr>
+                        <a:t>LightGBM (основная)</a:t>
+                      </a:r>
+                    </a:p>
+                  </a:txBody>
+                  <a:tcPr anchor="ctr">
+                    <a:solidFill>
+                      <a:srgbClr val="000000"/>
+                    </a:solidFill>
+                  </a:tcPr>
+                </a:tc>
+                <a:tc>
+                  <a:txBody>
+                    <a:bodyPr/>
+                    <a:lstStyle/>
+                    <a:p>
+                      <a:pPr algn="ctr"/>
+                      <a:r>
+                        <a:rPr sz="1600" b="1">
+                          <a:solidFill>
+                            <a:srgbClr val="FFFFFF"/>
+                          </a:solidFill>
+                          <a:latin typeface="Times New Roman"/>
+                        </a:rPr>
+                        <a:t>0,156</a:t>
+                      </a:r>
+                    </a:p>
+                  </a:txBody>
+                  <a:tcPr anchor="ctr">
+                    <a:solidFill>
+                      <a:srgbClr val="000000"/>
+                    </a:solidFill>
+                  </a:tcPr>
+                </a:tc>
+                <a:tc>
+                  <a:txBody>
+                    <a:bodyPr/>
+                    <a:lstStyle/>
+                    <a:p>
+                      <a:pPr algn="ctr"/>
+                      <a:r>
+                        <a:rPr sz="1600" b="1">
+                          <a:solidFill>
+                            <a:srgbClr val="FFFFFF"/>
+                          </a:solidFill>
+                          <a:latin typeface="Times New Roman"/>
+                        </a:rPr>
+                        <a:t>0,196</a:t>
+                      </a:r>
+                    </a:p>
+                  </a:txBody>
+                  <a:tcPr anchor="ctr">
+                    <a:solidFill>
+                      <a:srgbClr val="000000"/>
+                    </a:solidFill>
+                  </a:tcPr>
+                </a:tc>
+                <a:tc>
+                  <a:txBody>
+                    <a:bodyPr/>
+                    <a:lstStyle/>
+                    <a:p>
+                      <a:pPr algn="ctr"/>
+                      <a:r>
+                        <a:rPr sz="1600" b="1">
+                          <a:solidFill>
+                            <a:srgbClr val="FFFFFF"/>
+                          </a:solidFill>
+                          <a:latin typeface="Times New Roman"/>
+                        </a:rPr>
+                        <a:t>0,73</a:t>
+                      </a:r>
+                    </a:p>
+                  </a:txBody>
+                  <a:tcPr anchor="ctr">
+                    <a:solidFill>
+                      <a:srgbClr val="000000"/>
+                    </a:solidFill>
+                  </a:tcPr>
+                </a:tc>
+                <a:tc>
+                  <a:txBody>
+                    <a:bodyPr/>
+                    <a:lstStyle/>
+                    <a:p>
+                      <a:pPr algn="ctr"/>
+                      <a:r>
+                        <a:rPr sz="1600" b="1">
+                          <a:solidFill>
+                            <a:srgbClr val="FFFFFF"/>
+                          </a:solidFill>
+                          <a:latin typeface="Times New Roman"/>
+                        </a:rPr>
+                        <a:t>52 %</a:t>
+                      </a:r>
+                    </a:p>
+                  </a:txBody>
+                  <a:tcPr anchor="ctr">
+                    <a:solidFill>
+                      <a:srgbClr val="000000"/>
+                    </a:solidFill>
+                  </a:tcPr>
+                </a:tc>
+              </a:tr>
+              <a:tr h="777240">
+                <a:tc>
+                  <a:txBody>
+                    <a:bodyPr/>
+                    <a:lstStyle/>
+                    <a:p>
+                      <a:pPr algn="l"/>
+                      <a:r>
+                        <a:rPr sz="1600" b="0">
+                          <a:solidFill>
+                            <a:srgbClr val="1F1F1F"/>
+                          </a:solidFill>
+                          <a:latin typeface="Times New Roman"/>
+                        </a:rPr>
+                        <a:t>Нейросеть (PyTorch)</a:t>
+                      </a:r>
+                    </a:p>
+                  </a:txBody>
+                  <a:tcPr anchor="ctr">
+                    <a:solidFill>
+                      <a:srgbClr val="FFFFFF"/>
+                    </a:solidFill>
+                  </a:tcPr>
+                </a:tc>
+                <a:tc>
+                  <a:txBody>
+                    <a:bodyPr/>
+                    <a:lstStyle/>
+                    <a:p>
+                      <a:pPr algn="ctr"/>
+                      <a:r>
+                        <a:rPr sz="1600" b="0">
+                          <a:solidFill>
+                            <a:srgbClr val="1F1F1F"/>
+                          </a:solidFill>
+                          <a:latin typeface="Times New Roman"/>
+                        </a:rPr>
+                        <a:t>0,156</a:t>
+                      </a:r>
+                    </a:p>
+                  </a:txBody>
+                  <a:tcPr anchor="ctr">
+                    <a:solidFill>
+                      <a:srgbClr val="FFFFFF"/>
+                    </a:solidFill>
+                  </a:tcPr>
+                </a:tc>
+                <a:tc>
+                  <a:txBody>
+                    <a:bodyPr/>
+                    <a:lstStyle/>
+                    <a:p>
+                      <a:pPr algn="ctr"/>
+                      <a:r>
+                        <a:rPr sz="1600" b="0">
+                          <a:solidFill>
+                            <a:srgbClr val="1F1F1F"/>
+                          </a:solidFill>
+                          <a:latin typeface="Times New Roman"/>
+                        </a:rPr>
+                        <a:t>0,196</a:t>
+                      </a:r>
+                    </a:p>
+                  </a:txBody>
+                  <a:tcPr anchor="ctr">
+                    <a:solidFill>
+                      <a:srgbClr val="FFFFFF"/>
+                    </a:solidFill>
+                  </a:tcPr>
+                </a:tc>
+                <a:tc>
+                  <a:txBody>
+                    <a:bodyPr/>
+                    <a:lstStyle/>
+                    <a:p>
+                      <a:pPr algn="ctr"/>
+                      <a:r>
+                        <a:rPr sz="1600" b="0">
+                          <a:solidFill>
+                            <a:srgbClr val="1F1F1F"/>
+                          </a:solidFill>
+                          <a:latin typeface="Times New Roman"/>
+                        </a:rPr>
+                        <a:t>0,73</a:t>
+                      </a:r>
+                    </a:p>
+                  </a:txBody>
+                  <a:tcPr anchor="ctr">
+                    <a:solidFill>
+                      <a:srgbClr val="FFFFFF"/>
+                    </a:solidFill>
+                  </a:tcPr>
+                </a:tc>
+                <a:tc>
+                  <a:txBody>
+                    <a:bodyPr/>
+                    <a:lstStyle/>
+                    <a:p>
+                      <a:pPr algn="ctr"/>
+                      <a:r>
+                        <a:rPr sz="1600" b="0">
+                          <a:solidFill>
+                            <a:srgbClr val="1F1F1F"/>
+                          </a:solidFill>
+                          <a:latin typeface="Times New Roman"/>
+                        </a:rPr>
+                        <a:t>52 %</a:t>
+                      </a:r>
+                    </a:p>
+                  </a:txBody>
+                  <a:tcPr anchor="ctr">
+                    <a:solidFill>
+                      <a:srgbClr val="FFFFFF"/>
+                    </a:solidFill>
+                  </a:tcPr>
+                </a:tc>
+              </a:tr>
+            </a:tbl>
+          </a:graphicData>
+        </a:graphic>
+      </p:graphicFrame>
+      <p:sp>
+        <p:nvSpPr>
+          <p:cNvPr id="5" name="TextBox 4"/>
           <p:cNvSpPr txBox="1"/>
           <p:nvPr/>
         </p:nvSpPr>
         <p:spPr>
           <a:xfrm>
-            <a:off x="548640" y="5029200"/>
-            <a:ext cx="10972800" cy="457200"/>
+            <a:off x="10332720" y="6263640"/>
+            <a:ext cx="1371600" cy="457200"/>
           </a:xfrm>
           <a:prstGeom prst="rect">
             <a:avLst/>
@@ -4954,29 +4916,47 @@
           </a:bodyPr>
           <a:lstStyle/>
           <a:p>
-            <a:pPr algn="ctr"/>
-            <a:r>
-              <a:rPr sz="1600" b="0">
-                <a:solidFill>
-                  <a:srgbClr val="FFFFFF"/>
-                </a:solidFill>
-                <a:latin typeface="Calibri"/>
-              </a:rPr>
-              <a:t>Лапова Мария Сергеевна · группа МММ-401-О-03</a:t>
-            </a:r>
-          </a:p>
-        </p:txBody>
-      </p:sp>
-      <p:sp>
-        <p:nvSpPr>
-          <p:cNvPr id="7" name="TextBox 6"/>
+            <a:pPr algn="r"/>
+            <a:r>
+              <a:rPr sz="2000" b="0">
+                <a:solidFill>
+                  <a:srgbClr val="555555"/>
+                </a:solidFill>
+                <a:latin typeface="Times New Roman"/>
+              </a:rPr>
+              <a:t>14</a:t>
+            </a:r>
+          </a:p>
+        </p:txBody>
+      </p:sp>
+    </p:spTree>
+  </p:cSld>
+  <p:clrMapOvr>
+    <a:masterClrMapping/>
+  </p:clrMapOvr>
+</p:sld>
+</file>
+
+<file path=ppt/slides/slide15.xml><?xml version="1.0" encoding="utf-8"?>
+<p:sld xmlns:a="http://schemas.openxmlformats.org/drawingml/2006/main" xmlns:p="http://schemas.openxmlformats.org/presentationml/2006/main" xmlns:r="http://schemas.openxmlformats.org/officeDocument/2006/relationships">
+  <p:cSld>
+    <p:spTree>
+      <p:nvGrpSpPr>
+        <p:cNvPr id="1" name=""/>
+        <p:cNvGrpSpPr/>
+        <p:nvPr/>
+      </p:nvGrpSpPr>
+      <p:grpSpPr/>
+      <p:sp>
+        <p:nvSpPr>
+          <p:cNvPr id="2" name="TextBox 1"/>
           <p:cNvSpPr txBox="1"/>
           <p:nvPr/>
         </p:nvSpPr>
         <p:spPr>
           <a:xfrm>
-            <a:off x="548640" y="5440680"/>
-            <a:ext cx="10972800" cy="365760"/>
+            <a:off x="548640" y="274320"/>
+            <a:ext cx="10972800" cy="548640"/>
           </a:xfrm>
           <a:prstGeom prst="rect">
             <a:avLst/>
@@ -4989,19 +4969,377 @@
           </a:bodyPr>
           <a:lstStyle/>
           <a:p>
+            <a:pPr algn="l"/>
+            <a:r>
+              <a:rPr sz="2800" b="1">
+                <a:solidFill>
+                  <a:srgbClr val="1F1F1F"/>
+                </a:solidFill>
+                <a:latin typeface="Times New Roman"/>
+              </a:rPr>
+              <a:t>Результаты: сравнение моделей</a:t>
+            </a:r>
+          </a:p>
+        </p:txBody>
+      </p:sp>
+      <p:pic>
+        <p:nvPicPr>
+          <p:cNvPr id="3" name="Picture 2" descr="image.png"/>
+          <p:cNvPicPr>
+            <a:picLocks noChangeAspect="1"/>
+          </p:cNvPicPr>
+          <p:nvPr/>
+        </p:nvPicPr>
+        <p:blipFill>
+          <a:blip r:embed="rId2"/>
+          <a:stretch>
+            <a:fillRect/>
+          </a:stretch>
+        </p:blipFill>
+        <p:spPr>
+          <a:xfrm>
+            <a:off x="1292448" y="960120"/>
+            <a:ext cx="9606798" cy="4754880"/>
+          </a:xfrm>
+          <a:prstGeom prst="rect">
+            <a:avLst/>
+          </a:prstGeom>
+        </p:spPr>
+      </p:pic>
+      <p:sp>
+        <p:nvSpPr>
+          <p:cNvPr id="4" name="TextBox 3"/>
+          <p:cNvSpPr txBox="1"/>
+          <p:nvPr/>
+        </p:nvSpPr>
+        <p:spPr>
+          <a:xfrm>
+            <a:off x="548640" y="5852160"/>
+            <a:ext cx="10972800" cy="457200"/>
+          </a:xfrm>
+          <a:prstGeom prst="rect">
+            <a:avLst/>
+          </a:prstGeom>
+          <a:noFill/>
+        </p:spPr>
+        <p:txBody>
+          <a:bodyPr wrap="square">
+            <a:spAutoFit/>
+          </a:bodyPr>
+          <a:lstStyle/>
+          <a:p>
             <a:pPr algn="ctr"/>
             <a:r>
-              <a:rPr sz="1200" b="0">
-                <a:solidFill>
-                  <a:srgbClr val="BBBBBB"/>
-                </a:solidFill>
-                <a:latin typeface="Calibri"/>
-              </a:rPr>
-              <a:t>Омск · 2026</a:t>
-            </a:r>
-          </a:p>
-        </p:txBody>
-      </p:sp>
+              <a:rPr sz="1400" b="0">
+                <a:solidFill>
+                  <a:srgbClr val="555555"/>
+                </a:solidFill>
+                <a:latin typeface="Times New Roman"/>
+              </a:rPr>
+              <a:t>Рис. 5. MAE четырёх моделей на тестовой выборке</a:t>
+            </a:r>
+          </a:p>
+        </p:txBody>
+      </p:sp>
+      <p:sp>
+        <p:nvSpPr>
+          <p:cNvPr id="5" name="TextBox 4"/>
+          <p:cNvSpPr txBox="1"/>
+          <p:nvPr/>
+        </p:nvSpPr>
+        <p:spPr>
+          <a:xfrm>
+            <a:off x="10332720" y="6263640"/>
+            <a:ext cx="1371600" cy="457200"/>
+          </a:xfrm>
+          <a:prstGeom prst="rect">
+            <a:avLst/>
+          </a:prstGeom>
+          <a:noFill/>
+        </p:spPr>
+        <p:txBody>
+          <a:bodyPr wrap="square">
+            <a:spAutoFit/>
+          </a:bodyPr>
+          <a:lstStyle/>
+          <a:p>
+            <a:pPr algn="r"/>
+            <a:r>
+              <a:rPr sz="2000" b="0">
+                <a:solidFill>
+                  <a:srgbClr val="555555"/>
+                </a:solidFill>
+                <a:latin typeface="Times New Roman"/>
+              </a:rPr>
+              <a:t>15</a:t>
+            </a:r>
+          </a:p>
+        </p:txBody>
+      </p:sp>
+    </p:spTree>
+  </p:cSld>
+  <p:clrMapOvr>
+    <a:masterClrMapping/>
+  </p:clrMapOvr>
+</p:sld>
+</file>
+
+<file path=ppt/slides/slide16.xml><?xml version="1.0" encoding="utf-8"?>
+<p:sld xmlns:a="http://schemas.openxmlformats.org/drawingml/2006/main" xmlns:p="http://schemas.openxmlformats.org/presentationml/2006/main" xmlns:r="http://schemas.openxmlformats.org/officeDocument/2006/relationships">
+  <p:cSld>
+    <p:spTree>
+      <p:nvGrpSpPr>
+        <p:cNvPr id="1" name=""/>
+        <p:cNvGrpSpPr/>
+        <p:nvPr/>
+      </p:nvGrpSpPr>
+      <p:grpSpPr/>
+      <p:sp>
+        <p:nvSpPr>
+          <p:cNvPr id="2" name="TextBox 1"/>
+          <p:cNvSpPr txBox="1"/>
+          <p:nvPr/>
+        </p:nvSpPr>
+        <p:spPr>
+          <a:xfrm>
+            <a:off x="548640" y="274320"/>
+            <a:ext cx="10972800" cy="548640"/>
+          </a:xfrm>
+          <a:prstGeom prst="rect">
+            <a:avLst/>
+          </a:prstGeom>
+          <a:noFill/>
+        </p:spPr>
+        <p:txBody>
+          <a:bodyPr wrap="square">
+            <a:spAutoFit/>
+          </a:bodyPr>
+          <a:lstStyle/>
+          <a:p>
+            <a:pPr algn="l"/>
+            <a:r>
+              <a:rPr sz="2800" b="1">
+                <a:solidFill>
+                  <a:srgbClr val="1F1F1F"/>
+                </a:solidFill>
+                <a:latin typeface="Times New Roman"/>
+              </a:rPr>
+              <a:t>Выводы</a:t>
+            </a:r>
+          </a:p>
+        </p:txBody>
+      </p:sp>
+      <p:sp>
+        <p:nvSpPr>
+          <p:cNvPr id="3" name="TextBox 2"/>
+          <p:cNvSpPr txBox="1"/>
+          <p:nvPr/>
+        </p:nvSpPr>
+        <p:spPr>
+          <a:xfrm>
+            <a:off x="548640" y="1097280"/>
+            <a:ext cx="10972800" cy="5120640"/>
+          </a:xfrm>
+          <a:prstGeom prst="rect">
+            <a:avLst/>
+          </a:prstGeom>
+          <a:noFill/>
+        </p:spPr>
+        <p:txBody>
+          <a:bodyPr wrap="square" anchor="ctr">
+            <a:spAutoFit/>
+          </a:bodyPr>
+          <a:lstStyle/>
+          <a:p>
+            <a:pPr algn="l">
+              <a:lnSpc>
+                <a:spcPct val="115000"/>
+              </a:lnSpc>
+              <a:spcAft>
+                <a:spcPts val="1800"/>
+              </a:spcAft>
+            </a:pPr>
+            <a:r>
+              <a:rPr sz="2800">
+                <a:solidFill>
+                  <a:srgbClr val="1F1F1F"/>
+                </a:solidFill>
+                <a:latin typeface="Times New Roman"/>
+              </a:rPr>
+              <a:t>•  Создано приложение Portal (FastAPI + Flutter)</a:t>
+            </a:r>
+          </a:p>
+          <a:p>
+            <a:pPr algn="l">
+              <a:lnSpc>
+                <a:spcPct val="115000"/>
+              </a:lnSpc>
+              <a:spcAft>
+                <a:spcPts val="1800"/>
+              </a:spcAft>
+            </a:pPr>
+            <a:r>
+              <a:rPr sz="2800">
+                <a:solidFill>
+                  <a:srgbClr val="1F1F1F"/>
+                </a:solidFill>
+                <a:latin typeface="Times New Roman"/>
+              </a:rPr>
+              <a:t>•  Реализован прогноз состава тела (R² = 0,73)</a:t>
+            </a:r>
+          </a:p>
+          <a:p>
+            <a:pPr algn="l">
+              <a:lnSpc>
+                <a:spcPct val="115000"/>
+              </a:lnSpc>
+              <a:spcAft>
+                <a:spcPts val="1800"/>
+              </a:spcAft>
+            </a:pPr>
+            <a:r>
+              <a:rPr sz="2800">
+                <a:solidFill>
+                  <a:srgbClr val="1F1F1F"/>
+                </a:solidFill>
+                <a:latin typeface="Times New Roman"/>
+              </a:rPr>
+              <a:t>•  Реализована автоадаптация тренировок</a:t>
+            </a:r>
+          </a:p>
+          <a:p>
+            <a:pPr algn="l">
+              <a:lnSpc>
+                <a:spcPct val="115000"/>
+              </a:lnSpc>
+              <a:spcAft>
+                <a:spcPts val="1800"/>
+              </a:spcAft>
+            </a:pPr>
+            <a:r>
+              <a:rPr sz="2800">
+                <a:solidFill>
+                  <a:srgbClr val="1F1F1F"/>
+                </a:solidFill>
+                <a:latin typeface="Times New Roman"/>
+              </a:rPr>
+              <a:t>•  Подтверждена работоспособность системы</a:t>
+            </a:r>
+          </a:p>
+        </p:txBody>
+      </p:sp>
+      <p:sp>
+        <p:nvSpPr>
+          <p:cNvPr id="4" name="TextBox 3"/>
+          <p:cNvSpPr txBox="1"/>
+          <p:nvPr/>
+        </p:nvSpPr>
+        <p:spPr>
+          <a:xfrm>
+            <a:off x="10332720" y="6263640"/>
+            <a:ext cx="1371600" cy="457200"/>
+          </a:xfrm>
+          <a:prstGeom prst="rect">
+            <a:avLst/>
+          </a:prstGeom>
+          <a:noFill/>
+        </p:spPr>
+        <p:txBody>
+          <a:bodyPr wrap="square">
+            <a:spAutoFit/>
+          </a:bodyPr>
+          <a:lstStyle/>
+          <a:p>
+            <a:pPr algn="r"/>
+            <a:r>
+              <a:rPr sz="2000" b="0">
+                <a:solidFill>
+                  <a:srgbClr val="555555"/>
+                </a:solidFill>
+                <a:latin typeface="Times New Roman"/>
+              </a:rPr>
+              <a:t>16</a:t>
+            </a:r>
+          </a:p>
+        </p:txBody>
+      </p:sp>
+    </p:spTree>
+  </p:cSld>
+  <p:clrMapOvr>
+    <a:masterClrMapping/>
+  </p:clrMapOvr>
+</p:sld>
+</file>
+
+<file path=ppt/slides/slide17.xml><?xml version="1.0" encoding="utf-8"?>
+<p:sld xmlns:a="http://schemas.openxmlformats.org/drawingml/2006/main" xmlns:p="http://schemas.openxmlformats.org/presentationml/2006/main" xmlns:r="http://schemas.openxmlformats.org/officeDocument/2006/relationships">
+  <p:cSld>
+    <p:spTree>
+      <p:nvGrpSpPr>
+        <p:cNvPr id="1" name=""/>
+        <p:cNvGrpSpPr/>
+        <p:nvPr/>
+      </p:nvGrpSpPr>
+      <p:grpSpPr/>
+      <p:sp>
+        <p:nvSpPr>
+          <p:cNvPr id="2" name="TextBox 1"/>
+          <p:cNvSpPr txBox="1"/>
+          <p:nvPr/>
+        </p:nvSpPr>
+        <p:spPr>
+          <a:xfrm>
+            <a:off x="548640" y="822960"/>
+            <a:ext cx="10972800" cy="1097280"/>
+          </a:xfrm>
+          <a:prstGeom prst="rect">
+            <a:avLst/>
+          </a:prstGeom>
+          <a:noFill/>
+        </p:spPr>
+        <p:txBody>
+          <a:bodyPr wrap="square">
+            <a:spAutoFit/>
+          </a:bodyPr>
+          <a:lstStyle/>
+          <a:p>
+            <a:pPr algn="ctr"/>
+            <a:r>
+              <a:rPr sz="4600" b="1">
+                <a:solidFill>
+                  <a:srgbClr val="1F1F1F"/>
+                </a:solidFill>
+                <a:latin typeface="Times New Roman"/>
+              </a:rPr>
+              <a:t>Спасибо за внимание</a:t>
+            </a:r>
+          </a:p>
+        </p:txBody>
+      </p:sp>
+      <p:pic>
+        <p:nvPicPr>
+          <p:cNvPr id="3" name="Picture 2" descr="qr-app.png"/>
+          <p:cNvPicPr>
+            <a:picLocks noChangeAspect="1"/>
+          </p:cNvPicPr>
+          <p:nvPr/>
+        </p:nvPicPr>
+        <p:blipFill>
+          <a:blip r:embed="rId2"/>
+          <a:stretch>
+            <a:fillRect/>
+          </a:stretch>
+        </p:blipFill>
+        <p:spPr>
+          <a:xfrm>
+            <a:off x="4826174" y="1965960"/>
+            <a:ext cx="2539347" cy="3291840"/>
+          </a:xfrm>
+          <a:prstGeom prst="rect">
+            <a:avLst/>
+          </a:prstGeom>
+        </p:spPr>
+      </p:pic>
     </p:spTree>
   </p:cSld>
   <p:clrMapOvr>
@@ -5048,7 +5386,7 @@
                 <a:solidFill>
                   <a:srgbClr val="1F1F1F"/>
                 </a:solidFill>
-                <a:latin typeface="Calibri"/>
+                <a:latin typeface="Times New Roman"/>
               </a:rPr>
               <a:t>Актуальность</a:t>
             </a:r>
@@ -5057,57 +5395,14 @@
       </p:sp>
       <p:sp>
         <p:nvSpPr>
-          <p:cNvPr id="3" name="Rectangle 2"/>
-          <p:cNvSpPr/>
-          <p:nvPr/>
-        </p:nvSpPr>
-        <p:spPr>
-          <a:xfrm>
-            <a:off x="548640" y="594360"/>
-            <a:ext cx="1097280" cy="54864"/>
-          </a:xfrm>
-          <a:prstGeom prst="rect">
-            <a:avLst/>
-          </a:prstGeom>
-          <a:solidFill>
-            <a:srgbClr val="7F0DF2"/>
-          </a:solidFill>
-          <a:ln>
-            <a:noFill/>
-          </a:ln>
-        </p:spPr>
-        <p:style>
-          <a:lnRef idx="1">
-            <a:schemeClr val="accent1"/>
-          </a:lnRef>
-          <a:fillRef idx="3">
-            <a:schemeClr val="accent1"/>
-          </a:fillRef>
-          <a:effectRef idx="2">
-            <a:schemeClr val="accent1"/>
-          </a:effectRef>
-          <a:fontRef idx="minor">
-            <a:schemeClr val="lt1"/>
-          </a:fontRef>
-        </p:style>
-        <p:txBody>
-          <a:bodyPr rtlCol="0" anchor="ctr"/>
-          <a:lstStyle/>
-          <a:p>
-            <a:pPr algn="ctr"/>
-          </a:p>
-        </p:txBody>
-      </p:sp>
-      <p:sp>
-        <p:nvSpPr>
-          <p:cNvPr id="4" name="TextBox 3"/>
+          <p:cNvPr id="3" name="TextBox 2"/>
           <p:cNvSpPr txBox="1"/>
           <p:nvPr/>
         </p:nvSpPr>
         <p:spPr>
           <a:xfrm>
             <a:off x="548640" y="1005840"/>
-            <a:ext cx="10972800" cy="731520"/>
+            <a:ext cx="10972800" cy="5394960"/>
           </a:xfrm>
           <a:prstGeom prst="rect">
             <a:avLst/>
@@ -5115,34 +5410,98 @@
           <a:noFill/>
         </p:spPr>
         <p:txBody>
-          <a:bodyPr wrap="square">
+          <a:bodyPr wrap="square" anchor="ctr">
             <a:spAutoFit/>
           </a:bodyPr>
           <a:lstStyle/>
           <a:p>
-            <a:pPr algn="l"/>
-            <a:r>
-              <a:rPr sz="1800" b="0">
+            <a:pPr algn="l">
+              <a:lnSpc>
+                <a:spcPct val="115000"/>
+              </a:lnSpc>
+              <a:spcAft>
+                <a:spcPts val="1800"/>
+              </a:spcAft>
+            </a:pPr>
+            <a:r>
+              <a:rPr sz="2600">
                 <a:solidFill>
                   <a:srgbClr val="1F1F1F"/>
                 </a:solidFill>
-                <a:latin typeface="Calibri"/>
-              </a:rPr>
-              <a:t>Самостоятельные силовые тренировки требуют системного контроля состава тела и своевременной адаптации плана.</a:t>
-            </a:r>
-          </a:p>
-        </p:txBody>
-      </p:sp>
-      <p:sp>
-        <p:nvSpPr>
-          <p:cNvPr id="5" name="TextBox 4"/>
+                <a:latin typeface="Times New Roman"/>
+              </a:rPr>
+              <a:t>•  Рост популярности фитнес-приложений</a:t>
+            </a:r>
+          </a:p>
+          <a:p>
+            <a:pPr algn="l">
+              <a:lnSpc>
+                <a:spcPct val="115000"/>
+              </a:lnSpc>
+              <a:spcAft>
+                <a:spcPts val="1800"/>
+              </a:spcAft>
+            </a:pPr>
+            <a:r>
+              <a:rPr sz="2600">
+                <a:solidFill>
+                  <a:srgbClr val="1F1F1F"/>
+                </a:solidFill>
+                <a:latin typeface="Times New Roman"/>
+              </a:rPr>
+              <a:t>•  Отсутствие персонализированного прогноза</a:t>
+            </a:r>
+          </a:p>
+          <a:p>
+            <a:pPr algn="l">
+              <a:lnSpc>
+                <a:spcPct val="115000"/>
+              </a:lnSpc>
+              <a:spcAft>
+                <a:spcPts val="1800"/>
+              </a:spcAft>
+            </a:pPr>
+            <a:r>
+              <a:rPr sz="2600">
+                <a:solidFill>
+                  <a:srgbClr val="1F1F1F"/>
+                </a:solidFill>
+                <a:latin typeface="Times New Roman"/>
+              </a:rPr>
+              <a:t>•  Нет адаптации плана тренировок</a:t>
+            </a:r>
+          </a:p>
+          <a:p>
+            <a:pPr algn="l">
+              <a:lnSpc>
+                <a:spcPct val="115000"/>
+              </a:lnSpc>
+              <a:spcAft>
+                <a:spcPts val="1800"/>
+              </a:spcAft>
+            </a:pPr>
+            <a:r>
+              <a:rPr sz="2600">
+                <a:solidFill>
+                  <a:srgbClr val="1F1F1F"/>
+                </a:solidFill>
+                <a:latin typeface="Times New Roman"/>
+              </a:rPr>
+              <a:t>•  InBody используется без аналитики</a:t>
+            </a:r>
+          </a:p>
+        </p:txBody>
+      </p:sp>
+      <p:sp>
+        <p:nvSpPr>
+          <p:cNvPr id="4" name="TextBox 3"/>
           <p:cNvSpPr txBox="1"/>
           <p:nvPr/>
         </p:nvSpPr>
         <p:spPr>
           <a:xfrm>
-            <a:off x="548640" y="2103120"/>
-            <a:ext cx="10972800" cy="4114800"/>
+            <a:off x="10332720" y="6263640"/>
+            <a:ext cx="1371600" cy="457200"/>
           </a:xfrm>
           <a:prstGeom prst="rect">
             <a:avLst/>
@@ -5155,137 +5514,15 @@
           </a:bodyPr>
           <a:lstStyle/>
           <a:p>
-            <a:pPr algn="l">
-              <a:spcAft>
-                <a:spcPts val="800"/>
-              </a:spcAft>
-            </a:pPr>
-            <a:r>
-              <a:rPr sz="1800">
-                <a:solidFill>
-                  <a:srgbClr val="1F1F1F"/>
-                </a:solidFill>
-                <a:latin typeface="Calibri"/>
-              </a:rPr>
-              <a:t>•  Биоимпедансный анализ (InBody) даёт точные показатели состава тела, но интерпретация требует экспертизы тренера</a:t>
-            </a:r>
-          </a:p>
-          <a:p>
-            <a:pPr algn="l">
-              <a:spcAft>
-                <a:spcPts val="800"/>
-              </a:spcAft>
-            </a:pPr>
-            <a:r>
-              <a:rPr sz="1800">
-                <a:solidFill>
-                  <a:srgbClr val="1F1F1F"/>
-                </a:solidFill>
-                <a:latin typeface="Calibri"/>
-              </a:rPr>
-              <a:t>•  Существующие приложения (Hevy, Strong, Fitbod) ведут дневник тренировок, но не прогнозируют изменения состава тела на 1–4 недели вперёд</a:t>
-            </a:r>
-          </a:p>
-          <a:p>
-            <a:pPr algn="l">
-              <a:spcAft>
-                <a:spcPts val="800"/>
-              </a:spcAft>
-            </a:pPr>
-            <a:r>
-              <a:rPr sz="1800">
-                <a:solidFill>
-                  <a:srgbClr val="1F1F1F"/>
-                </a:solidFill>
-                <a:latin typeface="Calibri"/>
-              </a:rPr>
-              <a:t>•  Пользователь без знания физиологии не может оценить, насколько его тренировки и питание соответствуют цели</a:t>
-            </a:r>
-          </a:p>
-          <a:p>
-            <a:pPr algn="l">
-              <a:spcAft>
-                <a:spcPts val="800"/>
-              </a:spcAft>
-            </a:pPr>
-            <a:r>
-              <a:rPr sz="1800">
-                <a:solidFill>
-                  <a:srgbClr val="1F1F1F"/>
-                </a:solidFill>
-                <a:latin typeface="Calibri"/>
-              </a:rPr>
-              <a:t>•  Решение: ML-модель прогноза + детерминированный сервис автоматической адаптации тренировочного плана при изменениях профиля</a:t>
-            </a:r>
-          </a:p>
-        </p:txBody>
-      </p:sp>
-      <p:sp>
-        <p:nvSpPr>
-          <p:cNvPr id="6" name="TextBox 5"/>
-          <p:cNvSpPr txBox="1"/>
-          <p:nvPr/>
-        </p:nvSpPr>
-        <p:spPr>
-          <a:xfrm>
-            <a:off x="548640" y="6446520"/>
-            <a:ext cx="5486400" cy="274320"/>
-          </a:xfrm>
-          <a:prstGeom prst="rect">
-            <a:avLst/>
-          </a:prstGeom>
-          <a:noFill/>
-        </p:spPr>
-        <p:txBody>
-          <a:bodyPr wrap="square">
-            <a:spAutoFit/>
-          </a:bodyPr>
-          <a:lstStyle/>
-          <a:p>
-            <a:pPr algn="l"/>
-            <a:r>
-              <a:rPr sz="1000" b="0">
+            <a:pPr algn="r"/>
+            <a:r>
+              <a:rPr sz="2000" b="0">
                 <a:solidFill>
                   <a:srgbClr val="555555"/>
                 </a:solidFill>
-                <a:latin typeface="Calibri"/>
-              </a:rPr>
-              <a:t>Лапова М. С.  ·  ВКР 2026  ·  Fitness Tracker</a:t>
-            </a:r>
-          </a:p>
-        </p:txBody>
-      </p:sp>
-      <p:sp>
-        <p:nvSpPr>
-          <p:cNvPr id="7" name="TextBox 6"/>
-          <p:cNvSpPr txBox="1"/>
-          <p:nvPr/>
-        </p:nvSpPr>
-        <p:spPr>
-          <a:xfrm>
-            <a:off x="10515600" y="6446520"/>
-            <a:ext cx="1188720" cy="274320"/>
-          </a:xfrm>
-          <a:prstGeom prst="rect">
-            <a:avLst/>
-          </a:prstGeom>
-          <a:noFill/>
-        </p:spPr>
-        <p:txBody>
-          <a:bodyPr wrap="square">
-            <a:spAutoFit/>
-          </a:bodyPr>
-          <a:lstStyle/>
-          <a:p>
-            <a:pPr algn="r"/>
-            <a:r>
-              <a:rPr sz="1000" b="0">
-                <a:solidFill>
-                  <a:srgbClr val="555555"/>
-                </a:solidFill>
-                <a:latin typeface="Calibri"/>
-              </a:rPr>
-              <a:t>2 / 14</a:t>
+                <a:latin typeface="Times New Roman"/>
+              </a:rPr>
+              <a:t>2</a:t>
             </a:r>
           </a:p>
         </p:txBody>
@@ -5336,7 +5573,7 @@
                 <a:solidFill>
                   <a:srgbClr val="1F1F1F"/>
                 </a:solidFill>
-                <a:latin typeface="Calibri"/>
+                <a:latin typeface="Times New Roman"/>
               </a:rPr>
               <a:t>Цель и задачи</a:t>
             </a:r>
@@ -5345,50 +5582,7 @@
       </p:sp>
       <p:sp>
         <p:nvSpPr>
-          <p:cNvPr id="3" name="Rectangle 2"/>
-          <p:cNvSpPr/>
-          <p:nvPr/>
-        </p:nvSpPr>
-        <p:spPr>
-          <a:xfrm>
-            <a:off x="548640" y="594360"/>
-            <a:ext cx="1097280" cy="54864"/>
-          </a:xfrm>
-          <a:prstGeom prst="rect">
-            <a:avLst/>
-          </a:prstGeom>
-          <a:solidFill>
-            <a:srgbClr val="7F0DF2"/>
-          </a:solidFill>
-          <a:ln>
-            <a:noFill/>
-          </a:ln>
-        </p:spPr>
-        <p:style>
-          <a:lnRef idx="1">
-            <a:schemeClr val="accent1"/>
-          </a:lnRef>
-          <a:fillRef idx="3">
-            <a:schemeClr val="accent1"/>
-          </a:fillRef>
-          <a:effectRef idx="2">
-            <a:schemeClr val="accent1"/>
-          </a:effectRef>
-          <a:fontRef idx="minor">
-            <a:schemeClr val="lt1"/>
-          </a:fontRef>
-        </p:style>
-        <p:txBody>
-          <a:bodyPr rtlCol="0" anchor="ctr"/>
-          <a:lstStyle/>
-          <a:p>
-            <a:pPr algn="ctr"/>
-          </a:p>
-        </p:txBody>
-      </p:sp>
-      <p:sp>
-        <p:nvSpPr>
-          <p:cNvPr id="4" name="TextBox 3"/>
+          <p:cNvPr id="3" name="TextBox 2"/>
           <p:cNvSpPr txBox="1"/>
           <p:nvPr/>
         </p:nvSpPr>
@@ -5410,11 +5604,11 @@
           <a:p>
             <a:pPr algn="l"/>
             <a:r>
-              <a:rPr sz="1600" b="1">
-                <a:solidFill>
-                  <a:srgbClr val="7F0DF2"/>
-                </a:solidFill>
-                <a:latin typeface="Calibri"/>
+              <a:rPr sz="2200" b="1">
+                <a:solidFill>
+                  <a:srgbClr val="1F1F1F"/>
+                </a:solidFill>
+                <a:latin typeface="Times New Roman"/>
               </a:rPr>
               <a:t>Цель</a:t>
             </a:r>
@@ -5423,7 +5617,7 @@
       </p:sp>
       <p:sp>
         <p:nvSpPr>
-          <p:cNvPr id="5" name="TextBox 4"/>
+          <p:cNvPr id="4" name="TextBox 3"/>
           <p:cNvSpPr txBox="1"/>
           <p:nvPr/>
         </p:nvSpPr>
@@ -5445,20 +5639,20 @@
           <a:p>
             <a:pPr algn="l"/>
             <a:r>
-              <a:rPr sz="1800" b="0">
+              <a:rPr sz="2400" b="0">
                 <a:solidFill>
                   <a:srgbClr val="1F1F1F"/>
                 </a:solidFill>
-                <a:latin typeface="Calibri"/>
-              </a:rPr>
-              <a:t>Разработать кроссплатформенное приложение с прогнозом InBody-метрик на горизонт 1–4 недели и автоматической адаптацией плана тренировок.</a:t>
-            </a:r>
-          </a:p>
-        </p:txBody>
-      </p:sp>
-      <p:sp>
-        <p:nvSpPr>
-          <p:cNvPr id="6" name="TextBox 5"/>
+                <a:latin typeface="Times New Roman"/>
+              </a:rPr>
+              <a:t>Разработка приложения Portal для прогноза состава тела и адаптации тренировочного плана.</a:t>
+            </a:r>
+          </a:p>
+        </p:txBody>
+      </p:sp>
+      <p:sp>
+        <p:nvSpPr>
+          <p:cNvPr id="5" name="TextBox 4"/>
           <p:cNvSpPr txBox="1"/>
           <p:nvPr/>
         </p:nvSpPr>
@@ -5480,11 +5674,11 @@
           <a:p>
             <a:pPr algn="l"/>
             <a:r>
-              <a:rPr sz="1600" b="1">
-                <a:solidFill>
-                  <a:srgbClr val="7F0DF2"/>
-                </a:solidFill>
-                <a:latin typeface="Calibri"/>
+              <a:rPr sz="2200" b="1">
+                <a:solidFill>
+                  <a:srgbClr val="1F1F1F"/>
+                </a:solidFill>
+                <a:latin typeface="Times New Roman"/>
               </a:rPr>
               <a:t>Задачи</a:t>
             </a:r>
@@ -5493,14 +5687,14 @@
       </p:sp>
       <p:sp>
         <p:nvSpPr>
-          <p:cNvPr id="7" name="TextBox 6"/>
+          <p:cNvPr id="6" name="TextBox 5"/>
           <p:cNvSpPr txBox="1"/>
           <p:nvPr/>
         </p:nvSpPr>
         <p:spPr>
           <a:xfrm>
             <a:off x="548640" y="3017520"/>
-            <a:ext cx="10972800" cy="3200400"/>
+            <a:ext cx="10972800" cy="3383280"/>
           </a:xfrm>
           <a:prstGeom prst="rect">
             <a:avLst/>
@@ -5508,118 +5702,117 @@
           <a:noFill/>
         </p:spPr>
         <p:txBody>
-          <a:bodyPr wrap="square">
+          <a:bodyPr wrap="square" anchor="ctr">
             <a:spAutoFit/>
           </a:bodyPr>
           <a:lstStyle/>
           <a:p>
             <a:pPr algn="l">
+              <a:lnSpc>
+                <a:spcPct val="115000"/>
+              </a:lnSpc>
               <a:spcAft>
-                <a:spcPts val="800"/>
+                <a:spcPts val="1800"/>
               </a:spcAft>
             </a:pPr>
             <a:r>
-              <a:rPr sz="1600">
+              <a:rPr sz="2400">
                 <a:solidFill>
                   <a:srgbClr val="1F1F1F"/>
                 </a:solidFill>
-                <a:latin typeface="Calibri"/>
-              </a:rPr>
-              <a:t>•  Проанализировать существующие фитнес-приложения и подходы к прогнозу динамики веса и состава тела</a:t>
+                <a:latin typeface="Times New Roman"/>
+              </a:rPr>
+              <a:t>•  Анализ предметной области</a:t>
             </a:r>
           </a:p>
           <a:p>
             <a:pPr algn="l">
+              <a:lnSpc>
+                <a:spcPct val="115000"/>
+              </a:lnSpc>
               <a:spcAft>
-                <a:spcPts val="800"/>
+                <a:spcPts val="1800"/>
               </a:spcAft>
             </a:pPr>
             <a:r>
-              <a:rPr sz="1600">
+              <a:rPr sz="2400">
                 <a:solidFill>
                   <a:srgbClr val="1F1F1F"/>
                 </a:solidFill>
-                <a:latin typeface="Calibri"/>
-              </a:rPr>
-              <a:t>•  Спроектировать архитектуру PWA-приложения (FastAPI + Flutter + PostgreSQL)</a:t>
+                <a:latin typeface="Times New Roman"/>
+              </a:rPr>
+              <a:t>•  Разработка ML-модели прогноза</a:t>
             </a:r>
           </a:p>
           <a:p>
             <a:pPr algn="l">
+              <a:lnSpc>
+                <a:spcPct val="115000"/>
+              </a:lnSpc>
               <a:spcAft>
-                <a:spcPts val="800"/>
+                <a:spcPts val="1800"/>
               </a:spcAft>
             </a:pPr>
             <a:r>
-              <a:rPr sz="1600">
+              <a:rPr sz="2400">
                 <a:solidFill>
                   <a:srgbClr val="1F1F1F"/>
                 </a:solidFill>
-                <a:latin typeface="Calibri"/>
-              </a:rPr>
-              <a:t>•  Собрать датасет временных рядов InBody с синтезом траекторий из открытых Kaggle-источников</a:t>
+                <a:latin typeface="Times New Roman"/>
+              </a:rPr>
+              <a:t>•  Создание REST API</a:t>
             </a:r>
           </a:p>
           <a:p>
             <a:pPr algn="l">
+              <a:lnSpc>
+                <a:spcPct val="115000"/>
+              </a:lnSpc>
               <a:spcAft>
-                <a:spcPts val="800"/>
+                <a:spcPts val="1800"/>
               </a:spcAft>
             </a:pPr>
             <a:r>
-              <a:rPr sz="1600">
+              <a:rPr sz="2400">
                 <a:solidFill>
                   <a:srgbClr val="1F1F1F"/>
                 </a:solidFill>
-                <a:latin typeface="Calibri"/>
-              </a:rPr>
-              <a:t>•  Обучить и сравнить четыре модели прогноза: persistence, Ridge, LightGBM quantile, MLP с δ-параметризацией</a:t>
+                <a:latin typeface="Times New Roman"/>
+              </a:rPr>
+              <a:t>•  Реализация PWA-приложения</a:t>
             </a:r>
           </a:p>
           <a:p>
             <a:pPr algn="l">
+              <a:lnSpc>
+                <a:spcPct val="115000"/>
+              </a:lnSpc>
               <a:spcAft>
-                <a:spcPts val="800"/>
+                <a:spcPts val="1800"/>
               </a:spcAft>
             </a:pPr>
             <a:r>
-              <a:rPr sz="1600">
+              <a:rPr sz="2400">
                 <a:solidFill>
                   <a:srgbClr val="1F1F1F"/>
                 </a:solidFill>
-                <a:latin typeface="Calibri"/>
-              </a:rPr>
-              <a:t>•  Реализовать watcher-сервис автоматической адаптации плана при изменениях профиля пользователя</a:t>
-            </a:r>
-          </a:p>
-          <a:p>
-            <a:pPr algn="l">
-              <a:spcAft>
-                <a:spcPts val="800"/>
-              </a:spcAft>
-            </a:pPr>
-            <a:r>
-              <a:rPr sz="1600">
-                <a:solidFill>
-                  <a:srgbClr val="1F1F1F"/>
-                </a:solidFill>
-                <a:latin typeface="Calibri"/>
-              </a:rPr>
-              <a:t>•  Покрыть критические компоненты автотестами; обеспечить fallback на baseline при отказе ML-инференса</a:t>
-            </a:r>
-          </a:p>
-        </p:txBody>
-      </p:sp>
-      <p:sp>
-        <p:nvSpPr>
-          <p:cNvPr id="8" name="TextBox 7"/>
+                <a:latin typeface="Times New Roman"/>
+              </a:rPr>
+              <a:t>•  Тестирование системы</a:t>
+            </a:r>
+          </a:p>
+        </p:txBody>
+      </p:sp>
+      <p:sp>
+        <p:nvSpPr>
+          <p:cNvPr id="7" name="TextBox 6"/>
           <p:cNvSpPr txBox="1"/>
           <p:nvPr/>
         </p:nvSpPr>
         <p:spPr>
           <a:xfrm>
-            <a:off x="548640" y="6446520"/>
-            <a:ext cx="5486400" cy="274320"/>
+            <a:off x="10332720" y="6263640"/>
+            <a:ext cx="1371600" cy="457200"/>
           </a:xfrm>
           <a:prstGeom prst="rect">
             <a:avLst/>
@@ -5632,50 +5825,15 @@
           </a:bodyPr>
           <a:lstStyle/>
           <a:p>
-            <a:pPr algn="l"/>
-            <a:r>
-              <a:rPr sz="1000" b="0">
+            <a:pPr algn="r"/>
+            <a:r>
+              <a:rPr sz="2000" b="0">
                 <a:solidFill>
                   <a:srgbClr val="555555"/>
                 </a:solidFill>
-                <a:latin typeface="Calibri"/>
-              </a:rPr>
-              <a:t>Лапова М. С.  ·  ВКР 2026  ·  Fitness Tracker</a:t>
-            </a:r>
-          </a:p>
-        </p:txBody>
-      </p:sp>
-      <p:sp>
-        <p:nvSpPr>
-          <p:cNvPr id="9" name="TextBox 8"/>
-          <p:cNvSpPr txBox="1"/>
-          <p:nvPr/>
-        </p:nvSpPr>
-        <p:spPr>
-          <a:xfrm>
-            <a:off x="10515600" y="6446520"/>
-            <a:ext cx="1188720" cy="274320"/>
-          </a:xfrm>
-          <a:prstGeom prst="rect">
-            <a:avLst/>
-          </a:prstGeom>
-          <a:noFill/>
-        </p:spPr>
-        <p:txBody>
-          <a:bodyPr wrap="square">
-            <a:spAutoFit/>
-          </a:bodyPr>
-          <a:lstStyle/>
-          <a:p>
-            <a:pPr algn="r"/>
-            <a:r>
-              <a:rPr sz="1000" b="0">
-                <a:solidFill>
-                  <a:srgbClr val="555555"/>
-                </a:solidFill>
-                <a:latin typeface="Calibri"/>
-              </a:rPr>
-              <a:t>3 / 14</a:t>
+                <a:latin typeface="Times New Roman"/>
+              </a:rPr>
+              <a:t>3</a:t>
             </a:r>
           </a:p>
         </p:txBody>
@@ -5726,66 +5884,23 @@
                 <a:solidFill>
                   <a:srgbClr val="1F1F1F"/>
                 </a:solidFill>
-                <a:latin typeface="Calibri"/>
-              </a:rPr>
-              <a:t>Архитектура приложения</a:t>
-            </a:r>
-          </a:p>
-        </p:txBody>
-      </p:sp>
-      <p:sp>
-        <p:nvSpPr>
-          <p:cNvPr id="3" name="Rectangle 2"/>
-          <p:cNvSpPr/>
-          <p:nvPr/>
-        </p:nvSpPr>
-        <p:spPr>
-          <a:xfrm>
-            <a:off x="548640" y="594360"/>
-            <a:ext cx="1097280" cy="54864"/>
-          </a:xfrm>
-          <a:prstGeom prst="rect">
-            <a:avLst/>
-          </a:prstGeom>
-          <a:solidFill>
-            <a:srgbClr val="7F0DF2"/>
-          </a:solidFill>
-          <a:ln>
-            <a:noFill/>
-          </a:ln>
-        </p:spPr>
-        <p:style>
-          <a:lnRef idx="1">
-            <a:schemeClr val="accent1"/>
-          </a:lnRef>
-          <a:fillRef idx="3">
-            <a:schemeClr val="accent1"/>
-          </a:fillRef>
-          <a:effectRef idx="2">
-            <a:schemeClr val="accent1"/>
-          </a:effectRef>
-          <a:fontRef idx="minor">
-            <a:schemeClr val="lt1"/>
-          </a:fontRef>
-        </p:style>
-        <p:txBody>
-          <a:bodyPr rtlCol="0" anchor="ctr"/>
-          <a:lstStyle/>
-          <a:p>
-            <a:pPr algn="ctr"/>
-          </a:p>
-        </p:txBody>
-      </p:sp>
-      <p:sp>
-        <p:nvSpPr>
-          <p:cNvPr id="4" name="TextBox 3"/>
+                <a:latin typeface="Times New Roman"/>
+              </a:rPr>
+              <a:t>Разделение работ</a:t>
+            </a:r>
+          </a:p>
+        </p:txBody>
+      </p:sp>
+      <p:sp>
+        <p:nvSpPr>
+          <p:cNvPr id="3" name="TextBox 2"/>
           <p:cNvSpPr txBox="1"/>
           <p:nvPr/>
         </p:nvSpPr>
         <p:spPr>
           <a:xfrm>
-            <a:off x="548640" y="1005840"/>
-            <a:ext cx="5486400" cy="365760"/>
+            <a:off x="1340967" y="2057400"/>
+            <a:ext cx="9509760" cy="365760"/>
           </a:xfrm>
           <a:prstGeom prst="rect">
             <a:avLst/>
@@ -5798,19 +5913,237 @@
           </a:bodyPr>
           <a:lstStyle/>
           <a:p>
-            <a:pPr algn="l"/>
-            <a:r>
-              <a:rPr sz="1400" b="1">
-                <a:solidFill>
-                  <a:srgbClr val="7F0DF2"/>
-                </a:solidFill>
-                <a:latin typeface="Calibri"/>
-              </a:rPr>
-              <a:t>Принципы</a:t>
-            </a:r>
-          </a:p>
-        </p:txBody>
-      </p:sp>
+            <a:pPr algn="r"/>
+            <a:r>
+              <a:rPr sz="1400" b="0">
+                <a:solidFill>
+                  <a:srgbClr val="1F1F1F"/>
+                </a:solidFill>
+                <a:latin typeface="Times New Roman"/>
+              </a:rPr>
+              <a:t>Таблица 1. Разделение работ</a:t>
+            </a:r>
+          </a:p>
+        </p:txBody>
+      </p:sp>
+      <p:graphicFrame>
+        <p:nvGraphicFramePr>
+          <p:cNvPr id="4" name="Table 3"/>
+          <p:cNvGraphicFramePr>
+            <a:graphicFrameLocks noGrp="1"/>
+          </p:cNvGraphicFramePr>
+          <p:nvPr/>
+        </p:nvGraphicFramePr>
+        <p:xfrm>
+          <a:off x="1340967" y="2514600"/>
+          <a:ext cx="9509760" cy="2926080"/>
+        </p:xfrm>
+        <a:graphic>
+          <a:graphicData uri="http://schemas.openxmlformats.org/drawingml/2006/table">
+            <a:tbl>
+              <a:tblPr firstRow="0" bandRow="0">
+                <a:tableStyleId>{5940675A-B579-460E-94D1-54222C63F5DA}</a:tableStyleId>
+              </a:tblPr>
+              <a:tblGrid>
+                <a:gridCol w="2743200"/>
+                <a:gridCol w="6766560"/>
+              </a:tblGrid>
+              <a:tr h="594360">
+                <a:tc>
+                  <a:txBody>
+                    <a:bodyPr/>
+                    <a:lstStyle/>
+                    <a:p>
+                      <a:pPr algn="ctr"/>
+                      <a:r>
+                        <a:rPr sz="1800" b="1">
+                          <a:solidFill>
+                            <a:srgbClr val="FFFFFF"/>
+                          </a:solidFill>
+                          <a:latin typeface="Times New Roman"/>
+                        </a:rPr>
+                        <a:t>Студент</a:t>
+                      </a:r>
+                    </a:p>
+                  </a:txBody>
+                  <a:tcPr anchor="ctr">
+                    <a:solidFill>
+                      <a:srgbClr val="000000"/>
+                    </a:solidFill>
+                  </a:tcPr>
+                </a:tc>
+                <a:tc>
+                  <a:txBody>
+                    <a:bodyPr/>
+                    <a:lstStyle/>
+                    <a:p>
+                      <a:pPr algn="ctr"/>
+                      <a:r>
+                        <a:rPr sz="1800" b="1">
+                          <a:solidFill>
+                            <a:srgbClr val="FFFFFF"/>
+                          </a:solidFill>
+                          <a:latin typeface="Times New Roman"/>
+                        </a:rPr>
+                        <a:t>Что разрабатывал</a:t>
+                      </a:r>
+                    </a:p>
+                  </a:txBody>
+                  <a:tcPr anchor="ctr">
+                    <a:solidFill>
+                      <a:srgbClr val="000000"/>
+                    </a:solidFill>
+                  </a:tcPr>
+                </a:tc>
+              </a:tr>
+              <a:tr h="777240">
+                <a:tc>
+                  <a:txBody>
+                    <a:bodyPr/>
+                    <a:lstStyle/>
+                    <a:p>
+                      <a:pPr algn="l"/>
+                      <a:r>
+                        <a:rPr sz="1600" b="0">
+                          <a:solidFill>
+                            <a:srgbClr val="1F1F1F"/>
+                          </a:solidFill>
+                          <a:latin typeface="Times New Roman"/>
+                        </a:rPr>
+                        <a:t>Лапова М. С.</a:t>
+                      </a:r>
+                    </a:p>
+                  </a:txBody>
+                  <a:tcPr anchor="ctr">
+                    <a:solidFill>
+                      <a:srgbClr val="FFFFFF"/>
+                    </a:solidFill>
+                  </a:tcPr>
+                </a:tc>
+                <a:tc>
+                  <a:txBody>
+                    <a:bodyPr/>
+                    <a:lstStyle/>
+                    <a:p>
+                      <a:pPr algn="ctr"/>
+                      <a:r>
+                        <a:rPr sz="1600" b="0">
+                          <a:solidFill>
+                            <a:srgbClr val="1F1F1F"/>
+                          </a:solidFill>
+                          <a:latin typeface="Times New Roman"/>
+                        </a:rPr>
+                        <a:t>Прогноз состава тела (InBody), доверительные интервалы, адаптация плана, синтез данных, импорт PDF InBody</a:t>
+                      </a:r>
+                    </a:p>
+                  </a:txBody>
+                  <a:tcPr anchor="ctr">
+                    <a:solidFill>
+                      <a:srgbClr val="FFFFFF"/>
+                    </a:solidFill>
+                  </a:tcPr>
+                </a:tc>
+              </a:tr>
+              <a:tr h="777240">
+                <a:tc>
+                  <a:txBody>
+                    <a:bodyPr/>
+                    <a:lstStyle/>
+                    <a:p>
+                      <a:pPr algn="l"/>
+                      <a:r>
+                        <a:rPr sz="1600" b="0">
+                          <a:solidFill>
+                            <a:srgbClr val="1F1F1F"/>
+                          </a:solidFill>
+                          <a:latin typeface="Times New Roman"/>
+                        </a:rPr>
+                        <a:t>Ощепков Е. С.</a:t>
+                      </a:r>
+                    </a:p>
+                  </a:txBody>
+                  <a:tcPr anchor="ctr">
+                    <a:solidFill>
+                      <a:srgbClr val="FFFFFF"/>
+                    </a:solidFill>
+                  </a:tcPr>
+                </a:tc>
+                <a:tc>
+                  <a:txBody>
+                    <a:bodyPr/>
+                    <a:lstStyle/>
+                    <a:p>
+                      <a:pPr algn="ctr"/>
+                      <a:r>
+                        <a:rPr sz="1600" b="0">
+                          <a:solidFill>
+                            <a:srgbClr val="1F1F1F"/>
+                          </a:solidFill>
+                          <a:latin typeface="Times New Roman"/>
+                        </a:rPr>
+                        <a:t>Генератор плана тренировок, каталог упражнений, учёт тренировок</a:t>
+                      </a:r>
+                    </a:p>
+                  </a:txBody>
+                  <a:tcPr anchor="ctr">
+                    <a:solidFill>
+                      <a:srgbClr val="FFFFFF"/>
+                    </a:solidFill>
+                  </a:tcPr>
+                </a:tc>
+              </a:tr>
+              <a:tr h="777240">
+                <a:tc>
+                  <a:txBody>
+                    <a:bodyPr/>
+                    <a:lstStyle/>
+                    <a:p>
+                      <a:pPr algn="l"/>
+                      <a:r>
+                        <a:rPr sz="1600" b="0">
+                          <a:solidFill>
+                            <a:srgbClr val="1F1F1F"/>
+                          </a:solidFill>
+                          <a:latin typeface="Times New Roman"/>
+                        </a:rPr>
+                        <a:t>Совместно</a:t>
+                      </a:r>
+                    </a:p>
+                  </a:txBody>
+                  <a:tcPr anchor="ctr">
+                    <a:solidFill>
+                      <a:srgbClr val="FFFFFF"/>
+                    </a:solidFill>
+                  </a:tcPr>
+                </a:tc>
+                <a:tc>
+                  <a:txBody>
+                    <a:bodyPr/>
+                    <a:lstStyle/>
+                    <a:p>
+                      <a:pPr algn="ctr"/>
+                      <a:r>
+                        <a:rPr sz="1600" b="0">
+                          <a:solidFill>
+                            <a:srgbClr val="1F1F1F"/>
+                          </a:solidFill>
+                          <a:latin typeface="Times New Roman"/>
+                        </a:rPr>
+                        <a:t>Концепция, архитектура, REST API, PWA-клиент, база данных</a:t>
+                      </a:r>
+                    </a:p>
+                  </a:txBody>
+                  <a:tcPr anchor="ctr">
+                    <a:solidFill>
+                      <a:srgbClr val="FFFFFF"/>
+                    </a:solidFill>
+                  </a:tcPr>
+                </a:tc>
+              </a:tr>
+            </a:tbl>
+          </a:graphicData>
+        </a:graphic>
+      </p:graphicFrame>
       <p:sp>
         <p:nvSpPr>
           <p:cNvPr id="5" name="TextBox 4"/>
@@ -5819,8 +6152,8 @@
         </p:nvSpPr>
         <p:spPr>
           <a:xfrm>
-            <a:off x="548640" y="1371600"/>
-            <a:ext cx="5486400" cy="4114800"/>
+            <a:off x="10332720" y="6263640"/>
+            <a:ext cx="1371600" cy="457200"/>
           </a:xfrm>
           <a:prstGeom prst="rect">
             <a:avLst/>
@@ -5833,307 +6166,15 @@
           </a:bodyPr>
           <a:lstStyle/>
           <a:p>
-            <a:pPr algn="l">
-              <a:spcAft>
-                <a:spcPts val="800"/>
-              </a:spcAft>
-            </a:pPr>
-            <a:r>
-              <a:rPr sz="1400">
-                <a:solidFill>
-                  <a:srgbClr val="1F1F1F"/>
-                </a:solidFill>
-                <a:latin typeface="Calibri"/>
-              </a:rPr>
-              <a:t>•  Чёткое разделение domain/ (чистая логика, без I/O) и domains/ (БД-обвязка, FastAPI-роутеры)</a:t>
-            </a:r>
-          </a:p>
-          <a:p>
-            <a:pPr algn="l">
-              <a:spcAft>
-                <a:spcPts val="800"/>
-              </a:spcAft>
-            </a:pPr>
-            <a:r>
-              <a:rPr sz="1400">
-                <a:solidFill>
-                  <a:srgbClr val="1F1F1F"/>
-                </a:solidFill>
-                <a:latin typeface="Calibri"/>
-              </a:rPr>
-              <a:t>•  Спека-ориентированная разработка: каждая фича закреплена в specs/NNN-*.md, REQ-теги цитируются в коде</a:t>
-            </a:r>
-          </a:p>
-          <a:p>
-            <a:pPr algn="l">
-              <a:spcAft>
-                <a:spcPts val="800"/>
-              </a:spcAft>
-            </a:pPr>
-            <a:r>
-              <a:rPr sz="1400">
-                <a:solidFill>
-                  <a:srgbClr val="1F1F1F"/>
-                </a:solidFill>
-                <a:latin typeface="Calibri"/>
-              </a:rPr>
-              <a:t>•  Lazy-load ML-артефактов, безусловный fallback на OLS-baseline при отсутствии или ошибке модели (REQ-12 spec 008)</a:t>
-            </a:r>
-          </a:p>
-          <a:p>
-            <a:pPr algn="l">
-              <a:spcAft>
-                <a:spcPts val="800"/>
-              </a:spcAft>
-            </a:pPr>
-            <a:r>
-              <a:rPr sz="1400">
-                <a:solidFill>
-                  <a:srgbClr val="1F1F1F"/>
-                </a:solidFill>
-                <a:latin typeface="Calibri"/>
-              </a:rPr>
-              <a:t>•  Async SQLAlchemy 2 + Alembic-миграции с инкрементной нумерацией</a:t>
-            </a:r>
-          </a:p>
-          <a:p>
-            <a:pPr algn="l">
-              <a:spcAft>
-                <a:spcPts val="800"/>
-              </a:spcAft>
-            </a:pPr>
-            <a:r>
-              <a:rPr sz="1400">
-                <a:solidFill>
-                  <a:srgbClr val="1F1F1F"/>
-                </a:solidFill>
-                <a:latin typeface="Calibri"/>
-              </a:rPr>
-              <a:t>•  Версионирование ML-моделей: ml/models/&lt;task&gt;/&lt;algo&gt;/v&lt;semver&gt;/</a:t>
-            </a:r>
-          </a:p>
-        </p:txBody>
-      </p:sp>
-      <p:sp>
-        <p:nvSpPr>
-          <p:cNvPr id="6" name="TextBox 5"/>
-          <p:cNvSpPr txBox="1"/>
-          <p:nvPr/>
-        </p:nvSpPr>
-        <p:spPr>
-          <a:xfrm>
-            <a:off x="6400800" y="1005840"/>
-            <a:ext cx="5486400" cy="365760"/>
-          </a:xfrm>
-          <a:prstGeom prst="rect">
-            <a:avLst/>
-          </a:prstGeom>
-          <a:noFill/>
-        </p:spPr>
-        <p:txBody>
-          <a:bodyPr wrap="square">
-            <a:spAutoFit/>
-          </a:bodyPr>
-          <a:lstStyle/>
-          <a:p>
-            <a:pPr algn="l"/>
-            <a:r>
-              <a:rPr sz="1400" b="1">
-                <a:solidFill>
-                  <a:srgbClr val="7F0DF2"/>
-                </a:solidFill>
-                <a:latin typeface="Calibri"/>
-              </a:rPr>
-              <a:t>Стек</a:t>
-            </a:r>
-          </a:p>
-        </p:txBody>
-      </p:sp>
-      <p:sp>
-        <p:nvSpPr>
-          <p:cNvPr id="7" name="TextBox 6"/>
-          <p:cNvSpPr txBox="1"/>
-          <p:nvPr/>
-        </p:nvSpPr>
-        <p:spPr>
-          <a:xfrm>
-            <a:off x="6400800" y="1371600"/>
-            <a:ext cx="5486400" cy="4114800"/>
-          </a:xfrm>
-          <a:prstGeom prst="rect">
-            <a:avLst/>
-          </a:prstGeom>
-          <a:noFill/>
-        </p:spPr>
-        <p:txBody>
-          <a:bodyPr wrap="square">
-            <a:spAutoFit/>
-          </a:bodyPr>
-          <a:lstStyle/>
-          <a:p>
-            <a:pPr algn="l">
-              <a:spcAft>
-                <a:spcPts val="800"/>
-              </a:spcAft>
-            </a:pPr>
-            <a:r>
-              <a:rPr sz="1400">
-                <a:solidFill>
-                  <a:srgbClr val="1F1F1F"/>
-                </a:solidFill>
-                <a:latin typeface="Calibri"/>
-              </a:rPr>
-              <a:t>•  Backend: FastAPI + SQLAlchemy 2 (async) + PostgreSQL 16</a:t>
-            </a:r>
-          </a:p>
-          <a:p>
-            <a:pPr algn="l">
-              <a:spcAft>
-                <a:spcPts val="800"/>
-              </a:spcAft>
-            </a:pPr>
-            <a:r>
-              <a:rPr sz="1400">
-                <a:solidFill>
-                  <a:srgbClr val="1F1F1F"/>
-                </a:solidFill>
-                <a:latin typeface="Calibri"/>
-              </a:rPr>
-              <a:t>•  ML: LightGBM, PyTorch, scikit-learn, joblib</a:t>
-            </a:r>
-          </a:p>
-          <a:p>
-            <a:pPr algn="l">
-              <a:spcAft>
-                <a:spcPts val="800"/>
-              </a:spcAft>
-            </a:pPr>
-            <a:r>
-              <a:rPr sz="1400">
-                <a:solidFill>
-                  <a:srgbClr val="1F1F1F"/>
-                </a:solidFill>
-                <a:latin typeface="Calibri"/>
-              </a:rPr>
-              <a:t>•  Frontend: Flutter (Web/PWA) + Riverpod + go_router + Dio</a:t>
-            </a:r>
-          </a:p>
-          <a:p>
-            <a:pPr algn="l">
-              <a:spcAft>
-                <a:spcPts val="800"/>
-              </a:spcAft>
-            </a:pPr>
-            <a:r>
-              <a:rPr sz="1400">
-                <a:solidFill>
-                  <a:srgbClr val="1F1F1F"/>
-                </a:solidFill>
-                <a:latin typeface="Calibri"/>
-              </a:rPr>
-              <a:t>•  Storage: MinIO/S3 (signed URLs для приватных файлов)</a:t>
-            </a:r>
-          </a:p>
-          <a:p>
-            <a:pPr algn="l">
-              <a:spcAft>
-                <a:spcPts val="800"/>
-              </a:spcAft>
-            </a:pPr>
-            <a:r>
-              <a:rPr sz="1400">
-                <a:solidFill>
-                  <a:srgbClr val="1F1F1F"/>
-                </a:solidFill>
-                <a:latin typeface="Calibri"/>
-              </a:rPr>
-              <a:t>•  Инфраструктура: Docker Compose, Alembic, GitHub Actions</a:t>
-            </a:r>
-          </a:p>
-          <a:p>
-            <a:pPr algn="l">
-              <a:spcAft>
-                <a:spcPts val="800"/>
-              </a:spcAft>
-            </a:pPr>
-            <a:r>
-              <a:rPr sz="1400">
-                <a:solidFill>
-                  <a:srgbClr val="1F1F1F"/>
-                </a:solidFill>
-                <a:latin typeface="Calibri"/>
-              </a:rPr>
-              <a:t>•  Тесты: pytest + testcontainers PostgreSQL</a:t>
-            </a:r>
-          </a:p>
-        </p:txBody>
-      </p:sp>
-      <p:sp>
-        <p:nvSpPr>
-          <p:cNvPr id="8" name="TextBox 7"/>
-          <p:cNvSpPr txBox="1"/>
-          <p:nvPr/>
-        </p:nvSpPr>
-        <p:spPr>
-          <a:xfrm>
-            <a:off x="548640" y="6446520"/>
-            <a:ext cx="5486400" cy="274320"/>
-          </a:xfrm>
-          <a:prstGeom prst="rect">
-            <a:avLst/>
-          </a:prstGeom>
-          <a:noFill/>
-        </p:spPr>
-        <p:txBody>
-          <a:bodyPr wrap="square">
-            <a:spAutoFit/>
-          </a:bodyPr>
-          <a:lstStyle/>
-          <a:p>
-            <a:pPr algn="l"/>
-            <a:r>
-              <a:rPr sz="1000" b="0">
+            <a:pPr algn="r"/>
+            <a:r>
+              <a:rPr sz="2000" b="0">
                 <a:solidFill>
                   <a:srgbClr val="555555"/>
                 </a:solidFill>
-                <a:latin typeface="Calibri"/>
-              </a:rPr>
-              <a:t>Лапова М. С.  ·  ВКР 2026  ·  Fitness Tracker</a:t>
-            </a:r>
-          </a:p>
-        </p:txBody>
-      </p:sp>
-      <p:sp>
-        <p:nvSpPr>
-          <p:cNvPr id="9" name="TextBox 8"/>
-          <p:cNvSpPr txBox="1"/>
-          <p:nvPr/>
-        </p:nvSpPr>
-        <p:spPr>
-          <a:xfrm>
-            <a:off x="10515600" y="6446520"/>
-            <a:ext cx="1188720" cy="274320"/>
-          </a:xfrm>
-          <a:prstGeom prst="rect">
-            <a:avLst/>
-          </a:prstGeom>
-          <a:noFill/>
-        </p:spPr>
-        <p:txBody>
-          <a:bodyPr wrap="square">
-            <a:spAutoFit/>
-          </a:bodyPr>
-          <a:lstStyle/>
-          <a:p>
-            <a:pPr algn="r"/>
-            <a:r>
-              <a:rPr sz="1000" b="0">
-                <a:solidFill>
-                  <a:srgbClr val="555555"/>
-                </a:solidFill>
-                <a:latin typeface="Calibri"/>
-              </a:rPr>
-              <a:t>4 / 14</a:t>
+                <a:latin typeface="Times New Roman"/>
+              </a:rPr>
+              <a:t>4</a:t>
             </a:r>
           </a:p>
         </p:txBody>
@@ -6184,66 +6225,23 @@
                 <a:solidFill>
                   <a:srgbClr val="1F1F1F"/>
                 </a:solidFill>
-                <a:latin typeface="Calibri"/>
-              </a:rPr>
-              <a:t>Двухуровневая модель прогноза InBody</a:t>
-            </a:r>
-          </a:p>
-        </p:txBody>
-      </p:sp>
-      <p:sp>
-        <p:nvSpPr>
-          <p:cNvPr id="3" name="Rectangle 2"/>
-          <p:cNvSpPr/>
-          <p:nvPr/>
-        </p:nvSpPr>
-        <p:spPr>
-          <a:xfrm>
-            <a:off x="548640" y="594360"/>
-            <a:ext cx="1097280" cy="54864"/>
-          </a:xfrm>
-          <a:prstGeom prst="rect">
-            <a:avLst/>
-          </a:prstGeom>
-          <a:solidFill>
-            <a:srgbClr val="7F0DF2"/>
-          </a:solidFill>
-          <a:ln>
-            <a:noFill/>
-          </a:ln>
-        </p:spPr>
-        <p:style>
-          <a:lnRef idx="1">
-            <a:schemeClr val="accent1"/>
-          </a:lnRef>
-          <a:fillRef idx="3">
-            <a:schemeClr val="accent1"/>
-          </a:fillRef>
-          <a:effectRef idx="2">
-            <a:schemeClr val="accent1"/>
-          </a:effectRef>
-          <a:fontRef idx="minor">
-            <a:schemeClr val="lt1"/>
-          </a:fontRef>
-        </p:style>
-        <p:txBody>
-          <a:bodyPr rtlCol="0" anchor="ctr"/>
-          <a:lstStyle/>
-          <a:p>
-            <a:pPr algn="ctr"/>
-          </a:p>
-        </p:txBody>
-      </p:sp>
-      <p:sp>
-        <p:nvSpPr>
-          <p:cNvPr id="4" name="TextBox 3"/>
+                <a:latin typeface="Times New Roman"/>
+              </a:rPr>
+              <a:t>Сравнение с существующими решениями</a:t>
+            </a:r>
+          </a:p>
+        </p:txBody>
+      </p:sp>
+      <p:sp>
+        <p:nvSpPr>
+          <p:cNvPr id="3" name="TextBox 2"/>
           <p:cNvSpPr txBox="1"/>
           <p:nvPr/>
         </p:nvSpPr>
         <p:spPr>
           <a:xfrm>
-            <a:off x="548640" y="1005840"/>
-            <a:ext cx="10972800" cy="731520"/>
+            <a:off x="838047" y="1371600"/>
+            <a:ext cx="10515600" cy="365760"/>
           </a:xfrm>
           <a:prstGeom prst="rect">
             <a:avLst/>
@@ -6256,19 +6254,611 @@
           </a:bodyPr>
           <a:lstStyle/>
           <a:p>
-            <a:pPr algn="l"/>
-            <a:r>
-              <a:rPr sz="1800" b="0">
+            <a:pPr algn="r"/>
+            <a:r>
+              <a:rPr sz="1400" b="0">
                 <a:solidFill>
                   <a:srgbClr val="1F1F1F"/>
                 </a:solidFill>
-                <a:latin typeface="Calibri"/>
-              </a:rPr>
-              <a:t>Задача: предсказать Δ веса, Δ % жира, Δ мышечной массы на горизонте 1, 2, 4 недели с доверительными интервалами.</a:t>
-            </a:r>
-          </a:p>
-        </p:txBody>
-      </p:sp>
+                <a:latin typeface="Times New Roman"/>
+              </a:rPr>
+              <a:t>Таблица 2. Сравнение с существующими решениями</a:t>
+            </a:r>
+          </a:p>
+        </p:txBody>
+      </p:sp>
+      <p:graphicFrame>
+        <p:nvGraphicFramePr>
+          <p:cNvPr id="4" name="Table 3"/>
+          <p:cNvGraphicFramePr>
+            <a:graphicFrameLocks noGrp="1"/>
+          </p:cNvGraphicFramePr>
+          <p:nvPr/>
+        </p:nvGraphicFramePr>
+        <p:xfrm>
+          <a:off x="838047" y="1828800"/>
+          <a:ext cx="10515600" cy="4480560"/>
+        </p:xfrm>
+        <a:graphic>
+          <a:graphicData uri="http://schemas.openxmlformats.org/drawingml/2006/table">
+            <a:tbl>
+              <a:tblPr firstRow="0" bandRow="0">
+                <a:tableStyleId>{5940675A-B579-460E-94D1-54222C63F5DA}</a:tableStyleId>
+              </a:tblPr>
+              <a:tblGrid>
+                <a:gridCol w="2628900"/>
+                <a:gridCol w="2628900"/>
+                <a:gridCol w="2628900"/>
+                <a:gridCol w="2628900"/>
+              </a:tblGrid>
+              <a:tr h="594360">
+                <a:tc>
+                  <a:txBody>
+                    <a:bodyPr/>
+                    <a:lstStyle/>
+                    <a:p>
+                      <a:pPr algn="ctr"/>
+                      <a:r>
+                        <a:rPr sz="1800" b="1">
+                          <a:solidFill>
+                            <a:srgbClr val="FFFFFF"/>
+                          </a:solidFill>
+                          <a:latin typeface="Times New Roman"/>
+                        </a:rPr>
+                        <a:t>Приложение</a:t>
+                      </a:r>
+                    </a:p>
+                  </a:txBody>
+                  <a:tcPr anchor="ctr">
+                    <a:solidFill>
+                      <a:srgbClr val="000000"/>
+                    </a:solidFill>
+                  </a:tcPr>
+                </a:tc>
+                <a:tc>
+                  <a:txBody>
+                    <a:bodyPr/>
+                    <a:lstStyle/>
+                    <a:p>
+                      <a:pPr algn="ctr"/>
+                      <a:r>
+                        <a:rPr sz="1800" b="1">
+                          <a:solidFill>
+                            <a:srgbClr val="FFFFFF"/>
+                          </a:solidFill>
+                          <a:latin typeface="Times New Roman"/>
+                        </a:rPr>
+                        <a:t>Прогноз</a:t>
+                      </a:r>
+                    </a:p>
+                  </a:txBody>
+                  <a:tcPr anchor="ctr">
+                    <a:solidFill>
+                      <a:srgbClr val="000000"/>
+                    </a:solidFill>
+                  </a:tcPr>
+                </a:tc>
+                <a:tc>
+                  <a:txBody>
+                    <a:bodyPr/>
+                    <a:lstStyle/>
+                    <a:p>
+                      <a:pPr algn="ctr"/>
+                      <a:r>
+                        <a:rPr sz="1800" b="1">
+                          <a:solidFill>
+                            <a:srgbClr val="FFFFFF"/>
+                          </a:solidFill>
+                          <a:latin typeface="Times New Roman"/>
+                        </a:rPr>
+                        <a:t>InBody</a:t>
+                      </a:r>
+                    </a:p>
+                  </a:txBody>
+                  <a:tcPr anchor="ctr">
+                    <a:solidFill>
+                      <a:srgbClr val="000000"/>
+                    </a:solidFill>
+                  </a:tcPr>
+                </a:tc>
+                <a:tc>
+                  <a:txBody>
+                    <a:bodyPr/>
+                    <a:lstStyle/>
+                    <a:p>
+                      <a:pPr algn="ctr"/>
+                      <a:r>
+                        <a:rPr sz="1800" b="1">
+                          <a:solidFill>
+                            <a:srgbClr val="FFFFFF"/>
+                          </a:solidFill>
+                          <a:latin typeface="Times New Roman"/>
+                        </a:rPr>
+                        <a:t>Адаптация</a:t>
+                      </a:r>
+                    </a:p>
+                  </a:txBody>
+                  <a:tcPr anchor="ctr">
+                    <a:solidFill>
+                      <a:srgbClr val="000000"/>
+                    </a:solidFill>
+                  </a:tcPr>
+                </a:tc>
+              </a:tr>
+              <a:tr h="777240">
+                <a:tc>
+                  <a:txBody>
+                    <a:bodyPr/>
+                    <a:lstStyle/>
+                    <a:p>
+                      <a:pPr algn="l"/>
+                      <a:r>
+                        <a:rPr sz="1600" b="0">
+                          <a:solidFill>
+                            <a:srgbClr val="1F1F1F"/>
+                          </a:solidFill>
+                          <a:latin typeface="Times New Roman"/>
+                        </a:rPr>
+                        <a:t>Hevy, Strong</a:t>
+                      </a:r>
+                    </a:p>
+                  </a:txBody>
+                  <a:tcPr anchor="ctr">
+                    <a:solidFill>
+                      <a:srgbClr val="FFFFFF"/>
+                    </a:solidFill>
+                  </a:tcPr>
+                </a:tc>
+                <a:tc>
+                  <a:txBody>
+                    <a:bodyPr/>
+                    <a:lstStyle/>
+                    <a:p>
+                      <a:pPr algn="ctr"/>
+                      <a:r>
+                        <a:rPr sz="1600" b="0">
+                          <a:solidFill>
+                            <a:srgbClr val="1F1F1F"/>
+                          </a:solidFill>
+                          <a:latin typeface="Times New Roman"/>
+                        </a:rPr>
+                        <a:t>—</a:t>
+                      </a:r>
+                    </a:p>
+                  </a:txBody>
+                  <a:tcPr anchor="ctr">
+                    <a:solidFill>
+                      <a:srgbClr val="FFFFFF"/>
+                    </a:solidFill>
+                  </a:tcPr>
+                </a:tc>
+                <a:tc>
+                  <a:txBody>
+                    <a:bodyPr/>
+                    <a:lstStyle/>
+                    <a:p>
+                      <a:pPr algn="ctr"/>
+                      <a:r>
+                        <a:rPr sz="1600" b="0">
+                          <a:solidFill>
+                            <a:srgbClr val="1F1F1F"/>
+                          </a:solidFill>
+                          <a:latin typeface="Times New Roman"/>
+                        </a:rPr>
+                        <a:t>—</a:t>
+                      </a:r>
+                    </a:p>
+                  </a:txBody>
+                  <a:tcPr anchor="ctr">
+                    <a:solidFill>
+                      <a:srgbClr val="FFFFFF"/>
+                    </a:solidFill>
+                  </a:tcPr>
+                </a:tc>
+                <a:tc>
+                  <a:txBody>
+                    <a:bodyPr/>
+                    <a:lstStyle/>
+                    <a:p>
+                      <a:pPr algn="ctr"/>
+                      <a:r>
+                        <a:rPr sz="1600" b="0">
+                          <a:solidFill>
+                            <a:srgbClr val="1F1F1F"/>
+                          </a:solidFill>
+                          <a:latin typeface="Times New Roman"/>
+                        </a:rPr>
+                        <a:t>—</a:t>
+                      </a:r>
+                    </a:p>
+                  </a:txBody>
+                  <a:tcPr anchor="ctr">
+                    <a:solidFill>
+                      <a:srgbClr val="FFFFFF"/>
+                    </a:solidFill>
+                  </a:tcPr>
+                </a:tc>
+              </a:tr>
+              <a:tr h="777240">
+                <a:tc>
+                  <a:txBody>
+                    <a:bodyPr/>
+                    <a:lstStyle/>
+                    <a:p>
+                      <a:pPr algn="l"/>
+                      <a:r>
+                        <a:rPr sz="1600" b="0">
+                          <a:solidFill>
+                            <a:srgbClr val="1F1F1F"/>
+                          </a:solidFill>
+                          <a:latin typeface="Times New Roman"/>
+                        </a:rPr>
+                        <a:t>Fitbod</a:t>
+                      </a:r>
+                    </a:p>
+                  </a:txBody>
+                  <a:tcPr anchor="ctr">
+                    <a:solidFill>
+                      <a:srgbClr val="FFFFFF"/>
+                    </a:solidFill>
+                  </a:tcPr>
+                </a:tc>
+                <a:tc>
+                  <a:txBody>
+                    <a:bodyPr/>
+                    <a:lstStyle/>
+                    <a:p>
+                      <a:pPr algn="ctr"/>
+                      <a:r>
+                        <a:rPr sz="1600" b="0">
+                          <a:solidFill>
+                            <a:srgbClr val="1F1F1F"/>
+                          </a:solidFill>
+                          <a:latin typeface="Times New Roman"/>
+                        </a:rPr>
+                        <a:t>—</a:t>
+                      </a:r>
+                    </a:p>
+                  </a:txBody>
+                  <a:tcPr anchor="ctr">
+                    <a:solidFill>
+                      <a:srgbClr val="FFFFFF"/>
+                    </a:solidFill>
+                  </a:tcPr>
+                </a:tc>
+                <a:tc>
+                  <a:txBody>
+                    <a:bodyPr/>
+                    <a:lstStyle/>
+                    <a:p>
+                      <a:pPr algn="ctr"/>
+                      <a:r>
+                        <a:rPr sz="1600" b="0">
+                          <a:solidFill>
+                            <a:srgbClr val="1F1F1F"/>
+                          </a:solidFill>
+                          <a:latin typeface="Times New Roman"/>
+                        </a:rPr>
+                        <a:t>—</a:t>
+                      </a:r>
+                    </a:p>
+                  </a:txBody>
+                  <a:tcPr anchor="ctr">
+                    <a:solidFill>
+                      <a:srgbClr val="FFFFFF"/>
+                    </a:solidFill>
+                  </a:tcPr>
+                </a:tc>
+                <a:tc>
+                  <a:txBody>
+                    <a:bodyPr/>
+                    <a:lstStyle/>
+                    <a:p>
+                      <a:pPr algn="ctr"/>
+                      <a:r>
+                        <a:rPr sz="1600" b="0">
+                          <a:solidFill>
+                            <a:srgbClr val="1F1F1F"/>
+                          </a:solidFill>
+                          <a:latin typeface="Times New Roman"/>
+                        </a:rPr>
+                        <a:t>—</a:t>
+                      </a:r>
+                    </a:p>
+                  </a:txBody>
+                  <a:tcPr anchor="ctr">
+                    <a:solidFill>
+                      <a:srgbClr val="FFFFFF"/>
+                    </a:solidFill>
+                  </a:tcPr>
+                </a:tc>
+              </a:tr>
+              <a:tr h="777240">
+                <a:tc>
+                  <a:txBody>
+                    <a:bodyPr/>
+                    <a:lstStyle/>
+                    <a:p>
+                      <a:pPr algn="l"/>
+                      <a:r>
+                        <a:rPr sz="1600" b="0">
+                          <a:solidFill>
+                            <a:srgbClr val="1F1F1F"/>
+                          </a:solidFill>
+                          <a:latin typeface="Times New Roman"/>
+                        </a:rPr>
+                        <a:t>MacroFactor</a:t>
+                      </a:r>
+                    </a:p>
+                  </a:txBody>
+                  <a:tcPr anchor="ctr">
+                    <a:solidFill>
+                      <a:srgbClr val="FFFFFF"/>
+                    </a:solidFill>
+                  </a:tcPr>
+                </a:tc>
+                <a:tc>
+                  <a:txBody>
+                    <a:bodyPr/>
+                    <a:lstStyle/>
+                    <a:p>
+                      <a:pPr algn="ctr"/>
+                      <a:r>
+                        <a:rPr sz="1600" b="0">
+                          <a:solidFill>
+                            <a:srgbClr val="1F1F1F"/>
+                          </a:solidFill>
+                          <a:latin typeface="Times New Roman"/>
+                        </a:rPr>
+                        <a:t>Только вес</a:t>
+                      </a:r>
+                    </a:p>
+                  </a:txBody>
+                  <a:tcPr anchor="ctr">
+                    <a:solidFill>
+                      <a:srgbClr val="FFFFFF"/>
+                    </a:solidFill>
+                  </a:tcPr>
+                </a:tc>
+                <a:tc>
+                  <a:txBody>
+                    <a:bodyPr/>
+                    <a:lstStyle/>
+                    <a:p>
+                      <a:pPr algn="ctr"/>
+                      <a:r>
+                        <a:rPr sz="1600" b="0">
+                          <a:solidFill>
+                            <a:srgbClr val="1F1F1F"/>
+                          </a:solidFill>
+                          <a:latin typeface="Times New Roman"/>
+                        </a:rPr>
+                        <a:t>—</a:t>
+                      </a:r>
+                    </a:p>
+                  </a:txBody>
+                  <a:tcPr anchor="ctr">
+                    <a:solidFill>
+                      <a:srgbClr val="FFFFFF"/>
+                    </a:solidFill>
+                  </a:tcPr>
+                </a:tc>
+                <a:tc>
+                  <a:txBody>
+                    <a:bodyPr/>
+                    <a:lstStyle/>
+                    <a:p>
+                      <a:pPr algn="ctr"/>
+                      <a:r>
+                        <a:rPr sz="1600" b="0">
+                          <a:solidFill>
+                            <a:srgbClr val="1F1F1F"/>
+                          </a:solidFill>
+                          <a:latin typeface="Times New Roman"/>
+                        </a:rPr>
+                        <a:t>Частично</a:t>
+                      </a:r>
+                    </a:p>
+                  </a:txBody>
+                  <a:tcPr anchor="ctr">
+                    <a:solidFill>
+                      <a:srgbClr val="FFFFFF"/>
+                    </a:solidFill>
+                  </a:tcPr>
+                </a:tc>
+              </a:tr>
+              <a:tr h="777240">
+                <a:tc>
+                  <a:txBody>
+                    <a:bodyPr/>
+                    <a:lstStyle/>
+                    <a:p>
+                      <a:pPr algn="l"/>
+                      <a:r>
+                        <a:rPr sz="1600" b="0">
+                          <a:solidFill>
+                            <a:srgbClr val="1F1F1F"/>
+                          </a:solidFill>
+                          <a:latin typeface="Times New Roman"/>
+                        </a:rPr>
+                        <a:t>DDX Fitness</a:t>
+                      </a:r>
+                    </a:p>
+                  </a:txBody>
+                  <a:tcPr anchor="ctr">
+                    <a:solidFill>
+                      <a:srgbClr val="FFFFFF"/>
+                    </a:solidFill>
+                  </a:tcPr>
+                </a:tc>
+                <a:tc>
+                  <a:txBody>
+                    <a:bodyPr/>
+                    <a:lstStyle/>
+                    <a:p>
+                      <a:pPr algn="ctr"/>
+                      <a:r>
+                        <a:rPr sz="1600" b="0">
+                          <a:solidFill>
+                            <a:srgbClr val="1F1F1F"/>
+                          </a:solidFill>
+                          <a:latin typeface="Times New Roman"/>
+                        </a:rPr>
+                        <a:t>—</a:t>
+                      </a:r>
+                    </a:p>
+                  </a:txBody>
+                  <a:tcPr anchor="ctr">
+                    <a:solidFill>
+                      <a:srgbClr val="FFFFFF"/>
+                    </a:solidFill>
+                  </a:tcPr>
+                </a:tc>
+                <a:tc>
+                  <a:txBody>
+                    <a:bodyPr/>
+                    <a:lstStyle/>
+                    <a:p>
+                      <a:pPr algn="ctr"/>
+                      <a:r>
+                        <a:rPr sz="1600" b="0">
+                          <a:solidFill>
+                            <a:srgbClr val="1F1F1F"/>
+                          </a:solidFill>
+                          <a:latin typeface="Times New Roman"/>
+                        </a:rPr>
+                        <a:t>Замер</a:t>
+                      </a:r>
+                    </a:p>
+                  </a:txBody>
+                  <a:tcPr anchor="ctr">
+                    <a:solidFill>
+                      <a:srgbClr val="FFFFFF"/>
+                    </a:solidFill>
+                  </a:tcPr>
+                </a:tc>
+                <a:tc>
+                  <a:txBody>
+                    <a:bodyPr/>
+                    <a:lstStyle/>
+                    <a:p>
+                      <a:pPr algn="ctr"/>
+                      <a:r>
+                        <a:rPr sz="1600" b="0">
+                          <a:solidFill>
+                            <a:srgbClr val="1F1F1F"/>
+                          </a:solidFill>
+                          <a:latin typeface="Times New Roman"/>
+                        </a:rPr>
+                        <a:t>—</a:t>
+                      </a:r>
+                    </a:p>
+                  </a:txBody>
+                  <a:tcPr anchor="ctr">
+                    <a:solidFill>
+                      <a:srgbClr val="FFFFFF"/>
+                    </a:solidFill>
+                  </a:tcPr>
+                </a:tc>
+              </a:tr>
+              <a:tr h="777240">
+                <a:tc>
+                  <a:txBody>
+                    <a:bodyPr/>
+                    <a:lstStyle/>
+                    <a:p>
+                      <a:pPr algn="l"/>
+                      <a:r>
+                        <a:rPr sz="1600" b="1">
+                          <a:solidFill>
+                            <a:srgbClr val="FFFFFF"/>
+                          </a:solidFill>
+                          <a:latin typeface="Times New Roman"/>
+                        </a:rPr>
+                        <a:t>Portal</a:t>
+                      </a:r>
+                    </a:p>
+                  </a:txBody>
+                  <a:tcPr anchor="ctr">
+                    <a:solidFill>
+                      <a:srgbClr val="000000"/>
+                    </a:solidFill>
+                  </a:tcPr>
+                </a:tc>
+                <a:tc>
+                  <a:txBody>
+                    <a:bodyPr/>
+                    <a:lstStyle/>
+                    <a:p>
+                      <a:pPr algn="ctr"/>
+                      <a:r>
+                        <a:rPr sz="1600" b="1">
+                          <a:solidFill>
+                            <a:srgbClr val="FFFFFF"/>
+                          </a:solidFill>
+                          <a:latin typeface="Times New Roman"/>
+                        </a:rPr>
+                        <a:t>+</a:t>
+                      </a:r>
+                    </a:p>
+                  </a:txBody>
+                  <a:tcPr anchor="ctr">
+                    <a:solidFill>
+                      <a:srgbClr val="000000"/>
+                    </a:solidFill>
+                  </a:tcPr>
+                </a:tc>
+                <a:tc>
+                  <a:txBody>
+                    <a:bodyPr/>
+                    <a:lstStyle/>
+                    <a:p>
+                      <a:pPr algn="ctr"/>
+                      <a:r>
+                        <a:rPr sz="1600" b="1">
+                          <a:solidFill>
+                            <a:srgbClr val="FFFFFF"/>
+                          </a:solidFill>
+                          <a:latin typeface="Times New Roman"/>
+                        </a:rPr>
+                        <a:t>+</a:t>
+                      </a:r>
+                    </a:p>
+                  </a:txBody>
+                  <a:tcPr anchor="ctr">
+                    <a:solidFill>
+                      <a:srgbClr val="000000"/>
+                    </a:solidFill>
+                  </a:tcPr>
+                </a:tc>
+                <a:tc>
+                  <a:txBody>
+                    <a:bodyPr/>
+                    <a:lstStyle/>
+                    <a:p>
+                      <a:pPr algn="ctr"/>
+                      <a:r>
+                        <a:rPr sz="1600" b="1">
+                          <a:solidFill>
+                            <a:srgbClr val="FFFFFF"/>
+                          </a:solidFill>
+                          <a:latin typeface="Times New Roman"/>
+                        </a:rPr>
+                        <a:t>+</a:t>
+                      </a:r>
+                    </a:p>
+                  </a:txBody>
+                  <a:tcPr anchor="ctr">
+                    <a:solidFill>
+                      <a:srgbClr val="000000"/>
+                    </a:solidFill>
+                  </a:tcPr>
+                </a:tc>
+              </a:tr>
+            </a:tbl>
+          </a:graphicData>
+        </a:graphic>
+      </p:graphicFrame>
       <p:sp>
         <p:nvSpPr>
           <p:cNvPr id="5" name="TextBox 4"/>
@@ -6277,8 +6867,8 @@
         </p:nvSpPr>
         <p:spPr>
           <a:xfrm>
-            <a:off x="548640" y="2011680"/>
-            <a:ext cx="10972800" cy="4389120"/>
+            <a:off x="10332720" y="6263640"/>
+            <a:ext cx="1371600" cy="457200"/>
           </a:xfrm>
           <a:prstGeom prst="rect">
             <a:avLst/>
@@ -6291,153 +6881,15 @@
           </a:bodyPr>
           <a:lstStyle/>
           <a:p>
-            <a:pPr algn="l">
-              <a:spcAft>
-                <a:spcPts val="800"/>
-              </a:spcAft>
-            </a:pPr>
-            <a:r>
-              <a:rPr sz="1700">
-                <a:solidFill>
-                  <a:srgbClr val="1F1F1F"/>
-                </a:solidFill>
-                <a:latin typeface="Calibri"/>
-              </a:rPr>
-              <a:t>•  Постановка: квантильная one-step регрессия дельт; multi-horizon получается рекурсивным применением модели</a:t>
-            </a:r>
-          </a:p>
-          <a:p>
-            <a:pPr algn="l">
-              <a:spcAft>
-                <a:spcPts val="800"/>
-              </a:spcAft>
-            </a:pPr>
-            <a:r>
-              <a:rPr sz="1700">
-                <a:solidFill>
-                  <a:srgbClr val="1F1F1F"/>
-                </a:solidFill>
-                <a:latin typeface="Calibri"/>
-              </a:rPr>
-              <a:t>•  Целевая функция quantile (α ∈ {0.1, 0.5, 0.9}) даёт три оценки: нижняя граница CI, медиана (точечный прогноз), верхняя граница</a:t>
-            </a:r>
-          </a:p>
-          <a:p>
-            <a:pPr algn="l">
-              <a:spcAft>
-                <a:spcPts val="800"/>
-              </a:spcAft>
-            </a:pPr>
-            <a:r>
-              <a:rPr sz="1700">
-                <a:solidFill>
-                  <a:srgbClr val="1F1F1F"/>
-                </a:solidFill>
-                <a:latin typeface="Calibri"/>
-              </a:rPr>
-              <a:t>•  12 признаков: возраст, пол, рост, текущие weight/fat/muscle, BMI, FFM, тренировочный объём, калории, цель (one-hot)</a:t>
-            </a:r>
-          </a:p>
-          <a:p>
-            <a:pPr algn="l">
-              <a:spcAft>
-                <a:spcPts val="800"/>
-              </a:spcAft>
-            </a:pPr>
-            <a:r>
-              <a:rPr sz="1700">
-                <a:solidFill>
-                  <a:srgbClr val="1F1F1F"/>
-                </a:solidFill>
-                <a:latin typeface="Calibri"/>
-              </a:rPr>
-              <a:t>•  Прод-артефакт — 9 LightGBM-бустеров (3 целевых × 3 квантиля); каждый бустер — ансамбль из ~86 деревьев решений глубиной до 4, обучен с целевой функцией quantile loss</a:t>
-            </a:r>
-          </a:p>
-          <a:p>
-            <a:pPr algn="l">
-              <a:spcAft>
-                <a:spcPts val="800"/>
-              </a:spcAft>
-            </a:pPr>
-            <a:r>
-              <a:rPr sz="1700">
-                <a:solidFill>
-                  <a:srgbClr val="1F1F1F"/>
-                </a:solidFill>
-                <a:latin typeface="Calibri"/>
-              </a:rPr>
-              <a:t>•  Baseline для сравнения: persistence (Δ=0) и Ridge; альтернатива — MLP с shared trunk 64→32 + δ-параметризация квантилей (q10 ≤ q50 ≤ q90)</a:t>
-            </a:r>
-          </a:p>
-        </p:txBody>
-      </p:sp>
-      <p:sp>
-        <p:nvSpPr>
-          <p:cNvPr id="6" name="TextBox 5"/>
-          <p:cNvSpPr txBox="1"/>
-          <p:nvPr/>
-        </p:nvSpPr>
-        <p:spPr>
-          <a:xfrm>
-            <a:off x="548640" y="6446520"/>
-            <a:ext cx="5486400" cy="274320"/>
-          </a:xfrm>
-          <a:prstGeom prst="rect">
-            <a:avLst/>
-          </a:prstGeom>
-          <a:noFill/>
-        </p:spPr>
-        <p:txBody>
-          <a:bodyPr wrap="square">
-            <a:spAutoFit/>
-          </a:bodyPr>
-          <a:lstStyle/>
-          <a:p>
-            <a:pPr algn="l"/>
-            <a:r>
-              <a:rPr sz="1000" b="0">
+            <a:pPr algn="r"/>
+            <a:r>
+              <a:rPr sz="2000" b="0">
                 <a:solidFill>
                   <a:srgbClr val="555555"/>
                 </a:solidFill>
-                <a:latin typeface="Calibri"/>
-              </a:rPr>
-              <a:t>Лапова М. С.  ·  ВКР 2026  ·  Fitness Tracker</a:t>
-            </a:r>
-          </a:p>
-        </p:txBody>
-      </p:sp>
-      <p:sp>
-        <p:nvSpPr>
-          <p:cNvPr id="7" name="TextBox 6"/>
-          <p:cNvSpPr txBox="1"/>
-          <p:nvPr/>
-        </p:nvSpPr>
-        <p:spPr>
-          <a:xfrm>
-            <a:off x="10515600" y="6446520"/>
-            <a:ext cx="1188720" cy="274320"/>
-          </a:xfrm>
-          <a:prstGeom prst="rect">
-            <a:avLst/>
-          </a:prstGeom>
-          <a:noFill/>
-        </p:spPr>
-        <p:txBody>
-          <a:bodyPr wrap="square">
-            <a:spAutoFit/>
-          </a:bodyPr>
-          <a:lstStyle/>
-          <a:p>
-            <a:pPr algn="r"/>
-            <a:r>
-              <a:rPr sz="1000" b="0">
-                <a:solidFill>
-                  <a:srgbClr val="555555"/>
-                </a:solidFill>
-                <a:latin typeface="Calibri"/>
-              </a:rPr>
-              <a:t>5 / 14</a:t>
+                <a:latin typeface="Times New Roman"/>
+              </a:rPr>
+              <a:t>5</a:t>
             </a:r>
           </a:p>
         </p:txBody>
@@ -6488,56 +6940,37 @@
                 <a:solidFill>
                   <a:srgbClr val="1F1F1F"/>
                 </a:solidFill>
-                <a:latin typeface="Calibri"/>
-              </a:rPr>
-              <a:t>Датасет: 9776 точек, синтез траекторий</a:t>
-            </a:r>
-          </a:p>
-        </p:txBody>
-      </p:sp>
-      <p:sp>
-        <p:nvSpPr>
-          <p:cNvPr id="3" name="Rectangle 2"/>
-          <p:cNvSpPr/>
+                <a:latin typeface="Times New Roman"/>
+              </a:rPr>
+              <a:t>Архитектура системы</a:t>
+            </a:r>
+          </a:p>
+        </p:txBody>
+      </p:sp>
+      <p:pic>
+        <p:nvPicPr>
+          <p:cNvPr id="3" name="Picture 2" descr="image.png"/>
+          <p:cNvPicPr>
+            <a:picLocks noChangeAspect="1"/>
+          </p:cNvPicPr>
           <p:nvPr/>
-        </p:nvSpPr>
-        <p:spPr>
-          <a:xfrm>
-            <a:off x="548640" y="594360"/>
-            <a:ext cx="1097280" cy="54864"/>
+        </p:nvPicPr>
+        <p:blipFill>
+          <a:blip r:embed="rId2"/>
+          <a:stretch>
+            <a:fillRect/>
+          </a:stretch>
+        </p:blipFill>
+        <p:spPr>
+          <a:xfrm>
+            <a:off x="1291380" y="960120"/>
+            <a:ext cx="9608935" cy="4754880"/>
           </a:xfrm>
           <a:prstGeom prst="rect">
             <a:avLst/>
           </a:prstGeom>
-          <a:solidFill>
-            <a:srgbClr val="7F0DF2"/>
-          </a:solidFill>
-          <a:ln>
-            <a:noFill/>
-          </a:ln>
-        </p:spPr>
-        <p:style>
-          <a:lnRef idx="1">
-            <a:schemeClr val="accent1"/>
-          </a:lnRef>
-          <a:fillRef idx="3">
-            <a:schemeClr val="accent1"/>
-          </a:fillRef>
-          <a:effectRef idx="2">
-            <a:schemeClr val="accent1"/>
-          </a:effectRef>
-          <a:fontRef idx="minor">
-            <a:schemeClr val="lt1"/>
-          </a:fontRef>
-        </p:style>
-        <p:txBody>
-          <a:bodyPr rtlCol="0" anchor="ctr"/>
-          <a:lstStyle/>
-          <a:p>
-            <a:pPr algn="ctr"/>
-          </a:p>
-        </p:txBody>
-      </p:sp>
+        </p:spPr>
+      </p:pic>
       <p:sp>
         <p:nvSpPr>
           <p:cNvPr id="4" name="TextBox 3"/>
@@ -6546,8 +6979,8 @@
         </p:nvSpPr>
         <p:spPr>
           <a:xfrm>
-            <a:off x="548640" y="1005840"/>
-            <a:ext cx="10972800" cy="731520"/>
+            <a:off x="548640" y="5852160"/>
+            <a:ext cx="10972800" cy="457200"/>
           </a:xfrm>
           <a:prstGeom prst="rect">
             <a:avLst/>
@@ -6560,15 +6993,15 @@
           </a:bodyPr>
           <a:lstStyle/>
           <a:p>
-            <a:pPr algn="l"/>
-            <a:r>
-              <a:rPr sz="1800" b="0">
-                <a:solidFill>
-                  <a:srgbClr val="1F1F1F"/>
-                </a:solidFill>
-                <a:latin typeface="Calibri"/>
-              </a:rPr>
-              <a:t>Открытых time-series датасетов InBody не существует. Решение — синтез траекторий на основе двух кросс-секционных Kaggle-источников.</a:t>
+            <a:pPr algn="ctr"/>
+            <a:r>
+              <a:rPr sz="1400" b="0">
+                <a:solidFill>
+                  <a:srgbClr val="555555"/>
+                </a:solidFill>
+                <a:latin typeface="Times New Roman"/>
+              </a:rPr>
+              <a:t>Рис. 1. Архитектура приложения Portal</a:t>
             </a:r>
           </a:p>
         </p:txBody>
@@ -6581,8 +7014,8 @@
         </p:nvSpPr>
         <p:spPr>
           <a:xfrm>
-            <a:off x="548640" y="2011680"/>
-            <a:ext cx="10972800" cy="4389120"/>
+            <a:off x="10332720" y="6263640"/>
+            <a:ext cx="1371600" cy="457200"/>
           </a:xfrm>
           <a:prstGeom prst="rect">
             <a:avLst/>
@@ -6595,169 +7028,15 @@
           </a:bodyPr>
           <a:lstStyle/>
           <a:p>
-            <a:pPr algn="l">
-              <a:spcAft>
-                <a:spcPts val="800"/>
-              </a:spcAft>
-            </a:pPr>
-            <a:r>
-              <a:rPr sz="1700">
-                <a:solidFill>
-                  <a:srgbClr val="1F1F1F"/>
-                </a:solidFill>
-                <a:latin typeface="Calibri"/>
-              </a:rPr>
-              <a:t>•  S3 (gym-members-exercise-dataset): 973 строки профилей фитнес-клиентов после prevalence-фильтрации</a:t>
-            </a:r>
-          </a:p>
-          <a:p>
-            <a:pPr algn="l">
-              <a:spcAft>
-                <a:spcPts val="800"/>
-              </a:spcAft>
-            </a:pPr>
-            <a:r>
-              <a:rPr sz="1700">
-                <a:solidFill>
-                  <a:srgbClr val="1F1F1F"/>
-                </a:solidFill>
-                <a:latin typeface="Calibri"/>
-              </a:rPr>
-              <a:t>•  S4 (body-fat-prediction-dataset): 251 строка с body composition</a:t>
-            </a:r>
-          </a:p>
-          <a:p>
-            <a:pPr algn="l">
-              <a:spcAft>
-                <a:spcPts val="800"/>
-              </a:spcAft>
-            </a:pPr>
-            <a:r>
-              <a:rPr sz="1700">
-                <a:solidFill>
-                  <a:srgbClr val="1F1F1F"/>
-                </a:solidFill>
-                <a:latin typeface="Calibri"/>
-              </a:rPr>
-              <a:t>•  Синтез: для каждого пользователя из S3 генерируется 8-недельная траектория с физиологически правдоподобной динамикой</a:t>
-            </a:r>
-          </a:p>
-          <a:p>
-            <a:pPr algn="l">
-              <a:spcAft>
-                <a:spcPts val="800"/>
-              </a:spcAft>
-            </a:pPr>
-            <a:r>
-              <a:rPr sz="1700">
-                <a:solidFill>
-                  <a:srgbClr val="1F1F1F"/>
-                </a:solidFill>
-                <a:latin typeface="Calibri"/>
-              </a:rPr>
-              <a:t>•  Итог: 9776 строк (пользователь × неделя), 1222 анонимизированных пользователя; флаг is_synthetic=True</a:t>
-            </a:r>
-          </a:p>
-          <a:p>
-            <a:pPr algn="l">
-              <a:spcAft>
-                <a:spcPts val="800"/>
-              </a:spcAft>
-            </a:pPr>
-            <a:r>
-              <a:rPr sz="1700">
-                <a:solidFill>
-                  <a:srgbClr val="1F1F1F"/>
-                </a:solidFill>
-                <a:latin typeface="Calibri"/>
-              </a:rPr>
-              <a:t>•  Сплит 70/15/15 без leakage по anon_user_id: 6843 / 1466 / 1467 точек</a:t>
-            </a:r>
-          </a:p>
-          <a:p>
-            <a:pPr algn="l">
-              <a:spcAft>
-                <a:spcPts val="800"/>
-              </a:spcAft>
-            </a:pPr>
-            <a:r>
-              <a:rPr sz="1700">
-                <a:solidFill>
-                  <a:srgbClr val="1F1F1F"/>
-                </a:solidFill>
-                <a:latin typeface="Calibri"/>
-              </a:rPr>
-              <a:t>•  Воспроизводимость: SHA-256 датасета фиксируется в manifest.json каждой модели; seed=42 на всех шагах</a:t>
-            </a:r>
-          </a:p>
-        </p:txBody>
-      </p:sp>
-      <p:sp>
-        <p:nvSpPr>
-          <p:cNvPr id="6" name="TextBox 5"/>
-          <p:cNvSpPr txBox="1"/>
-          <p:nvPr/>
-        </p:nvSpPr>
-        <p:spPr>
-          <a:xfrm>
-            <a:off x="548640" y="6446520"/>
-            <a:ext cx="5486400" cy="274320"/>
-          </a:xfrm>
-          <a:prstGeom prst="rect">
-            <a:avLst/>
-          </a:prstGeom>
-          <a:noFill/>
-        </p:spPr>
-        <p:txBody>
-          <a:bodyPr wrap="square">
-            <a:spAutoFit/>
-          </a:bodyPr>
-          <a:lstStyle/>
-          <a:p>
-            <a:pPr algn="l"/>
-            <a:r>
-              <a:rPr sz="1000" b="0">
+            <a:pPr algn="r"/>
+            <a:r>
+              <a:rPr sz="2000" b="0">
                 <a:solidFill>
                   <a:srgbClr val="555555"/>
                 </a:solidFill>
-                <a:latin typeface="Calibri"/>
-              </a:rPr>
-              <a:t>Лапова М. С.  ·  ВКР 2026  ·  Fitness Tracker</a:t>
-            </a:r>
-          </a:p>
-        </p:txBody>
-      </p:sp>
-      <p:sp>
-        <p:nvSpPr>
-          <p:cNvPr id="7" name="TextBox 6"/>
-          <p:cNvSpPr txBox="1"/>
-          <p:nvPr/>
-        </p:nvSpPr>
-        <p:spPr>
-          <a:xfrm>
-            <a:off x="10515600" y="6446520"/>
-            <a:ext cx="1188720" cy="274320"/>
-          </a:xfrm>
-          <a:prstGeom prst="rect">
-            <a:avLst/>
-          </a:prstGeom>
-          <a:noFill/>
-        </p:spPr>
-        <p:txBody>
-          <a:bodyPr wrap="square">
-            <a:spAutoFit/>
-          </a:bodyPr>
-          <a:lstStyle/>
-          <a:p>
-            <a:pPr algn="r"/>
-            <a:r>
-              <a:rPr sz="1000" b="0">
-                <a:solidFill>
-                  <a:srgbClr val="555555"/>
-                </a:solidFill>
-                <a:latin typeface="Calibri"/>
-              </a:rPr>
-              <a:t>6 / 14</a:t>
+                <a:latin typeface="Times New Roman"/>
+              </a:rPr>
+              <a:t>6</a:t>
             </a:r>
           </a:p>
         </p:txBody>
@@ -6808,59 +7087,16 @@
                 <a:solidFill>
                   <a:srgbClr val="1F1F1F"/>
                 </a:solidFill>
-                <a:latin typeface="Calibri"/>
-              </a:rPr>
-              <a:t>Сравнение моделей: MAE на тестовом сплите</a:t>
-            </a:r>
-          </a:p>
-        </p:txBody>
-      </p:sp>
-      <p:sp>
-        <p:nvSpPr>
-          <p:cNvPr id="3" name="Rectangle 2"/>
-          <p:cNvSpPr/>
-          <p:nvPr/>
-        </p:nvSpPr>
-        <p:spPr>
-          <a:xfrm>
-            <a:off x="548640" y="594360"/>
-            <a:ext cx="1097280" cy="54864"/>
-          </a:xfrm>
-          <a:prstGeom prst="rect">
-            <a:avLst/>
-          </a:prstGeom>
-          <a:solidFill>
-            <a:srgbClr val="7F0DF2"/>
-          </a:solidFill>
-          <a:ln>
-            <a:noFill/>
-          </a:ln>
-        </p:spPr>
-        <p:style>
-          <a:lnRef idx="1">
-            <a:schemeClr val="accent1"/>
-          </a:lnRef>
-          <a:fillRef idx="3">
-            <a:schemeClr val="accent1"/>
-          </a:fillRef>
-          <a:effectRef idx="2">
-            <a:schemeClr val="accent1"/>
-          </a:effectRef>
-          <a:fontRef idx="minor">
-            <a:schemeClr val="lt1"/>
-          </a:fontRef>
-        </p:style>
-        <p:txBody>
-          <a:bodyPr rtlCol="0" anchor="ctr"/>
-          <a:lstStyle/>
-          <a:p>
-            <a:pPr algn="ctr"/>
+                <a:latin typeface="Times New Roman"/>
+              </a:rPr>
+              <a:t>Схема базы данных</a:t>
+            </a:r>
           </a:p>
         </p:txBody>
       </p:sp>
       <p:pic>
         <p:nvPicPr>
-          <p:cNvPr id="4" name="Picture 3" descr="image.png"/>
+          <p:cNvPr id="3" name="Picture 2" descr="er-diagram-maria.png"/>
           <p:cNvPicPr>
             <a:picLocks noChangeAspect="1"/>
           </p:cNvPicPr>
@@ -6874,8 +7110,8 @@
         </p:blipFill>
         <p:spPr>
           <a:xfrm>
-            <a:off x="1097280" y="1005840"/>
-            <a:ext cx="10058400" cy="4978400"/>
+            <a:off x="2469883" y="1143000"/>
+            <a:ext cx="7251928" cy="4572000"/>
           </a:xfrm>
           <a:prstGeom prst="rect">
             <a:avLst/>
@@ -6884,7 +7120,7 @@
       </p:pic>
       <p:sp>
         <p:nvSpPr>
-          <p:cNvPr id="5" name="TextBox 4"/>
+          <p:cNvPr id="4" name="TextBox 3"/>
           <p:cNvSpPr txBox="1"/>
           <p:nvPr/>
         </p:nvSpPr>
@@ -6906,27 +7142,27 @@
           <a:p>
             <a:pPr algn="ctr"/>
             <a:r>
-              <a:rPr sz="1400" b="0">
+              <a:rPr sz="1300" b="0">
                 <a:solidFill>
                   <a:srgbClr val="555555"/>
                 </a:solidFill>
-                <a:latin typeface="Calibri"/>
-              </a:rPr>
-              <a:t>LightGBM выбран в качестве прод-модели: бьёт baseline'ы на всех трёх таргетах, R²(weight)=0.73, скорость инференса &lt; 50 мс.</a:t>
-            </a:r>
-          </a:p>
-        </p:txBody>
-      </p:sp>
-      <p:sp>
-        <p:nvSpPr>
-          <p:cNvPr id="6" name="TextBox 5"/>
+                <a:latin typeface="Times New Roman"/>
+              </a:rPr>
+              <a:t>Рис. 2. Сущности и связи подсистемы прогноза и адаптации</a:t>
+            </a:r>
+          </a:p>
+        </p:txBody>
+      </p:sp>
+      <p:sp>
+        <p:nvSpPr>
+          <p:cNvPr id="5" name="TextBox 4"/>
           <p:cNvSpPr txBox="1"/>
           <p:nvPr/>
         </p:nvSpPr>
         <p:spPr>
           <a:xfrm>
-            <a:off x="548640" y="6446520"/>
-            <a:ext cx="5486400" cy="274320"/>
+            <a:off x="10332720" y="6263640"/>
+            <a:ext cx="1371600" cy="457200"/>
           </a:xfrm>
           <a:prstGeom prst="rect">
             <a:avLst/>
@@ -6939,50 +7175,15 @@
           </a:bodyPr>
           <a:lstStyle/>
           <a:p>
-            <a:pPr algn="l"/>
-            <a:r>
-              <a:rPr sz="1000" b="0">
+            <a:pPr algn="r"/>
+            <a:r>
+              <a:rPr sz="2000" b="0">
                 <a:solidFill>
                   <a:srgbClr val="555555"/>
                 </a:solidFill>
-                <a:latin typeface="Calibri"/>
-              </a:rPr>
-              <a:t>Лапова М. С.  ·  ВКР 2026  ·  Fitness Tracker</a:t>
-            </a:r>
-          </a:p>
-        </p:txBody>
-      </p:sp>
-      <p:sp>
-        <p:nvSpPr>
-          <p:cNvPr id="7" name="TextBox 6"/>
-          <p:cNvSpPr txBox="1"/>
-          <p:nvPr/>
-        </p:nvSpPr>
-        <p:spPr>
-          <a:xfrm>
-            <a:off x="10515600" y="6446520"/>
-            <a:ext cx="1188720" cy="274320"/>
-          </a:xfrm>
-          <a:prstGeom prst="rect">
-            <a:avLst/>
-          </a:prstGeom>
-          <a:noFill/>
-        </p:spPr>
-        <p:txBody>
-          <a:bodyPr wrap="square">
-            <a:spAutoFit/>
-          </a:bodyPr>
-          <a:lstStyle/>
-          <a:p>
-            <a:pPr algn="r"/>
-            <a:r>
-              <a:rPr sz="1000" b="0">
-                <a:solidFill>
-                  <a:srgbClr val="555555"/>
-                </a:solidFill>
-                <a:latin typeface="Calibri"/>
-              </a:rPr>
-              <a:t>7 / 14</a:t>
+                <a:latin typeface="Times New Roman"/>
+              </a:rPr>
+              <a:t>7</a:t>
             </a:r>
           </a:p>
         </p:txBody>
@@ -7033,620 +7234,23 @@
                 <a:solidFill>
                   <a:srgbClr val="1F1F1F"/>
                 </a:solidFill>
-                <a:latin typeface="Calibri"/>
-              </a:rPr>
-              <a:t>Метрики моделей: точечная оценка Δweight</a:t>
-            </a:r>
-          </a:p>
-        </p:txBody>
-      </p:sp>
-      <p:sp>
-        <p:nvSpPr>
-          <p:cNvPr id="3" name="Rectangle 2"/>
-          <p:cNvSpPr/>
-          <p:nvPr/>
-        </p:nvSpPr>
-        <p:spPr>
-          <a:xfrm>
-            <a:off x="548640" y="594360"/>
-            <a:ext cx="1097280" cy="54864"/>
-          </a:xfrm>
-          <a:prstGeom prst="rect">
-            <a:avLst/>
-          </a:prstGeom>
-          <a:solidFill>
-            <a:srgbClr val="7F0DF2"/>
-          </a:solidFill>
-          <a:ln>
-            <a:noFill/>
-          </a:ln>
-        </p:spPr>
-        <p:style>
-          <a:lnRef idx="1">
-            <a:schemeClr val="accent1"/>
-          </a:lnRef>
-          <a:fillRef idx="3">
-            <a:schemeClr val="accent1"/>
-          </a:fillRef>
-          <a:effectRef idx="2">
-            <a:schemeClr val="accent1"/>
-          </a:effectRef>
-          <a:fontRef idx="minor">
-            <a:schemeClr val="lt1"/>
-          </a:fontRef>
-        </p:style>
-        <p:txBody>
-          <a:bodyPr rtlCol="0" anchor="ctr"/>
-          <a:lstStyle/>
-          <a:p>
-            <a:pPr algn="ctr"/>
-          </a:p>
-        </p:txBody>
-      </p:sp>
-      <p:graphicFrame>
-        <p:nvGraphicFramePr>
-          <p:cNvPr id="4" name="Table 3"/>
-          <p:cNvGraphicFramePr>
-            <a:graphicFrameLocks noGrp="1"/>
-          </p:cNvGraphicFramePr>
-          <p:nvPr/>
-        </p:nvGraphicFramePr>
-        <p:xfrm>
-          <a:off x="838047" y="1280160"/>
-          <a:ext cx="10515600" cy="2468880"/>
-        </p:xfrm>
-        <a:graphic>
-          <a:graphicData uri="http://schemas.openxmlformats.org/drawingml/2006/table">
-            <a:tbl>
-              <a:tblPr firstRow="1" bandRow="1">
-                <a:tableStyleId>{5C22544A-7EE6-4342-B048-85BDC9FD1C3A}</a:tableStyleId>
-              </a:tblPr>
-              <a:tblGrid>
-                <a:gridCol w="2103120"/>
-                <a:gridCol w="2103120"/>
-                <a:gridCol w="2103120"/>
-                <a:gridCol w="2103120"/>
-                <a:gridCol w="2103120"/>
-              </a:tblGrid>
-              <a:tr h="493776">
-                <a:tc>
-                  <a:txBody>
-                    <a:bodyPr/>
-                    <a:lstStyle/>
-                    <a:p>
-                      <a:pPr algn="ctr"/>
-                      <a:r>
-                        <a:rPr sz="1400" b="1">
-                          <a:solidFill>
-                            <a:srgbClr val="FFFFFF"/>
-                          </a:solidFill>
-                          <a:latin typeface="Calibri"/>
-                        </a:rPr>
-                        <a:t>Модель</a:t>
-                      </a:r>
-                    </a:p>
-                  </a:txBody>
-                  <a:tcPr>
-                    <a:solidFill>
-                      <a:srgbClr val="7F0DF2"/>
-                    </a:solidFill>
-                  </a:tcPr>
-                </a:tc>
-                <a:tc>
-                  <a:txBody>
-                    <a:bodyPr/>
-                    <a:lstStyle/>
-                    <a:p>
-                      <a:pPr algn="ctr"/>
-                      <a:r>
-                        <a:rPr sz="1400" b="1">
-                          <a:solidFill>
-                            <a:srgbClr val="FFFFFF"/>
-                          </a:solidFill>
-                          <a:latin typeface="Calibri"/>
-                        </a:rPr>
-                        <a:t>MAE, кг</a:t>
-                      </a:r>
-                    </a:p>
-                  </a:txBody>
-                  <a:tcPr>
-                    <a:solidFill>
-                      <a:srgbClr val="7F0DF2"/>
-                    </a:solidFill>
-                  </a:tcPr>
-                </a:tc>
-                <a:tc>
-                  <a:txBody>
-                    <a:bodyPr/>
-                    <a:lstStyle/>
-                    <a:p>
-                      <a:pPr algn="ctr"/>
-                      <a:r>
-                        <a:rPr sz="1400" b="1">
-                          <a:solidFill>
-                            <a:srgbClr val="FFFFFF"/>
-                          </a:solidFill>
-                          <a:latin typeface="Calibri"/>
-                        </a:rPr>
-                        <a:t>RMSE, кг</a:t>
-                      </a:r>
-                    </a:p>
-                  </a:txBody>
-                  <a:tcPr>
-                    <a:solidFill>
-                      <a:srgbClr val="7F0DF2"/>
-                    </a:solidFill>
-                  </a:tcPr>
-                </a:tc>
-                <a:tc>
-                  <a:txBody>
-                    <a:bodyPr/>
-                    <a:lstStyle/>
-                    <a:p>
-                      <a:pPr algn="ctr"/>
-                      <a:r>
-                        <a:rPr sz="1400" b="1">
-                          <a:solidFill>
-                            <a:srgbClr val="FFFFFF"/>
-                          </a:solidFill>
-                          <a:latin typeface="Calibri"/>
-                        </a:rPr>
-                        <a:t>R²</a:t>
-                      </a:r>
-                    </a:p>
-                  </a:txBody>
-                  <a:tcPr>
-                    <a:solidFill>
-                      <a:srgbClr val="7F0DF2"/>
-                    </a:solidFill>
-                  </a:tcPr>
-                </a:tc>
-                <a:tc>
-                  <a:txBody>
-                    <a:bodyPr/>
-                    <a:lstStyle/>
-                    <a:p>
-                      <a:pPr algn="ctr"/>
-                      <a:r>
-                        <a:rPr sz="1400" b="1">
-                          <a:solidFill>
-                            <a:srgbClr val="FFFFFF"/>
-                          </a:solidFill>
-                          <a:latin typeface="Calibri"/>
-                        </a:rPr>
-                        <a:t>Δ vs baseline</a:t>
-                      </a:r>
-                    </a:p>
-                  </a:txBody>
-                  <a:tcPr>
-                    <a:solidFill>
-                      <a:srgbClr val="7F0DF2"/>
-                    </a:solidFill>
-                  </a:tcPr>
-                </a:tc>
-              </a:tr>
-              <a:tr h="493776">
-                <a:tc>
-                  <a:txBody>
-                    <a:bodyPr/>
-                    <a:lstStyle/>
-                    <a:p>
-                      <a:pPr algn="l"/>
-                      <a:r>
-                        <a:rPr sz="1300" b="0">
-                          <a:solidFill>
-                            <a:srgbClr val="1F1F1F"/>
-                          </a:solidFill>
-                          <a:latin typeface="Calibri"/>
-                        </a:rPr>
-                        <a:t>Persistence baseline</a:t>
-                      </a:r>
-                    </a:p>
-                  </a:txBody>
-                  <a:tcPr/>
-                </a:tc>
-                <a:tc>
-                  <a:txBody>
-                    <a:bodyPr/>
-                    <a:lstStyle/>
-                    <a:p>
-                      <a:pPr algn="ctr"/>
-                      <a:r>
-                        <a:rPr sz="1300" b="0">
-                          <a:solidFill>
-                            <a:srgbClr val="1F1F1F"/>
-                          </a:solidFill>
-                          <a:latin typeface="Calibri"/>
-                        </a:rPr>
-                        <a:t>0,325</a:t>
-                      </a:r>
-                    </a:p>
-                  </a:txBody>
-                  <a:tcPr/>
-                </a:tc>
-                <a:tc>
-                  <a:txBody>
-                    <a:bodyPr/>
-                    <a:lstStyle/>
-                    <a:p>
-                      <a:pPr algn="ctr"/>
-                      <a:r>
-                        <a:rPr sz="1300" b="0">
-                          <a:solidFill>
-                            <a:srgbClr val="1F1F1F"/>
-                          </a:solidFill>
-                          <a:latin typeface="Calibri"/>
-                        </a:rPr>
-                        <a:t>0,399</a:t>
-                      </a:r>
-                    </a:p>
-                  </a:txBody>
-                  <a:tcPr/>
-                </a:tc>
-                <a:tc>
-                  <a:txBody>
-                    <a:bodyPr/>
-                    <a:lstStyle/>
-                    <a:p>
-                      <a:pPr algn="ctr"/>
-                      <a:r>
-                        <a:rPr sz="1300" b="0">
-                          <a:solidFill>
-                            <a:srgbClr val="1F1F1F"/>
-                          </a:solidFill>
-                          <a:latin typeface="Calibri"/>
-                        </a:rPr>
-                        <a:t>−0,13</a:t>
-                      </a:r>
-                    </a:p>
-                  </a:txBody>
-                  <a:tcPr/>
-                </a:tc>
-                <a:tc>
-                  <a:txBody>
-                    <a:bodyPr/>
-                    <a:lstStyle/>
-                    <a:p>
-                      <a:pPr algn="ctr"/>
-                      <a:r>
-                        <a:rPr sz="1300" b="0">
-                          <a:solidFill>
-                            <a:srgbClr val="1F1F1F"/>
-                          </a:solidFill>
-                          <a:latin typeface="Calibri"/>
-                        </a:rPr>
-                        <a:t>—</a:t>
-                      </a:r>
-                    </a:p>
-                  </a:txBody>
-                  <a:tcPr/>
-                </a:tc>
-              </a:tr>
-              <a:tr h="493776">
-                <a:tc>
-                  <a:txBody>
-                    <a:bodyPr/>
-                    <a:lstStyle/>
-                    <a:p>
-                      <a:pPr algn="l"/>
-                      <a:r>
-                        <a:rPr sz="1300" b="0">
-                          <a:solidFill>
-                            <a:srgbClr val="1F1F1F"/>
-                          </a:solidFill>
-                          <a:latin typeface="Calibri"/>
-                        </a:rPr>
-                        <a:t>Ridge регрессия</a:t>
-                      </a:r>
-                    </a:p>
-                  </a:txBody>
-                  <a:tcPr/>
-                </a:tc>
-                <a:tc>
-                  <a:txBody>
-                    <a:bodyPr/>
-                    <a:lstStyle/>
-                    <a:p>
-                      <a:pPr algn="ctr"/>
-                      <a:r>
-                        <a:rPr sz="1300" b="0">
-                          <a:solidFill>
-                            <a:srgbClr val="1F1F1F"/>
-                          </a:solidFill>
-                          <a:latin typeface="Calibri"/>
-                        </a:rPr>
-                        <a:t>0,168</a:t>
-                      </a:r>
-                    </a:p>
-                  </a:txBody>
-                  <a:tcPr/>
-                </a:tc>
-                <a:tc>
-                  <a:txBody>
-                    <a:bodyPr/>
-                    <a:lstStyle/>
-                    <a:p>
-                      <a:pPr algn="ctr"/>
-                      <a:r>
-                        <a:rPr sz="1300" b="0">
-                          <a:solidFill>
-                            <a:srgbClr val="1F1F1F"/>
-                          </a:solidFill>
-                          <a:latin typeface="Calibri"/>
-                        </a:rPr>
-                        <a:t>0,210</a:t>
-                      </a:r>
-                    </a:p>
-                  </a:txBody>
-                  <a:tcPr/>
-                </a:tc>
-                <a:tc>
-                  <a:txBody>
-                    <a:bodyPr/>
-                    <a:lstStyle/>
-                    <a:p>
-                      <a:pPr algn="ctr"/>
-                      <a:r>
-                        <a:rPr sz="1300" b="0">
-                          <a:solidFill>
-                            <a:srgbClr val="1F1F1F"/>
-                          </a:solidFill>
-                          <a:latin typeface="Calibri"/>
-                        </a:rPr>
-                        <a:t>0,69</a:t>
-                      </a:r>
-                    </a:p>
-                  </a:txBody>
-                  <a:tcPr/>
-                </a:tc>
-                <a:tc>
-                  <a:txBody>
-                    <a:bodyPr/>
-                    <a:lstStyle/>
-                    <a:p>
-                      <a:pPr algn="ctr"/>
-                      <a:r>
-                        <a:rPr sz="1300" b="0">
-                          <a:solidFill>
-                            <a:srgbClr val="1F1F1F"/>
-                          </a:solidFill>
-                          <a:latin typeface="Calibri"/>
-                        </a:rPr>
-                        <a:t>−48%</a:t>
-                      </a:r>
-                    </a:p>
-                  </a:txBody>
-                  <a:tcPr/>
-                </a:tc>
-              </a:tr>
-              <a:tr h="493776">
-                <a:tc>
-                  <a:txBody>
-                    <a:bodyPr/>
-                    <a:lstStyle/>
-                    <a:p>
-                      <a:pPr algn="l"/>
-                      <a:r>
-                        <a:rPr sz="1300" b="1">
-                          <a:solidFill>
-                            <a:srgbClr val="1F1F1F"/>
-                          </a:solidFill>
-                          <a:latin typeface="Calibri"/>
-                        </a:rPr>
-                        <a:t>LightGBM (квантильная)</a:t>
-                      </a:r>
-                    </a:p>
-                  </a:txBody>
-                  <a:tcPr>
-                    <a:solidFill>
-                      <a:srgbClr val="F3E8FF"/>
-                    </a:solidFill>
-                  </a:tcPr>
-                </a:tc>
-                <a:tc>
-                  <a:txBody>
-                    <a:bodyPr/>
-                    <a:lstStyle/>
-                    <a:p>
-                      <a:pPr algn="ctr"/>
-                      <a:r>
-                        <a:rPr sz="1300" b="1">
-                          <a:solidFill>
-                            <a:srgbClr val="1F1F1F"/>
-                          </a:solidFill>
-                          <a:latin typeface="Calibri"/>
-                        </a:rPr>
-                        <a:t>0,156</a:t>
-                      </a:r>
-                    </a:p>
-                  </a:txBody>
-                  <a:tcPr>
-                    <a:solidFill>
-                      <a:srgbClr val="F3E8FF"/>
-                    </a:solidFill>
-                  </a:tcPr>
-                </a:tc>
-                <a:tc>
-                  <a:txBody>
-                    <a:bodyPr/>
-                    <a:lstStyle/>
-                    <a:p>
-                      <a:pPr algn="ctr"/>
-                      <a:r>
-                        <a:rPr sz="1300" b="1">
-                          <a:solidFill>
-                            <a:srgbClr val="1F1F1F"/>
-                          </a:solidFill>
-                          <a:latin typeface="Calibri"/>
-                        </a:rPr>
-                        <a:t>0,196</a:t>
-                      </a:r>
-                    </a:p>
-                  </a:txBody>
-                  <a:tcPr>
-                    <a:solidFill>
-                      <a:srgbClr val="F3E8FF"/>
-                    </a:solidFill>
-                  </a:tcPr>
-                </a:tc>
-                <a:tc>
-                  <a:txBody>
-                    <a:bodyPr/>
-                    <a:lstStyle/>
-                    <a:p>
-                      <a:pPr algn="ctr"/>
-                      <a:r>
-                        <a:rPr sz="1300" b="1">
-                          <a:solidFill>
-                            <a:srgbClr val="1F1F1F"/>
-                          </a:solidFill>
-                          <a:latin typeface="Calibri"/>
-                        </a:rPr>
-                        <a:t>0,73</a:t>
-                      </a:r>
-                    </a:p>
-                  </a:txBody>
-                  <a:tcPr>
-                    <a:solidFill>
-                      <a:srgbClr val="F3E8FF"/>
-                    </a:solidFill>
-                  </a:tcPr>
-                </a:tc>
-                <a:tc>
-                  <a:txBody>
-                    <a:bodyPr/>
-                    <a:lstStyle/>
-                    <a:p>
-                      <a:pPr algn="ctr"/>
-                      <a:r>
-                        <a:rPr sz="1300" b="1">
-                          <a:solidFill>
-                            <a:srgbClr val="1F1F1F"/>
-                          </a:solidFill>
-                          <a:latin typeface="Calibri"/>
-                        </a:rPr>
-                        <a:t>−52%</a:t>
-                      </a:r>
-                    </a:p>
-                  </a:txBody>
-                  <a:tcPr>
-                    <a:solidFill>
-                      <a:srgbClr val="F3E8FF"/>
-                    </a:solidFill>
-                  </a:tcPr>
-                </a:tc>
-              </a:tr>
-              <a:tr h="493776">
-                <a:tc>
-                  <a:txBody>
-                    <a:bodyPr/>
-                    <a:lstStyle/>
-                    <a:p>
-                      <a:pPr algn="l"/>
-                      <a:r>
-                        <a:rPr sz="1300" b="0">
-                          <a:solidFill>
-                            <a:srgbClr val="1F1F1F"/>
-                          </a:solidFill>
-                          <a:latin typeface="Calibri"/>
-                        </a:rPr>
-                        <a:t>MLP (PyTorch, наша)</a:t>
-                      </a:r>
-                    </a:p>
-                  </a:txBody>
-                  <a:tcPr/>
-                </a:tc>
-                <a:tc>
-                  <a:txBody>
-                    <a:bodyPr/>
-                    <a:lstStyle/>
-                    <a:p>
-                      <a:pPr algn="ctr"/>
-                      <a:r>
-                        <a:rPr sz="1300" b="0">
-                          <a:solidFill>
-                            <a:srgbClr val="1F1F1F"/>
-                          </a:solidFill>
-                          <a:latin typeface="Calibri"/>
-                        </a:rPr>
-                        <a:t>0,156</a:t>
-                      </a:r>
-                    </a:p>
-                  </a:txBody>
-                  <a:tcPr/>
-                </a:tc>
-                <a:tc>
-                  <a:txBody>
-                    <a:bodyPr/>
-                    <a:lstStyle/>
-                    <a:p>
-                      <a:pPr algn="ctr"/>
-                      <a:r>
-                        <a:rPr sz="1300" b="0">
-                          <a:solidFill>
-                            <a:srgbClr val="1F1F1F"/>
-                          </a:solidFill>
-                          <a:latin typeface="Calibri"/>
-                        </a:rPr>
-                        <a:t>0,196</a:t>
-                      </a:r>
-                    </a:p>
-                  </a:txBody>
-                  <a:tcPr/>
-                </a:tc>
-                <a:tc>
-                  <a:txBody>
-                    <a:bodyPr/>
-                    <a:lstStyle/>
-                    <a:p>
-                      <a:pPr algn="ctr"/>
-                      <a:r>
-                        <a:rPr sz="1300" b="0">
-                          <a:solidFill>
-                            <a:srgbClr val="1F1F1F"/>
-                          </a:solidFill>
-                          <a:latin typeface="Calibri"/>
-                        </a:rPr>
-                        <a:t>0,73</a:t>
-                      </a:r>
-                    </a:p>
-                  </a:txBody>
-                  <a:tcPr/>
-                </a:tc>
-                <a:tc>
-                  <a:txBody>
-                    <a:bodyPr/>
-                    <a:lstStyle/>
-                    <a:p>
-                      <a:pPr algn="ctr"/>
-                      <a:r>
-                        <a:rPr sz="1300" b="0">
-                          <a:solidFill>
-                            <a:srgbClr val="1F1F1F"/>
-                          </a:solidFill>
-                          <a:latin typeface="Calibri"/>
-                        </a:rPr>
-                        <a:t>−52%</a:t>
-                      </a:r>
-                    </a:p>
-                  </a:txBody>
-                  <a:tcPr/>
-                </a:tc>
-              </a:tr>
-            </a:tbl>
-          </a:graphicData>
-        </a:graphic>
-      </p:graphicFrame>
-      <p:sp>
-        <p:nvSpPr>
-          <p:cNvPr id="5" name="TextBox 4"/>
+                <a:latin typeface="Times New Roman"/>
+              </a:rPr>
+              <a:t>Основные функции</a:t>
+            </a:r>
+          </a:p>
+        </p:txBody>
+      </p:sp>
+      <p:sp>
+        <p:nvSpPr>
+          <p:cNvPr id="3" name="TextBox 2"/>
           <p:cNvSpPr txBox="1"/>
           <p:nvPr/>
         </p:nvSpPr>
         <p:spPr>
           <a:xfrm>
-            <a:off x="548640" y="4023359"/>
-            <a:ext cx="10972800" cy="640080"/>
+            <a:off x="548640" y="1005840"/>
+            <a:ext cx="10972800" cy="5394960"/>
           </a:xfrm>
           <a:prstGeom prst="rect">
             <a:avLst/>
@@ -7654,34 +7258,117 @@
           <a:noFill/>
         </p:spPr>
         <p:txBody>
-          <a:bodyPr wrap="square">
+          <a:bodyPr wrap="square" anchor="ctr">
             <a:spAutoFit/>
           </a:bodyPr>
           <a:lstStyle/>
           <a:p>
-            <a:pPr algn="ctr"/>
-            <a:r>
-              <a:rPr sz="1300" b="0">
-                <a:solidFill>
-                  <a:srgbClr val="555555"/>
-                </a:solidFill>
-                <a:latin typeface="Calibri"/>
-              </a:rPr>
-              <a:t>LightGBM и MLP сходятся к близкой точности; LightGBM выбран в прод за скорость и интерпретируемость. Калибровка CI80: 0,78–0,80.</a:t>
-            </a:r>
-          </a:p>
-        </p:txBody>
-      </p:sp>
-      <p:sp>
-        <p:nvSpPr>
-          <p:cNvPr id="6" name="TextBox 5"/>
+            <a:pPr algn="l">
+              <a:lnSpc>
+                <a:spcPct val="115000"/>
+              </a:lnSpc>
+              <a:spcAft>
+                <a:spcPts val="1800"/>
+              </a:spcAft>
+            </a:pPr>
+            <a:r>
+              <a:rPr sz="2600">
+                <a:solidFill>
+                  <a:srgbClr val="1F1F1F"/>
+                </a:solidFill>
+                <a:latin typeface="Times New Roman"/>
+              </a:rPr>
+              <a:t>•  Прогноз состава тела (вес, жир, мышцы)</a:t>
+            </a:r>
+          </a:p>
+          <a:p>
+            <a:pPr algn="l">
+              <a:lnSpc>
+                <a:spcPct val="115000"/>
+              </a:lnSpc>
+              <a:spcAft>
+                <a:spcPts val="1800"/>
+              </a:spcAft>
+            </a:pPr>
+            <a:r>
+              <a:rPr sz="2600">
+                <a:solidFill>
+                  <a:srgbClr val="1F1F1F"/>
+                </a:solidFill>
+                <a:latin typeface="Times New Roman"/>
+              </a:rPr>
+              <a:t>•  Генерация плана тренировок на 4 недели</a:t>
+            </a:r>
+          </a:p>
+          <a:p>
+            <a:pPr algn="l">
+              <a:lnSpc>
+                <a:spcPct val="115000"/>
+              </a:lnSpc>
+              <a:spcAft>
+                <a:spcPts val="1800"/>
+              </a:spcAft>
+            </a:pPr>
+            <a:r>
+              <a:rPr sz="2600">
+                <a:solidFill>
+                  <a:srgbClr val="1F1F1F"/>
+                </a:solidFill>
+                <a:latin typeface="Times New Roman"/>
+              </a:rPr>
+              <a:t>•  Импорт PDF-отчётов InBody</a:t>
+            </a:r>
+          </a:p>
+          <a:p>
+            <a:pPr algn="l">
+              <a:lnSpc>
+                <a:spcPct val="115000"/>
+              </a:lnSpc>
+              <a:spcAft>
+                <a:spcPts val="1800"/>
+              </a:spcAft>
+            </a:pPr>
+            <a:r>
+              <a:rPr sz="2600">
+                <a:solidFill>
+                  <a:srgbClr val="1F1F1F"/>
+                </a:solidFill>
+                <a:latin typeface="Times New Roman"/>
+              </a:rPr>
+              <a:t>•  Рекомендации по нормам ВОЗ и ACSM</a:t>
+            </a:r>
+          </a:p>
+          <a:p>
+            <a:pPr algn="l">
+              <a:lnSpc>
+                <a:spcPct val="115000"/>
+              </a:lnSpc>
+              <a:spcAft>
+                <a:spcPts val="1800"/>
+              </a:spcAft>
+            </a:pPr>
+            <a:r>
+              <a:rPr sz="2600">
+                <a:solidFill>
+                  <a:srgbClr val="1F1F1F"/>
+                </a:solidFill>
+                <a:latin typeface="Times New Roman"/>
+              </a:rPr>
+              <a:t>•  Автоадаптация плана при изменениях профиля</a:t>
+            </a:r>
+          </a:p>
+        </p:txBody>
+      </p:sp>
+      <p:sp>
+        <p:nvSpPr>
+          <p:cNvPr id="4" name="TextBox 3"/>
           <p:cNvSpPr txBox="1"/>
           <p:nvPr/>
         </p:nvSpPr>
         <p:spPr>
           <a:xfrm>
-            <a:off x="548640" y="6446520"/>
-            <a:ext cx="5486400" cy="274320"/>
+            <a:off x="10332720" y="6263640"/>
+            <a:ext cx="1371600" cy="457200"/>
           </a:xfrm>
           <a:prstGeom prst="rect">
             <a:avLst/>
@@ -7694,50 +7381,15 @@
           </a:bodyPr>
           <a:lstStyle/>
           <a:p>
-            <a:pPr algn="l"/>
-            <a:r>
-              <a:rPr sz="1000" b="0">
+            <a:pPr algn="r"/>
+            <a:r>
+              <a:rPr sz="2000" b="0">
                 <a:solidFill>
                   <a:srgbClr val="555555"/>
                 </a:solidFill>
-                <a:latin typeface="Calibri"/>
-              </a:rPr>
-              <a:t>Лапова М. С.  ·  ВКР 2026  ·  Fitness Tracker</a:t>
-            </a:r>
-          </a:p>
-        </p:txBody>
-      </p:sp>
-      <p:sp>
-        <p:nvSpPr>
-          <p:cNvPr id="7" name="TextBox 6"/>
-          <p:cNvSpPr txBox="1"/>
-          <p:nvPr/>
-        </p:nvSpPr>
-        <p:spPr>
-          <a:xfrm>
-            <a:off x="10515600" y="6446520"/>
-            <a:ext cx="1188720" cy="274320"/>
-          </a:xfrm>
-          <a:prstGeom prst="rect">
-            <a:avLst/>
-          </a:prstGeom>
-          <a:noFill/>
-        </p:spPr>
-        <p:txBody>
-          <a:bodyPr wrap="square">
-            <a:spAutoFit/>
-          </a:bodyPr>
-          <a:lstStyle/>
-          <a:p>
-            <a:pPr algn="r"/>
-            <a:r>
-              <a:rPr sz="1000" b="0">
-                <a:solidFill>
-                  <a:srgbClr val="555555"/>
-                </a:solidFill>
-                <a:latin typeface="Calibri"/>
-              </a:rPr>
-              <a:t>8 / 14</a:t>
+                <a:latin typeface="Times New Roman"/>
+              </a:rPr>
+              <a:t>8</a:t>
             </a:r>
           </a:p>
         </p:txBody>
@@ -7788,90 +7440,23 @@
                 <a:solidFill>
                   <a:srgbClr val="1F1F1F"/>
                 </a:solidFill>
-                <a:latin typeface="Calibri"/>
-              </a:rPr>
-              <a:t>Что внутри модели: feature importance</a:t>
-            </a:r>
-          </a:p>
-        </p:txBody>
-      </p:sp>
-      <p:sp>
-        <p:nvSpPr>
-          <p:cNvPr id="3" name="Rectangle 2"/>
-          <p:cNvSpPr/>
-          <p:nvPr/>
-        </p:nvSpPr>
-        <p:spPr>
-          <a:xfrm>
-            <a:off x="548640" y="594360"/>
-            <a:ext cx="1097280" cy="54864"/>
-          </a:xfrm>
-          <a:prstGeom prst="rect">
-            <a:avLst/>
-          </a:prstGeom>
-          <a:solidFill>
-            <a:srgbClr val="7F0DF2"/>
-          </a:solidFill>
-          <a:ln>
-            <a:noFill/>
-          </a:ln>
-        </p:spPr>
-        <p:style>
-          <a:lnRef idx="1">
-            <a:schemeClr val="accent1"/>
-          </a:lnRef>
-          <a:fillRef idx="3">
-            <a:schemeClr val="accent1"/>
-          </a:fillRef>
-          <a:effectRef idx="2">
-            <a:schemeClr val="accent1"/>
-          </a:effectRef>
-          <a:fontRef idx="minor">
-            <a:schemeClr val="lt1"/>
-          </a:fontRef>
-        </p:style>
-        <p:txBody>
-          <a:bodyPr rtlCol="0" anchor="ctr"/>
-          <a:lstStyle/>
-          <a:p>
-            <a:pPr algn="ctr"/>
-          </a:p>
-        </p:txBody>
-      </p:sp>
-      <p:pic>
-        <p:nvPicPr>
-          <p:cNvPr id="4" name="Picture 3" descr="image.png"/>
-          <p:cNvPicPr>
-            <a:picLocks noChangeAspect="1"/>
-          </p:cNvPicPr>
-          <p:nvPr/>
-        </p:nvPicPr>
-        <p:blipFill>
-          <a:blip r:embed="rId2"/>
-          <a:stretch>
-            <a:fillRect/>
-          </a:stretch>
-        </p:blipFill>
-        <p:spPr>
-          <a:xfrm>
-            <a:off x="1097280" y="1005840"/>
-            <a:ext cx="10058400" cy="5184873"/>
-          </a:xfrm>
-          <a:prstGeom prst="rect">
-            <a:avLst/>
-          </a:prstGeom>
-        </p:spPr>
-      </p:pic>
-      <p:sp>
-        <p:nvSpPr>
-          <p:cNvPr id="5" name="TextBox 4"/>
+                <a:latin typeface="Times New Roman"/>
+              </a:rPr>
+              <a:t>ML-модель прогноза</a:t>
+            </a:r>
+          </a:p>
+        </p:txBody>
+      </p:sp>
+      <p:sp>
+        <p:nvSpPr>
+          <p:cNvPr id="3" name="TextBox 2"/>
           <p:cNvSpPr txBox="1"/>
           <p:nvPr/>
         </p:nvSpPr>
         <p:spPr>
           <a:xfrm>
-            <a:off x="548640" y="5852160"/>
-            <a:ext cx="10972800" cy="457200"/>
+            <a:off x="548640" y="1005840"/>
+            <a:ext cx="10972800" cy="731520"/>
           </a:xfrm>
           <a:prstGeom prst="rect">
             <a:avLst/>
@@ -7884,29 +7469,29 @@
           </a:bodyPr>
           <a:lstStyle/>
           <a:p>
-            <a:pPr algn="ctr"/>
-            <a:r>
-              <a:rPr sz="1400" b="0">
-                <a:solidFill>
-                  <a:srgbClr val="555555"/>
-                </a:solidFill>
-                <a:latin typeface="Calibri"/>
-              </a:rPr>
-              <a:t>Главный сигнал — цель пользователя (goal_weight_loss); следом — BMI. Это согласуется с физиологией: при сознательном дефиците калорий человек теряет вес независимо от исходных параметров.</a:t>
-            </a:r>
-          </a:p>
-        </p:txBody>
-      </p:sp>
-      <p:sp>
-        <p:nvSpPr>
-          <p:cNvPr id="6" name="TextBox 5"/>
+            <a:pPr algn="l"/>
+            <a:r>
+              <a:rPr sz="2400" b="0">
+                <a:solidFill>
+                  <a:srgbClr val="1F1F1F"/>
+                </a:solidFill>
+                <a:latin typeface="Times New Roman"/>
+              </a:rPr>
+              <a:t>Прогнозируются: вес, процент жира, мышечная масса на горизонтах 1, 2, 4 недели.</a:t>
+            </a:r>
+          </a:p>
+        </p:txBody>
+      </p:sp>
+      <p:sp>
+        <p:nvSpPr>
+          <p:cNvPr id="4" name="TextBox 3"/>
           <p:cNvSpPr txBox="1"/>
           <p:nvPr/>
         </p:nvSpPr>
         <p:spPr>
           <a:xfrm>
-            <a:off x="548640" y="6446520"/>
-            <a:ext cx="5486400" cy="274320"/>
+            <a:off x="548640" y="2011680"/>
+            <a:ext cx="10972800" cy="4389120"/>
           </a:xfrm>
           <a:prstGeom prst="rect">
             <a:avLst/>
@@ -7914,34 +7499,98 @@
           <a:noFill/>
         </p:spPr>
         <p:txBody>
-          <a:bodyPr wrap="square">
+          <a:bodyPr wrap="square" anchor="ctr">
             <a:spAutoFit/>
           </a:bodyPr>
           <a:lstStyle/>
           <a:p>
-            <a:pPr algn="l"/>
-            <a:r>
-              <a:rPr sz="1000" b="0">
-                <a:solidFill>
-                  <a:srgbClr val="555555"/>
-                </a:solidFill>
-                <a:latin typeface="Calibri"/>
-              </a:rPr>
-              <a:t>Лапова М. С.  ·  ВКР 2026  ·  Fitness Tracker</a:t>
-            </a:r>
-          </a:p>
-        </p:txBody>
-      </p:sp>
-      <p:sp>
-        <p:nvSpPr>
-          <p:cNvPr id="7" name="TextBox 6"/>
+            <a:pPr algn="l">
+              <a:lnSpc>
+                <a:spcPct val="115000"/>
+              </a:lnSpc>
+              <a:spcAft>
+                <a:spcPts val="1800"/>
+              </a:spcAft>
+            </a:pPr>
+            <a:r>
+              <a:rPr sz="2600">
+                <a:solidFill>
+                  <a:srgbClr val="1F1F1F"/>
+                </a:solidFill>
+                <a:latin typeface="Times New Roman"/>
+              </a:rPr>
+              <a:t>•  Ridge Regression — линейная базовая модель</a:t>
+            </a:r>
+          </a:p>
+          <a:p>
+            <a:pPr algn="l">
+              <a:lnSpc>
+                <a:spcPct val="115000"/>
+              </a:lnSpc>
+              <a:spcAft>
+                <a:spcPts val="1800"/>
+              </a:spcAft>
+            </a:pPr>
+            <a:r>
+              <a:rPr sz="2600">
+                <a:solidFill>
+                  <a:srgbClr val="1F1F1F"/>
+                </a:solidFill>
+                <a:latin typeface="Times New Roman"/>
+              </a:rPr>
+              <a:t>•  LightGBM — градиентный бустинг (основная модель)</a:t>
+            </a:r>
+          </a:p>
+          <a:p>
+            <a:pPr algn="l">
+              <a:lnSpc>
+                <a:spcPct val="115000"/>
+              </a:lnSpc>
+              <a:spcAft>
+                <a:spcPts val="1800"/>
+              </a:spcAft>
+            </a:pPr>
+            <a:r>
+              <a:rPr sz="2600">
+                <a:solidFill>
+                  <a:srgbClr val="1F1F1F"/>
+                </a:solidFill>
+                <a:latin typeface="Times New Roman"/>
+              </a:rPr>
+              <a:t>•  Нейросеть (PyTorch) — альтернативная архитектура</a:t>
+            </a:r>
+          </a:p>
+          <a:p>
+            <a:pPr algn="l">
+              <a:lnSpc>
+                <a:spcPct val="115000"/>
+              </a:lnSpc>
+              <a:spcAft>
+                <a:spcPts val="1800"/>
+              </a:spcAft>
+            </a:pPr>
+            <a:r>
+              <a:rPr sz="2600">
+                <a:solidFill>
+                  <a:srgbClr val="1F1F1F"/>
+                </a:solidFill>
+                <a:latin typeface="Times New Roman"/>
+              </a:rPr>
+              <a:t>•  Квантильная регрессия для доверительных интервалов</a:t>
+            </a:r>
+          </a:p>
+        </p:txBody>
+      </p:sp>
+      <p:sp>
+        <p:nvSpPr>
+          <p:cNvPr id="5" name="TextBox 4"/>
           <p:cNvSpPr txBox="1"/>
           <p:nvPr/>
         </p:nvSpPr>
         <p:spPr>
           <a:xfrm>
-            <a:off x="10515600" y="6446520"/>
-            <a:ext cx="1188720" cy="274320"/>
+            <a:off x="10332720" y="6263640"/>
+            <a:ext cx="1371600" cy="457200"/>
           </a:xfrm>
           <a:prstGeom prst="rect">
             <a:avLst/>
@@ -7956,13 +7605,13 @@
           <a:p>
             <a:pPr algn="r"/>
             <a:r>
-              <a:rPr sz="1000" b="0">
+              <a:rPr sz="2000" b="0">
                 <a:solidFill>
                   <a:srgbClr val="555555"/>
                 </a:solidFill>
-                <a:latin typeface="Calibri"/>
-              </a:rPr>
-              <a:t>9 / 14</a:t>
+                <a:latin typeface="Times New Roman"/>
+              </a:rPr>
+              <a:t>9</a:t>
             </a:r>
           </a:p>
         </p:txBody>

--- a/docs/thesis/presentation-maria.pptx
+++ b/docs/thesis/presentation-maria.pptx
@@ -22,6 +22,7 @@
     <p:sldId id="270" r:id="rId21"/>
     <p:sldId id="271" r:id="rId22"/>
     <p:sldId id="272" r:id="rId23"/>
+    <p:sldId id="273" r:id="rId24"/>
   </p:sldIdLst>
   <p:sldSz cx="12191695" cy="6858000" type="screen4x3"/>
   <p:notesSz cx="6858000" cy="9144000"/>
@@ -5124,21 +5125,45 @@
                 </a:solidFill>
                 <a:latin typeface="Times New Roman"/>
               </a:rPr>
-              <a:t>Выводы</a:t>
-            </a:r>
-          </a:p>
-        </p:txBody>
-      </p:sp>
-      <p:sp>
-        <p:nvSpPr>
-          <p:cNvPr id="3" name="TextBox 2"/>
+              <a:t>Интерфейс приложения</a:t>
+            </a:r>
+          </a:p>
+        </p:txBody>
+      </p:sp>
+      <p:pic>
+        <p:nvPicPr>
+          <p:cNvPr id="3" name="Picture 2" descr="03_home.jpg"/>
+          <p:cNvPicPr>
+            <a:picLocks noChangeAspect="1"/>
+          </p:cNvPicPr>
+          <p:nvPr/>
+        </p:nvPicPr>
+        <p:blipFill>
+          <a:blip r:embed="rId2"/>
+          <a:stretch>
+            <a:fillRect/>
+          </a:stretch>
+        </p:blipFill>
+        <p:spPr>
+          <a:xfrm>
+            <a:off x="1264767" y="1097280"/>
+            <a:ext cx="2468880" cy="4389120"/>
+          </a:xfrm>
+          <a:prstGeom prst="rect">
+            <a:avLst/>
+          </a:prstGeom>
+        </p:spPr>
+      </p:pic>
+      <p:sp>
+        <p:nvSpPr>
+          <p:cNvPr id="4" name="TextBox 3"/>
           <p:cNvSpPr txBox="1"/>
           <p:nvPr/>
         </p:nvSpPr>
         <p:spPr>
           <a:xfrm>
-            <a:off x="548640" y="1097280"/>
-            <a:ext cx="10972800" cy="5120640"/>
+            <a:off x="838047" y="5623560"/>
+            <a:ext cx="3322320" cy="548640"/>
           </a:xfrm>
           <a:prstGeom prst="rect">
             <a:avLst/>
@@ -5146,91 +5171,145 @@
           <a:noFill/>
         </p:spPr>
         <p:txBody>
-          <a:bodyPr wrap="square" anchor="ctr">
+          <a:bodyPr wrap="square">
             <a:spAutoFit/>
           </a:bodyPr>
           <a:lstStyle/>
           <a:p>
-            <a:pPr algn="l">
-              <a:lnSpc>
-                <a:spcPct val="115000"/>
-              </a:lnSpc>
-              <a:spcAft>
-                <a:spcPts val="1800"/>
-              </a:spcAft>
-            </a:pPr>
-            <a:r>
-              <a:rPr sz="2800">
-                <a:solidFill>
-                  <a:srgbClr val="1F1F1F"/>
-                </a:solidFill>
-                <a:latin typeface="Times New Roman"/>
-              </a:rPr>
-              <a:t>•  Создано приложение Portal (FastAPI + Flutter)</a:t>
-            </a:r>
-          </a:p>
-          <a:p>
-            <a:pPr algn="l">
-              <a:lnSpc>
-                <a:spcPct val="115000"/>
-              </a:lnSpc>
-              <a:spcAft>
-                <a:spcPts val="1800"/>
-              </a:spcAft>
-            </a:pPr>
-            <a:r>
-              <a:rPr sz="2800">
-                <a:solidFill>
-                  <a:srgbClr val="1F1F1F"/>
-                </a:solidFill>
-                <a:latin typeface="Times New Roman"/>
-              </a:rPr>
-              <a:t>•  Реализован прогноз состава тела (R² = 0,73)</a:t>
-            </a:r>
-          </a:p>
-          <a:p>
-            <a:pPr algn="l">
-              <a:lnSpc>
-                <a:spcPct val="115000"/>
-              </a:lnSpc>
-              <a:spcAft>
-                <a:spcPts val="1800"/>
-              </a:spcAft>
-            </a:pPr>
-            <a:r>
-              <a:rPr sz="2800">
-                <a:solidFill>
-                  <a:srgbClr val="1F1F1F"/>
-                </a:solidFill>
-                <a:latin typeface="Times New Roman"/>
-              </a:rPr>
-              <a:t>•  Реализована автоадаптация тренировок</a:t>
-            </a:r>
-          </a:p>
-          <a:p>
-            <a:pPr algn="l">
-              <a:lnSpc>
-                <a:spcPct val="115000"/>
-              </a:lnSpc>
-              <a:spcAft>
-                <a:spcPts val="1800"/>
-              </a:spcAft>
-            </a:pPr>
-            <a:r>
-              <a:rPr sz="2800">
-                <a:solidFill>
-                  <a:srgbClr val="1F1F1F"/>
-                </a:solidFill>
-                <a:latin typeface="Times New Roman"/>
-              </a:rPr>
-              <a:t>•  Подтверждена работоспособность системы</a:t>
-            </a:r>
-          </a:p>
-        </p:txBody>
-      </p:sp>
-      <p:sp>
-        <p:nvSpPr>
-          <p:cNvPr id="4" name="TextBox 3"/>
+            <a:pPr algn="ctr"/>
+            <a:r>
+              <a:rPr sz="1200" b="0">
+                <a:solidFill>
+                  <a:srgbClr val="555555"/>
+                </a:solidFill>
+                <a:latin typeface="Times New Roman"/>
+              </a:rPr>
+              <a:t>Главный экран</a:t>
+            </a:r>
+          </a:p>
+        </p:txBody>
+      </p:sp>
+      <p:pic>
+        <p:nvPicPr>
+          <p:cNvPr id="5" name="Picture 4" descr="09_inbody_pdf.jpg"/>
+          <p:cNvPicPr>
+            <a:picLocks noChangeAspect="1"/>
+          </p:cNvPicPr>
+          <p:nvPr/>
+        </p:nvPicPr>
+        <p:blipFill>
+          <a:blip r:embed="rId3"/>
+          <a:stretch>
+            <a:fillRect/>
+          </a:stretch>
+        </p:blipFill>
+        <p:spPr>
+          <a:xfrm>
+            <a:off x="4861407" y="1097280"/>
+            <a:ext cx="2468880" cy="4389120"/>
+          </a:xfrm>
+          <a:prstGeom prst="rect">
+            <a:avLst/>
+          </a:prstGeom>
+        </p:spPr>
+      </p:pic>
+      <p:sp>
+        <p:nvSpPr>
+          <p:cNvPr id="6" name="TextBox 5"/>
+          <p:cNvSpPr txBox="1"/>
+          <p:nvPr/>
+        </p:nvSpPr>
+        <p:spPr>
+          <a:xfrm>
+            <a:off x="4434687" y="5623560"/>
+            <a:ext cx="3322320" cy="548640"/>
+          </a:xfrm>
+          <a:prstGeom prst="rect">
+            <a:avLst/>
+          </a:prstGeom>
+          <a:noFill/>
+        </p:spPr>
+        <p:txBody>
+          <a:bodyPr wrap="square">
+            <a:spAutoFit/>
+          </a:bodyPr>
+          <a:lstStyle/>
+          <a:p>
+            <a:pPr algn="ctr"/>
+            <a:r>
+              <a:rPr sz="1200" b="0">
+                <a:solidFill>
+                  <a:srgbClr val="555555"/>
+                </a:solidFill>
+                <a:latin typeface="Times New Roman"/>
+              </a:rPr>
+              <a:t>Загрузка и анализ InBody</a:t>
+            </a:r>
+          </a:p>
+        </p:txBody>
+      </p:sp>
+      <p:pic>
+        <p:nvPicPr>
+          <p:cNvPr id="7" name="Picture 6" descr="08_statistics.jpg"/>
+          <p:cNvPicPr>
+            <a:picLocks noChangeAspect="1"/>
+          </p:cNvPicPr>
+          <p:nvPr/>
+        </p:nvPicPr>
+        <p:blipFill>
+          <a:blip r:embed="rId4"/>
+          <a:stretch>
+            <a:fillRect/>
+          </a:stretch>
+        </p:blipFill>
+        <p:spPr>
+          <a:xfrm>
+            <a:off x="8458047" y="1097280"/>
+            <a:ext cx="2468880" cy="4389120"/>
+          </a:xfrm>
+          <a:prstGeom prst="rect">
+            <a:avLst/>
+          </a:prstGeom>
+        </p:spPr>
+      </p:pic>
+      <p:sp>
+        <p:nvSpPr>
+          <p:cNvPr id="8" name="TextBox 7"/>
+          <p:cNvSpPr txBox="1"/>
+          <p:nvPr/>
+        </p:nvSpPr>
+        <p:spPr>
+          <a:xfrm>
+            <a:off x="8031327" y="5623560"/>
+            <a:ext cx="3322320" cy="548640"/>
+          </a:xfrm>
+          <a:prstGeom prst="rect">
+            <a:avLst/>
+          </a:prstGeom>
+          <a:noFill/>
+        </p:spPr>
+        <p:txBody>
+          <a:bodyPr wrap="square">
+            <a:spAutoFit/>
+          </a:bodyPr>
+          <a:lstStyle/>
+          <a:p>
+            <a:pPr algn="ctr"/>
+            <a:r>
+              <a:rPr sz="1200" b="0">
+                <a:solidFill>
+                  <a:srgbClr val="555555"/>
+                </a:solidFill>
+                <a:latin typeface="Times New Roman"/>
+              </a:rPr>
+              <a:t>Статистика прогресса</a:t>
+            </a:r>
+          </a:p>
+        </p:txBody>
+      </p:sp>
+      <p:sp>
+        <p:nvSpPr>
+          <p:cNvPr id="9" name="TextBox 8"/>
           <p:cNvSpPr txBox="1"/>
           <p:nvPr/>
         </p:nvSpPr>
@@ -5272,6 +5351,193 @@
 </file>
 
 <file path=ppt/slides/slide17.xml><?xml version="1.0" encoding="utf-8"?>
+<p:sld xmlns:a="http://schemas.openxmlformats.org/drawingml/2006/main" xmlns:p="http://schemas.openxmlformats.org/presentationml/2006/main" xmlns:r="http://schemas.openxmlformats.org/officeDocument/2006/relationships">
+  <p:cSld>
+    <p:spTree>
+      <p:nvGrpSpPr>
+        <p:cNvPr id="1" name=""/>
+        <p:cNvGrpSpPr/>
+        <p:nvPr/>
+      </p:nvGrpSpPr>
+      <p:grpSpPr/>
+      <p:sp>
+        <p:nvSpPr>
+          <p:cNvPr id="2" name="TextBox 1"/>
+          <p:cNvSpPr txBox="1"/>
+          <p:nvPr/>
+        </p:nvSpPr>
+        <p:spPr>
+          <a:xfrm>
+            <a:off x="548640" y="274320"/>
+            <a:ext cx="10972800" cy="548640"/>
+          </a:xfrm>
+          <a:prstGeom prst="rect">
+            <a:avLst/>
+          </a:prstGeom>
+          <a:noFill/>
+        </p:spPr>
+        <p:txBody>
+          <a:bodyPr wrap="square">
+            <a:spAutoFit/>
+          </a:bodyPr>
+          <a:lstStyle/>
+          <a:p>
+            <a:pPr algn="l"/>
+            <a:r>
+              <a:rPr sz="2800" b="1">
+                <a:solidFill>
+                  <a:srgbClr val="1F1F1F"/>
+                </a:solidFill>
+                <a:latin typeface="Times New Roman"/>
+              </a:rPr>
+              <a:t>Выводы</a:t>
+            </a:r>
+          </a:p>
+        </p:txBody>
+      </p:sp>
+      <p:sp>
+        <p:nvSpPr>
+          <p:cNvPr id="3" name="TextBox 2"/>
+          <p:cNvSpPr txBox="1"/>
+          <p:nvPr/>
+        </p:nvSpPr>
+        <p:spPr>
+          <a:xfrm>
+            <a:off x="548640" y="1097280"/>
+            <a:ext cx="10972800" cy="5120640"/>
+          </a:xfrm>
+          <a:prstGeom prst="rect">
+            <a:avLst/>
+          </a:prstGeom>
+          <a:noFill/>
+        </p:spPr>
+        <p:txBody>
+          <a:bodyPr wrap="square" anchor="ctr">
+            <a:spAutoFit/>
+          </a:bodyPr>
+          <a:lstStyle/>
+          <a:p>
+            <a:pPr algn="l">
+              <a:lnSpc>
+                <a:spcPct val="115000"/>
+              </a:lnSpc>
+              <a:spcAft>
+                <a:spcPts val="1800"/>
+              </a:spcAft>
+            </a:pPr>
+            <a:r>
+              <a:rPr sz="2800">
+                <a:solidFill>
+                  <a:srgbClr val="1F1F1F"/>
+                </a:solidFill>
+                <a:latin typeface="Times New Roman"/>
+              </a:rPr>
+              <a:t>•  Создано приложение Portal (FastAPI + Flutter)</a:t>
+            </a:r>
+          </a:p>
+          <a:p>
+            <a:pPr algn="l">
+              <a:lnSpc>
+                <a:spcPct val="115000"/>
+              </a:lnSpc>
+              <a:spcAft>
+                <a:spcPts val="1800"/>
+              </a:spcAft>
+            </a:pPr>
+            <a:r>
+              <a:rPr sz="2800">
+                <a:solidFill>
+                  <a:srgbClr val="1F1F1F"/>
+                </a:solidFill>
+                <a:latin typeface="Times New Roman"/>
+              </a:rPr>
+              <a:t>•  Реализован прогноз состава тела (R² = 0,73)</a:t>
+            </a:r>
+          </a:p>
+          <a:p>
+            <a:pPr algn="l">
+              <a:lnSpc>
+                <a:spcPct val="115000"/>
+              </a:lnSpc>
+              <a:spcAft>
+                <a:spcPts val="1800"/>
+              </a:spcAft>
+            </a:pPr>
+            <a:r>
+              <a:rPr sz="2800">
+                <a:solidFill>
+                  <a:srgbClr val="1F1F1F"/>
+                </a:solidFill>
+                <a:latin typeface="Times New Roman"/>
+              </a:rPr>
+              <a:t>•  Реализована автоадаптация тренировок</a:t>
+            </a:r>
+          </a:p>
+          <a:p>
+            <a:pPr algn="l">
+              <a:lnSpc>
+                <a:spcPct val="115000"/>
+              </a:lnSpc>
+              <a:spcAft>
+                <a:spcPts val="1800"/>
+              </a:spcAft>
+            </a:pPr>
+            <a:r>
+              <a:rPr sz="2800">
+                <a:solidFill>
+                  <a:srgbClr val="1F1F1F"/>
+                </a:solidFill>
+                <a:latin typeface="Times New Roman"/>
+              </a:rPr>
+              <a:t>•  Подтверждена работоспособность системы</a:t>
+            </a:r>
+          </a:p>
+        </p:txBody>
+      </p:sp>
+      <p:sp>
+        <p:nvSpPr>
+          <p:cNvPr id="4" name="TextBox 3"/>
+          <p:cNvSpPr txBox="1"/>
+          <p:nvPr/>
+        </p:nvSpPr>
+        <p:spPr>
+          <a:xfrm>
+            <a:off x="10332720" y="6263640"/>
+            <a:ext cx="1371600" cy="457200"/>
+          </a:xfrm>
+          <a:prstGeom prst="rect">
+            <a:avLst/>
+          </a:prstGeom>
+          <a:noFill/>
+        </p:spPr>
+        <p:txBody>
+          <a:bodyPr wrap="square">
+            <a:spAutoFit/>
+          </a:bodyPr>
+          <a:lstStyle/>
+          <a:p>
+            <a:pPr algn="r"/>
+            <a:r>
+              <a:rPr sz="2000" b="0">
+                <a:solidFill>
+                  <a:srgbClr val="555555"/>
+                </a:solidFill>
+                <a:latin typeface="Times New Roman"/>
+              </a:rPr>
+              <a:t>17</a:t>
+            </a:r>
+          </a:p>
+        </p:txBody>
+      </p:sp>
+    </p:spTree>
+  </p:cSld>
+  <p:clrMapOvr>
+    <a:masterClrMapping/>
+  </p:clrMapOvr>
+</p:sld>
+</file>
+
+<file path=ppt/slides/slide18.xml><?xml version="1.0" encoding="utf-8"?>
 <p:sld xmlns:a="http://schemas.openxmlformats.org/drawingml/2006/main" xmlns:p="http://schemas.openxmlformats.org/presentationml/2006/main" xmlns:r="http://schemas.openxmlformats.org/officeDocument/2006/relationships">
   <p:cSld>
     <p:spTree>

--- a/docs/thesis/presentation-maria.pptx
+++ b/docs/thesis/presentation-maria.pptx
@@ -7601,7 +7601,7 @@
                 </a:solidFill>
                 <a:latin typeface="Times New Roman"/>
               </a:rPr>
-              <a:t>•  Рекомендации по нормам ВОЗ и ACSM</a:t>
+              <a:t>•  Рекомендации по нормам ВОЗ</a:t>
             </a:r>
           </a:p>
           <a:p>

--- a/docs/thesis/presentation-maria.pptx
+++ b/docs/thesis/presentation-maria.pptx
@@ -5,26 +5,27 @@
     <p:sldMasterId id="2147483648" r:id="rId1"/>
   </p:sldMasterIdLst>
   <p:sldIdLst>
-    <p:sldId id="256" r:id="rId7"/>
-    <p:sldId id="257" r:id="rId8"/>
-    <p:sldId id="258" r:id="rId9"/>
-    <p:sldId id="259" r:id="rId10"/>
-    <p:sldId id="260" r:id="rId11"/>
-    <p:sldId id="261" r:id="rId12"/>
-    <p:sldId id="262" r:id="rId13"/>
-    <p:sldId id="263" r:id="rId14"/>
-    <p:sldId id="264" r:id="rId15"/>
-    <p:sldId id="265" r:id="rId16"/>
-    <p:sldId id="266" r:id="rId17"/>
-    <p:sldId id="267" r:id="rId18"/>
-    <p:sldId id="268" r:id="rId19"/>
-    <p:sldId id="269" r:id="rId20"/>
-    <p:sldId id="270" r:id="rId21"/>
-    <p:sldId id="271" r:id="rId22"/>
-    <p:sldId id="272" r:id="rId23"/>
-    <p:sldId id="273" r:id="rId24"/>
+    <p:sldId id="256" r:id="rId2"/>
+    <p:sldId id="257" r:id="rId3"/>
+    <p:sldId id="258" r:id="rId4"/>
+    <p:sldId id="259" r:id="rId5"/>
+    <p:sldId id="260" r:id="rId6"/>
+    <p:sldId id="261" r:id="rId7"/>
+    <p:sldId id="262" r:id="rId8"/>
+    <p:sldId id="263" r:id="rId9"/>
+    <p:sldId id="264" r:id="rId10"/>
+    <p:sldId id="265" r:id="rId11"/>
+    <p:sldId id="266" r:id="rId12"/>
+    <p:sldId id="267" r:id="rId13"/>
+    <p:sldId id="268" r:id="rId14"/>
+    <p:sldId id="269" r:id="rId15"/>
+    <p:sldId id="270" r:id="rId16"/>
+    <p:sldId id="271" r:id="rId17"/>
+    <p:sldId id="272" r:id="rId18"/>
+    <p:sldId id="273" r:id="rId19"/>
+    <p:sldId id="274" r:id="rId20"/>
   </p:sldIdLst>
-  <p:sldSz cx="12191695" cy="6858000" type="screen4x3"/>
+  <p:sldSz cx="12192000" cy="6858000"/>
   <p:notesSz cx="6858000" cy="9144000"/>
   <p:defaultTextStyle>
     <a:defPPr>
@@ -121,6 +122,22 @@
       </a:defRPr>
     </a:lvl9pPr>
   </p:defaultTextStyle>
+  <p:extLst>
+    <p:ext uri="{EFAFB233-063F-42B5-8137-9DF3F51BA10A}">
+      <p15:sldGuideLst xmlns:p15="http://schemas.microsoft.com/office/powerpoint/2012/main">
+        <p15:guide id="1" orient="horz" pos="2160">
+          <p15:clr>
+            <a:srgbClr val="A4A3A4"/>
+          </p15:clr>
+        </p15:guide>
+        <p15:guide id="2" pos="2880">
+          <p15:clr>
+            <a:srgbClr val="A4A3A4"/>
+          </p15:clr>
+        </p15:guide>
+      </p15:sldGuideLst>
+    </p:ext>
+  </p:extLst>
 </p:presentation>
 </file>
 
@@ -162,10 +179,9 @@
           <a:lstStyle/>
           <a:p>
             <a:r>
-              <a:rPr lang="en-US" smtClean="0"/>
+              <a:rPr lang="en-US"/>
               <a:t>Click to edit Master title style</a:t>
             </a:r>
-            <a:endParaRPr lang="en-US"/>
           </a:p>
         </p:txBody>
       </p:sp>
@@ -281,10 +297,9 @@
           </a:lstStyle>
           <a:p>
             <a:r>
-              <a:rPr lang="en-US" smtClean="0"/>
+              <a:rPr lang="en-US"/>
               <a:t>Click to edit Master subtitle style</a:t>
             </a:r>
-            <a:endParaRPr lang="en-US"/>
           </a:p>
         </p:txBody>
       </p:sp>
@@ -305,7 +320,7 @@
           <a:p>
             <a:fld id="{5BCAD085-E8A6-8845-BD4E-CB4CCA059FC4}" type="datetimeFigureOut">
               <a:rPr lang="en-US" smtClean="0"/>
-              <a:t>1/27/13</a:t>
+              <a:t>6/7/26</a:t>
             </a:fld>
             <a:endParaRPr lang="en-US"/>
           </a:p>
@@ -399,10 +414,9 @@
           <a:lstStyle/>
           <a:p>
             <a:r>
-              <a:rPr lang="en-US" smtClean="0"/>
+              <a:rPr lang="en-US"/>
               <a:t>Click to edit Master title style</a:t>
             </a:r>
-            <a:endParaRPr lang="en-US"/>
           </a:p>
         </p:txBody>
       </p:sp>
@@ -423,38 +437,37 @@
           <a:p>
             <a:pPr lvl="0"/>
             <a:r>
-              <a:rPr lang="en-US" smtClean="0"/>
+              <a:rPr lang="en-US"/>
               <a:t>Click to edit Master text styles</a:t>
             </a:r>
           </a:p>
           <a:p>
             <a:pPr lvl="1"/>
             <a:r>
-              <a:rPr lang="en-US" smtClean="0"/>
+              <a:rPr lang="en-US"/>
               <a:t>Second level</a:t>
             </a:r>
           </a:p>
           <a:p>
             <a:pPr lvl="2"/>
             <a:r>
-              <a:rPr lang="en-US" smtClean="0"/>
+              <a:rPr lang="en-US"/>
               <a:t>Third level</a:t>
             </a:r>
           </a:p>
           <a:p>
             <a:pPr lvl="3"/>
             <a:r>
-              <a:rPr lang="en-US" smtClean="0"/>
+              <a:rPr lang="en-US"/>
               <a:t>Fourth level</a:t>
             </a:r>
           </a:p>
           <a:p>
             <a:pPr lvl="4"/>
             <a:r>
-              <a:rPr lang="en-US" smtClean="0"/>
+              <a:rPr lang="en-US"/>
               <a:t>Fifth level</a:t>
             </a:r>
-            <a:endParaRPr lang="en-US"/>
           </a:p>
         </p:txBody>
       </p:sp>
@@ -475,7 +488,7 @@
           <a:p>
             <a:fld id="{5BCAD085-E8A6-8845-BD4E-CB4CCA059FC4}" type="datetimeFigureOut">
               <a:rPr lang="en-US" smtClean="0"/>
-              <a:t>1/27/13</a:t>
+              <a:t>6/7/26</a:t>
             </a:fld>
             <a:endParaRPr lang="en-US"/>
           </a:p>
@@ -574,10 +587,9 @@
           <a:lstStyle/>
           <a:p>
             <a:r>
-              <a:rPr lang="en-US" smtClean="0"/>
+              <a:rPr lang="en-US"/>
               <a:t>Click to edit Master title style</a:t>
             </a:r>
-            <a:endParaRPr lang="en-US"/>
           </a:p>
         </p:txBody>
       </p:sp>
@@ -603,38 +615,37 @@
           <a:p>
             <a:pPr lvl="0"/>
             <a:r>
-              <a:rPr lang="en-US" smtClean="0"/>
+              <a:rPr lang="en-US"/>
               <a:t>Click to edit Master text styles</a:t>
             </a:r>
           </a:p>
           <a:p>
             <a:pPr lvl="1"/>
             <a:r>
-              <a:rPr lang="en-US" smtClean="0"/>
+              <a:rPr lang="en-US"/>
               <a:t>Second level</a:t>
             </a:r>
           </a:p>
           <a:p>
             <a:pPr lvl="2"/>
             <a:r>
-              <a:rPr lang="en-US" smtClean="0"/>
+              <a:rPr lang="en-US"/>
               <a:t>Third level</a:t>
             </a:r>
           </a:p>
           <a:p>
             <a:pPr lvl="3"/>
             <a:r>
-              <a:rPr lang="en-US" smtClean="0"/>
+              <a:rPr lang="en-US"/>
               <a:t>Fourth level</a:t>
             </a:r>
           </a:p>
           <a:p>
             <a:pPr lvl="4"/>
             <a:r>
-              <a:rPr lang="en-US" smtClean="0"/>
+              <a:rPr lang="en-US"/>
               <a:t>Fifth level</a:t>
             </a:r>
-            <a:endParaRPr lang="en-US"/>
           </a:p>
         </p:txBody>
       </p:sp>
@@ -655,7 +666,7 @@
           <a:p>
             <a:fld id="{5BCAD085-E8A6-8845-BD4E-CB4CCA059FC4}" type="datetimeFigureOut">
               <a:rPr lang="en-US" smtClean="0"/>
-              <a:t>1/27/13</a:t>
+              <a:t>6/7/26</a:t>
             </a:fld>
             <a:endParaRPr lang="en-US"/>
           </a:p>
@@ -749,10 +760,9 @@
           <a:lstStyle/>
           <a:p>
             <a:r>
-              <a:rPr lang="en-US" smtClean="0"/>
+              <a:rPr lang="en-US"/>
               <a:t>Click to edit Master title style</a:t>
             </a:r>
-            <a:endParaRPr lang="en-US"/>
           </a:p>
         </p:txBody>
       </p:sp>
@@ -773,38 +783,37 @@
           <a:p>
             <a:pPr lvl="0"/>
             <a:r>
-              <a:rPr lang="en-US" smtClean="0"/>
+              <a:rPr lang="en-US"/>
               <a:t>Click to edit Master text styles</a:t>
             </a:r>
           </a:p>
           <a:p>
             <a:pPr lvl="1"/>
             <a:r>
-              <a:rPr lang="en-US" smtClean="0"/>
+              <a:rPr lang="en-US"/>
               <a:t>Second level</a:t>
             </a:r>
           </a:p>
           <a:p>
             <a:pPr lvl="2"/>
             <a:r>
-              <a:rPr lang="en-US" smtClean="0"/>
+              <a:rPr lang="en-US"/>
               <a:t>Third level</a:t>
             </a:r>
           </a:p>
           <a:p>
             <a:pPr lvl="3"/>
             <a:r>
-              <a:rPr lang="en-US" smtClean="0"/>
+              <a:rPr lang="en-US"/>
               <a:t>Fourth level</a:t>
             </a:r>
           </a:p>
           <a:p>
             <a:pPr lvl="4"/>
             <a:r>
-              <a:rPr lang="en-US" smtClean="0"/>
+              <a:rPr lang="en-US"/>
               <a:t>Fifth level</a:t>
             </a:r>
-            <a:endParaRPr lang="en-US"/>
           </a:p>
         </p:txBody>
       </p:sp>
@@ -825,7 +834,7 @@
           <a:p>
             <a:fld id="{5BCAD085-E8A6-8845-BD4E-CB4CCA059FC4}" type="datetimeFigureOut">
               <a:rPr lang="en-US" smtClean="0"/>
-              <a:t>1/27/13</a:t>
+              <a:t>6/7/26</a:t>
             </a:fld>
             <a:endParaRPr lang="en-US"/>
           </a:p>
@@ -928,10 +937,9 @@
           </a:lstStyle>
           <a:p>
             <a:r>
-              <a:rPr lang="en-US" smtClean="0"/>
+              <a:rPr lang="en-US"/>
               <a:t>Click to edit Master title style</a:t>
             </a:r>
-            <a:endParaRPr lang="en-US"/>
           </a:p>
         </p:txBody>
       </p:sp>
@@ -1048,7 +1056,7 @@
           <a:p>
             <a:pPr lvl="0"/>
             <a:r>
-              <a:rPr lang="en-US" smtClean="0"/>
+              <a:rPr lang="en-US"/>
               <a:t>Click to edit Master text styles</a:t>
             </a:r>
           </a:p>
@@ -1071,7 +1079,7 @@
           <a:p>
             <a:fld id="{5BCAD085-E8A6-8845-BD4E-CB4CCA059FC4}" type="datetimeFigureOut">
               <a:rPr lang="en-US" smtClean="0"/>
-              <a:t>1/27/13</a:t>
+              <a:t>6/7/26</a:t>
             </a:fld>
             <a:endParaRPr lang="en-US"/>
           </a:p>
@@ -1165,10 +1173,9 @@
           <a:lstStyle/>
           <a:p>
             <a:r>
-              <a:rPr lang="en-US" smtClean="0"/>
+              <a:rPr lang="en-US"/>
               <a:t>Click to edit Master title style</a:t>
             </a:r>
-            <a:endParaRPr lang="en-US"/>
           </a:p>
         </p:txBody>
       </p:sp>
@@ -1222,38 +1229,37 @@
           <a:p>
             <a:pPr lvl="0"/>
             <a:r>
-              <a:rPr lang="en-US" smtClean="0"/>
+              <a:rPr lang="en-US"/>
               <a:t>Click to edit Master text styles</a:t>
             </a:r>
           </a:p>
           <a:p>
             <a:pPr lvl="1"/>
             <a:r>
-              <a:rPr lang="en-US" smtClean="0"/>
+              <a:rPr lang="en-US"/>
               <a:t>Second level</a:t>
             </a:r>
           </a:p>
           <a:p>
             <a:pPr lvl="2"/>
             <a:r>
-              <a:rPr lang="en-US" smtClean="0"/>
+              <a:rPr lang="en-US"/>
               <a:t>Third level</a:t>
             </a:r>
           </a:p>
           <a:p>
             <a:pPr lvl="3"/>
             <a:r>
-              <a:rPr lang="en-US" smtClean="0"/>
+              <a:rPr lang="en-US"/>
               <a:t>Fourth level</a:t>
             </a:r>
           </a:p>
           <a:p>
             <a:pPr lvl="4"/>
             <a:r>
-              <a:rPr lang="en-US" smtClean="0"/>
+              <a:rPr lang="en-US"/>
               <a:t>Fifth level</a:t>
             </a:r>
-            <a:endParaRPr lang="en-US"/>
           </a:p>
         </p:txBody>
       </p:sp>
@@ -1307,38 +1313,37 @@
           <a:p>
             <a:pPr lvl="0"/>
             <a:r>
-              <a:rPr lang="en-US" smtClean="0"/>
+              <a:rPr lang="en-US"/>
               <a:t>Click to edit Master text styles</a:t>
             </a:r>
           </a:p>
           <a:p>
             <a:pPr lvl="1"/>
             <a:r>
-              <a:rPr lang="en-US" smtClean="0"/>
+              <a:rPr lang="en-US"/>
               <a:t>Second level</a:t>
             </a:r>
           </a:p>
           <a:p>
             <a:pPr lvl="2"/>
             <a:r>
-              <a:rPr lang="en-US" smtClean="0"/>
+              <a:rPr lang="en-US"/>
               <a:t>Third level</a:t>
             </a:r>
           </a:p>
           <a:p>
             <a:pPr lvl="3"/>
             <a:r>
-              <a:rPr lang="en-US" smtClean="0"/>
+              <a:rPr lang="en-US"/>
               <a:t>Fourth level</a:t>
             </a:r>
           </a:p>
           <a:p>
             <a:pPr lvl="4"/>
             <a:r>
-              <a:rPr lang="en-US" smtClean="0"/>
+              <a:rPr lang="en-US"/>
               <a:t>Fifth level</a:t>
             </a:r>
-            <a:endParaRPr lang="en-US"/>
           </a:p>
         </p:txBody>
       </p:sp>
@@ -1359,7 +1364,7 @@
           <a:p>
             <a:fld id="{5BCAD085-E8A6-8845-BD4E-CB4CCA059FC4}" type="datetimeFigureOut">
               <a:rPr lang="en-US" smtClean="0"/>
-              <a:t>1/27/13</a:t>
+              <a:t>6/7/26</a:t>
             </a:fld>
             <a:endParaRPr lang="en-US"/>
           </a:p>
@@ -1457,10 +1462,9 @@
           </a:lstStyle>
           <a:p>
             <a:r>
-              <a:rPr lang="en-US" smtClean="0"/>
+              <a:rPr lang="en-US"/>
               <a:t>Click to edit Master title style</a:t>
             </a:r>
-            <a:endParaRPr lang="en-US"/>
           </a:p>
         </p:txBody>
       </p:sp>
@@ -1523,7 +1527,7 @@
           <a:p>
             <a:pPr lvl="0"/>
             <a:r>
-              <a:rPr lang="en-US" smtClean="0"/>
+              <a:rPr lang="en-US"/>
               <a:t>Click to edit Master text styles</a:t>
             </a:r>
           </a:p>
@@ -1579,38 +1583,37 @@
           <a:p>
             <a:pPr lvl="0"/>
             <a:r>
-              <a:rPr lang="en-US" smtClean="0"/>
+              <a:rPr lang="en-US"/>
               <a:t>Click to edit Master text styles</a:t>
             </a:r>
           </a:p>
           <a:p>
             <a:pPr lvl="1"/>
             <a:r>
-              <a:rPr lang="en-US" smtClean="0"/>
+              <a:rPr lang="en-US"/>
               <a:t>Second level</a:t>
             </a:r>
           </a:p>
           <a:p>
             <a:pPr lvl="2"/>
             <a:r>
-              <a:rPr lang="en-US" smtClean="0"/>
+              <a:rPr lang="en-US"/>
               <a:t>Third level</a:t>
             </a:r>
           </a:p>
           <a:p>
             <a:pPr lvl="3"/>
             <a:r>
-              <a:rPr lang="en-US" smtClean="0"/>
+              <a:rPr lang="en-US"/>
               <a:t>Fourth level</a:t>
             </a:r>
           </a:p>
           <a:p>
             <a:pPr lvl="4"/>
             <a:r>
-              <a:rPr lang="en-US" smtClean="0"/>
+              <a:rPr lang="en-US"/>
               <a:t>Fifth level</a:t>
             </a:r>
-            <a:endParaRPr lang="en-US"/>
           </a:p>
         </p:txBody>
       </p:sp>
@@ -1673,7 +1676,7 @@
           <a:p>
             <a:pPr lvl="0"/>
             <a:r>
-              <a:rPr lang="en-US" smtClean="0"/>
+              <a:rPr lang="en-US"/>
               <a:t>Click to edit Master text styles</a:t>
             </a:r>
           </a:p>
@@ -1729,38 +1732,37 @@
           <a:p>
             <a:pPr lvl="0"/>
             <a:r>
-              <a:rPr lang="en-US" smtClean="0"/>
+              <a:rPr lang="en-US"/>
               <a:t>Click to edit Master text styles</a:t>
             </a:r>
           </a:p>
           <a:p>
             <a:pPr lvl="1"/>
             <a:r>
-              <a:rPr lang="en-US" smtClean="0"/>
+              <a:rPr lang="en-US"/>
               <a:t>Second level</a:t>
             </a:r>
           </a:p>
           <a:p>
             <a:pPr lvl="2"/>
             <a:r>
-              <a:rPr lang="en-US" smtClean="0"/>
+              <a:rPr lang="en-US"/>
               <a:t>Third level</a:t>
             </a:r>
           </a:p>
           <a:p>
             <a:pPr lvl="3"/>
             <a:r>
-              <a:rPr lang="en-US" smtClean="0"/>
+              <a:rPr lang="en-US"/>
               <a:t>Fourth level</a:t>
             </a:r>
           </a:p>
           <a:p>
             <a:pPr lvl="4"/>
             <a:r>
-              <a:rPr lang="en-US" smtClean="0"/>
+              <a:rPr lang="en-US"/>
               <a:t>Fifth level</a:t>
             </a:r>
-            <a:endParaRPr lang="en-US"/>
           </a:p>
         </p:txBody>
       </p:sp>
@@ -1781,7 +1783,7 @@
           <a:p>
             <a:fld id="{5BCAD085-E8A6-8845-BD4E-CB4CCA059FC4}" type="datetimeFigureOut">
               <a:rPr lang="en-US" smtClean="0"/>
-              <a:t>1/27/13</a:t>
+              <a:t>6/7/26</a:t>
             </a:fld>
             <a:endParaRPr lang="en-US"/>
           </a:p>
@@ -1875,10 +1877,9 @@
           <a:lstStyle/>
           <a:p>
             <a:r>
-              <a:rPr lang="en-US" smtClean="0"/>
+              <a:rPr lang="en-US"/>
               <a:t>Click to edit Master title style</a:t>
             </a:r>
-            <a:endParaRPr lang="en-US"/>
           </a:p>
         </p:txBody>
       </p:sp>
@@ -1899,7 +1900,7 @@
           <a:p>
             <a:fld id="{5BCAD085-E8A6-8845-BD4E-CB4CCA059FC4}" type="datetimeFigureOut">
               <a:rPr lang="en-US" smtClean="0"/>
-              <a:t>1/27/13</a:t>
+              <a:t>6/7/26</a:t>
             </a:fld>
             <a:endParaRPr lang="en-US"/>
           </a:p>
@@ -1994,7 +1995,7 @@
           <a:p>
             <a:fld id="{5BCAD085-E8A6-8845-BD4E-CB4CCA059FC4}" type="datetimeFigureOut">
               <a:rPr lang="en-US" smtClean="0"/>
-              <a:t>1/27/13</a:t>
+              <a:t>6/7/26</a:t>
             </a:fld>
             <a:endParaRPr lang="en-US"/>
           </a:p>
@@ -2097,10 +2098,9 @@
           </a:lstStyle>
           <a:p>
             <a:r>
-              <a:rPr lang="en-US" smtClean="0"/>
+              <a:rPr lang="en-US"/>
               <a:t>Click to edit Master title style</a:t>
             </a:r>
-            <a:endParaRPr lang="en-US"/>
           </a:p>
         </p:txBody>
       </p:sp>
@@ -2154,38 +2154,37 @@
           <a:p>
             <a:pPr lvl="0"/>
             <a:r>
-              <a:rPr lang="en-US" smtClean="0"/>
+              <a:rPr lang="en-US"/>
               <a:t>Click to edit Master text styles</a:t>
             </a:r>
           </a:p>
           <a:p>
             <a:pPr lvl="1"/>
             <a:r>
-              <a:rPr lang="en-US" smtClean="0"/>
+              <a:rPr lang="en-US"/>
               <a:t>Second level</a:t>
             </a:r>
           </a:p>
           <a:p>
             <a:pPr lvl="2"/>
             <a:r>
-              <a:rPr lang="en-US" smtClean="0"/>
+              <a:rPr lang="en-US"/>
               <a:t>Third level</a:t>
             </a:r>
           </a:p>
           <a:p>
             <a:pPr lvl="3"/>
             <a:r>
-              <a:rPr lang="en-US" smtClean="0"/>
+              <a:rPr lang="en-US"/>
               <a:t>Fourth level</a:t>
             </a:r>
           </a:p>
           <a:p>
             <a:pPr lvl="4"/>
             <a:r>
-              <a:rPr lang="en-US" smtClean="0"/>
+              <a:rPr lang="en-US"/>
               <a:t>Fifth level</a:t>
             </a:r>
-            <a:endParaRPr lang="en-US"/>
           </a:p>
         </p:txBody>
       </p:sp>
@@ -2248,7 +2247,7 @@
           <a:p>
             <a:pPr lvl="0"/>
             <a:r>
-              <a:rPr lang="en-US" smtClean="0"/>
+              <a:rPr lang="en-US"/>
               <a:t>Click to edit Master text styles</a:t>
             </a:r>
           </a:p>
@@ -2271,7 +2270,7 @@
           <a:p>
             <a:fld id="{5BCAD085-E8A6-8845-BD4E-CB4CCA059FC4}" type="datetimeFigureOut">
               <a:rPr lang="en-US" smtClean="0"/>
-              <a:t>1/27/13</a:t>
+              <a:t>6/7/26</a:t>
             </a:fld>
             <a:endParaRPr lang="en-US"/>
           </a:p>
@@ -2374,10 +2373,9 @@
           </a:lstStyle>
           <a:p>
             <a:r>
-              <a:rPr lang="en-US" smtClean="0"/>
+              <a:rPr lang="en-US"/>
               <a:t>Click to edit Master title style</a:t>
             </a:r>
-            <a:endParaRPr lang="en-US"/>
           </a:p>
         </p:txBody>
       </p:sp>
@@ -2501,7 +2499,7 @@
           <a:p>
             <a:pPr lvl="0"/>
             <a:r>
-              <a:rPr lang="en-US" smtClean="0"/>
+              <a:rPr lang="en-US"/>
               <a:t>Click to edit Master text styles</a:t>
             </a:r>
           </a:p>
@@ -2524,7 +2522,7 @@
           <a:p>
             <a:fld id="{5BCAD085-E8A6-8845-BD4E-CB4CCA059FC4}" type="datetimeFigureOut">
               <a:rPr lang="en-US" smtClean="0"/>
-              <a:t>1/27/13</a:t>
+              <a:t>6/7/26</a:t>
             </a:fld>
             <a:endParaRPr lang="en-US"/>
           </a:p>
@@ -2633,10 +2631,9 @@
           <a:lstStyle/>
           <a:p>
             <a:r>
-              <a:rPr lang="en-US" smtClean="0"/>
+              <a:rPr lang="en-US"/>
               <a:t>Click to edit Master title style</a:t>
             </a:r>
-            <a:endParaRPr lang="en-US"/>
           </a:p>
         </p:txBody>
       </p:sp>
@@ -2667,38 +2664,37 @@
           <a:p>
             <a:pPr lvl="0"/>
             <a:r>
-              <a:rPr lang="en-US" smtClean="0"/>
+              <a:rPr lang="en-US"/>
               <a:t>Click to edit Master text styles</a:t>
             </a:r>
           </a:p>
           <a:p>
             <a:pPr lvl="1"/>
             <a:r>
-              <a:rPr lang="en-US" smtClean="0"/>
+              <a:rPr lang="en-US"/>
               <a:t>Second level</a:t>
             </a:r>
           </a:p>
           <a:p>
             <a:pPr lvl="2"/>
             <a:r>
-              <a:rPr lang="en-US" smtClean="0"/>
+              <a:rPr lang="en-US"/>
               <a:t>Third level</a:t>
             </a:r>
           </a:p>
           <a:p>
             <a:pPr lvl="3"/>
             <a:r>
-              <a:rPr lang="en-US" smtClean="0"/>
+              <a:rPr lang="en-US"/>
               <a:t>Fourth level</a:t>
             </a:r>
           </a:p>
           <a:p>
             <a:pPr lvl="4"/>
             <a:r>
-              <a:rPr lang="en-US" smtClean="0"/>
+              <a:rPr lang="en-US"/>
               <a:t>Fifth level</a:t>
             </a:r>
-            <a:endParaRPr lang="en-US"/>
           </a:p>
         </p:txBody>
       </p:sp>
@@ -2737,7 +2733,7 @@
           <a:p>
             <a:fld id="{5BCAD085-E8A6-8845-BD4E-CB4CCA059FC4}" type="datetimeFigureOut">
               <a:rPr lang="en-US" smtClean="0"/>
-              <a:t>1/27/13</a:t>
+              <a:t>6/7/26</a:t>
             </a:fld>
             <a:endParaRPr lang="en-US"/>
           </a:p>
@@ -3096,7 +3092,7 @@
 </file>
 
 <file path=ppt/slides/slide1.xml><?xml version="1.0" encoding="utf-8"?>
-<p:sld xmlns:a="http://schemas.openxmlformats.org/drawingml/2006/main" xmlns:p="http://schemas.openxmlformats.org/presentationml/2006/main" xmlns:r="http://schemas.openxmlformats.org/officeDocument/2006/relationships">
+<p:sld xmlns:a="http://schemas.openxmlformats.org/drawingml/2006/main" xmlns:r="http://schemas.openxmlformats.org/officeDocument/2006/relationships" xmlns:p="http://schemas.openxmlformats.org/presentationml/2006/main">
   <p:cSld>
     <p:spTree>
       <p:nvGrpSpPr>
@@ -3104,7 +3100,14 @@
         <p:cNvGrpSpPr/>
         <p:nvPr/>
       </p:nvGrpSpPr>
-      <p:grpSpPr/>
+      <p:grpSpPr>
+        <a:xfrm>
+          <a:off x="0" y="0"/>
+          <a:ext cx="0" cy="0"/>
+          <a:chOff x="0" y="0"/>
+          <a:chExt cx="0" cy="0"/>
+        </a:xfrm>
+      </p:grpSpPr>
       <p:sp>
         <p:nvSpPr>
           <p:cNvPr id="2" name="TextBox 1"/>
@@ -3499,7 +3502,7 @@
 </file>
 
 <file path=ppt/slides/slide10.xml><?xml version="1.0" encoding="utf-8"?>
-<p:sld xmlns:a="http://schemas.openxmlformats.org/drawingml/2006/main" xmlns:p="http://schemas.openxmlformats.org/presentationml/2006/main" xmlns:r="http://schemas.openxmlformats.org/officeDocument/2006/relationships">
+<p:sld xmlns:a="http://schemas.openxmlformats.org/drawingml/2006/main" xmlns:r="http://schemas.openxmlformats.org/officeDocument/2006/relationships" xmlns:p="http://schemas.openxmlformats.org/presentationml/2006/main">
   <p:cSld>
     <p:spTree>
       <p:nvGrpSpPr>
@@ -3507,7 +3510,14 @@
         <p:cNvGrpSpPr/>
         <p:nvPr/>
       </p:nvGrpSpPr>
-      <p:grpSpPr/>
+      <p:grpSpPr>
+        <a:xfrm>
+          <a:off x="0" y="0"/>
+          <a:ext cx="0" cy="0"/>
+          <a:chOff x="0" y="0"/>
+          <a:chExt cx="0" cy="0"/>
+        </a:xfrm>
+      </p:grpSpPr>
       <p:sp>
         <p:nvSpPr>
           <p:cNvPr id="2" name="TextBox 1"/>
@@ -3646,7 +3656,7 @@
 </file>
 
 <file path=ppt/slides/slide11.xml><?xml version="1.0" encoding="utf-8"?>
-<p:sld xmlns:a="http://schemas.openxmlformats.org/drawingml/2006/main" xmlns:p="http://schemas.openxmlformats.org/presentationml/2006/main" xmlns:r="http://schemas.openxmlformats.org/officeDocument/2006/relationships">
+<p:sld xmlns:a="http://schemas.openxmlformats.org/drawingml/2006/main" xmlns:r="http://schemas.openxmlformats.org/officeDocument/2006/relationships" xmlns:p="http://schemas.openxmlformats.org/presentationml/2006/main">
   <p:cSld>
     <p:spTree>
       <p:nvGrpSpPr>
@@ -3654,7 +3664,14 @@
         <p:cNvGrpSpPr/>
         <p:nvPr/>
       </p:nvGrpSpPr>
-      <p:grpSpPr/>
+      <p:grpSpPr>
+        <a:xfrm>
+          <a:off x="0" y="0"/>
+          <a:ext cx="0" cy="0"/>
+          <a:chOff x="0" y="0"/>
+          <a:chExt cx="0" cy="0"/>
+        </a:xfrm>
+      </p:grpSpPr>
       <p:sp>
         <p:nvSpPr>
           <p:cNvPr id="2" name="TextBox 1"/>
@@ -3793,7 +3810,7 @@
 </file>
 
 <file path=ppt/slides/slide12.xml><?xml version="1.0" encoding="utf-8"?>
-<p:sld xmlns:a="http://schemas.openxmlformats.org/drawingml/2006/main" xmlns:p="http://schemas.openxmlformats.org/presentationml/2006/main" xmlns:r="http://schemas.openxmlformats.org/officeDocument/2006/relationships">
+<p:sld xmlns:a="http://schemas.openxmlformats.org/drawingml/2006/main" xmlns:r="http://schemas.openxmlformats.org/officeDocument/2006/relationships" xmlns:p="http://schemas.openxmlformats.org/presentationml/2006/main">
   <p:cSld>
     <p:spTree>
       <p:nvGrpSpPr>
@@ -3801,7 +3818,14 @@
         <p:cNvGrpSpPr/>
         <p:nvPr/>
       </p:nvGrpSpPr>
-      <p:grpSpPr/>
+      <p:grpSpPr>
+        <a:xfrm>
+          <a:off x="0" y="0"/>
+          <a:ext cx="0" cy="0"/>
+          <a:chOff x="0" y="0"/>
+          <a:chExt cx="0" cy="0"/>
+        </a:xfrm>
+      </p:grpSpPr>
       <p:sp>
         <p:nvSpPr>
           <p:cNvPr id="2" name="TextBox 1"/>
@@ -3980,7 +4004,7 @@
 </file>
 
 <file path=ppt/slides/slide13.xml><?xml version="1.0" encoding="utf-8"?>
-<p:sld xmlns:a="http://schemas.openxmlformats.org/drawingml/2006/main" xmlns:p="http://schemas.openxmlformats.org/presentationml/2006/main" xmlns:r="http://schemas.openxmlformats.org/officeDocument/2006/relationships">
+<p:sld xmlns:a="http://schemas.openxmlformats.org/drawingml/2006/main" xmlns:r="http://schemas.openxmlformats.org/officeDocument/2006/relationships" xmlns:p="http://schemas.openxmlformats.org/presentationml/2006/main">
   <p:cSld>
     <p:spTree>
       <p:nvGrpSpPr>
@@ -3988,7 +4012,14 @@
         <p:cNvGrpSpPr/>
         <p:nvPr/>
       </p:nvGrpSpPr>
-      <p:grpSpPr/>
+      <p:grpSpPr>
+        <a:xfrm>
+          <a:off x="0" y="0"/>
+          <a:ext cx="0" cy="0"/>
+          <a:chOff x="0" y="0"/>
+          <a:chExt cx="0" cy="0"/>
+        </a:xfrm>
+      </p:grpSpPr>
       <p:sp>
         <p:nvSpPr>
           <p:cNvPr id="2" name="TextBox 1"/>
@@ -4202,7 +4233,7 @@
 </file>
 
 <file path=ppt/slides/slide14.xml><?xml version="1.0" encoding="utf-8"?>
-<p:sld xmlns:a="http://schemas.openxmlformats.org/drawingml/2006/main" xmlns:p="http://schemas.openxmlformats.org/presentationml/2006/main" xmlns:r="http://schemas.openxmlformats.org/officeDocument/2006/relationships">
+<p:sld xmlns:a="http://schemas.openxmlformats.org/drawingml/2006/main" xmlns:r="http://schemas.openxmlformats.org/officeDocument/2006/relationships" xmlns:p="http://schemas.openxmlformats.org/presentationml/2006/main">
   <p:cSld>
     <p:spTree>
       <p:nvGrpSpPr>
@@ -4210,7 +4241,14 @@
         <p:cNvGrpSpPr/>
         <p:nvPr/>
       </p:nvGrpSpPr>
-      <p:grpSpPr/>
+      <p:grpSpPr>
+        <a:xfrm>
+          <a:off x="0" y="0"/>
+          <a:ext cx="0" cy="0"/>
+          <a:chOff x="0" y="0"/>
+          <a:chExt cx="0" cy="0"/>
+        </a:xfrm>
+      </p:grpSpPr>
       <p:sp>
         <p:nvSpPr>
           <p:cNvPr id="2" name="TextBox 1"/>
@@ -4296,15 +4334,45 @@
         <a:graphic>
           <a:graphicData uri="http://schemas.openxmlformats.org/drawingml/2006/table">
             <a:tbl>
-              <a:tblPr firstRow="0" bandRow="0">
+              <a:tblPr>
                 <a:tableStyleId>{5940675A-B579-460E-94D1-54222C63F5DA}</a:tableStyleId>
               </a:tblPr>
               <a:tblGrid>
-                <a:gridCol w="2103120"/>
-                <a:gridCol w="2103120"/>
-                <a:gridCol w="2103120"/>
-                <a:gridCol w="2103120"/>
-                <a:gridCol w="2103120"/>
+                <a:gridCol w="2103120">
+                  <a:extLst>
+                    <a:ext uri="{9D8B030D-6E8A-4147-A177-3AD203B41FA5}">
+                      <a16:colId xmlns:a16="http://schemas.microsoft.com/office/drawing/2014/main" val="20000"/>
+                    </a:ext>
+                  </a:extLst>
+                </a:gridCol>
+                <a:gridCol w="2103120">
+                  <a:extLst>
+                    <a:ext uri="{9D8B030D-6E8A-4147-A177-3AD203B41FA5}">
+                      <a16:colId xmlns:a16="http://schemas.microsoft.com/office/drawing/2014/main" val="20001"/>
+                    </a:ext>
+                  </a:extLst>
+                </a:gridCol>
+                <a:gridCol w="2103120">
+                  <a:extLst>
+                    <a:ext uri="{9D8B030D-6E8A-4147-A177-3AD203B41FA5}">
+                      <a16:colId xmlns:a16="http://schemas.microsoft.com/office/drawing/2014/main" val="20002"/>
+                    </a:ext>
+                  </a:extLst>
+                </a:gridCol>
+                <a:gridCol w="2103120">
+                  <a:extLst>
+                    <a:ext uri="{9D8B030D-6E8A-4147-A177-3AD203B41FA5}">
+                      <a16:colId xmlns:a16="http://schemas.microsoft.com/office/drawing/2014/main" val="20003"/>
+                    </a:ext>
+                  </a:extLst>
+                </a:gridCol>
+                <a:gridCol w="2103120">
+                  <a:extLst>
+                    <a:ext uri="{9D8B030D-6E8A-4147-A177-3AD203B41FA5}">
+                      <a16:colId xmlns:a16="http://schemas.microsoft.com/office/drawing/2014/main" val="20004"/>
+                    </a:ext>
+                  </a:extLst>
+                </a:gridCol>
               </a:tblGrid>
               <a:tr h="594360">
                 <a:tc>
@@ -4422,6 +4490,11 @@
                     </a:solidFill>
                   </a:tcPr>
                 </a:tc>
+                <a:extLst>
+                  <a:ext uri="{0D108BD9-81ED-4DB2-BD59-A6C34878D82A}">
+                    <a16:rowId xmlns:a16="http://schemas.microsoft.com/office/drawing/2014/main" val="10000"/>
+                  </a:ext>
+                </a:extLst>
               </a:tr>
               <a:tr h="777240">
                 <a:tc>
@@ -4539,6 +4612,11 @@
                     </a:solidFill>
                   </a:tcPr>
                 </a:tc>
+                <a:extLst>
+                  <a:ext uri="{0D108BD9-81ED-4DB2-BD59-A6C34878D82A}">
+                    <a16:rowId xmlns:a16="http://schemas.microsoft.com/office/drawing/2014/main" val="10001"/>
+                  </a:ext>
+                </a:extLst>
               </a:tr>
               <a:tr h="777240">
                 <a:tc>
@@ -4656,6 +4734,11 @@
                     </a:solidFill>
                   </a:tcPr>
                 </a:tc>
+                <a:extLst>
+                  <a:ext uri="{0D108BD9-81ED-4DB2-BD59-A6C34878D82A}">
+                    <a16:rowId xmlns:a16="http://schemas.microsoft.com/office/drawing/2014/main" val="10002"/>
+                  </a:ext>
+                </a:extLst>
               </a:tr>
               <a:tr h="777240">
                 <a:tc>
@@ -4773,6 +4856,11 @@
                     </a:solidFill>
                   </a:tcPr>
                 </a:tc>
+                <a:extLst>
+                  <a:ext uri="{0D108BD9-81ED-4DB2-BD59-A6C34878D82A}">
+                    <a16:rowId xmlns:a16="http://schemas.microsoft.com/office/drawing/2014/main" val="10003"/>
+                  </a:ext>
+                </a:extLst>
               </a:tr>
               <a:tr h="777240">
                 <a:tc>
@@ -4890,6 +4978,11 @@
                     </a:solidFill>
                   </a:tcPr>
                 </a:tc>
+                <a:extLst>
+                  <a:ext uri="{0D108BD9-81ED-4DB2-BD59-A6C34878D82A}">
+                    <a16:rowId xmlns:a16="http://schemas.microsoft.com/office/drawing/2014/main" val="10004"/>
+                  </a:ext>
+                </a:extLst>
               </a:tr>
             </a:tbl>
           </a:graphicData>
@@ -4939,7 +5032,7 @@
 </file>
 
 <file path=ppt/slides/slide15.xml><?xml version="1.0" encoding="utf-8"?>
-<p:sld xmlns:a="http://schemas.openxmlformats.org/drawingml/2006/main" xmlns:p="http://schemas.openxmlformats.org/presentationml/2006/main" xmlns:r="http://schemas.openxmlformats.org/officeDocument/2006/relationships">
+<p:sld xmlns:a="http://schemas.openxmlformats.org/drawingml/2006/main" xmlns:r="http://schemas.openxmlformats.org/officeDocument/2006/relationships" xmlns:p="http://schemas.openxmlformats.org/presentationml/2006/main">
   <p:cSld>
     <p:spTree>
       <p:nvGrpSpPr>
@@ -4947,7 +5040,14 @@
         <p:cNvGrpSpPr/>
         <p:nvPr/>
       </p:nvGrpSpPr>
-      <p:grpSpPr/>
+      <p:grpSpPr>
+        <a:xfrm>
+          <a:off x="0" y="0"/>
+          <a:ext cx="0" cy="0"/>
+          <a:chOff x="0" y="0"/>
+          <a:chExt cx="0" cy="0"/>
+        </a:xfrm>
+      </p:grpSpPr>
       <p:sp>
         <p:nvSpPr>
           <p:cNvPr id="2" name="TextBox 1"/>
@@ -5086,7 +5186,7 @@
 </file>
 
 <file path=ppt/slides/slide16.xml><?xml version="1.0" encoding="utf-8"?>
-<p:sld xmlns:a="http://schemas.openxmlformats.org/drawingml/2006/main" xmlns:p="http://schemas.openxmlformats.org/presentationml/2006/main" xmlns:r="http://schemas.openxmlformats.org/officeDocument/2006/relationships">
+<p:sld xmlns:a="http://schemas.openxmlformats.org/drawingml/2006/main" xmlns:r="http://schemas.openxmlformats.org/officeDocument/2006/relationships" xmlns:p="http://schemas.openxmlformats.org/presentationml/2006/main">
   <p:cSld>
     <p:spTree>
       <p:nvGrpSpPr>
@@ -5094,7 +5194,14 @@
         <p:cNvGrpSpPr/>
         <p:nvPr/>
       </p:nvGrpSpPr>
-      <p:grpSpPr/>
+      <p:grpSpPr>
+        <a:xfrm>
+          <a:off x="0" y="0"/>
+          <a:ext cx="0" cy="0"/>
+          <a:chOff x="0" y="0"/>
+          <a:chExt cx="0" cy="0"/>
+        </a:xfrm>
+      </p:grpSpPr>
       <p:sp>
         <p:nvSpPr>
           <p:cNvPr id="2" name="TextBox 1"/>
@@ -5351,7 +5458,7 @@
 </file>
 
 <file path=ppt/slides/slide17.xml><?xml version="1.0" encoding="utf-8"?>
-<p:sld xmlns:a="http://schemas.openxmlformats.org/drawingml/2006/main" xmlns:p="http://schemas.openxmlformats.org/presentationml/2006/main" xmlns:r="http://schemas.openxmlformats.org/officeDocument/2006/relationships">
+<p:sld xmlns:a="http://schemas.openxmlformats.org/drawingml/2006/main" xmlns:r="http://schemas.openxmlformats.org/officeDocument/2006/relationships" xmlns:p="http://schemas.openxmlformats.org/presentationml/2006/main">
   <p:cSld>
     <p:spTree>
       <p:nvGrpSpPr>
@@ -5359,7 +5466,14 @@
         <p:cNvGrpSpPr/>
         <p:nvPr/>
       </p:nvGrpSpPr>
-      <p:grpSpPr/>
+      <p:grpSpPr>
+        <a:xfrm>
+          <a:off x="0" y="0"/>
+          <a:ext cx="0" cy="0"/>
+          <a:chOff x="0" y="0"/>
+          <a:chExt cx="0" cy="0"/>
+        </a:xfrm>
+      </p:grpSpPr>
       <p:sp>
         <p:nvSpPr>
           <p:cNvPr id="2" name="TextBox 1"/>
@@ -5390,21 +5504,45 @@
                 </a:solidFill>
                 <a:latin typeface="Times New Roman"/>
               </a:rPr>
-              <a:t>Выводы</a:t>
-            </a:r>
-          </a:p>
-        </p:txBody>
-      </p:sp>
-      <p:sp>
-        <p:nvSpPr>
-          <p:cNvPr id="3" name="TextBox 2"/>
+              <a:t>Прогноз состава тела</a:t>
+            </a:r>
+          </a:p>
+        </p:txBody>
+      </p:sp>
+      <p:pic>
+        <p:nvPicPr>
+          <p:cNvPr id="3" name="Picture 2" descr="10_compare.jpg"/>
+          <p:cNvPicPr>
+            <a:picLocks noChangeAspect="1"/>
+          </p:cNvPicPr>
+          <p:nvPr/>
+        </p:nvPicPr>
+        <p:blipFill>
+          <a:blip r:embed="rId2"/>
+          <a:stretch>
+            <a:fillRect/>
+          </a:stretch>
+        </p:blipFill>
+        <p:spPr>
+          <a:xfrm>
+            <a:off x="1263614" y="1097280"/>
+            <a:ext cx="2471185" cy="4389120"/>
+          </a:xfrm>
+          <a:prstGeom prst="rect">
+            <a:avLst/>
+          </a:prstGeom>
+        </p:spPr>
+      </p:pic>
+      <p:sp>
+        <p:nvSpPr>
+          <p:cNvPr id="4" name="TextBox 3"/>
           <p:cNvSpPr txBox="1"/>
           <p:nvPr/>
         </p:nvSpPr>
         <p:spPr>
           <a:xfrm>
-            <a:off x="548640" y="1097280"/>
-            <a:ext cx="10972800" cy="5120640"/>
+            <a:off x="838047" y="5623560"/>
+            <a:ext cx="3322320" cy="548640"/>
           </a:xfrm>
           <a:prstGeom prst="rect">
             <a:avLst/>
@@ -5412,91 +5550,145 @@
           <a:noFill/>
         </p:spPr>
         <p:txBody>
-          <a:bodyPr wrap="square" anchor="ctr">
+          <a:bodyPr wrap="square">
             <a:spAutoFit/>
           </a:bodyPr>
           <a:lstStyle/>
           <a:p>
-            <a:pPr algn="l">
-              <a:lnSpc>
-                <a:spcPct val="115000"/>
-              </a:lnSpc>
-              <a:spcAft>
-                <a:spcPts val="1800"/>
-              </a:spcAft>
-            </a:pPr>
-            <a:r>
-              <a:rPr sz="2800">
-                <a:solidFill>
-                  <a:srgbClr val="1F1F1F"/>
-                </a:solidFill>
-                <a:latin typeface="Times New Roman"/>
-              </a:rPr>
-              <a:t>•  Создано приложение Portal (FastAPI + Flutter)</a:t>
-            </a:r>
-          </a:p>
-          <a:p>
-            <a:pPr algn="l">
-              <a:lnSpc>
-                <a:spcPct val="115000"/>
-              </a:lnSpc>
-              <a:spcAft>
-                <a:spcPts val="1800"/>
-              </a:spcAft>
-            </a:pPr>
-            <a:r>
-              <a:rPr sz="2800">
-                <a:solidFill>
-                  <a:srgbClr val="1F1F1F"/>
-                </a:solidFill>
-                <a:latin typeface="Times New Roman"/>
-              </a:rPr>
-              <a:t>•  Реализован прогноз состава тела (R² = 0,73)</a:t>
-            </a:r>
-          </a:p>
-          <a:p>
-            <a:pPr algn="l">
-              <a:lnSpc>
-                <a:spcPct val="115000"/>
-              </a:lnSpc>
-              <a:spcAft>
-                <a:spcPts val="1800"/>
-              </a:spcAft>
-            </a:pPr>
-            <a:r>
-              <a:rPr sz="2800">
-                <a:solidFill>
-                  <a:srgbClr val="1F1F1F"/>
-                </a:solidFill>
-                <a:latin typeface="Times New Roman"/>
-              </a:rPr>
-              <a:t>•  Реализована автоадаптация тренировок</a:t>
-            </a:r>
-          </a:p>
-          <a:p>
-            <a:pPr algn="l">
-              <a:lnSpc>
-                <a:spcPct val="115000"/>
-              </a:lnSpc>
-              <a:spcAft>
-                <a:spcPts val="1800"/>
-              </a:spcAft>
-            </a:pPr>
-            <a:r>
-              <a:rPr sz="2800">
-                <a:solidFill>
-                  <a:srgbClr val="1F1F1F"/>
-                </a:solidFill>
-                <a:latin typeface="Times New Roman"/>
-              </a:rPr>
-              <a:t>•  Подтверждена работоспособность системы</a:t>
-            </a:r>
-          </a:p>
-        </p:txBody>
-      </p:sp>
-      <p:sp>
-        <p:nvSpPr>
-          <p:cNvPr id="4" name="TextBox 3"/>
+            <a:pPr algn="ctr"/>
+            <a:r>
+              <a:rPr sz="1200" b="0">
+                <a:solidFill>
+                  <a:srgbClr val="555555"/>
+                </a:solidFill>
+                <a:latin typeface="Times New Roman"/>
+              </a:rPr>
+              <a:t>Сравнение замеров</a:t>
+            </a:r>
+          </a:p>
+        </p:txBody>
+      </p:sp>
+      <p:pic>
+        <p:nvPicPr>
+          <p:cNvPr id="5" name="Picture 4" descr="11_forecast_charts.jpg"/>
+          <p:cNvPicPr>
+            <a:picLocks noChangeAspect="1"/>
+          </p:cNvPicPr>
+          <p:nvPr/>
+        </p:nvPicPr>
+        <p:blipFill>
+          <a:blip r:embed="rId3"/>
+          <a:stretch>
+            <a:fillRect/>
+          </a:stretch>
+        </p:blipFill>
+        <p:spPr>
+          <a:xfrm>
+            <a:off x="4860254" y="1097280"/>
+            <a:ext cx="2471185" cy="4389120"/>
+          </a:xfrm>
+          <a:prstGeom prst="rect">
+            <a:avLst/>
+          </a:prstGeom>
+        </p:spPr>
+      </p:pic>
+      <p:sp>
+        <p:nvSpPr>
+          <p:cNvPr id="6" name="TextBox 5"/>
+          <p:cNvSpPr txBox="1"/>
+          <p:nvPr/>
+        </p:nvSpPr>
+        <p:spPr>
+          <a:xfrm>
+            <a:off x="4434687" y="5623560"/>
+            <a:ext cx="3322320" cy="548640"/>
+          </a:xfrm>
+          <a:prstGeom prst="rect">
+            <a:avLst/>
+          </a:prstGeom>
+          <a:noFill/>
+        </p:spPr>
+        <p:txBody>
+          <a:bodyPr wrap="square">
+            <a:spAutoFit/>
+          </a:bodyPr>
+          <a:lstStyle/>
+          <a:p>
+            <a:pPr algn="ctr"/>
+            <a:r>
+              <a:rPr sz="1200" b="0">
+                <a:solidFill>
+                  <a:srgbClr val="555555"/>
+                </a:solidFill>
+                <a:latin typeface="Times New Roman"/>
+              </a:rPr>
+              <a:t>Прогноз с доверительным интервалом</a:t>
+            </a:r>
+          </a:p>
+        </p:txBody>
+      </p:sp>
+      <p:pic>
+        <p:nvPicPr>
+          <p:cNvPr id="7" name="Picture 6" descr="12_muscle_reco.jpg"/>
+          <p:cNvPicPr>
+            <a:picLocks noChangeAspect="1"/>
+          </p:cNvPicPr>
+          <p:nvPr/>
+        </p:nvPicPr>
+        <p:blipFill>
+          <a:blip r:embed="rId4"/>
+          <a:stretch>
+            <a:fillRect/>
+          </a:stretch>
+        </p:blipFill>
+        <p:spPr>
+          <a:xfrm>
+            <a:off x="8456894" y="1097280"/>
+            <a:ext cx="2471185" cy="4389120"/>
+          </a:xfrm>
+          <a:prstGeom prst="rect">
+            <a:avLst/>
+          </a:prstGeom>
+        </p:spPr>
+      </p:pic>
+      <p:sp>
+        <p:nvSpPr>
+          <p:cNvPr id="8" name="TextBox 7"/>
+          <p:cNvSpPr txBox="1"/>
+          <p:nvPr/>
+        </p:nvSpPr>
+        <p:spPr>
+          <a:xfrm>
+            <a:off x="8031327" y="5623560"/>
+            <a:ext cx="3322320" cy="548640"/>
+          </a:xfrm>
+          <a:prstGeom prst="rect">
+            <a:avLst/>
+          </a:prstGeom>
+          <a:noFill/>
+        </p:spPr>
+        <p:txBody>
+          <a:bodyPr wrap="square">
+            <a:spAutoFit/>
+          </a:bodyPr>
+          <a:lstStyle/>
+          <a:p>
+            <a:pPr algn="ctr"/>
+            <a:r>
+              <a:rPr sz="1200" b="0">
+                <a:solidFill>
+                  <a:srgbClr val="555555"/>
+                </a:solidFill>
+                <a:latin typeface="Times New Roman"/>
+              </a:rPr>
+              <a:t>Рекомендации на основе прогноза</a:t>
+            </a:r>
+          </a:p>
+        </p:txBody>
+      </p:sp>
+      <p:sp>
+        <p:nvSpPr>
+          <p:cNvPr id="9" name="TextBox 8"/>
           <p:cNvSpPr txBox="1"/>
           <p:nvPr/>
         </p:nvSpPr>
@@ -5538,7 +5730,7 @@
 </file>
 
 <file path=ppt/slides/slide18.xml><?xml version="1.0" encoding="utf-8"?>
-<p:sld xmlns:a="http://schemas.openxmlformats.org/drawingml/2006/main" xmlns:p="http://schemas.openxmlformats.org/presentationml/2006/main" xmlns:r="http://schemas.openxmlformats.org/officeDocument/2006/relationships">
+<p:sld xmlns:a="http://schemas.openxmlformats.org/drawingml/2006/main" xmlns:r="http://schemas.openxmlformats.org/officeDocument/2006/relationships" xmlns:p="http://schemas.openxmlformats.org/presentationml/2006/main">
   <p:cSld>
     <p:spTree>
       <p:nvGrpSpPr>
@@ -5546,7 +5738,208 @@
         <p:cNvGrpSpPr/>
         <p:nvPr/>
       </p:nvGrpSpPr>
-      <p:grpSpPr/>
+      <p:grpSpPr>
+        <a:xfrm>
+          <a:off x="0" y="0"/>
+          <a:ext cx="0" cy="0"/>
+          <a:chOff x="0" y="0"/>
+          <a:chExt cx="0" cy="0"/>
+        </a:xfrm>
+      </p:grpSpPr>
+      <p:sp>
+        <p:nvSpPr>
+          <p:cNvPr id="2" name="TextBox 1"/>
+          <p:cNvSpPr txBox="1"/>
+          <p:nvPr/>
+        </p:nvSpPr>
+        <p:spPr>
+          <a:xfrm>
+            <a:off x="548640" y="274320"/>
+            <a:ext cx="10972800" cy="548640"/>
+          </a:xfrm>
+          <a:prstGeom prst="rect">
+            <a:avLst/>
+          </a:prstGeom>
+          <a:noFill/>
+        </p:spPr>
+        <p:txBody>
+          <a:bodyPr wrap="square">
+            <a:spAutoFit/>
+          </a:bodyPr>
+          <a:lstStyle/>
+          <a:p>
+            <a:pPr algn="l"/>
+            <a:r>
+              <a:rPr sz="2800" b="1">
+                <a:solidFill>
+                  <a:srgbClr val="1F1F1F"/>
+                </a:solidFill>
+                <a:latin typeface="Times New Roman"/>
+              </a:rPr>
+              <a:t>Выводы</a:t>
+            </a:r>
+          </a:p>
+        </p:txBody>
+      </p:sp>
+      <p:sp>
+        <p:nvSpPr>
+          <p:cNvPr id="3" name="TextBox 2"/>
+          <p:cNvSpPr txBox="1"/>
+          <p:nvPr/>
+        </p:nvSpPr>
+        <p:spPr>
+          <a:xfrm>
+            <a:off x="548640" y="1097280"/>
+            <a:ext cx="10972800" cy="5120640"/>
+          </a:xfrm>
+          <a:prstGeom prst="rect">
+            <a:avLst/>
+          </a:prstGeom>
+          <a:noFill/>
+        </p:spPr>
+        <p:txBody>
+          <a:bodyPr wrap="square" anchor="ctr">
+            <a:spAutoFit/>
+          </a:bodyPr>
+          <a:lstStyle/>
+          <a:p>
+            <a:pPr algn="l">
+              <a:lnSpc>
+                <a:spcPct val="115000"/>
+              </a:lnSpc>
+              <a:spcAft>
+                <a:spcPts val="1800"/>
+              </a:spcAft>
+            </a:pPr>
+            <a:r>
+              <a:rPr sz="2800">
+                <a:solidFill>
+                  <a:srgbClr val="1F1F1F"/>
+                </a:solidFill>
+                <a:latin typeface="Times New Roman"/>
+              </a:rPr>
+              <a:t>•  Создано приложение Portal (FastAPI + Flutter)</a:t>
+            </a:r>
+          </a:p>
+          <a:p>
+            <a:pPr algn="l">
+              <a:lnSpc>
+                <a:spcPct val="115000"/>
+              </a:lnSpc>
+              <a:spcAft>
+                <a:spcPts val="1800"/>
+              </a:spcAft>
+            </a:pPr>
+            <a:r>
+              <a:rPr sz="2800">
+                <a:solidFill>
+                  <a:srgbClr val="1F1F1F"/>
+                </a:solidFill>
+                <a:latin typeface="Times New Roman"/>
+              </a:rPr>
+              <a:t>•  Реализован прогноз состава тела (R² = 0,73)</a:t>
+            </a:r>
+          </a:p>
+          <a:p>
+            <a:pPr algn="l">
+              <a:lnSpc>
+                <a:spcPct val="115000"/>
+              </a:lnSpc>
+              <a:spcAft>
+                <a:spcPts val="1800"/>
+              </a:spcAft>
+            </a:pPr>
+            <a:r>
+              <a:rPr sz="2800">
+                <a:solidFill>
+                  <a:srgbClr val="1F1F1F"/>
+                </a:solidFill>
+                <a:latin typeface="Times New Roman"/>
+              </a:rPr>
+              <a:t>•  Реализована автоадаптация тренировок</a:t>
+            </a:r>
+          </a:p>
+          <a:p>
+            <a:pPr algn="l">
+              <a:lnSpc>
+                <a:spcPct val="115000"/>
+              </a:lnSpc>
+              <a:spcAft>
+                <a:spcPts val="1800"/>
+              </a:spcAft>
+            </a:pPr>
+            <a:r>
+              <a:rPr sz="2800">
+                <a:solidFill>
+                  <a:srgbClr val="1F1F1F"/>
+                </a:solidFill>
+                <a:latin typeface="Times New Roman"/>
+              </a:rPr>
+              <a:t>•  Подтверждена работоспособность системы</a:t>
+            </a:r>
+          </a:p>
+        </p:txBody>
+      </p:sp>
+      <p:sp>
+        <p:nvSpPr>
+          <p:cNvPr id="4" name="TextBox 3"/>
+          <p:cNvSpPr txBox="1"/>
+          <p:nvPr/>
+        </p:nvSpPr>
+        <p:spPr>
+          <a:xfrm>
+            <a:off x="10332720" y="6263640"/>
+            <a:ext cx="1371600" cy="457200"/>
+          </a:xfrm>
+          <a:prstGeom prst="rect">
+            <a:avLst/>
+          </a:prstGeom>
+          <a:noFill/>
+        </p:spPr>
+        <p:txBody>
+          <a:bodyPr wrap="square">
+            <a:spAutoFit/>
+          </a:bodyPr>
+          <a:lstStyle/>
+          <a:p>
+            <a:pPr algn="r"/>
+            <a:r>
+              <a:rPr sz="2000" b="0">
+                <a:solidFill>
+                  <a:srgbClr val="555555"/>
+                </a:solidFill>
+                <a:latin typeface="Times New Roman"/>
+              </a:rPr>
+              <a:t>18</a:t>
+            </a:r>
+          </a:p>
+        </p:txBody>
+      </p:sp>
+    </p:spTree>
+  </p:cSld>
+  <p:clrMapOvr>
+    <a:masterClrMapping/>
+  </p:clrMapOvr>
+</p:sld>
+</file>
+
+<file path=ppt/slides/slide19.xml><?xml version="1.0" encoding="utf-8"?>
+<p:sld xmlns:a="http://schemas.openxmlformats.org/drawingml/2006/main" xmlns:r="http://schemas.openxmlformats.org/officeDocument/2006/relationships" xmlns:p="http://schemas.openxmlformats.org/presentationml/2006/main">
+  <p:cSld>
+    <p:spTree>
+      <p:nvGrpSpPr>
+        <p:cNvPr id="1" name=""/>
+        <p:cNvGrpSpPr/>
+        <p:nvPr/>
+      </p:nvGrpSpPr>
+      <p:grpSpPr>
+        <a:xfrm>
+          <a:off x="0" y="0"/>
+          <a:ext cx="0" cy="0"/>
+          <a:chOff x="0" y="0"/>
+          <a:chExt cx="0" cy="0"/>
+        </a:xfrm>
+      </p:grpSpPr>
       <p:sp>
         <p:nvSpPr>
           <p:cNvPr id="2" name="TextBox 1"/>
@@ -5598,14 +5991,108 @@
         </p:blipFill>
         <p:spPr>
           <a:xfrm>
-            <a:off x="4826174" y="1965960"/>
-            <a:ext cx="2539347" cy="3291840"/>
+            <a:off x="2545021" y="1965960"/>
+            <a:ext cx="2468809" cy="3200400"/>
           </a:xfrm>
           <a:prstGeom prst="rect">
             <a:avLst/>
           </a:prstGeom>
         </p:spPr>
       </p:pic>
+      <p:pic>
+        <p:nvPicPr>
+          <p:cNvPr id="4" name="Picture 3" descr="qr-rustore.png"/>
+          <p:cNvPicPr>
+            <a:picLocks noChangeAspect="1"/>
+          </p:cNvPicPr>
+          <p:nvPr/>
+        </p:nvPicPr>
+        <p:blipFill>
+          <a:blip r:embed="rId3"/>
+          <a:stretch>
+            <a:fillRect/>
+          </a:stretch>
+        </p:blipFill>
+        <p:spPr>
+          <a:xfrm>
+            <a:off x="7132109" y="2286000"/>
+            <a:ext cx="2560320" cy="2560320"/>
+          </a:xfrm>
+          <a:prstGeom prst="rect">
+            <a:avLst/>
+          </a:prstGeom>
+        </p:spPr>
+      </p:pic>
+      <p:sp>
+        <p:nvSpPr>
+          <p:cNvPr id="5" name="TextBox 4"/>
+          <p:cNvSpPr txBox="1"/>
+          <p:nvPr/>
+        </p:nvSpPr>
+        <p:spPr>
+          <a:xfrm>
+            <a:off x="1036225" y="5349240"/>
+            <a:ext cx="5486400" cy="457200"/>
+          </a:xfrm>
+          <a:prstGeom prst="rect">
+            <a:avLst/>
+          </a:prstGeom>
+          <a:noFill/>
+        </p:spPr>
+        <p:txBody>
+          <a:bodyPr wrap="square">
+            <a:spAutoFit/>
+          </a:bodyPr>
+          <a:lstStyle/>
+          <a:p>
+            <a:pPr algn="ctr"/>
+            <a:r>
+              <a:rPr sz="1800" b="1">
+                <a:solidFill>
+                  <a:srgbClr val="1F1F1F"/>
+                </a:solidFill>
+                <a:latin typeface="Times New Roman"/>
+              </a:rPr>
+              <a:t>Открыть в браузере</a:t>
+            </a:r>
+          </a:p>
+        </p:txBody>
+      </p:sp>
+      <p:sp>
+        <p:nvSpPr>
+          <p:cNvPr id="6" name="TextBox 5"/>
+          <p:cNvSpPr txBox="1"/>
+          <p:nvPr/>
+        </p:nvSpPr>
+        <p:spPr>
+          <a:xfrm>
+            <a:off x="5669069" y="5349240"/>
+            <a:ext cx="5486400" cy="457200"/>
+          </a:xfrm>
+          <a:prstGeom prst="rect">
+            <a:avLst/>
+          </a:prstGeom>
+          <a:noFill/>
+        </p:spPr>
+        <p:txBody>
+          <a:bodyPr wrap="square">
+            <a:spAutoFit/>
+          </a:bodyPr>
+          <a:lstStyle/>
+          <a:p>
+            <a:pPr algn="ctr"/>
+            <a:r>
+              <a:rPr sz="1800" b="1">
+                <a:solidFill>
+                  <a:srgbClr val="1F1F1F"/>
+                </a:solidFill>
+                <a:latin typeface="Times New Roman"/>
+              </a:rPr>
+              <a:t>Скачать в RuStore</a:t>
+            </a:r>
+          </a:p>
+        </p:txBody>
+      </p:sp>
     </p:spTree>
   </p:cSld>
   <p:clrMapOvr>
@@ -5615,7 +6102,7 @@
 </file>
 
 <file path=ppt/slides/slide2.xml><?xml version="1.0" encoding="utf-8"?>
-<p:sld xmlns:a="http://schemas.openxmlformats.org/drawingml/2006/main" xmlns:p="http://schemas.openxmlformats.org/presentationml/2006/main" xmlns:r="http://schemas.openxmlformats.org/officeDocument/2006/relationships">
+<p:sld xmlns:a="http://schemas.openxmlformats.org/drawingml/2006/main" xmlns:r="http://schemas.openxmlformats.org/officeDocument/2006/relationships" xmlns:p="http://schemas.openxmlformats.org/presentationml/2006/main">
   <p:cSld>
     <p:spTree>
       <p:nvGrpSpPr>
@@ -5623,7 +6110,14 @@
         <p:cNvGrpSpPr/>
         <p:nvPr/>
       </p:nvGrpSpPr>
-      <p:grpSpPr/>
+      <p:grpSpPr>
+        <a:xfrm>
+          <a:off x="0" y="0"/>
+          <a:ext cx="0" cy="0"/>
+          <a:chOff x="0" y="0"/>
+          <a:chExt cx="0" cy="0"/>
+        </a:xfrm>
+      </p:grpSpPr>
       <p:sp>
         <p:nvSpPr>
           <p:cNvPr id="2" name="TextBox 1"/>
@@ -5802,7 +6296,7 @@
 </file>
 
 <file path=ppt/slides/slide3.xml><?xml version="1.0" encoding="utf-8"?>
-<p:sld xmlns:a="http://schemas.openxmlformats.org/drawingml/2006/main" xmlns:p="http://schemas.openxmlformats.org/presentationml/2006/main" xmlns:r="http://schemas.openxmlformats.org/officeDocument/2006/relationships">
+<p:sld xmlns:a="http://schemas.openxmlformats.org/drawingml/2006/main" xmlns:r="http://schemas.openxmlformats.org/officeDocument/2006/relationships" xmlns:p="http://schemas.openxmlformats.org/presentationml/2006/main">
   <p:cSld>
     <p:spTree>
       <p:nvGrpSpPr>
@@ -5810,7 +6304,14 @@
         <p:cNvGrpSpPr/>
         <p:nvPr/>
       </p:nvGrpSpPr>
-      <p:grpSpPr/>
+      <p:grpSpPr>
+        <a:xfrm>
+          <a:off x="0" y="0"/>
+          <a:ext cx="0" cy="0"/>
+          <a:chOff x="0" y="0"/>
+          <a:chExt cx="0" cy="0"/>
+        </a:xfrm>
+      </p:grpSpPr>
       <p:sp>
         <p:nvSpPr>
           <p:cNvPr id="2" name="TextBox 1"/>
@@ -6113,7 +6614,7 @@
 </file>
 
 <file path=ppt/slides/slide4.xml><?xml version="1.0" encoding="utf-8"?>
-<p:sld xmlns:a="http://schemas.openxmlformats.org/drawingml/2006/main" xmlns:p="http://schemas.openxmlformats.org/presentationml/2006/main" xmlns:r="http://schemas.openxmlformats.org/officeDocument/2006/relationships">
+<p:sld xmlns:a="http://schemas.openxmlformats.org/drawingml/2006/main" xmlns:r="http://schemas.openxmlformats.org/officeDocument/2006/relationships" xmlns:p="http://schemas.openxmlformats.org/presentationml/2006/main">
   <p:cSld>
     <p:spTree>
       <p:nvGrpSpPr>
@@ -6121,7 +6622,14 @@
         <p:cNvGrpSpPr/>
         <p:nvPr/>
       </p:nvGrpSpPr>
-      <p:grpSpPr/>
+      <p:grpSpPr>
+        <a:xfrm>
+          <a:off x="0" y="0"/>
+          <a:ext cx="0" cy="0"/>
+          <a:chOff x="0" y="0"/>
+          <a:chExt cx="0" cy="0"/>
+        </a:xfrm>
+      </p:grpSpPr>
       <p:sp>
         <p:nvSpPr>
           <p:cNvPr id="2" name="TextBox 1"/>
@@ -6207,12 +6715,24 @@
         <a:graphic>
           <a:graphicData uri="http://schemas.openxmlformats.org/drawingml/2006/table">
             <a:tbl>
-              <a:tblPr firstRow="0" bandRow="0">
+              <a:tblPr>
                 <a:tableStyleId>{5940675A-B579-460E-94D1-54222C63F5DA}</a:tableStyleId>
               </a:tblPr>
               <a:tblGrid>
-                <a:gridCol w="2743200"/>
-                <a:gridCol w="6766560"/>
+                <a:gridCol w="2743200">
+                  <a:extLst>
+                    <a:ext uri="{9D8B030D-6E8A-4147-A177-3AD203B41FA5}">
+                      <a16:colId xmlns:a16="http://schemas.microsoft.com/office/drawing/2014/main" val="20000"/>
+                    </a:ext>
+                  </a:extLst>
+                </a:gridCol>
+                <a:gridCol w="6766560">
+                  <a:extLst>
+                    <a:ext uri="{9D8B030D-6E8A-4147-A177-3AD203B41FA5}">
+                      <a16:colId xmlns:a16="http://schemas.microsoft.com/office/drawing/2014/main" val="20001"/>
+                    </a:ext>
+                  </a:extLst>
+                </a:gridCol>
               </a:tblGrid>
               <a:tr h="594360">
                 <a:tc>
@@ -6261,6 +6781,11 @@
                     </a:solidFill>
                   </a:tcPr>
                 </a:tc>
+                <a:extLst>
+                  <a:ext uri="{0D108BD9-81ED-4DB2-BD59-A6C34878D82A}">
+                    <a16:rowId xmlns:a16="http://schemas.microsoft.com/office/drawing/2014/main" val="10000"/>
+                  </a:ext>
+                </a:extLst>
               </a:tr>
               <a:tr h="777240">
                 <a:tc>
@@ -6309,6 +6834,11 @@
                     </a:solidFill>
                   </a:tcPr>
                 </a:tc>
+                <a:extLst>
+                  <a:ext uri="{0D108BD9-81ED-4DB2-BD59-A6C34878D82A}">
+                    <a16:rowId xmlns:a16="http://schemas.microsoft.com/office/drawing/2014/main" val="10001"/>
+                  </a:ext>
+                </a:extLst>
               </a:tr>
               <a:tr h="777240">
                 <a:tc>
@@ -6357,6 +6887,11 @@
                     </a:solidFill>
                   </a:tcPr>
                 </a:tc>
+                <a:extLst>
+                  <a:ext uri="{0D108BD9-81ED-4DB2-BD59-A6C34878D82A}">
+                    <a16:rowId xmlns:a16="http://schemas.microsoft.com/office/drawing/2014/main" val="10002"/>
+                  </a:ext>
+                </a:extLst>
               </a:tr>
               <a:tr h="777240">
                 <a:tc>
@@ -6405,6 +6940,11 @@
                     </a:solidFill>
                   </a:tcPr>
                 </a:tc>
+                <a:extLst>
+                  <a:ext uri="{0D108BD9-81ED-4DB2-BD59-A6C34878D82A}">
+                    <a16:rowId xmlns:a16="http://schemas.microsoft.com/office/drawing/2014/main" val="10003"/>
+                  </a:ext>
+                </a:extLst>
               </a:tr>
             </a:tbl>
           </a:graphicData>
@@ -6454,7 +6994,7 @@
 </file>
 
 <file path=ppt/slides/slide5.xml><?xml version="1.0" encoding="utf-8"?>
-<p:sld xmlns:a="http://schemas.openxmlformats.org/drawingml/2006/main" xmlns:p="http://schemas.openxmlformats.org/presentationml/2006/main" xmlns:r="http://schemas.openxmlformats.org/officeDocument/2006/relationships">
+<p:sld xmlns:a="http://schemas.openxmlformats.org/drawingml/2006/main" xmlns:r="http://schemas.openxmlformats.org/officeDocument/2006/relationships" xmlns:p="http://schemas.openxmlformats.org/presentationml/2006/main">
   <p:cSld>
     <p:spTree>
       <p:nvGrpSpPr>
@@ -6462,7 +7002,14 @@
         <p:cNvGrpSpPr/>
         <p:nvPr/>
       </p:nvGrpSpPr>
-      <p:grpSpPr/>
+      <p:grpSpPr>
+        <a:xfrm>
+          <a:off x="0" y="0"/>
+          <a:ext cx="0" cy="0"/>
+          <a:chOff x="0" y="0"/>
+          <a:chExt cx="0" cy="0"/>
+        </a:xfrm>
+      </p:grpSpPr>
       <p:sp>
         <p:nvSpPr>
           <p:cNvPr id="2" name="TextBox 1"/>
@@ -6548,14 +7095,38 @@
         <a:graphic>
           <a:graphicData uri="http://schemas.openxmlformats.org/drawingml/2006/table">
             <a:tbl>
-              <a:tblPr firstRow="0" bandRow="0">
+              <a:tblPr>
                 <a:tableStyleId>{5940675A-B579-460E-94D1-54222C63F5DA}</a:tableStyleId>
               </a:tblPr>
               <a:tblGrid>
-                <a:gridCol w="2628900"/>
-                <a:gridCol w="2628900"/>
-                <a:gridCol w="2628900"/>
-                <a:gridCol w="2628900"/>
+                <a:gridCol w="2628900">
+                  <a:extLst>
+                    <a:ext uri="{9D8B030D-6E8A-4147-A177-3AD203B41FA5}">
+                      <a16:colId xmlns:a16="http://schemas.microsoft.com/office/drawing/2014/main" val="20000"/>
+                    </a:ext>
+                  </a:extLst>
+                </a:gridCol>
+                <a:gridCol w="2628900">
+                  <a:extLst>
+                    <a:ext uri="{9D8B030D-6E8A-4147-A177-3AD203B41FA5}">
+                      <a16:colId xmlns:a16="http://schemas.microsoft.com/office/drawing/2014/main" val="20001"/>
+                    </a:ext>
+                  </a:extLst>
+                </a:gridCol>
+                <a:gridCol w="2628900">
+                  <a:extLst>
+                    <a:ext uri="{9D8B030D-6E8A-4147-A177-3AD203B41FA5}">
+                      <a16:colId xmlns:a16="http://schemas.microsoft.com/office/drawing/2014/main" val="20002"/>
+                    </a:ext>
+                  </a:extLst>
+                </a:gridCol>
+                <a:gridCol w="2628900">
+                  <a:extLst>
+                    <a:ext uri="{9D8B030D-6E8A-4147-A177-3AD203B41FA5}">
+                      <a16:colId xmlns:a16="http://schemas.microsoft.com/office/drawing/2014/main" val="20003"/>
+                    </a:ext>
+                  </a:extLst>
+                </a:gridCol>
               </a:tblGrid>
               <a:tr h="594360">
                 <a:tc>
@@ -6650,6 +7221,11 @@
                     </a:solidFill>
                   </a:tcPr>
                 </a:tc>
+                <a:extLst>
+                  <a:ext uri="{0D108BD9-81ED-4DB2-BD59-A6C34878D82A}">
+                    <a16:rowId xmlns:a16="http://schemas.microsoft.com/office/drawing/2014/main" val="10000"/>
+                  </a:ext>
+                </a:extLst>
               </a:tr>
               <a:tr h="777240">
                 <a:tc>
@@ -6744,6 +7320,11 @@
                     </a:solidFill>
                   </a:tcPr>
                 </a:tc>
+                <a:extLst>
+                  <a:ext uri="{0D108BD9-81ED-4DB2-BD59-A6C34878D82A}">
+                    <a16:rowId xmlns:a16="http://schemas.microsoft.com/office/drawing/2014/main" val="10001"/>
+                  </a:ext>
+                </a:extLst>
               </a:tr>
               <a:tr h="777240">
                 <a:tc>
@@ -6838,6 +7419,11 @@
                     </a:solidFill>
                   </a:tcPr>
                 </a:tc>
+                <a:extLst>
+                  <a:ext uri="{0D108BD9-81ED-4DB2-BD59-A6C34878D82A}">
+                    <a16:rowId xmlns:a16="http://schemas.microsoft.com/office/drawing/2014/main" val="10002"/>
+                  </a:ext>
+                </a:extLst>
               </a:tr>
               <a:tr h="777240">
                 <a:tc>
@@ -6932,6 +7518,11 @@
                     </a:solidFill>
                   </a:tcPr>
                 </a:tc>
+                <a:extLst>
+                  <a:ext uri="{0D108BD9-81ED-4DB2-BD59-A6C34878D82A}">
+                    <a16:rowId xmlns:a16="http://schemas.microsoft.com/office/drawing/2014/main" val="10003"/>
+                  </a:ext>
+                </a:extLst>
               </a:tr>
               <a:tr h="777240">
                 <a:tc>
@@ -7026,6 +7617,11 @@
                     </a:solidFill>
                   </a:tcPr>
                 </a:tc>
+                <a:extLst>
+                  <a:ext uri="{0D108BD9-81ED-4DB2-BD59-A6C34878D82A}">
+                    <a16:rowId xmlns:a16="http://schemas.microsoft.com/office/drawing/2014/main" val="10004"/>
+                  </a:ext>
+                </a:extLst>
               </a:tr>
               <a:tr h="777240">
                 <a:tc>
@@ -7120,6 +7716,11 @@
                     </a:solidFill>
                   </a:tcPr>
                 </a:tc>
+                <a:extLst>
+                  <a:ext uri="{0D108BD9-81ED-4DB2-BD59-A6C34878D82A}">
+                    <a16:rowId xmlns:a16="http://schemas.microsoft.com/office/drawing/2014/main" val="10005"/>
+                  </a:ext>
+                </a:extLst>
               </a:tr>
             </a:tbl>
           </a:graphicData>
@@ -7169,7 +7770,7 @@
 </file>
 
 <file path=ppt/slides/slide6.xml><?xml version="1.0" encoding="utf-8"?>
-<p:sld xmlns:a="http://schemas.openxmlformats.org/drawingml/2006/main" xmlns:p="http://schemas.openxmlformats.org/presentationml/2006/main" xmlns:r="http://schemas.openxmlformats.org/officeDocument/2006/relationships">
+<p:sld xmlns:a="http://schemas.openxmlformats.org/drawingml/2006/main" xmlns:r="http://schemas.openxmlformats.org/officeDocument/2006/relationships" xmlns:p="http://schemas.openxmlformats.org/presentationml/2006/main">
   <p:cSld>
     <p:spTree>
       <p:nvGrpSpPr>
@@ -7177,7 +7778,14 @@
         <p:cNvGrpSpPr/>
         <p:nvPr/>
       </p:nvGrpSpPr>
-      <p:grpSpPr/>
+      <p:grpSpPr>
+        <a:xfrm>
+          <a:off x="0" y="0"/>
+          <a:ext cx="0" cy="0"/>
+          <a:chOff x="0" y="0"/>
+          <a:chExt cx="0" cy="0"/>
+        </a:xfrm>
+      </p:grpSpPr>
       <p:sp>
         <p:nvSpPr>
           <p:cNvPr id="2" name="TextBox 1"/>
@@ -7316,7 +7924,7 @@
 </file>
 
 <file path=ppt/slides/slide7.xml><?xml version="1.0" encoding="utf-8"?>
-<p:sld xmlns:a="http://schemas.openxmlformats.org/drawingml/2006/main" xmlns:p="http://schemas.openxmlformats.org/presentationml/2006/main" xmlns:r="http://schemas.openxmlformats.org/officeDocument/2006/relationships">
+<p:sld xmlns:a="http://schemas.openxmlformats.org/drawingml/2006/main" xmlns:r="http://schemas.openxmlformats.org/officeDocument/2006/relationships" xmlns:p="http://schemas.openxmlformats.org/presentationml/2006/main">
   <p:cSld>
     <p:spTree>
       <p:nvGrpSpPr>
@@ -7324,7 +7932,14 @@
         <p:cNvGrpSpPr/>
         <p:nvPr/>
       </p:nvGrpSpPr>
-      <p:grpSpPr/>
+      <p:grpSpPr>
+        <a:xfrm>
+          <a:off x="0" y="0"/>
+          <a:ext cx="0" cy="0"/>
+          <a:chOff x="0" y="0"/>
+          <a:chExt cx="0" cy="0"/>
+        </a:xfrm>
+      </p:grpSpPr>
       <p:sp>
         <p:nvSpPr>
           <p:cNvPr id="2" name="TextBox 1"/>
@@ -7463,7 +8078,7 @@
 </file>
 
 <file path=ppt/slides/slide8.xml><?xml version="1.0" encoding="utf-8"?>
-<p:sld xmlns:a="http://schemas.openxmlformats.org/drawingml/2006/main" xmlns:p="http://schemas.openxmlformats.org/presentationml/2006/main" xmlns:r="http://schemas.openxmlformats.org/officeDocument/2006/relationships">
+<p:sld xmlns:a="http://schemas.openxmlformats.org/drawingml/2006/main" xmlns:r="http://schemas.openxmlformats.org/officeDocument/2006/relationships" xmlns:p="http://schemas.openxmlformats.org/presentationml/2006/main">
   <p:cSld>
     <p:spTree>
       <p:nvGrpSpPr>
@@ -7471,7 +8086,14 @@
         <p:cNvGrpSpPr/>
         <p:nvPr/>
       </p:nvGrpSpPr>
-      <p:grpSpPr/>
+      <p:grpSpPr>
+        <a:xfrm>
+          <a:off x="0" y="0"/>
+          <a:ext cx="0" cy="0"/>
+          <a:chOff x="0" y="0"/>
+          <a:chExt cx="0" cy="0"/>
+        </a:xfrm>
+      </p:grpSpPr>
       <p:sp>
         <p:nvSpPr>
           <p:cNvPr id="2" name="TextBox 1"/>
@@ -7669,7 +8291,7 @@
 </file>
 
 <file path=ppt/slides/slide9.xml><?xml version="1.0" encoding="utf-8"?>
-<p:sld xmlns:a="http://schemas.openxmlformats.org/drawingml/2006/main" xmlns:p="http://schemas.openxmlformats.org/presentationml/2006/main" xmlns:r="http://schemas.openxmlformats.org/officeDocument/2006/relationships">
+<p:sld xmlns:a="http://schemas.openxmlformats.org/drawingml/2006/main" xmlns:r="http://schemas.openxmlformats.org/officeDocument/2006/relationships" xmlns:p="http://schemas.openxmlformats.org/presentationml/2006/main">
   <p:cSld>
     <p:spTree>
       <p:nvGrpSpPr>
@@ -7677,7 +8299,14 @@
         <p:cNvGrpSpPr/>
         <p:nvPr/>
       </p:nvGrpSpPr>
-      <p:grpSpPr/>
+      <p:grpSpPr>
+        <a:xfrm>
+          <a:off x="0" y="0"/>
+          <a:ext cx="0" cy="0"/>
+          <a:chOff x="0" y="0"/>
+          <a:chExt cx="0" cy="0"/>
+        </a:xfrm>
+      </p:grpSpPr>
       <p:sp>
         <p:nvSpPr>
           <p:cNvPr id="2" name="TextBox 1"/>

--- a/docs/thesis/presentation-maria.pptx
+++ b/docs/thesis/presentation-maria.pptx
@@ -5,27 +5,27 @@
     <p:sldMasterId id="2147483648" r:id="rId1"/>
   </p:sldMasterIdLst>
   <p:sldIdLst>
-    <p:sldId id="256" r:id="rId2"/>
-    <p:sldId id="257" r:id="rId3"/>
-    <p:sldId id="258" r:id="rId4"/>
-    <p:sldId id="259" r:id="rId5"/>
-    <p:sldId id="260" r:id="rId6"/>
-    <p:sldId id="261" r:id="rId7"/>
-    <p:sldId id="262" r:id="rId8"/>
-    <p:sldId id="263" r:id="rId9"/>
-    <p:sldId id="264" r:id="rId10"/>
-    <p:sldId id="265" r:id="rId11"/>
-    <p:sldId id="266" r:id="rId12"/>
-    <p:sldId id="267" r:id="rId13"/>
-    <p:sldId id="268" r:id="rId14"/>
-    <p:sldId id="269" r:id="rId15"/>
-    <p:sldId id="270" r:id="rId16"/>
-    <p:sldId id="271" r:id="rId17"/>
-    <p:sldId id="272" r:id="rId18"/>
-    <p:sldId id="273" r:id="rId19"/>
-    <p:sldId id="274" r:id="rId20"/>
+    <p:sldId id="256" r:id="rId7"/>
+    <p:sldId id="257" r:id="rId8"/>
+    <p:sldId id="258" r:id="rId9"/>
+    <p:sldId id="259" r:id="rId10"/>
+    <p:sldId id="260" r:id="rId11"/>
+    <p:sldId id="261" r:id="rId12"/>
+    <p:sldId id="262" r:id="rId13"/>
+    <p:sldId id="263" r:id="rId14"/>
+    <p:sldId id="264" r:id="rId15"/>
+    <p:sldId id="265" r:id="rId16"/>
+    <p:sldId id="266" r:id="rId17"/>
+    <p:sldId id="267" r:id="rId18"/>
+    <p:sldId id="268" r:id="rId19"/>
+    <p:sldId id="269" r:id="rId20"/>
+    <p:sldId id="270" r:id="rId21"/>
+    <p:sldId id="271" r:id="rId22"/>
+    <p:sldId id="272" r:id="rId23"/>
+    <p:sldId id="273" r:id="rId24"/>
+    <p:sldId id="274" r:id="rId25"/>
   </p:sldIdLst>
-  <p:sldSz cx="12192000" cy="6858000"/>
+  <p:sldSz cx="12191695" cy="6858000" type="screen4x3"/>
   <p:notesSz cx="6858000" cy="9144000"/>
   <p:defaultTextStyle>
     <a:defPPr>
@@ -122,22 +122,6 @@
       </a:defRPr>
     </a:lvl9pPr>
   </p:defaultTextStyle>
-  <p:extLst>
-    <p:ext uri="{EFAFB233-063F-42B5-8137-9DF3F51BA10A}">
-      <p15:sldGuideLst xmlns:p15="http://schemas.microsoft.com/office/powerpoint/2012/main">
-        <p15:guide id="1" orient="horz" pos="2160">
-          <p15:clr>
-            <a:srgbClr val="A4A3A4"/>
-          </p15:clr>
-        </p15:guide>
-        <p15:guide id="2" pos="2880">
-          <p15:clr>
-            <a:srgbClr val="A4A3A4"/>
-          </p15:clr>
-        </p15:guide>
-      </p15:sldGuideLst>
-    </p:ext>
-  </p:extLst>
 </p:presentation>
 </file>
 
@@ -179,9 +163,10 @@
           <a:lstStyle/>
           <a:p>
             <a:r>
-              <a:rPr lang="en-US"/>
+              <a:rPr lang="en-US" smtClean="0"/>
               <a:t>Click to edit Master title style</a:t>
             </a:r>
+            <a:endParaRPr lang="en-US"/>
           </a:p>
         </p:txBody>
       </p:sp>
@@ -297,9 +282,10 @@
           </a:lstStyle>
           <a:p>
             <a:r>
-              <a:rPr lang="en-US"/>
+              <a:rPr lang="en-US" smtClean="0"/>
               <a:t>Click to edit Master subtitle style</a:t>
             </a:r>
+            <a:endParaRPr lang="en-US"/>
           </a:p>
         </p:txBody>
       </p:sp>
@@ -320,7 +306,7 @@
           <a:p>
             <a:fld id="{5BCAD085-E8A6-8845-BD4E-CB4CCA059FC4}" type="datetimeFigureOut">
               <a:rPr lang="en-US" smtClean="0"/>
-              <a:t>6/7/26</a:t>
+              <a:t>1/27/13</a:t>
             </a:fld>
             <a:endParaRPr lang="en-US"/>
           </a:p>
@@ -414,9 +400,10 @@
           <a:lstStyle/>
           <a:p>
             <a:r>
-              <a:rPr lang="en-US"/>
+              <a:rPr lang="en-US" smtClean="0"/>
               <a:t>Click to edit Master title style</a:t>
             </a:r>
+            <a:endParaRPr lang="en-US"/>
           </a:p>
         </p:txBody>
       </p:sp>
@@ -437,37 +424,38 @@
           <a:p>
             <a:pPr lvl="0"/>
             <a:r>
-              <a:rPr lang="en-US"/>
+              <a:rPr lang="en-US" smtClean="0"/>
               <a:t>Click to edit Master text styles</a:t>
             </a:r>
           </a:p>
           <a:p>
             <a:pPr lvl="1"/>
             <a:r>
-              <a:rPr lang="en-US"/>
+              <a:rPr lang="en-US" smtClean="0"/>
               <a:t>Second level</a:t>
             </a:r>
           </a:p>
           <a:p>
             <a:pPr lvl="2"/>
             <a:r>
-              <a:rPr lang="en-US"/>
+              <a:rPr lang="en-US" smtClean="0"/>
               <a:t>Third level</a:t>
             </a:r>
           </a:p>
           <a:p>
             <a:pPr lvl="3"/>
             <a:r>
-              <a:rPr lang="en-US"/>
+              <a:rPr lang="en-US" smtClean="0"/>
               <a:t>Fourth level</a:t>
             </a:r>
           </a:p>
           <a:p>
             <a:pPr lvl="4"/>
             <a:r>
-              <a:rPr lang="en-US"/>
+              <a:rPr lang="en-US" smtClean="0"/>
               <a:t>Fifth level</a:t>
             </a:r>
+            <a:endParaRPr lang="en-US"/>
           </a:p>
         </p:txBody>
       </p:sp>
@@ -488,7 +476,7 @@
           <a:p>
             <a:fld id="{5BCAD085-E8A6-8845-BD4E-CB4CCA059FC4}" type="datetimeFigureOut">
               <a:rPr lang="en-US" smtClean="0"/>
-              <a:t>6/7/26</a:t>
+              <a:t>1/27/13</a:t>
             </a:fld>
             <a:endParaRPr lang="en-US"/>
           </a:p>
@@ -587,9 +575,10 @@
           <a:lstStyle/>
           <a:p>
             <a:r>
-              <a:rPr lang="en-US"/>
+              <a:rPr lang="en-US" smtClean="0"/>
               <a:t>Click to edit Master title style</a:t>
             </a:r>
+            <a:endParaRPr lang="en-US"/>
           </a:p>
         </p:txBody>
       </p:sp>
@@ -615,37 +604,38 @@
           <a:p>
             <a:pPr lvl="0"/>
             <a:r>
-              <a:rPr lang="en-US"/>
+              <a:rPr lang="en-US" smtClean="0"/>
               <a:t>Click to edit Master text styles</a:t>
             </a:r>
           </a:p>
           <a:p>
             <a:pPr lvl="1"/>
             <a:r>
-              <a:rPr lang="en-US"/>
+              <a:rPr lang="en-US" smtClean="0"/>
               <a:t>Second level</a:t>
             </a:r>
           </a:p>
           <a:p>
             <a:pPr lvl="2"/>
             <a:r>
-              <a:rPr lang="en-US"/>
+              <a:rPr lang="en-US" smtClean="0"/>
               <a:t>Third level</a:t>
             </a:r>
           </a:p>
           <a:p>
             <a:pPr lvl="3"/>
             <a:r>
-              <a:rPr lang="en-US"/>
+              <a:rPr lang="en-US" smtClean="0"/>
               <a:t>Fourth level</a:t>
             </a:r>
           </a:p>
           <a:p>
             <a:pPr lvl="4"/>
             <a:r>
-              <a:rPr lang="en-US"/>
+              <a:rPr lang="en-US" smtClean="0"/>
               <a:t>Fifth level</a:t>
             </a:r>
+            <a:endParaRPr lang="en-US"/>
           </a:p>
         </p:txBody>
       </p:sp>
@@ -666,7 +656,7 @@
           <a:p>
             <a:fld id="{5BCAD085-E8A6-8845-BD4E-CB4CCA059FC4}" type="datetimeFigureOut">
               <a:rPr lang="en-US" smtClean="0"/>
-              <a:t>6/7/26</a:t>
+              <a:t>1/27/13</a:t>
             </a:fld>
             <a:endParaRPr lang="en-US"/>
           </a:p>
@@ -760,9 +750,10 @@
           <a:lstStyle/>
           <a:p>
             <a:r>
-              <a:rPr lang="en-US"/>
+              <a:rPr lang="en-US" smtClean="0"/>
               <a:t>Click to edit Master title style</a:t>
             </a:r>
+            <a:endParaRPr lang="en-US"/>
           </a:p>
         </p:txBody>
       </p:sp>
@@ -783,37 +774,38 @@
           <a:p>
             <a:pPr lvl="0"/>
             <a:r>
-              <a:rPr lang="en-US"/>
+              <a:rPr lang="en-US" smtClean="0"/>
               <a:t>Click to edit Master text styles</a:t>
             </a:r>
           </a:p>
           <a:p>
             <a:pPr lvl="1"/>
             <a:r>
-              <a:rPr lang="en-US"/>
+              <a:rPr lang="en-US" smtClean="0"/>
               <a:t>Second level</a:t>
             </a:r>
           </a:p>
           <a:p>
             <a:pPr lvl="2"/>
             <a:r>
-              <a:rPr lang="en-US"/>
+              <a:rPr lang="en-US" smtClean="0"/>
               <a:t>Third level</a:t>
             </a:r>
           </a:p>
           <a:p>
             <a:pPr lvl="3"/>
             <a:r>
-              <a:rPr lang="en-US"/>
+              <a:rPr lang="en-US" smtClean="0"/>
               <a:t>Fourth level</a:t>
             </a:r>
           </a:p>
           <a:p>
             <a:pPr lvl="4"/>
             <a:r>
-              <a:rPr lang="en-US"/>
+              <a:rPr lang="en-US" smtClean="0"/>
               <a:t>Fifth level</a:t>
             </a:r>
+            <a:endParaRPr lang="en-US"/>
           </a:p>
         </p:txBody>
       </p:sp>
@@ -834,7 +826,7 @@
           <a:p>
             <a:fld id="{5BCAD085-E8A6-8845-BD4E-CB4CCA059FC4}" type="datetimeFigureOut">
               <a:rPr lang="en-US" smtClean="0"/>
-              <a:t>6/7/26</a:t>
+              <a:t>1/27/13</a:t>
             </a:fld>
             <a:endParaRPr lang="en-US"/>
           </a:p>
@@ -937,9 +929,10 @@
           </a:lstStyle>
           <a:p>
             <a:r>
-              <a:rPr lang="en-US"/>
+              <a:rPr lang="en-US" smtClean="0"/>
               <a:t>Click to edit Master title style</a:t>
             </a:r>
+            <a:endParaRPr lang="en-US"/>
           </a:p>
         </p:txBody>
       </p:sp>
@@ -1056,7 +1049,7 @@
           <a:p>
             <a:pPr lvl="0"/>
             <a:r>
-              <a:rPr lang="en-US"/>
+              <a:rPr lang="en-US" smtClean="0"/>
               <a:t>Click to edit Master text styles</a:t>
             </a:r>
           </a:p>
@@ -1079,7 +1072,7 @@
           <a:p>
             <a:fld id="{5BCAD085-E8A6-8845-BD4E-CB4CCA059FC4}" type="datetimeFigureOut">
               <a:rPr lang="en-US" smtClean="0"/>
-              <a:t>6/7/26</a:t>
+              <a:t>1/27/13</a:t>
             </a:fld>
             <a:endParaRPr lang="en-US"/>
           </a:p>
@@ -1173,9 +1166,10 @@
           <a:lstStyle/>
           <a:p>
             <a:r>
-              <a:rPr lang="en-US"/>
+              <a:rPr lang="en-US" smtClean="0"/>
               <a:t>Click to edit Master title style</a:t>
             </a:r>
+            <a:endParaRPr lang="en-US"/>
           </a:p>
         </p:txBody>
       </p:sp>
@@ -1229,37 +1223,38 @@
           <a:p>
             <a:pPr lvl="0"/>
             <a:r>
-              <a:rPr lang="en-US"/>
+              <a:rPr lang="en-US" smtClean="0"/>
               <a:t>Click to edit Master text styles</a:t>
             </a:r>
           </a:p>
           <a:p>
             <a:pPr lvl="1"/>
             <a:r>
-              <a:rPr lang="en-US"/>
+              <a:rPr lang="en-US" smtClean="0"/>
               <a:t>Second level</a:t>
             </a:r>
           </a:p>
           <a:p>
             <a:pPr lvl="2"/>
             <a:r>
-              <a:rPr lang="en-US"/>
+              <a:rPr lang="en-US" smtClean="0"/>
               <a:t>Third level</a:t>
             </a:r>
           </a:p>
           <a:p>
             <a:pPr lvl="3"/>
             <a:r>
-              <a:rPr lang="en-US"/>
+              <a:rPr lang="en-US" smtClean="0"/>
               <a:t>Fourth level</a:t>
             </a:r>
           </a:p>
           <a:p>
             <a:pPr lvl="4"/>
             <a:r>
-              <a:rPr lang="en-US"/>
+              <a:rPr lang="en-US" smtClean="0"/>
               <a:t>Fifth level</a:t>
             </a:r>
+            <a:endParaRPr lang="en-US"/>
           </a:p>
         </p:txBody>
       </p:sp>
@@ -1313,37 +1308,38 @@
           <a:p>
             <a:pPr lvl="0"/>
             <a:r>
-              <a:rPr lang="en-US"/>
+              <a:rPr lang="en-US" smtClean="0"/>
               <a:t>Click to edit Master text styles</a:t>
             </a:r>
           </a:p>
           <a:p>
             <a:pPr lvl="1"/>
             <a:r>
-              <a:rPr lang="en-US"/>
+              <a:rPr lang="en-US" smtClean="0"/>
               <a:t>Second level</a:t>
             </a:r>
           </a:p>
           <a:p>
             <a:pPr lvl="2"/>
             <a:r>
-              <a:rPr lang="en-US"/>
+              <a:rPr lang="en-US" smtClean="0"/>
               <a:t>Third level</a:t>
             </a:r>
           </a:p>
           <a:p>
             <a:pPr lvl="3"/>
             <a:r>
-              <a:rPr lang="en-US"/>
+              <a:rPr lang="en-US" smtClean="0"/>
               <a:t>Fourth level</a:t>
             </a:r>
           </a:p>
           <a:p>
             <a:pPr lvl="4"/>
             <a:r>
-              <a:rPr lang="en-US"/>
+              <a:rPr lang="en-US" smtClean="0"/>
               <a:t>Fifth level</a:t>
             </a:r>
+            <a:endParaRPr lang="en-US"/>
           </a:p>
         </p:txBody>
       </p:sp>
@@ -1364,7 +1360,7 @@
           <a:p>
             <a:fld id="{5BCAD085-E8A6-8845-BD4E-CB4CCA059FC4}" type="datetimeFigureOut">
               <a:rPr lang="en-US" smtClean="0"/>
-              <a:t>6/7/26</a:t>
+              <a:t>1/27/13</a:t>
             </a:fld>
             <a:endParaRPr lang="en-US"/>
           </a:p>
@@ -1462,9 +1458,10 @@
           </a:lstStyle>
           <a:p>
             <a:r>
-              <a:rPr lang="en-US"/>
+              <a:rPr lang="en-US" smtClean="0"/>
               <a:t>Click to edit Master title style</a:t>
             </a:r>
+            <a:endParaRPr lang="en-US"/>
           </a:p>
         </p:txBody>
       </p:sp>
@@ -1527,7 +1524,7 @@
           <a:p>
             <a:pPr lvl="0"/>
             <a:r>
-              <a:rPr lang="en-US"/>
+              <a:rPr lang="en-US" smtClean="0"/>
               <a:t>Click to edit Master text styles</a:t>
             </a:r>
           </a:p>
@@ -1583,37 +1580,38 @@
           <a:p>
             <a:pPr lvl="0"/>
             <a:r>
-              <a:rPr lang="en-US"/>
+              <a:rPr lang="en-US" smtClean="0"/>
               <a:t>Click to edit Master text styles</a:t>
             </a:r>
           </a:p>
           <a:p>
             <a:pPr lvl="1"/>
             <a:r>
-              <a:rPr lang="en-US"/>
+              <a:rPr lang="en-US" smtClean="0"/>
               <a:t>Second level</a:t>
             </a:r>
           </a:p>
           <a:p>
             <a:pPr lvl="2"/>
             <a:r>
-              <a:rPr lang="en-US"/>
+              <a:rPr lang="en-US" smtClean="0"/>
               <a:t>Third level</a:t>
             </a:r>
           </a:p>
           <a:p>
             <a:pPr lvl="3"/>
             <a:r>
-              <a:rPr lang="en-US"/>
+              <a:rPr lang="en-US" smtClean="0"/>
               <a:t>Fourth level</a:t>
             </a:r>
           </a:p>
           <a:p>
             <a:pPr lvl="4"/>
             <a:r>
-              <a:rPr lang="en-US"/>
+              <a:rPr lang="en-US" smtClean="0"/>
               <a:t>Fifth level</a:t>
             </a:r>
+            <a:endParaRPr lang="en-US"/>
           </a:p>
         </p:txBody>
       </p:sp>
@@ -1676,7 +1674,7 @@
           <a:p>
             <a:pPr lvl="0"/>
             <a:r>
-              <a:rPr lang="en-US"/>
+              <a:rPr lang="en-US" smtClean="0"/>
               <a:t>Click to edit Master text styles</a:t>
             </a:r>
           </a:p>
@@ -1732,37 +1730,38 @@
           <a:p>
             <a:pPr lvl="0"/>
             <a:r>
-              <a:rPr lang="en-US"/>
+              <a:rPr lang="en-US" smtClean="0"/>
               <a:t>Click to edit Master text styles</a:t>
             </a:r>
           </a:p>
           <a:p>
             <a:pPr lvl="1"/>
             <a:r>
-              <a:rPr lang="en-US"/>
+              <a:rPr lang="en-US" smtClean="0"/>
               <a:t>Second level</a:t>
             </a:r>
           </a:p>
           <a:p>
             <a:pPr lvl="2"/>
             <a:r>
-              <a:rPr lang="en-US"/>
+              <a:rPr lang="en-US" smtClean="0"/>
               <a:t>Third level</a:t>
             </a:r>
           </a:p>
           <a:p>
             <a:pPr lvl="3"/>
             <a:r>
-              <a:rPr lang="en-US"/>
+              <a:rPr lang="en-US" smtClean="0"/>
               <a:t>Fourth level</a:t>
             </a:r>
           </a:p>
           <a:p>
             <a:pPr lvl="4"/>
             <a:r>
-              <a:rPr lang="en-US"/>
+              <a:rPr lang="en-US" smtClean="0"/>
               <a:t>Fifth level</a:t>
             </a:r>
+            <a:endParaRPr lang="en-US"/>
           </a:p>
         </p:txBody>
       </p:sp>
@@ -1783,7 +1782,7 @@
           <a:p>
             <a:fld id="{5BCAD085-E8A6-8845-BD4E-CB4CCA059FC4}" type="datetimeFigureOut">
               <a:rPr lang="en-US" smtClean="0"/>
-              <a:t>6/7/26</a:t>
+              <a:t>1/27/13</a:t>
             </a:fld>
             <a:endParaRPr lang="en-US"/>
           </a:p>
@@ -1877,9 +1876,10 @@
           <a:lstStyle/>
           <a:p>
             <a:r>
-              <a:rPr lang="en-US"/>
+              <a:rPr lang="en-US" smtClean="0"/>
               <a:t>Click to edit Master title style</a:t>
             </a:r>
+            <a:endParaRPr lang="en-US"/>
           </a:p>
         </p:txBody>
       </p:sp>
@@ -1900,7 +1900,7 @@
           <a:p>
             <a:fld id="{5BCAD085-E8A6-8845-BD4E-CB4CCA059FC4}" type="datetimeFigureOut">
               <a:rPr lang="en-US" smtClean="0"/>
-              <a:t>6/7/26</a:t>
+              <a:t>1/27/13</a:t>
             </a:fld>
             <a:endParaRPr lang="en-US"/>
           </a:p>
@@ -1995,7 +1995,7 @@
           <a:p>
             <a:fld id="{5BCAD085-E8A6-8845-BD4E-CB4CCA059FC4}" type="datetimeFigureOut">
               <a:rPr lang="en-US" smtClean="0"/>
-              <a:t>6/7/26</a:t>
+              <a:t>1/27/13</a:t>
             </a:fld>
             <a:endParaRPr lang="en-US"/>
           </a:p>
@@ -2098,9 +2098,10 @@
           </a:lstStyle>
           <a:p>
             <a:r>
-              <a:rPr lang="en-US"/>
+              <a:rPr lang="en-US" smtClean="0"/>
               <a:t>Click to edit Master title style</a:t>
             </a:r>
+            <a:endParaRPr lang="en-US"/>
           </a:p>
         </p:txBody>
       </p:sp>
@@ -2154,37 +2155,38 @@
           <a:p>
             <a:pPr lvl="0"/>
             <a:r>
-              <a:rPr lang="en-US"/>
+              <a:rPr lang="en-US" smtClean="0"/>
               <a:t>Click to edit Master text styles</a:t>
             </a:r>
           </a:p>
           <a:p>
             <a:pPr lvl="1"/>
             <a:r>
-              <a:rPr lang="en-US"/>
+              <a:rPr lang="en-US" smtClean="0"/>
               <a:t>Second level</a:t>
             </a:r>
           </a:p>
           <a:p>
             <a:pPr lvl="2"/>
             <a:r>
-              <a:rPr lang="en-US"/>
+              <a:rPr lang="en-US" smtClean="0"/>
               <a:t>Third level</a:t>
             </a:r>
           </a:p>
           <a:p>
             <a:pPr lvl="3"/>
             <a:r>
-              <a:rPr lang="en-US"/>
+              <a:rPr lang="en-US" smtClean="0"/>
               <a:t>Fourth level</a:t>
             </a:r>
           </a:p>
           <a:p>
             <a:pPr lvl="4"/>
             <a:r>
-              <a:rPr lang="en-US"/>
+              <a:rPr lang="en-US" smtClean="0"/>
               <a:t>Fifth level</a:t>
             </a:r>
+            <a:endParaRPr lang="en-US"/>
           </a:p>
         </p:txBody>
       </p:sp>
@@ -2247,7 +2249,7 @@
           <a:p>
             <a:pPr lvl="0"/>
             <a:r>
-              <a:rPr lang="en-US"/>
+              <a:rPr lang="en-US" smtClean="0"/>
               <a:t>Click to edit Master text styles</a:t>
             </a:r>
           </a:p>
@@ -2270,7 +2272,7 @@
           <a:p>
             <a:fld id="{5BCAD085-E8A6-8845-BD4E-CB4CCA059FC4}" type="datetimeFigureOut">
               <a:rPr lang="en-US" smtClean="0"/>
-              <a:t>6/7/26</a:t>
+              <a:t>1/27/13</a:t>
             </a:fld>
             <a:endParaRPr lang="en-US"/>
           </a:p>
@@ -2373,9 +2375,10 @@
           </a:lstStyle>
           <a:p>
             <a:r>
-              <a:rPr lang="en-US"/>
+              <a:rPr lang="en-US" smtClean="0"/>
               <a:t>Click to edit Master title style</a:t>
             </a:r>
+            <a:endParaRPr lang="en-US"/>
           </a:p>
         </p:txBody>
       </p:sp>
@@ -2499,7 +2502,7 @@
           <a:p>
             <a:pPr lvl="0"/>
             <a:r>
-              <a:rPr lang="en-US"/>
+              <a:rPr lang="en-US" smtClean="0"/>
               <a:t>Click to edit Master text styles</a:t>
             </a:r>
           </a:p>
@@ -2522,7 +2525,7 @@
           <a:p>
             <a:fld id="{5BCAD085-E8A6-8845-BD4E-CB4CCA059FC4}" type="datetimeFigureOut">
               <a:rPr lang="en-US" smtClean="0"/>
-              <a:t>6/7/26</a:t>
+              <a:t>1/27/13</a:t>
             </a:fld>
             <a:endParaRPr lang="en-US"/>
           </a:p>
@@ -2631,9 +2634,10 @@
           <a:lstStyle/>
           <a:p>
             <a:r>
-              <a:rPr lang="en-US"/>
+              <a:rPr lang="en-US" smtClean="0"/>
               <a:t>Click to edit Master title style</a:t>
             </a:r>
+            <a:endParaRPr lang="en-US"/>
           </a:p>
         </p:txBody>
       </p:sp>
@@ -2664,37 +2668,38 @@
           <a:p>
             <a:pPr lvl="0"/>
             <a:r>
-              <a:rPr lang="en-US"/>
+              <a:rPr lang="en-US" smtClean="0"/>
               <a:t>Click to edit Master text styles</a:t>
             </a:r>
           </a:p>
           <a:p>
             <a:pPr lvl="1"/>
             <a:r>
-              <a:rPr lang="en-US"/>
+              <a:rPr lang="en-US" smtClean="0"/>
               <a:t>Second level</a:t>
             </a:r>
           </a:p>
           <a:p>
             <a:pPr lvl="2"/>
             <a:r>
-              <a:rPr lang="en-US"/>
+              <a:rPr lang="en-US" smtClean="0"/>
               <a:t>Third level</a:t>
             </a:r>
           </a:p>
           <a:p>
             <a:pPr lvl="3"/>
             <a:r>
-              <a:rPr lang="en-US"/>
+              <a:rPr lang="en-US" smtClean="0"/>
               <a:t>Fourth level</a:t>
             </a:r>
           </a:p>
           <a:p>
             <a:pPr lvl="4"/>
             <a:r>
-              <a:rPr lang="en-US"/>
+              <a:rPr lang="en-US" smtClean="0"/>
               <a:t>Fifth level</a:t>
             </a:r>
+            <a:endParaRPr lang="en-US"/>
           </a:p>
         </p:txBody>
       </p:sp>
@@ -2733,7 +2738,7 @@
           <a:p>
             <a:fld id="{5BCAD085-E8A6-8845-BD4E-CB4CCA059FC4}" type="datetimeFigureOut">
               <a:rPr lang="en-US" smtClean="0"/>
-              <a:t>6/7/26</a:t>
+              <a:t>1/27/13</a:t>
             </a:fld>
             <a:endParaRPr lang="en-US"/>
           </a:p>
@@ -3092,7 +3097,7 @@
 </file>
 
 <file path=ppt/slides/slide1.xml><?xml version="1.0" encoding="utf-8"?>
-<p:sld xmlns:a="http://schemas.openxmlformats.org/drawingml/2006/main" xmlns:r="http://schemas.openxmlformats.org/officeDocument/2006/relationships" xmlns:p="http://schemas.openxmlformats.org/presentationml/2006/main">
+<p:sld xmlns:a="http://schemas.openxmlformats.org/drawingml/2006/main" xmlns:p="http://schemas.openxmlformats.org/presentationml/2006/main" xmlns:r="http://schemas.openxmlformats.org/officeDocument/2006/relationships">
   <p:cSld>
     <p:spTree>
       <p:nvGrpSpPr>
@@ -3100,14 +3105,7 @@
         <p:cNvGrpSpPr/>
         <p:nvPr/>
       </p:nvGrpSpPr>
-      <p:grpSpPr>
-        <a:xfrm>
-          <a:off x="0" y="0"/>
-          <a:ext cx="0" cy="0"/>
-          <a:chOff x="0" y="0"/>
-          <a:chExt cx="0" cy="0"/>
-        </a:xfrm>
-      </p:grpSpPr>
+      <p:grpSpPr/>
       <p:sp>
         <p:nvSpPr>
           <p:cNvPr id="2" name="TextBox 1"/>
@@ -3502,7 +3500,7 @@
 </file>
 
 <file path=ppt/slides/slide10.xml><?xml version="1.0" encoding="utf-8"?>
-<p:sld xmlns:a="http://schemas.openxmlformats.org/drawingml/2006/main" xmlns:r="http://schemas.openxmlformats.org/officeDocument/2006/relationships" xmlns:p="http://schemas.openxmlformats.org/presentationml/2006/main">
+<p:sld xmlns:a="http://schemas.openxmlformats.org/drawingml/2006/main" xmlns:p="http://schemas.openxmlformats.org/presentationml/2006/main" xmlns:r="http://schemas.openxmlformats.org/officeDocument/2006/relationships">
   <p:cSld>
     <p:spTree>
       <p:nvGrpSpPr>
@@ -3510,14 +3508,7 @@
         <p:cNvGrpSpPr/>
         <p:nvPr/>
       </p:nvGrpSpPr>
-      <p:grpSpPr>
-        <a:xfrm>
-          <a:off x="0" y="0"/>
-          <a:ext cx="0" cy="0"/>
-          <a:chOff x="0" y="0"/>
-          <a:chExt cx="0" cy="0"/>
-        </a:xfrm>
-      </p:grpSpPr>
+      <p:grpSpPr/>
       <p:sp>
         <p:nvSpPr>
           <p:cNvPr id="2" name="TextBox 1"/>
@@ -3656,7 +3647,7 @@
 </file>
 
 <file path=ppt/slides/slide11.xml><?xml version="1.0" encoding="utf-8"?>
-<p:sld xmlns:a="http://schemas.openxmlformats.org/drawingml/2006/main" xmlns:r="http://schemas.openxmlformats.org/officeDocument/2006/relationships" xmlns:p="http://schemas.openxmlformats.org/presentationml/2006/main">
+<p:sld xmlns:a="http://schemas.openxmlformats.org/drawingml/2006/main" xmlns:p="http://schemas.openxmlformats.org/presentationml/2006/main" xmlns:r="http://schemas.openxmlformats.org/officeDocument/2006/relationships">
   <p:cSld>
     <p:spTree>
       <p:nvGrpSpPr>
@@ -3664,14 +3655,7 @@
         <p:cNvGrpSpPr/>
         <p:nvPr/>
       </p:nvGrpSpPr>
-      <p:grpSpPr>
-        <a:xfrm>
-          <a:off x="0" y="0"/>
-          <a:ext cx="0" cy="0"/>
-          <a:chOff x="0" y="0"/>
-          <a:chExt cx="0" cy="0"/>
-        </a:xfrm>
-      </p:grpSpPr>
+      <p:grpSpPr/>
       <p:sp>
         <p:nvSpPr>
           <p:cNvPr id="2" name="TextBox 1"/>
@@ -3810,7 +3794,7 @@
 </file>
 
 <file path=ppt/slides/slide12.xml><?xml version="1.0" encoding="utf-8"?>
-<p:sld xmlns:a="http://schemas.openxmlformats.org/drawingml/2006/main" xmlns:r="http://schemas.openxmlformats.org/officeDocument/2006/relationships" xmlns:p="http://schemas.openxmlformats.org/presentationml/2006/main">
+<p:sld xmlns:a="http://schemas.openxmlformats.org/drawingml/2006/main" xmlns:p="http://schemas.openxmlformats.org/presentationml/2006/main" xmlns:r="http://schemas.openxmlformats.org/officeDocument/2006/relationships">
   <p:cSld>
     <p:spTree>
       <p:nvGrpSpPr>
@@ -3818,14 +3802,7 @@
         <p:cNvGrpSpPr/>
         <p:nvPr/>
       </p:nvGrpSpPr>
-      <p:grpSpPr>
-        <a:xfrm>
-          <a:off x="0" y="0"/>
-          <a:ext cx="0" cy="0"/>
-          <a:chOff x="0" y="0"/>
-          <a:chExt cx="0" cy="0"/>
-        </a:xfrm>
-      </p:grpSpPr>
+      <p:grpSpPr/>
       <p:sp>
         <p:nvSpPr>
           <p:cNvPr id="2" name="TextBox 1"/>
@@ -4004,7 +3981,7 @@
 </file>
 
 <file path=ppt/slides/slide13.xml><?xml version="1.0" encoding="utf-8"?>
-<p:sld xmlns:a="http://schemas.openxmlformats.org/drawingml/2006/main" xmlns:r="http://schemas.openxmlformats.org/officeDocument/2006/relationships" xmlns:p="http://schemas.openxmlformats.org/presentationml/2006/main">
+<p:sld xmlns:a="http://schemas.openxmlformats.org/drawingml/2006/main" xmlns:p="http://schemas.openxmlformats.org/presentationml/2006/main" xmlns:r="http://schemas.openxmlformats.org/officeDocument/2006/relationships">
   <p:cSld>
     <p:spTree>
       <p:nvGrpSpPr>
@@ -4012,14 +3989,7 @@
         <p:cNvGrpSpPr/>
         <p:nvPr/>
       </p:nvGrpSpPr>
-      <p:grpSpPr>
-        <a:xfrm>
-          <a:off x="0" y="0"/>
-          <a:ext cx="0" cy="0"/>
-          <a:chOff x="0" y="0"/>
-          <a:chExt cx="0" cy="0"/>
-        </a:xfrm>
-      </p:grpSpPr>
+      <p:grpSpPr/>
       <p:sp>
         <p:nvSpPr>
           <p:cNvPr id="2" name="TextBox 1"/>
@@ -4233,7 +4203,7 @@
 </file>
 
 <file path=ppt/slides/slide14.xml><?xml version="1.0" encoding="utf-8"?>
-<p:sld xmlns:a="http://schemas.openxmlformats.org/drawingml/2006/main" xmlns:r="http://schemas.openxmlformats.org/officeDocument/2006/relationships" xmlns:p="http://schemas.openxmlformats.org/presentationml/2006/main">
+<p:sld xmlns:a="http://schemas.openxmlformats.org/drawingml/2006/main" xmlns:p="http://schemas.openxmlformats.org/presentationml/2006/main" xmlns:r="http://schemas.openxmlformats.org/officeDocument/2006/relationships">
   <p:cSld>
     <p:spTree>
       <p:nvGrpSpPr>
@@ -4241,14 +4211,7 @@
         <p:cNvGrpSpPr/>
         <p:nvPr/>
       </p:nvGrpSpPr>
-      <p:grpSpPr>
-        <a:xfrm>
-          <a:off x="0" y="0"/>
-          <a:ext cx="0" cy="0"/>
-          <a:chOff x="0" y="0"/>
-          <a:chExt cx="0" cy="0"/>
-        </a:xfrm>
-      </p:grpSpPr>
+      <p:grpSpPr/>
       <p:sp>
         <p:nvSpPr>
           <p:cNvPr id="2" name="TextBox 1"/>
@@ -4334,45 +4297,15 @@
         <a:graphic>
           <a:graphicData uri="http://schemas.openxmlformats.org/drawingml/2006/table">
             <a:tbl>
-              <a:tblPr>
+              <a:tblPr firstRow="0" bandRow="0">
                 <a:tableStyleId>{5940675A-B579-460E-94D1-54222C63F5DA}</a:tableStyleId>
               </a:tblPr>
               <a:tblGrid>
-                <a:gridCol w="2103120">
-                  <a:extLst>
-                    <a:ext uri="{9D8B030D-6E8A-4147-A177-3AD203B41FA5}">
-                      <a16:colId xmlns:a16="http://schemas.microsoft.com/office/drawing/2014/main" val="20000"/>
-                    </a:ext>
-                  </a:extLst>
-                </a:gridCol>
-                <a:gridCol w="2103120">
-                  <a:extLst>
-                    <a:ext uri="{9D8B030D-6E8A-4147-A177-3AD203B41FA5}">
-                      <a16:colId xmlns:a16="http://schemas.microsoft.com/office/drawing/2014/main" val="20001"/>
-                    </a:ext>
-                  </a:extLst>
-                </a:gridCol>
-                <a:gridCol w="2103120">
-                  <a:extLst>
-                    <a:ext uri="{9D8B030D-6E8A-4147-A177-3AD203B41FA5}">
-                      <a16:colId xmlns:a16="http://schemas.microsoft.com/office/drawing/2014/main" val="20002"/>
-                    </a:ext>
-                  </a:extLst>
-                </a:gridCol>
-                <a:gridCol w="2103120">
-                  <a:extLst>
-                    <a:ext uri="{9D8B030D-6E8A-4147-A177-3AD203B41FA5}">
-                      <a16:colId xmlns:a16="http://schemas.microsoft.com/office/drawing/2014/main" val="20003"/>
-                    </a:ext>
-                  </a:extLst>
-                </a:gridCol>
-                <a:gridCol w="2103120">
-                  <a:extLst>
-                    <a:ext uri="{9D8B030D-6E8A-4147-A177-3AD203B41FA5}">
-                      <a16:colId xmlns:a16="http://schemas.microsoft.com/office/drawing/2014/main" val="20004"/>
-                    </a:ext>
-                  </a:extLst>
-                </a:gridCol>
+                <a:gridCol w="2103120"/>
+                <a:gridCol w="2103120"/>
+                <a:gridCol w="2103120"/>
+                <a:gridCol w="2103120"/>
+                <a:gridCol w="2103120"/>
               </a:tblGrid>
               <a:tr h="594360">
                 <a:tc>
@@ -4490,11 +4423,6 @@
                     </a:solidFill>
                   </a:tcPr>
                 </a:tc>
-                <a:extLst>
-                  <a:ext uri="{0D108BD9-81ED-4DB2-BD59-A6C34878D82A}">
-                    <a16:rowId xmlns:a16="http://schemas.microsoft.com/office/drawing/2014/main" val="10000"/>
-                  </a:ext>
-                </a:extLst>
               </a:tr>
               <a:tr h="777240">
                 <a:tc>
@@ -4612,11 +4540,6 @@
                     </a:solidFill>
                   </a:tcPr>
                 </a:tc>
-                <a:extLst>
-                  <a:ext uri="{0D108BD9-81ED-4DB2-BD59-A6C34878D82A}">
-                    <a16:rowId xmlns:a16="http://schemas.microsoft.com/office/drawing/2014/main" val="10001"/>
-                  </a:ext>
-                </a:extLst>
               </a:tr>
               <a:tr h="777240">
                 <a:tc>
@@ -4734,11 +4657,6 @@
                     </a:solidFill>
                   </a:tcPr>
                 </a:tc>
-                <a:extLst>
-                  <a:ext uri="{0D108BD9-81ED-4DB2-BD59-A6C34878D82A}">
-                    <a16:rowId xmlns:a16="http://schemas.microsoft.com/office/drawing/2014/main" val="10002"/>
-                  </a:ext>
-                </a:extLst>
               </a:tr>
               <a:tr h="777240">
                 <a:tc>
@@ -4856,11 +4774,6 @@
                     </a:solidFill>
                   </a:tcPr>
                 </a:tc>
-                <a:extLst>
-                  <a:ext uri="{0D108BD9-81ED-4DB2-BD59-A6C34878D82A}">
-                    <a16:rowId xmlns:a16="http://schemas.microsoft.com/office/drawing/2014/main" val="10003"/>
-                  </a:ext>
-                </a:extLst>
               </a:tr>
               <a:tr h="777240">
                 <a:tc>
@@ -4978,11 +4891,6 @@
                     </a:solidFill>
                   </a:tcPr>
                 </a:tc>
-                <a:extLst>
-                  <a:ext uri="{0D108BD9-81ED-4DB2-BD59-A6C34878D82A}">
-                    <a16:rowId xmlns:a16="http://schemas.microsoft.com/office/drawing/2014/main" val="10004"/>
-                  </a:ext>
-                </a:extLst>
               </a:tr>
             </a:tbl>
           </a:graphicData>
@@ -5032,7 +4940,7 @@
 </file>
 
 <file path=ppt/slides/slide15.xml><?xml version="1.0" encoding="utf-8"?>
-<p:sld xmlns:a="http://schemas.openxmlformats.org/drawingml/2006/main" xmlns:r="http://schemas.openxmlformats.org/officeDocument/2006/relationships" xmlns:p="http://schemas.openxmlformats.org/presentationml/2006/main">
+<p:sld xmlns:a="http://schemas.openxmlformats.org/drawingml/2006/main" xmlns:p="http://schemas.openxmlformats.org/presentationml/2006/main" xmlns:r="http://schemas.openxmlformats.org/officeDocument/2006/relationships">
   <p:cSld>
     <p:spTree>
       <p:nvGrpSpPr>
@@ -5040,14 +4948,7 @@
         <p:cNvGrpSpPr/>
         <p:nvPr/>
       </p:nvGrpSpPr>
-      <p:grpSpPr>
-        <a:xfrm>
-          <a:off x="0" y="0"/>
-          <a:ext cx="0" cy="0"/>
-          <a:chOff x="0" y="0"/>
-          <a:chExt cx="0" cy="0"/>
-        </a:xfrm>
-      </p:grpSpPr>
+      <p:grpSpPr/>
       <p:sp>
         <p:nvSpPr>
           <p:cNvPr id="2" name="TextBox 1"/>
@@ -5186,7 +5087,7 @@
 </file>
 
 <file path=ppt/slides/slide16.xml><?xml version="1.0" encoding="utf-8"?>
-<p:sld xmlns:a="http://schemas.openxmlformats.org/drawingml/2006/main" xmlns:r="http://schemas.openxmlformats.org/officeDocument/2006/relationships" xmlns:p="http://schemas.openxmlformats.org/presentationml/2006/main">
+<p:sld xmlns:a="http://schemas.openxmlformats.org/drawingml/2006/main" xmlns:p="http://schemas.openxmlformats.org/presentationml/2006/main" xmlns:r="http://schemas.openxmlformats.org/officeDocument/2006/relationships">
   <p:cSld>
     <p:spTree>
       <p:nvGrpSpPr>
@@ -5194,14 +5095,7 @@
         <p:cNvGrpSpPr/>
         <p:nvPr/>
       </p:nvGrpSpPr>
-      <p:grpSpPr>
-        <a:xfrm>
-          <a:off x="0" y="0"/>
-          <a:ext cx="0" cy="0"/>
-          <a:chOff x="0" y="0"/>
-          <a:chExt cx="0" cy="0"/>
-        </a:xfrm>
-      </p:grpSpPr>
+      <p:grpSpPr/>
       <p:sp>
         <p:nvSpPr>
           <p:cNvPr id="2" name="TextBox 1"/>
@@ -5253,8 +5147,8 @@
         </p:blipFill>
         <p:spPr>
           <a:xfrm>
-            <a:off x="1264767" y="1097280"/>
-            <a:ext cx="2468880" cy="4389120"/>
+            <a:off x="1263614" y="1097280"/>
+            <a:ext cx="2471185" cy="4389120"/>
           </a:xfrm>
           <a:prstGeom prst="rect">
             <a:avLst/>
@@ -5312,8 +5206,8 @@
         </p:blipFill>
         <p:spPr>
           <a:xfrm>
-            <a:off x="4861407" y="1097280"/>
-            <a:ext cx="2468880" cy="4389120"/>
+            <a:off x="4860254" y="1097280"/>
+            <a:ext cx="2471185" cy="4389120"/>
           </a:xfrm>
           <a:prstGeom prst="rect">
             <a:avLst/>
@@ -5371,8 +5265,8 @@
         </p:blipFill>
         <p:spPr>
           <a:xfrm>
-            <a:off x="8458047" y="1097280"/>
-            <a:ext cx="2468880" cy="4389120"/>
+            <a:off x="8456894" y="1097280"/>
+            <a:ext cx="2471185" cy="4389120"/>
           </a:xfrm>
           <a:prstGeom prst="rect">
             <a:avLst/>
@@ -5458,7 +5352,7 @@
 </file>
 
 <file path=ppt/slides/slide17.xml><?xml version="1.0" encoding="utf-8"?>
-<p:sld xmlns:a="http://schemas.openxmlformats.org/drawingml/2006/main" xmlns:r="http://schemas.openxmlformats.org/officeDocument/2006/relationships" xmlns:p="http://schemas.openxmlformats.org/presentationml/2006/main">
+<p:sld xmlns:a="http://schemas.openxmlformats.org/drawingml/2006/main" xmlns:p="http://schemas.openxmlformats.org/presentationml/2006/main" xmlns:r="http://schemas.openxmlformats.org/officeDocument/2006/relationships">
   <p:cSld>
     <p:spTree>
       <p:nvGrpSpPr>
@@ -5466,14 +5360,7 @@
         <p:cNvGrpSpPr/>
         <p:nvPr/>
       </p:nvGrpSpPr>
-      <p:grpSpPr>
-        <a:xfrm>
-          <a:off x="0" y="0"/>
-          <a:ext cx="0" cy="0"/>
-          <a:chOff x="0" y="0"/>
-          <a:chExt cx="0" cy="0"/>
-        </a:xfrm>
-      </p:grpSpPr>
+      <p:grpSpPr/>
       <p:sp>
         <p:nvSpPr>
           <p:cNvPr id="2" name="TextBox 1"/>
@@ -5730,7 +5617,7 @@
 </file>
 
 <file path=ppt/slides/slide18.xml><?xml version="1.0" encoding="utf-8"?>
-<p:sld xmlns:a="http://schemas.openxmlformats.org/drawingml/2006/main" xmlns:r="http://schemas.openxmlformats.org/officeDocument/2006/relationships" xmlns:p="http://schemas.openxmlformats.org/presentationml/2006/main">
+<p:sld xmlns:a="http://schemas.openxmlformats.org/drawingml/2006/main" xmlns:p="http://schemas.openxmlformats.org/presentationml/2006/main" xmlns:r="http://schemas.openxmlformats.org/officeDocument/2006/relationships">
   <p:cSld>
     <p:spTree>
       <p:nvGrpSpPr>
@@ -5738,14 +5625,7 @@
         <p:cNvGrpSpPr/>
         <p:nvPr/>
       </p:nvGrpSpPr>
-      <p:grpSpPr>
-        <a:xfrm>
-          <a:off x="0" y="0"/>
-          <a:ext cx="0" cy="0"/>
-          <a:chOff x="0" y="0"/>
-          <a:chExt cx="0" cy="0"/>
-        </a:xfrm>
-      </p:grpSpPr>
+      <p:grpSpPr/>
       <p:sp>
         <p:nvSpPr>
           <p:cNvPr id="2" name="TextBox 1"/>
@@ -5924,7 +5804,7 @@
 </file>
 
 <file path=ppt/slides/slide19.xml><?xml version="1.0" encoding="utf-8"?>
-<p:sld xmlns:a="http://schemas.openxmlformats.org/drawingml/2006/main" xmlns:r="http://schemas.openxmlformats.org/officeDocument/2006/relationships" xmlns:p="http://schemas.openxmlformats.org/presentationml/2006/main">
+<p:sld xmlns:a="http://schemas.openxmlformats.org/drawingml/2006/main" xmlns:p="http://schemas.openxmlformats.org/presentationml/2006/main" xmlns:r="http://schemas.openxmlformats.org/officeDocument/2006/relationships">
   <p:cSld>
     <p:spTree>
       <p:nvGrpSpPr>
@@ -5932,14 +5812,7 @@
         <p:cNvGrpSpPr/>
         <p:nvPr/>
       </p:nvGrpSpPr>
-      <p:grpSpPr>
-        <a:xfrm>
-          <a:off x="0" y="0"/>
-          <a:ext cx="0" cy="0"/>
-          <a:chOff x="0" y="0"/>
-          <a:chExt cx="0" cy="0"/>
-        </a:xfrm>
-      </p:grpSpPr>
+      <p:grpSpPr/>
       <p:sp>
         <p:nvSpPr>
           <p:cNvPr id="2" name="TextBox 1"/>
@@ -6102,7 +5975,7 @@
 </file>
 
 <file path=ppt/slides/slide2.xml><?xml version="1.0" encoding="utf-8"?>
-<p:sld xmlns:a="http://schemas.openxmlformats.org/drawingml/2006/main" xmlns:r="http://schemas.openxmlformats.org/officeDocument/2006/relationships" xmlns:p="http://schemas.openxmlformats.org/presentationml/2006/main">
+<p:sld xmlns:a="http://schemas.openxmlformats.org/drawingml/2006/main" xmlns:p="http://schemas.openxmlformats.org/presentationml/2006/main" xmlns:r="http://schemas.openxmlformats.org/officeDocument/2006/relationships">
   <p:cSld>
     <p:spTree>
       <p:nvGrpSpPr>
@@ -6110,14 +5983,7 @@
         <p:cNvGrpSpPr/>
         <p:nvPr/>
       </p:nvGrpSpPr>
-      <p:grpSpPr>
-        <a:xfrm>
-          <a:off x="0" y="0"/>
-          <a:ext cx="0" cy="0"/>
-          <a:chOff x="0" y="0"/>
-          <a:chExt cx="0" cy="0"/>
-        </a:xfrm>
-      </p:grpSpPr>
+      <p:grpSpPr/>
       <p:sp>
         <p:nvSpPr>
           <p:cNvPr id="2" name="TextBox 1"/>
@@ -6296,7 +6162,7 @@
 </file>
 
 <file path=ppt/slides/slide3.xml><?xml version="1.0" encoding="utf-8"?>
-<p:sld xmlns:a="http://schemas.openxmlformats.org/drawingml/2006/main" xmlns:r="http://schemas.openxmlformats.org/officeDocument/2006/relationships" xmlns:p="http://schemas.openxmlformats.org/presentationml/2006/main">
+<p:sld xmlns:a="http://schemas.openxmlformats.org/drawingml/2006/main" xmlns:p="http://schemas.openxmlformats.org/presentationml/2006/main" xmlns:r="http://schemas.openxmlformats.org/officeDocument/2006/relationships">
   <p:cSld>
     <p:spTree>
       <p:nvGrpSpPr>
@@ -6304,14 +6170,7 @@
         <p:cNvGrpSpPr/>
         <p:nvPr/>
       </p:nvGrpSpPr>
-      <p:grpSpPr>
-        <a:xfrm>
-          <a:off x="0" y="0"/>
-          <a:ext cx="0" cy="0"/>
-          <a:chOff x="0" y="0"/>
-          <a:chExt cx="0" cy="0"/>
-        </a:xfrm>
-      </p:grpSpPr>
+      <p:grpSpPr/>
       <p:sp>
         <p:nvSpPr>
           <p:cNvPr id="2" name="TextBox 1"/>
@@ -6614,7 +6473,7 @@
 </file>
 
 <file path=ppt/slides/slide4.xml><?xml version="1.0" encoding="utf-8"?>
-<p:sld xmlns:a="http://schemas.openxmlformats.org/drawingml/2006/main" xmlns:r="http://schemas.openxmlformats.org/officeDocument/2006/relationships" xmlns:p="http://schemas.openxmlformats.org/presentationml/2006/main">
+<p:sld xmlns:a="http://schemas.openxmlformats.org/drawingml/2006/main" xmlns:p="http://schemas.openxmlformats.org/presentationml/2006/main" xmlns:r="http://schemas.openxmlformats.org/officeDocument/2006/relationships">
   <p:cSld>
     <p:spTree>
       <p:nvGrpSpPr>
@@ -6622,14 +6481,7 @@
         <p:cNvGrpSpPr/>
         <p:nvPr/>
       </p:nvGrpSpPr>
-      <p:grpSpPr>
-        <a:xfrm>
-          <a:off x="0" y="0"/>
-          <a:ext cx="0" cy="0"/>
-          <a:chOff x="0" y="0"/>
-          <a:chExt cx="0" cy="0"/>
-        </a:xfrm>
-      </p:grpSpPr>
+      <p:grpSpPr/>
       <p:sp>
         <p:nvSpPr>
           <p:cNvPr id="2" name="TextBox 1"/>
@@ -6715,24 +6567,12 @@
         <a:graphic>
           <a:graphicData uri="http://schemas.openxmlformats.org/drawingml/2006/table">
             <a:tbl>
-              <a:tblPr>
+              <a:tblPr firstRow="0" bandRow="0">
                 <a:tableStyleId>{5940675A-B579-460E-94D1-54222C63F5DA}</a:tableStyleId>
               </a:tblPr>
               <a:tblGrid>
-                <a:gridCol w="2743200">
-                  <a:extLst>
-                    <a:ext uri="{9D8B030D-6E8A-4147-A177-3AD203B41FA5}">
-                      <a16:colId xmlns:a16="http://schemas.microsoft.com/office/drawing/2014/main" val="20000"/>
-                    </a:ext>
-                  </a:extLst>
-                </a:gridCol>
-                <a:gridCol w="6766560">
-                  <a:extLst>
-                    <a:ext uri="{9D8B030D-6E8A-4147-A177-3AD203B41FA5}">
-                      <a16:colId xmlns:a16="http://schemas.microsoft.com/office/drawing/2014/main" val="20001"/>
-                    </a:ext>
-                  </a:extLst>
-                </a:gridCol>
+                <a:gridCol w="2743200"/>
+                <a:gridCol w="6766560"/>
               </a:tblGrid>
               <a:tr h="594360">
                 <a:tc>
@@ -6781,11 +6621,6 @@
                     </a:solidFill>
                   </a:tcPr>
                 </a:tc>
-                <a:extLst>
-                  <a:ext uri="{0D108BD9-81ED-4DB2-BD59-A6C34878D82A}">
-                    <a16:rowId xmlns:a16="http://schemas.microsoft.com/office/drawing/2014/main" val="10000"/>
-                  </a:ext>
-                </a:extLst>
               </a:tr>
               <a:tr h="777240">
                 <a:tc>
@@ -6834,11 +6669,6 @@
                     </a:solidFill>
                   </a:tcPr>
                 </a:tc>
-                <a:extLst>
-                  <a:ext uri="{0D108BD9-81ED-4DB2-BD59-A6C34878D82A}">
-                    <a16:rowId xmlns:a16="http://schemas.microsoft.com/office/drawing/2014/main" val="10001"/>
-                  </a:ext>
-                </a:extLst>
               </a:tr>
               <a:tr h="777240">
                 <a:tc>
@@ -6887,11 +6717,6 @@
                     </a:solidFill>
                   </a:tcPr>
                 </a:tc>
-                <a:extLst>
-                  <a:ext uri="{0D108BD9-81ED-4DB2-BD59-A6C34878D82A}">
-                    <a16:rowId xmlns:a16="http://schemas.microsoft.com/office/drawing/2014/main" val="10002"/>
-                  </a:ext>
-                </a:extLst>
               </a:tr>
               <a:tr h="777240">
                 <a:tc>
@@ -6940,11 +6765,6 @@
                     </a:solidFill>
                   </a:tcPr>
                 </a:tc>
-                <a:extLst>
-                  <a:ext uri="{0D108BD9-81ED-4DB2-BD59-A6C34878D82A}">
-                    <a16:rowId xmlns:a16="http://schemas.microsoft.com/office/drawing/2014/main" val="10003"/>
-                  </a:ext>
-                </a:extLst>
               </a:tr>
             </a:tbl>
           </a:graphicData>
@@ -6994,7 +6814,7 @@
 </file>
 
 <file path=ppt/slides/slide5.xml><?xml version="1.0" encoding="utf-8"?>
-<p:sld xmlns:a="http://schemas.openxmlformats.org/drawingml/2006/main" xmlns:r="http://schemas.openxmlformats.org/officeDocument/2006/relationships" xmlns:p="http://schemas.openxmlformats.org/presentationml/2006/main">
+<p:sld xmlns:a="http://schemas.openxmlformats.org/drawingml/2006/main" xmlns:p="http://schemas.openxmlformats.org/presentationml/2006/main" xmlns:r="http://schemas.openxmlformats.org/officeDocument/2006/relationships">
   <p:cSld>
     <p:spTree>
       <p:nvGrpSpPr>
@@ -7002,14 +6822,7 @@
         <p:cNvGrpSpPr/>
         <p:nvPr/>
       </p:nvGrpSpPr>
-      <p:grpSpPr>
-        <a:xfrm>
-          <a:off x="0" y="0"/>
-          <a:ext cx="0" cy="0"/>
-          <a:chOff x="0" y="0"/>
-          <a:chExt cx="0" cy="0"/>
-        </a:xfrm>
-      </p:grpSpPr>
+      <p:grpSpPr/>
       <p:sp>
         <p:nvSpPr>
           <p:cNvPr id="2" name="TextBox 1"/>
@@ -7095,38 +6908,14 @@
         <a:graphic>
           <a:graphicData uri="http://schemas.openxmlformats.org/drawingml/2006/table">
             <a:tbl>
-              <a:tblPr>
+              <a:tblPr firstRow="0" bandRow="0">
                 <a:tableStyleId>{5940675A-B579-460E-94D1-54222C63F5DA}</a:tableStyleId>
               </a:tblPr>
               <a:tblGrid>
-                <a:gridCol w="2628900">
-                  <a:extLst>
-                    <a:ext uri="{9D8B030D-6E8A-4147-A177-3AD203B41FA5}">
-                      <a16:colId xmlns:a16="http://schemas.microsoft.com/office/drawing/2014/main" val="20000"/>
-                    </a:ext>
-                  </a:extLst>
-                </a:gridCol>
-                <a:gridCol w="2628900">
-                  <a:extLst>
-                    <a:ext uri="{9D8B030D-6E8A-4147-A177-3AD203B41FA5}">
-                      <a16:colId xmlns:a16="http://schemas.microsoft.com/office/drawing/2014/main" val="20001"/>
-                    </a:ext>
-                  </a:extLst>
-                </a:gridCol>
-                <a:gridCol w="2628900">
-                  <a:extLst>
-                    <a:ext uri="{9D8B030D-6E8A-4147-A177-3AD203B41FA5}">
-                      <a16:colId xmlns:a16="http://schemas.microsoft.com/office/drawing/2014/main" val="20002"/>
-                    </a:ext>
-                  </a:extLst>
-                </a:gridCol>
-                <a:gridCol w="2628900">
-                  <a:extLst>
-                    <a:ext uri="{9D8B030D-6E8A-4147-A177-3AD203B41FA5}">
-                      <a16:colId xmlns:a16="http://schemas.microsoft.com/office/drawing/2014/main" val="20003"/>
-                    </a:ext>
-                  </a:extLst>
-                </a:gridCol>
+                <a:gridCol w="2628900"/>
+                <a:gridCol w="2628900"/>
+                <a:gridCol w="2628900"/>
+                <a:gridCol w="2628900"/>
               </a:tblGrid>
               <a:tr h="594360">
                 <a:tc>
@@ -7221,11 +7010,6 @@
                     </a:solidFill>
                   </a:tcPr>
                 </a:tc>
-                <a:extLst>
-                  <a:ext uri="{0D108BD9-81ED-4DB2-BD59-A6C34878D82A}">
-                    <a16:rowId xmlns:a16="http://schemas.microsoft.com/office/drawing/2014/main" val="10000"/>
-                  </a:ext>
-                </a:extLst>
               </a:tr>
               <a:tr h="777240">
                 <a:tc>
@@ -7320,11 +7104,6 @@
                     </a:solidFill>
                   </a:tcPr>
                 </a:tc>
-                <a:extLst>
-                  <a:ext uri="{0D108BD9-81ED-4DB2-BD59-A6C34878D82A}">
-                    <a16:rowId xmlns:a16="http://schemas.microsoft.com/office/drawing/2014/main" val="10001"/>
-                  </a:ext>
-                </a:extLst>
               </a:tr>
               <a:tr h="777240">
                 <a:tc>
@@ -7419,11 +7198,6 @@
                     </a:solidFill>
                   </a:tcPr>
                 </a:tc>
-                <a:extLst>
-                  <a:ext uri="{0D108BD9-81ED-4DB2-BD59-A6C34878D82A}">
-                    <a16:rowId xmlns:a16="http://schemas.microsoft.com/office/drawing/2014/main" val="10002"/>
-                  </a:ext>
-                </a:extLst>
               </a:tr>
               <a:tr h="777240">
                 <a:tc>
@@ -7518,11 +7292,6 @@
                     </a:solidFill>
                   </a:tcPr>
                 </a:tc>
-                <a:extLst>
-                  <a:ext uri="{0D108BD9-81ED-4DB2-BD59-A6C34878D82A}">
-                    <a16:rowId xmlns:a16="http://schemas.microsoft.com/office/drawing/2014/main" val="10003"/>
-                  </a:ext>
-                </a:extLst>
               </a:tr>
               <a:tr h="777240">
                 <a:tc>
@@ -7617,11 +7386,6 @@
                     </a:solidFill>
                   </a:tcPr>
                 </a:tc>
-                <a:extLst>
-                  <a:ext uri="{0D108BD9-81ED-4DB2-BD59-A6C34878D82A}">
-                    <a16:rowId xmlns:a16="http://schemas.microsoft.com/office/drawing/2014/main" val="10004"/>
-                  </a:ext>
-                </a:extLst>
               </a:tr>
               <a:tr h="777240">
                 <a:tc>
@@ -7716,11 +7480,6 @@
                     </a:solidFill>
                   </a:tcPr>
                 </a:tc>
-                <a:extLst>
-                  <a:ext uri="{0D108BD9-81ED-4DB2-BD59-A6C34878D82A}">
-                    <a16:rowId xmlns:a16="http://schemas.microsoft.com/office/drawing/2014/main" val="10005"/>
-                  </a:ext>
-                </a:extLst>
               </a:tr>
             </a:tbl>
           </a:graphicData>
@@ -7770,7 +7529,7 @@
 </file>
 
 <file path=ppt/slides/slide6.xml><?xml version="1.0" encoding="utf-8"?>
-<p:sld xmlns:a="http://schemas.openxmlformats.org/drawingml/2006/main" xmlns:r="http://schemas.openxmlformats.org/officeDocument/2006/relationships" xmlns:p="http://schemas.openxmlformats.org/presentationml/2006/main">
+<p:sld xmlns:a="http://schemas.openxmlformats.org/drawingml/2006/main" xmlns:p="http://schemas.openxmlformats.org/presentationml/2006/main" xmlns:r="http://schemas.openxmlformats.org/officeDocument/2006/relationships">
   <p:cSld>
     <p:spTree>
       <p:nvGrpSpPr>
@@ -7778,14 +7537,7 @@
         <p:cNvGrpSpPr/>
         <p:nvPr/>
       </p:nvGrpSpPr>
-      <p:grpSpPr>
-        <a:xfrm>
-          <a:off x="0" y="0"/>
-          <a:ext cx="0" cy="0"/>
-          <a:chOff x="0" y="0"/>
-          <a:chExt cx="0" cy="0"/>
-        </a:xfrm>
-      </p:grpSpPr>
+      <p:grpSpPr/>
       <p:sp>
         <p:nvSpPr>
           <p:cNvPr id="2" name="TextBox 1"/>
@@ -7924,7 +7676,7 @@
 </file>
 
 <file path=ppt/slides/slide7.xml><?xml version="1.0" encoding="utf-8"?>
-<p:sld xmlns:a="http://schemas.openxmlformats.org/drawingml/2006/main" xmlns:r="http://schemas.openxmlformats.org/officeDocument/2006/relationships" xmlns:p="http://schemas.openxmlformats.org/presentationml/2006/main">
+<p:sld xmlns:a="http://schemas.openxmlformats.org/drawingml/2006/main" xmlns:p="http://schemas.openxmlformats.org/presentationml/2006/main" xmlns:r="http://schemas.openxmlformats.org/officeDocument/2006/relationships">
   <p:cSld>
     <p:spTree>
       <p:nvGrpSpPr>
@@ -7932,14 +7684,7 @@
         <p:cNvGrpSpPr/>
         <p:nvPr/>
       </p:nvGrpSpPr>
-      <p:grpSpPr>
-        <a:xfrm>
-          <a:off x="0" y="0"/>
-          <a:ext cx="0" cy="0"/>
-          <a:chOff x="0" y="0"/>
-          <a:chExt cx="0" cy="0"/>
-        </a:xfrm>
-      </p:grpSpPr>
+      <p:grpSpPr/>
       <p:sp>
         <p:nvSpPr>
           <p:cNvPr id="2" name="TextBox 1"/>
@@ -8078,7 +7823,7 @@
 </file>
 
 <file path=ppt/slides/slide8.xml><?xml version="1.0" encoding="utf-8"?>
-<p:sld xmlns:a="http://schemas.openxmlformats.org/drawingml/2006/main" xmlns:r="http://schemas.openxmlformats.org/officeDocument/2006/relationships" xmlns:p="http://schemas.openxmlformats.org/presentationml/2006/main">
+<p:sld xmlns:a="http://schemas.openxmlformats.org/drawingml/2006/main" xmlns:p="http://schemas.openxmlformats.org/presentationml/2006/main" xmlns:r="http://schemas.openxmlformats.org/officeDocument/2006/relationships">
   <p:cSld>
     <p:spTree>
       <p:nvGrpSpPr>
@@ -8086,14 +7831,7 @@
         <p:cNvGrpSpPr/>
         <p:nvPr/>
       </p:nvGrpSpPr>
-      <p:grpSpPr>
-        <a:xfrm>
-          <a:off x="0" y="0"/>
-          <a:ext cx="0" cy="0"/>
-          <a:chOff x="0" y="0"/>
-          <a:chExt cx="0" cy="0"/>
-        </a:xfrm>
-      </p:grpSpPr>
+      <p:grpSpPr/>
       <p:sp>
         <p:nvSpPr>
           <p:cNvPr id="2" name="TextBox 1"/>
@@ -8291,7 +8029,7 @@
 </file>
 
 <file path=ppt/slides/slide9.xml><?xml version="1.0" encoding="utf-8"?>
-<p:sld xmlns:a="http://schemas.openxmlformats.org/drawingml/2006/main" xmlns:r="http://schemas.openxmlformats.org/officeDocument/2006/relationships" xmlns:p="http://schemas.openxmlformats.org/presentationml/2006/main">
+<p:sld xmlns:a="http://schemas.openxmlformats.org/drawingml/2006/main" xmlns:p="http://schemas.openxmlformats.org/presentationml/2006/main" xmlns:r="http://schemas.openxmlformats.org/officeDocument/2006/relationships">
   <p:cSld>
     <p:spTree>
       <p:nvGrpSpPr>
@@ -8299,14 +8037,7 @@
         <p:cNvGrpSpPr/>
         <p:nvPr/>
       </p:nvGrpSpPr>
-      <p:grpSpPr>
-        <a:xfrm>
-          <a:off x="0" y="0"/>
-          <a:ext cx="0" cy="0"/>
-          <a:chOff x="0" y="0"/>
-          <a:chExt cx="0" cy="0"/>
-        </a:xfrm>
-      </p:grpSpPr>
+      <p:grpSpPr/>
       <p:sp>
         <p:nvSpPr>
           <p:cNvPr id="2" name="TextBox 1"/>
